--- a/manuscript/革新ビジネスアワード2026_プレゼン資料.pptx
+++ b/manuscript/革新ビジネスアワード2026_プレゼン資料.pptx
@@ -17,9 +17,10 @@
     <p:sldId id="265" r:id="rId11"/>
     <p:sldId id="266" r:id="rId12"/>
     <p:sldId id="267" r:id="rId13"/>
+    <p:sldId id="268" r:id="rId14"/>
   </p:sldIdLst>
   <p:notesMasterIdLst>
-    <p:notesMasterId r:id="rId14"/>
+    <p:notesMasterId r:id="rId15"/>
   </p:notesMasterIdLst>
   <p:sldSz cx="12191695" cy="6858000"/>
   <p:notesSz cx="6858000" cy="12191695"/>
@@ -801,6 +802,94 @@
             <a:fld id="{F7021451-1387-4CA6-816F-3879F97B5CBC}" type="slidenum">
               <a:rPr lang="en-US"/>
               <a:t>12</a:t>
+            </a:fld>
+            <a:endParaRPr lang="en-US"/>
+          </a:p>
+        </p:txBody>
+      </p:sp>
+    </p:spTree>
+    <p:extLst>
+      <p:ext uri="{BB962C8B-B14F-4D97-AF65-F5344CB8AC3E}">
+        <p14:creationId xmlns:p14="http://schemas.microsoft.com/office/powerpoint/2010/main" val="1024086991"/>
+      </p:ext>
+    </p:extLst>
+  </p:cSld>
+  <p:clrMapOvr>
+    <a:masterClrMapping/>
+  </p:clrMapOvr>
+</p:notes>
+</file>
+
+<file path=ppt/notesSlides/notesSlide13.xml><?xml version="1.0" encoding="utf-8"?>
+<p:notes xmlns:a="http://schemas.openxmlformats.org/drawingml/2006/main" xmlns:r="http://schemas.openxmlformats.org/officeDocument/2006/relationships" xmlns:p="http://schemas.openxmlformats.org/presentationml/2006/main">
+  <p:cSld>
+    <p:spTree>
+      <p:nvGrpSpPr>
+        <p:cNvPr id="1" name=""/>
+        <p:cNvGrpSpPr/>
+        <p:nvPr/>
+      </p:nvGrpSpPr>
+      <p:grpSpPr>
+        <a:xfrm>
+          <a:off x="0" y="0"/>
+          <a:ext cx="0" cy="0"/>
+          <a:chOff x="0" y="0"/>
+          <a:chExt cx="0" cy="0"/>
+        </a:xfrm>
+      </p:grpSpPr>
+      <p:sp>
+        <p:nvSpPr>
+          <p:cNvPr id="2" name="Slide Image Placeholder 1"/>
+          <p:cNvSpPr>
+            <a:spLocks noGrp="1" noRot="1" noChangeAspect="1"/>
+          </p:cNvSpPr>
+          <p:nvPr>
+            <p:ph type="sldImg"/>
+          </p:nvPr>
+        </p:nvSpPr>
+        <p:spPr/>
+      </p:sp>
+      <p:sp>
+        <p:nvSpPr>
+          <p:cNvPr id="3" name="Notes Placeholder 2"/>
+          <p:cNvSpPr>
+            <a:spLocks noGrp="1"/>
+          </p:cNvSpPr>
+          <p:nvPr>
+            <p:ph type="body" idx="1"/>
+          </p:nvPr>
+        </p:nvSpPr>
+        <p:spPr/>
+        <p:txBody>
+          <a:bodyPr/>
+          <a:lstStyle/>
+          <a:p>
+            <a:r>
+              <a:rPr lang="en-US" dirty="0"/>
+              <a:t/>
+            </a:r>
+            <a:endParaRPr lang="en-US" dirty="0"/>
+          </a:p>
+        </p:txBody>
+      </p:sp>
+      <p:sp>
+        <p:nvSpPr>
+          <p:cNvPr id="4" name="Slide Number Placeholder 3"/>
+          <p:cNvSpPr>
+            <a:spLocks noGrp="1"/>
+          </p:cNvSpPr>
+          <p:nvPr>
+            <p:ph type="sldNum" sz="quarter" idx="10"/>
+          </p:nvPr>
+        </p:nvSpPr>
+        <p:spPr/>
+        <p:txBody>
+          <a:bodyPr/>
+          <a:lstStyle/>
+          <a:p>
+            <a:fld id="{F7021451-1387-4CA6-816F-3879F97B5CBC}" type="slidenum">
+              <a:rPr lang="en-US"/>
+              <a:t>13</a:t>
             </a:fld>
             <a:endParaRPr lang="en-US"/>
           </a:p>
@@ -3714,6 +3803,718 @@
     <p:bg>
       <p:bgPr>
         <a:solidFill>
+          <a:srgbClr val="FFFFFF"/>
+        </a:solidFill>
+      </p:bgPr>
+    </p:bg>
+    <p:spTree>
+      <p:nvGrpSpPr>
+        <p:cNvPr id="1" name=""/>
+        <p:cNvGrpSpPr/>
+        <p:nvPr/>
+      </p:nvGrpSpPr>
+      <p:grpSpPr>
+        <a:xfrm>
+          <a:off x="0" y="0"/>
+          <a:ext cx="0" cy="0"/>
+          <a:chOff x="0" y="0"/>
+          <a:chExt cx="0" cy="0"/>
+        </a:xfrm>
+      </p:grpSpPr>
+      <p:sp>
+        <p:nvSpPr>
+          <p:cNvPr id="2" name="Text 0"/>
+          <p:cNvSpPr txBox="1"/>
+          <p:nvPr/>
+        </p:nvSpPr>
+        <p:spPr>
+          <a:xfrm>
+            <a:off x="640080" y="411480"/>
+            <a:ext cx="9144000" cy="320040"/>
+          </a:xfrm>
+          <a:prstGeom prst="rect">
+            <a:avLst/>
+          </a:prstGeom>
+          <a:noFill/>
+          <a:ln/>
+        </p:spPr>
+        <p:txBody>
+          <a:bodyPr wrap="square" lIns="0" tIns="0" rIns="0" bIns="0" rtlCol="0" anchor="ctr"/>
+          <a:lstStyle/>
+          <a:p>
+            <a:pPr indent="0" marL="0">
+              <a:buNone/>
+            </a:pPr>
+            <a:r>
+              <a:rPr lang="en-US" sz="1300" b="1" spc="100" kern="0" dirty="0">
+                <a:solidFill>
+                  <a:srgbClr val="C9603F"/>
+                </a:solidFill>
+                <a:latin typeface="游ゴシック" pitchFamily="34" charset="0"/>
+                <a:ea typeface="游ゴシック" pitchFamily="34" charset="-122"/>
+                <a:cs typeface="游ゴシック" pitchFamily="34" charset="-120"/>
+              </a:rPr>
+              <a:t>CASE STUDY</a:t>
+            </a:r>
+            <a:endParaRPr lang="en-US" sz="1300" dirty="0"/>
+          </a:p>
+        </p:txBody>
+      </p:sp>
+      <p:sp>
+        <p:nvSpPr>
+          <p:cNvPr id="3" name="Text 1"/>
+          <p:cNvSpPr txBox="1"/>
+          <p:nvPr/>
+        </p:nvSpPr>
+        <p:spPr>
+          <a:xfrm>
+            <a:off x="640080" y="713232"/>
+            <a:ext cx="10881360" cy="731520"/>
+          </a:xfrm>
+          <a:prstGeom prst="rect">
+            <a:avLst/>
+          </a:prstGeom>
+          <a:noFill/>
+          <a:ln/>
+        </p:spPr>
+        <p:txBody>
+          <a:bodyPr wrap="square" lIns="0" tIns="0" rIns="0" bIns="0" rtlCol="0" anchor="ctr"/>
+          <a:lstStyle/>
+          <a:p>
+            <a:pPr indent="0" marL="0">
+              <a:buNone/>
+            </a:pPr>
+            <a:r>
+              <a:rPr lang="en-US" sz="2800" b="1" dirty="0">
+                <a:solidFill>
+                  <a:srgbClr val="1E3A5F"/>
+                </a:solidFill>
+                <a:latin typeface="游ゴシック" pitchFamily="34" charset="0"/>
+                <a:ea typeface="游ゴシック" pitchFamily="34" charset="-122"/>
+                <a:cs typeface="游ゴシック" pitchFamily="34" charset="-120"/>
+              </a:rPr>
+              <a:t>実例 ― 「社会貢献」が開く、新しい扉</a:t>
+            </a:r>
+            <a:endParaRPr lang="en-US" sz="2800" dirty="0"/>
+          </a:p>
+        </p:txBody>
+      </p:sp>
+      <p:sp>
+        <p:nvSpPr>
+          <p:cNvPr id="4" name="Shape 2"/>
+          <p:cNvSpPr/>
+          <p:nvPr/>
+        </p:nvSpPr>
+        <p:spPr>
+          <a:xfrm>
+            <a:off x="640080" y="1737360"/>
+            <a:ext cx="5257800" cy="3931920"/>
+          </a:xfrm>
+          <a:prstGeom prst="roundRect">
+            <a:avLst>
+              <a:gd name="adj" fmla="val 2326"/>
+            </a:avLst>
+          </a:prstGeom>
+          <a:solidFill>
+            <a:srgbClr val="F6F1EA"/>
+          </a:solidFill>
+          <a:ln/>
+          <a:effectLst>
+            <a:outerShdw sx="100000" sy="100000" kx="0" ky="0" algn="bl" rotWithShape="0" blurRad="101600" dist="38100" dir="5400000">
+              <a:srgbClr val="10233A">
+                <a:alpha val="18000"/>
+              </a:srgbClr>
+            </a:outerShdw>
+          </a:effectLst>
+        </p:spPr>
+      </p:sp>
+      <p:sp>
+        <p:nvSpPr>
+          <p:cNvPr id="5" name="Text 3"/>
+          <p:cNvSpPr txBox="1"/>
+          <p:nvPr/>
+        </p:nvSpPr>
+        <p:spPr>
+          <a:xfrm>
+            <a:off x="914400" y="1965960"/>
+            <a:ext cx="4709160" cy="457200"/>
+          </a:xfrm>
+          <a:prstGeom prst="rect">
+            <a:avLst/>
+          </a:prstGeom>
+          <a:noFill/>
+          <a:ln/>
+        </p:spPr>
+        <p:txBody>
+          <a:bodyPr wrap="square" lIns="0" tIns="0" rIns="0" bIns="0" rtlCol="0" anchor="ctr"/>
+          <a:lstStyle/>
+          <a:p>
+            <a:pPr indent="0" marL="0">
+              <a:buNone/>
+            </a:pPr>
+            <a:r>
+              <a:rPr lang="en-US" sz="1700" b="1" dirty="0">
+                <a:solidFill>
+                  <a:srgbClr val="1E3A5F"/>
+                </a:solidFill>
+                <a:latin typeface="游ゴシック" pitchFamily="34" charset="0"/>
+                <a:ea typeface="游ゴシック" pitchFamily="34" charset="-122"/>
+                <a:cs typeface="游ゴシック" pitchFamily="34" charset="-120"/>
+              </a:rPr>
+              <a:t>法人開拓は、ドアノックから</a:t>
+            </a:r>
+            <a:endParaRPr lang="en-US" sz="1700" dirty="0"/>
+          </a:p>
+        </p:txBody>
+      </p:sp>
+      <p:sp>
+        <p:nvSpPr>
+          <p:cNvPr id="6" name="Text 4"/>
+          <p:cNvSpPr txBox="1"/>
+          <p:nvPr/>
+        </p:nvSpPr>
+        <p:spPr>
+          <a:xfrm>
+            <a:off x="914400" y="2395728"/>
+            <a:ext cx="4709160" cy="365760"/>
+          </a:xfrm>
+          <a:prstGeom prst="rect">
+            <a:avLst/>
+          </a:prstGeom>
+          <a:noFill/>
+          <a:ln/>
+        </p:spPr>
+        <p:txBody>
+          <a:bodyPr wrap="square" lIns="0" tIns="0" rIns="0" bIns="0" rtlCol="0" anchor="ctr"/>
+          <a:lstStyle/>
+          <a:p>
+            <a:pPr indent="0" marL="0">
+              <a:buNone/>
+            </a:pPr>
+            <a:r>
+              <a:rPr lang="en-US" sz="1150" dirty="0">
+                <a:solidFill>
+                  <a:srgbClr val="6B6B6B"/>
+                </a:solidFill>
+                <a:latin typeface="游ゴシック" pitchFamily="34" charset="0"/>
+                <a:ea typeface="游ゴシック" pitchFamily="34" charset="-122"/>
+                <a:cs typeface="游ゴシック" pitchFamily="34" charset="-120"/>
+              </a:rPr>
+              <a:t>運送業・従業員約200名規模の企業への導入事例</a:t>
+            </a:r>
+            <a:endParaRPr lang="en-US" sz="1150" dirty="0"/>
+          </a:p>
+        </p:txBody>
+      </p:sp>
+      <p:sp>
+        <p:nvSpPr>
+          <p:cNvPr id="7" name="Text 5"/>
+          <p:cNvSpPr txBox="1"/>
+          <p:nvPr/>
+        </p:nvSpPr>
+        <p:spPr>
+          <a:xfrm>
+            <a:off x="914400" y="2880360"/>
+            <a:ext cx="4709160" cy="1920240"/>
+          </a:xfrm>
+          <a:prstGeom prst="rect">
+            <a:avLst/>
+          </a:prstGeom>
+          <a:noFill/>
+          <a:ln/>
+        </p:spPr>
+        <p:txBody>
+          <a:bodyPr wrap="square" lIns="0" tIns="0" rIns="0" bIns="0" rtlCol="0" anchor="t"/>
+          <a:lstStyle/>
+          <a:p>
+            <a:pPr marL="342900" indent="-342900">
+              <a:lnSpc>
+                <a:spcPct val="125000"/>
+              </a:lnSpc>
+              <a:spcAft>
+                <a:spcPts val="1000"/>
+              </a:spcAft>
+              <a:buSzPct val="100000"/>
+              <a:buChar char="●"/>
+            </a:pPr>
+            <a:r>
+              <a:rPr lang="en-US" sz="1250" dirty="0">
+                <a:solidFill>
+                  <a:srgbClr val="3A3A3A"/>
+                </a:solidFill>
+                <a:latin typeface="游ゴシック" pitchFamily="34" charset="0"/>
+                <a:ea typeface="游ゴシック" pitchFamily="34" charset="-122"/>
+                <a:cs typeface="游ゴシック" pitchFamily="34" charset="-120"/>
+              </a:rPr>
+              <a:t>「繋ぐノートワークセミナー」を本社・支社で複数回開催し、従業員全員に接点を持つ</a:t>
+            </a:r>
+            <a:endParaRPr lang="en-US" sz="1250" dirty="0"/>
+          </a:p>
+          <a:p>
+            <a:pPr marL="342900" indent="-342900">
+              <a:lnSpc>
+                <a:spcPct val="125000"/>
+              </a:lnSpc>
+              <a:spcAft>
+                <a:spcPts val="1000"/>
+              </a:spcAft>
+              <a:buSzPct val="100000"/>
+              <a:buChar char="●"/>
+            </a:pPr>
+            <a:r>
+              <a:rPr lang="en-US" sz="1250" dirty="0">
+                <a:solidFill>
+                  <a:srgbClr val="3A3A3A"/>
+                </a:solidFill>
+                <a:latin typeface="游ゴシック" pitchFamily="34" charset="0"/>
+                <a:ea typeface="游ゴシック" pitchFamily="34" charset="-122"/>
+                <a:cs typeface="游ゴシック" pitchFamily="34" charset="-120"/>
+              </a:rPr>
+              <a:t>持ち込んだのは“商品”ではなく、従業員と家族の命・これからを考える機会</a:t>
+            </a:r>
+            <a:endParaRPr lang="en-US" sz="1250" dirty="0"/>
+          </a:p>
+          <a:p>
+            <a:pPr marL="342900" indent="-342900">
+              <a:lnSpc>
+                <a:spcPct val="125000"/>
+              </a:lnSpc>
+              <a:spcAft>
+                <a:spcPts val="800"/>
+              </a:spcAft>
+              <a:buSzPct val="100000"/>
+              <a:buChar char="●"/>
+            </a:pPr>
+            <a:r>
+              <a:rPr lang="en-US" sz="1250" dirty="0">
+                <a:solidFill>
+                  <a:srgbClr val="3A3A3A"/>
+                </a:solidFill>
+                <a:latin typeface="游ゴシック" pitchFamily="34" charset="0"/>
+                <a:ea typeface="游ゴシック" pitchFamily="34" charset="-122"/>
+                <a:cs typeface="游ゴシック" pitchFamily="34" charset="-120"/>
+              </a:rPr>
+              <a:t>セミナー後、自然な形で保険見直しの相談へ。本業は信頼の後からついてきた</a:t>
+            </a:r>
+            <a:endParaRPr lang="en-US" sz="1250" dirty="0"/>
+          </a:p>
+        </p:txBody>
+      </p:sp>
+      <p:sp>
+        <p:nvSpPr>
+          <p:cNvPr id="8" name="Shape 6"/>
+          <p:cNvSpPr/>
+          <p:nvPr/>
+        </p:nvSpPr>
+        <p:spPr>
+          <a:xfrm>
+            <a:off x="914400" y="4846320"/>
+            <a:ext cx="4709160" cy="640080"/>
+          </a:xfrm>
+          <a:prstGeom prst="roundRect">
+            <a:avLst>
+              <a:gd name="adj" fmla="val 11429"/>
+            </a:avLst>
+          </a:prstGeom>
+          <a:solidFill>
+            <a:srgbClr val="1E3A5F"/>
+          </a:solidFill>
+          <a:ln/>
+        </p:spPr>
+      </p:sp>
+      <p:sp>
+        <p:nvSpPr>
+          <p:cNvPr id="9" name="Text 7"/>
+          <p:cNvSpPr txBox="1"/>
+          <p:nvPr/>
+        </p:nvSpPr>
+        <p:spPr>
+          <a:xfrm>
+            <a:off x="914400" y="4846320"/>
+            <a:ext cx="4709160" cy="640080"/>
+          </a:xfrm>
+          <a:prstGeom prst="rect">
+            <a:avLst/>
+          </a:prstGeom>
+          <a:noFill/>
+          <a:ln/>
+        </p:spPr>
+        <p:txBody>
+          <a:bodyPr wrap="square" lIns="0" tIns="0" rIns="0" bIns="0" rtlCol="0" anchor="ctr"/>
+          <a:lstStyle/>
+          <a:p>
+            <a:pPr algn="ctr" indent="0" marL="0">
+              <a:buNone/>
+            </a:pPr>
+            <a:r>
+              <a:rPr lang="en-US" sz="1550" b="1" dirty="0">
+                <a:solidFill>
+                  <a:srgbClr val="F1DCCF"/>
+                </a:solidFill>
+                <a:latin typeface="游ゴシック" pitchFamily="34" charset="0"/>
+                <a:ea typeface="游ゴシック" pitchFamily="34" charset="-122"/>
+                <a:cs typeface="游ゴシック" pitchFamily="34" charset="-120"/>
+              </a:rPr>
+              <a:t>「ドアノックは、社会貢献。」</a:t>
+            </a:r>
+            <a:endParaRPr lang="en-US" sz="1550" dirty="0"/>
+          </a:p>
+        </p:txBody>
+      </p:sp>
+      <p:sp>
+        <p:nvSpPr>
+          <p:cNvPr id="10" name="Shape 8"/>
+          <p:cNvSpPr/>
+          <p:nvPr/>
+        </p:nvSpPr>
+        <p:spPr>
+          <a:xfrm>
+            <a:off x="6263640" y="1737360"/>
+            <a:ext cx="5257800" cy="3931920"/>
+          </a:xfrm>
+          <a:prstGeom prst="roundRect">
+            <a:avLst>
+              <a:gd name="adj" fmla="val 2326"/>
+            </a:avLst>
+          </a:prstGeom>
+          <a:solidFill>
+            <a:srgbClr val="F6F1EA"/>
+          </a:solidFill>
+          <a:ln/>
+          <a:effectLst>
+            <a:outerShdw sx="100000" sy="100000" kx="0" ky="0" algn="bl" rotWithShape="0" blurRad="101600" dist="38100" dir="5400000">
+              <a:srgbClr val="10233A">
+                <a:alpha val="18000"/>
+              </a:srgbClr>
+            </a:outerShdw>
+          </a:effectLst>
+        </p:spPr>
+      </p:sp>
+      <p:sp>
+        <p:nvSpPr>
+          <p:cNvPr id="11" name="Text 9"/>
+          <p:cNvSpPr txBox="1"/>
+          <p:nvPr/>
+        </p:nvSpPr>
+        <p:spPr>
+          <a:xfrm>
+            <a:off x="6537960" y="1965960"/>
+            <a:ext cx="4709160" cy="457200"/>
+          </a:xfrm>
+          <a:prstGeom prst="rect">
+            <a:avLst/>
+          </a:prstGeom>
+          <a:noFill/>
+          <a:ln/>
+        </p:spPr>
+        <p:txBody>
+          <a:bodyPr wrap="square" lIns="0" tIns="0" rIns="0" bIns="0" rtlCol="0" anchor="ctr"/>
+          <a:lstStyle/>
+          <a:p>
+            <a:pPr indent="0" marL="0">
+              <a:buNone/>
+            </a:pPr>
+            <a:r>
+              <a:rPr lang="en-US" sz="1700" b="1" dirty="0">
+                <a:solidFill>
+                  <a:srgbClr val="1E3A5F"/>
+                </a:solidFill>
+                <a:latin typeface="游ゴシック" pitchFamily="34" charset="0"/>
+                <a:ea typeface="游ゴシック" pitchFamily="34" charset="-122"/>
+                <a:cs typeface="游ゴシック" pitchFamily="34" charset="-120"/>
+              </a:rPr>
+              <a:t>一つの自治体から、全国モデルへ</a:t>
+            </a:r>
+            <a:endParaRPr lang="en-US" sz="1700" dirty="0"/>
+          </a:p>
+        </p:txBody>
+      </p:sp>
+      <p:sp>
+        <p:nvSpPr>
+          <p:cNvPr id="12" name="Text 10"/>
+          <p:cNvSpPr txBox="1"/>
+          <p:nvPr/>
+        </p:nvSpPr>
+        <p:spPr>
+          <a:xfrm>
+            <a:off x="6537960" y="2395728"/>
+            <a:ext cx="4709160" cy="365760"/>
+          </a:xfrm>
+          <a:prstGeom prst="rect">
+            <a:avLst/>
+          </a:prstGeom>
+          <a:noFill/>
+          <a:ln/>
+        </p:spPr>
+        <p:txBody>
+          <a:bodyPr wrap="square" lIns="0" tIns="0" rIns="0" bIns="0" rtlCol="0" anchor="ctr"/>
+          <a:lstStyle/>
+          <a:p>
+            <a:pPr indent="0" marL="0">
+              <a:buNone/>
+            </a:pPr>
+            <a:r>
+              <a:rPr lang="en-US" sz="1150" dirty="0">
+                <a:solidFill>
+                  <a:srgbClr val="6B6B6B"/>
+                </a:solidFill>
+                <a:latin typeface="游ゴシック" pitchFamily="34" charset="0"/>
+                <a:ea typeface="游ゴシック" pitchFamily="34" charset="-122"/>
+                <a:cs typeface="游ゴシック" pitchFamily="34" charset="-120"/>
+              </a:rPr>
+              <a:t>行政連携の広がり（朝来市 → 岸和田市）</a:t>
+            </a:r>
+            <a:endParaRPr lang="en-US" sz="1150" dirty="0"/>
+          </a:p>
+        </p:txBody>
+      </p:sp>
+      <p:sp>
+        <p:nvSpPr>
+          <p:cNvPr id="13" name="Text 11"/>
+          <p:cNvSpPr txBox="1"/>
+          <p:nvPr/>
+        </p:nvSpPr>
+        <p:spPr>
+          <a:xfrm>
+            <a:off x="6537960" y="2880360"/>
+            <a:ext cx="4709160" cy="1920240"/>
+          </a:xfrm>
+          <a:prstGeom prst="rect">
+            <a:avLst/>
+          </a:prstGeom>
+          <a:noFill/>
+          <a:ln/>
+        </p:spPr>
+        <p:txBody>
+          <a:bodyPr wrap="square" lIns="0" tIns="0" rIns="0" bIns="0" rtlCol="0" anchor="t"/>
+          <a:lstStyle/>
+          <a:p>
+            <a:pPr marL="342900" indent="-342900">
+              <a:lnSpc>
+                <a:spcPct val="125000"/>
+              </a:lnSpc>
+              <a:spcAft>
+                <a:spcPts val="1000"/>
+              </a:spcAft>
+              <a:buSzPct val="100000"/>
+              <a:buChar char="●"/>
+            </a:pPr>
+            <a:r>
+              <a:rPr lang="en-US" sz="1250" dirty="0">
+                <a:solidFill>
+                  <a:srgbClr val="3A3A3A"/>
+                </a:solidFill>
+                <a:latin typeface="游ゴシック" pitchFamily="34" charset="0"/>
+                <a:ea typeface="游ゴシック" pitchFamily="34" charset="-122"/>
+                <a:cs typeface="游ゴシック" pitchFamily="34" charset="-120"/>
+              </a:rPr>
+              <a:t>朝来市在宅医療・介護連携会議「身寄りのない人への支援検討ワーキング」への参画から始まった行政連携</a:t>
+            </a:r>
+            <a:endParaRPr lang="en-US" sz="1250" dirty="0"/>
+          </a:p>
+          <a:p>
+            <a:pPr marL="342900" indent="-342900">
+              <a:lnSpc>
+                <a:spcPct val="125000"/>
+              </a:lnSpc>
+              <a:spcAft>
+                <a:spcPts val="1000"/>
+              </a:spcAft>
+              <a:buSzPct val="100000"/>
+              <a:buChar char="●"/>
+            </a:pPr>
+            <a:r>
+              <a:rPr lang="en-US" sz="1250" dirty="0">
+                <a:solidFill>
+                  <a:srgbClr val="3A3A3A"/>
+                </a:solidFill>
+                <a:latin typeface="游ゴシック" pitchFamily="34" charset="0"/>
+                <a:ea typeface="游ゴシック" pitchFamily="34" charset="-122"/>
+                <a:cs typeface="游ゴシック" pitchFamily="34" charset="-120"/>
+              </a:rPr>
+              <a:t>岸和田市社会福祉協議会の研修（2026年10月）でも、専門職の縦割りを越えた「資源マップ」づくりを展開中</a:t>
+            </a:r>
+            <a:endParaRPr lang="en-US" sz="1250" dirty="0"/>
+          </a:p>
+          <a:p>
+            <a:pPr marL="342900" indent="-342900">
+              <a:lnSpc>
+                <a:spcPct val="125000"/>
+              </a:lnSpc>
+              <a:spcAft>
+                <a:spcPts val="800"/>
+              </a:spcAft>
+              <a:buSzPct val="100000"/>
+              <a:buChar char="●"/>
+            </a:pPr>
+            <a:r>
+              <a:rPr lang="en-US" sz="1250" dirty="0">
+                <a:solidFill>
+                  <a:srgbClr val="3A3A3A"/>
+                </a:solidFill>
+                <a:latin typeface="游ゴシック" pitchFamily="34" charset="0"/>
+                <a:ea typeface="游ゴシック" pitchFamily="34" charset="-122"/>
+                <a:cs typeface="游ゴシック" pitchFamily="34" charset="-120"/>
+              </a:rPr>
+              <a:t>一つの自治体で実証した手法を、他の自治体でも再現できる「型」として横展開している</a:t>
+            </a:r>
+            <a:endParaRPr lang="en-US" sz="1250" dirty="0"/>
+          </a:p>
+        </p:txBody>
+      </p:sp>
+      <p:sp>
+        <p:nvSpPr>
+          <p:cNvPr id="14" name="Shape 12"/>
+          <p:cNvSpPr/>
+          <p:nvPr/>
+        </p:nvSpPr>
+        <p:spPr>
+          <a:xfrm>
+            <a:off x="6537960" y="4846320"/>
+            <a:ext cx="4709160" cy="640080"/>
+          </a:xfrm>
+          <a:prstGeom prst="roundRect">
+            <a:avLst>
+              <a:gd name="adj" fmla="val 11429"/>
+            </a:avLst>
+          </a:prstGeom>
+          <a:solidFill>
+            <a:srgbClr val="C9603F"/>
+          </a:solidFill>
+          <a:ln/>
+        </p:spPr>
+      </p:sp>
+      <p:sp>
+        <p:nvSpPr>
+          <p:cNvPr id="15" name="Text 13"/>
+          <p:cNvSpPr txBox="1"/>
+          <p:nvPr/>
+        </p:nvSpPr>
+        <p:spPr>
+          <a:xfrm>
+            <a:off x="6537960" y="4846320"/>
+            <a:ext cx="4709160" cy="640080"/>
+          </a:xfrm>
+          <a:prstGeom prst="rect">
+            <a:avLst/>
+          </a:prstGeom>
+          <a:noFill/>
+          <a:ln/>
+        </p:spPr>
+        <p:txBody>
+          <a:bodyPr wrap="square" lIns="0" tIns="0" rIns="0" bIns="0" rtlCol="0" anchor="ctr"/>
+          <a:lstStyle/>
+          <a:p>
+            <a:pPr algn="ctr" indent="0" marL="0">
+              <a:buNone/>
+            </a:pPr>
+            <a:r>
+              <a:rPr lang="en-US" sz="1450" b="1" dirty="0">
+                <a:solidFill>
+                  <a:srgbClr val="FFFFFF"/>
+                </a:solidFill>
+                <a:latin typeface="游ゴシック" pitchFamily="34" charset="0"/>
+                <a:ea typeface="游ゴシック" pitchFamily="34" charset="-122"/>
+                <a:cs typeface="游ゴシック" pitchFamily="34" charset="-120"/>
+              </a:rPr>
+              <a:t>一つの街の実証を、次の街の手引きに。</a:t>
+            </a:r>
+            <a:endParaRPr lang="en-US" sz="1450" dirty="0"/>
+          </a:p>
+        </p:txBody>
+      </p:sp>
+      <p:sp>
+        <p:nvSpPr>
+          <p:cNvPr id="16" name="Text 14"/>
+          <p:cNvSpPr txBox="1"/>
+          <p:nvPr/>
+        </p:nvSpPr>
+        <p:spPr>
+          <a:xfrm>
+            <a:off x="640080" y="5989320"/>
+            <a:ext cx="10881360" cy="457200"/>
+          </a:xfrm>
+          <a:prstGeom prst="rect">
+            <a:avLst/>
+          </a:prstGeom>
+          <a:noFill/>
+          <a:ln/>
+        </p:spPr>
+        <p:txBody>
+          <a:bodyPr wrap="square" lIns="0" tIns="0" rIns="0" bIns="0" rtlCol="0" anchor="ctr"/>
+          <a:lstStyle/>
+          <a:p>
+            <a:pPr indent="0" marL="0">
+              <a:buNone/>
+            </a:pPr>
+            <a:r>
+              <a:rPr lang="en-US" sz="1250" i="1" dirty="0">
+                <a:solidFill>
+                  <a:srgbClr val="6B6B6B"/>
+                </a:solidFill>
+                <a:latin typeface="游ゴシック" pitchFamily="34" charset="0"/>
+                <a:ea typeface="游ゴシック" pitchFamily="34" charset="-122"/>
+                <a:cs typeface="游ゴシック" pitchFamily="34" charset="-120"/>
+              </a:rPr>
+              <a:t>「競争から共存へ」という経営思想が、実際の売上・連携へと転化している証拠です。</a:t>
+            </a:r>
+            <a:endParaRPr lang="en-US" sz="1250" dirty="0"/>
+          </a:p>
+        </p:txBody>
+      </p:sp>
+      <p:sp>
+        <p:nvSpPr>
+          <p:cNvPr id="17" name="Text 15"/>
+          <p:cNvSpPr txBox="1"/>
+          <p:nvPr/>
+        </p:nvSpPr>
+        <p:spPr>
+          <a:xfrm>
+            <a:off x="11551615" y="6400800"/>
+            <a:ext cx="457200" cy="274320"/>
+          </a:xfrm>
+          <a:prstGeom prst="rect">
+            <a:avLst/>
+          </a:prstGeom>
+          <a:noFill/>
+          <a:ln/>
+        </p:spPr>
+        <p:txBody>
+          <a:bodyPr wrap="square" lIns="0" tIns="0" rIns="0" bIns="0" rtlCol="0" anchor="ctr"/>
+          <a:lstStyle/>
+          <a:p>
+            <a:pPr algn="r" indent="0" marL="0">
+              <a:buNone/>
+            </a:pPr>
+            <a:r>
+              <a:rPr lang="en-US" sz="1000" dirty="0">
+                <a:solidFill>
+                  <a:srgbClr val="6B6B6B"/>
+                </a:solidFill>
+                <a:latin typeface="游ゴシック" pitchFamily="34" charset="0"/>
+                <a:ea typeface="游ゴシック" pitchFamily="34" charset="-122"/>
+                <a:cs typeface="游ゴシック" pitchFamily="34" charset="-120"/>
+              </a:rPr>
+              <a:t>12</a:t>
+            </a:r>
+            <a:endParaRPr lang="en-US" sz="1000" dirty="0"/>
+          </a:p>
+        </p:txBody>
+      </p:sp>
+    </p:spTree>
+  </p:cSld>
+  <p:clrMapOvr>
+    <a:masterClrMapping/>
+  </p:clrMapOvr>
+</p:sld>
+</file>
+
+<file path=ppt/slides/slide13.xml><?xml version="1.0" encoding="utf-8"?>
+<p:sld xmlns:a="http://schemas.openxmlformats.org/drawingml/2006/main" xmlns:r="http://schemas.openxmlformats.org/officeDocument/2006/relationships" xmlns:p="http://schemas.openxmlformats.org/presentationml/2006/main">
+  <p:cSld name="Slide 13">
+    <p:bg>
+      <p:bgPr>
+        <a:solidFill>
           <a:srgbClr val="10233A"/>
         </a:solidFill>
       </p:bgPr>
@@ -4298,18 +5099,21 @@
         </p:nvSpPr>
         <p:spPr>
           <a:xfrm>
-            <a:off x="640080" y="1920240"/>
-            <a:ext cx="2377440" cy="1371600"/>
-          </a:xfrm>
-          <a:prstGeom prst="roundRect">
-            <a:avLst>
-              <a:gd name="adj" fmla="val 5333"/>
-            </a:avLst>
+            <a:off x="667512" y="1673352"/>
+            <a:ext cx="1591056" cy="1591056"/>
+          </a:xfrm>
+          <a:prstGeom prst="ellipse">
+            <a:avLst/>
           </a:prstGeom>
           <a:solidFill>
-            <a:srgbClr val="1E3A5F"/>
+            <a:srgbClr val="FFFFFF"/>
           </a:solidFill>
-          <a:ln/>
+          <a:ln w="31750">
+            <a:solidFill>
+              <a:srgbClr val="C9603F"/>
+            </a:solidFill>
+            <a:prstDash val="solid"/>
+          </a:ln>
           <a:effectLst>
             <a:outerShdw sx="100000" sy="100000" kx="0" ky="0" algn="bl" rotWithShape="0" blurRad="101600" dist="38100" dir="5400000">
               <a:srgbClr val="10233A">
@@ -4319,133 +5123,40 @@
           </a:effectLst>
         </p:spPr>
       </p:sp>
-      <p:sp>
-        <p:nvSpPr>
-          <p:cNvPr id="5" name="Text 3"/>
-          <p:cNvSpPr txBox="1"/>
-          <p:nvPr/>
-        </p:nvSpPr>
-        <p:spPr>
-          <a:xfrm>
-            <a:off x="777240" y="2057400"/>
-            <a:ext cx="2103120" cy="274320"/>
-          </a:xfrm>
-          <a:prstGeom prst="rect">
-            <a:avLst/>
-          </a:prstGeom>
-          <a:noFill/>
-          <a:ln/>
-        </p:spPr>
-        <p:txBody>
-          <a:bodyPr wrap="square" lIns="0" tIns="0" rIns="0" bIns="0" rtlCol="0" anchor="ctr"/>
-          <a:lstStyle/>
-          <a:p>
-            <a:pPr indent="0" marL="0">
-              <a:buNone/>
-            </a:pPr>
-            <a:r>
-              <a:rPr lang="en-US" sz="1100" b="1" dirty="0">
-                <a:solidFill>
-                  <a:srgbClr val="F1DCCF"/>
-                </a:solidFill>
-                <a:latin typeface="游ゴシック" pitchFamily="34" charset="0"/>
-                <a:ea typeface="游ゴシック" pitchFamily="34" charset="-122"/>
-                <a:cs typeface="游ゴシック" pitchFamily="34" charset="-120"/>
-              </a:rPr>
-              <a:t>PART 1</a:t>
-            </a:r>
-            <a:endParaRPr lang="en-US" sz="1100" dirty="0"/>
-          </a:p>
-        </p:txBody>
-      </p:sp>
-      <p:sp>
-        <p:nvSpPr>
-          <p:cNvPr id="6" name="Text 4"/>
-          <p:cNvSpPr txBox="1"/>
-          <p:nvPr/>
-        </p:nvSpPr>
-        <p:spPr>
-          <a:xfrm>
-            <a:off x="777240" y="2331720"/>
-            <a:ext cx="2103120" cy="457200"/>
-          </a:xfrm>
-          <a:prstGeom prst="rect">
-            <a:avLst/>
-          </a:prstGeom>
-          <a:noFill/>
-          <a:ln/>
-        </p:spPr>
-        <p:txBody>
-          <a:bodyPr wrap="square" lIns="0" tIns="0" rIns="0" bIns="0" rtlCol="0" anchor="ctr"/>
-          <a:lstStyle/>
-          <a:p>
-            <a:pPr indent="0" marL="0">
-              <a:buNone/>
-            </a:pPr>
-            <a:r>
-              <a:rPr lang="en-US" sz="1700" b="1" dirty="0">
-                <a:solidFill>
-                  <a:srgbClr val="FFFFFF"/>
-                </a:solidFill>
-                <a:latin typeface="游ゴシック" pitchFamily="34" charset="0"/>
-                <a:ea typeface="游ゴシック" pitchFamily="34" charset="-122"/>
-                <a:cs typeface="游ゴシック" pitchFamily="34" charset="-120"/>
-              </a:rPr>
-              <a:t>メガバンク</a:t>
-            </a:r>
-            <a:endParaRPr lang="en-US" sz="1700" dirty="0"/>
-          </a:p>
-        </p:txBody>
-      </p:sp>
-      <p:sp>
-        <p:nvSpPr>
-          <p:cNvPr id="7" name="Text 5"/>
-          <p:cNvSpPr txBox="1"/>
-          <p:nvPr/>
-        </p:nvSpPr>
-        <p:spPr>
-          <a:xfrm>
-            <a:off x="777240" y="2816352"/>
-            <a:ext cx="2103120" cy="365760"/>
-          </a:xfrm>
-          <a:prstGeom prst="rect">
-            <a:avLst/>
-          </a:prstGeom>
-          <a:noFill/>
-          <a:ln/>
-        </p:spPr>
-        <p:txBody>
-          <a:bodyPr wrap="square" lIns="0" tIns="0" rIns="0" bIns="0" rtlCol="0" anchor="ctr"/>
-          <a:lstStyle/>
-          <a:p>
-            <a:pPr indent="0" marL="0">
-              <a:buNone/>
-            </a:pPr>
-            <a:r>
-              <a:rPr lang="en-US" sz="1100" dirty="0">
-                <a:solidFill>
-                  <a:srgbClr val="E8E8E8"/>
-                </a:solidFill>
-                <a:latin typeface="游ゴシック" pitchFamily="34" charset="0"/>
-                <a:ea typeface="游ゴシック" pitchFamily="34" charset="-122"/>
-                <a:cs typeface="游ゴシック" pitchFamily="34" charset="-120"/>
-              </a:rPr>
-              <a:t>三井住友銀行</a:t>
-            </a:r>
-            <a:endParaRPr lang="en-US" sz="1100" dirty="0"/>
-          </a:p>
-        </p:txBody>
-      </p:sp>
-      <p:sp>
-        <p:nvSpPr>
-          <p:cNvPr id="8" name="Text 6"/>
-          <p:cNvSpPr txBox="1"/>
-          <p:nvPr/>
-        </p:nvSpPr>
-        <p:spPr>
-          <a:xfrm>
-            <a:off x="3017520" y="2377440"/>
-            <a:ext cx="320040" cy="457200"/>
+      <p:pic>
+        <p:nvPicPr>
+          <p:cNvPr id="5" name="Image 0" descr="matsumoto_photo_circle.png">    </p:cNvPr>
+          <p:cNvPicPr>
+            <a:picLocks noChangeAspect="1"/>
+          </p:cNvPicPr>
+          <p:nvPr/>
+        </p:nvPicPr>
+        <p:blipFill>
+          <a:blip r:embed="rId1"/>
+          <a:stretch>
+            <a:fillRect/>
+          </a:stretch>
+        </p:blipFill>
+        <p:spPr>
+          <a:xfrm>
+            <a:off x="731520" y="1737360"/>
+            <a:ext cx="1463040" cy="1463040"/>
+          </a:xfrm>
+          <a:prstGeom prst="rect">
+            <a:avLst/>
+          </a:prstGeom>
+        </p:spPr>
+      </p:pic>
+      <p:sp>
+        <p:nvSpPr>
+          <p:cNvPr id="6" name="Text 3"/>
+          <p:cNvSpPr txBox="1"/>
+          <p:nvPr/>
+        </p:nvSpPr>
+        <p:spPr>
+          <a:xfrm>
+            <a:off x="457200" y="3355848"/>
+            <a:ext cx="2011680" cy="320040"/>
           </a:xfrm>
           <a:prstGeom prst="rect">
             <a:avLst/>
@@ -4461,27 +5172,30 @@
               <a:buNone/>
             </a:pPr>
             <a:r>
-              <a:rPr lang="en-US" sz="1800" dirty="0">
+              <a:rPr lang="en-US" sz="1400" b="1" dirty="0">
                 <a:solidFill>
                   <a:srgbClr val="1E3A5F"/>
                 </a:solidFill>
-              </a:rPr>
-              <a:t>→</a:t>
-            </a:r>
-            <a:endParaRPr lang="en-US" sz="1800" dirty="0"/>
-          </a:p>
-        </p:txBody>
-      </p:sp>
-      <p:sp>
-        <p:nvSpPr>
-          <p:cNvPr id="9" name="Shape 7"/>
+                <a:latin typeface="游ゴシック" pitchFamily="34" charset="0"/>
+                <a:ea typeface="游ゴシック" pitchFamily="34" charset="-122"/>
+                <a:cs typeface="游ゴシック" pitchFamily="34" charset="-120"/>
+              </a:rPr>
+              <a:t>代表　松本 恵</a:t>
+            </a:r>
+            <a:endParaRPr lang="en-US" sz="1400" dirty="0"/>
+          </a:p>
+        </p:txBody>
+      </p:sp>
+      <p:sp>
+        <p:nvSpPr>
+          <p:cNvPr id="7" name="Shape 4"/>
           <p:cNvSpPr/>
           <p:nvPr/>
         </p:nvSpPr>
         <p:spPr>
           <a:xfrm>
-            <a:off x="3337560" y="1920240"/>
-            <a:ext cx="2377440" cy="1371600"/>
+            <a:off x="2743200" y="1920240"/>
+            <a:ext cx="2011680" cy="1371600"/>
           </a:xfrm>
           <a:prstGeom prst="roundRect">
             <a:avLst>
@@ -4503,14 +5217,14 @@
       </p:sp>
       <p:sp>
         <p:nvSpPr>
-          <p:cNvPr id="10" name="Text 8"/>
-          <p:cNvSpPr txBox="1"/>
-          <p:nvPr/>
-        </p:nvSpPr>
-        <p:spPr>
-          <a:xfrm>
-            <a:off x="3474720" y="2057400"/>
-            <a:ext cx="2103120" cy="274320"/>
+          <p:cNvPr id="8" name="Text 5"/>
+          <p:cNvSpPr txBox="1"/>
+          <p:nvPr/>
+        </p:nvSpPr>
+        <p:spPr>
+          <a:xfrm>
+            <a:off x="2880360" y="2057400"/>
+            <a:ext cx="1737360" cy="274320"/>
           </a:xfrm>
           <a:prstGeom prst="rect">
             <a:avLst/>
@@ -4526,7 +5240,7 @@
               <a:buNone/>
             </a:pPr>
             <a:r>
-              <a:rPr lang="en-US" sz="1100" b="1" dirty="0">
+              <a:rPr lang="en-US" sz="1050" b="1" dirty="0">
                 <a:solidFill>
                   <a:srgbClr val="F1DCCF"/>
                 </a:solidFill>
@@ -4534,22 +5248,22 @@
                 <a:ea typeface="游ゴシック" pitchFamily="34" charset="-122"/>
                 <a:cs typeface="游ゴシック" pitchFamily="34" charset="-120"/>
               </a:rPr>
-              <a:t>PART 2</a:t>
-            </a:r>
-            <a:endParaRPr lang="en-US" sz="1100" dirty="0"/>
-          </a:p>
-        </p:txBody>
-      </p:sp>
-      <p:sp>
-        <p:nvSpPr>
-          <p:cNvPr id="11" name="Text 9"/>
-          <p:cNvSpPr txBox="1"/>
-          <p:nvPr/>
-        </p:nvSpPr>
-        <p:spPr>
-          <a:xfrm>
-            <a:off x="3474720" y="2331720"/>
-            <a:ext cx="2103120" cy="457200"/>
+              <a:t>PART 1</a:t>
+            </a:r>
+            <a:endParaRPr lang="en-US" sz="1050" dirty="0"/>
+          </a:p>
+        </p:txBody>
+      </p:sp>
+      <p:sp>
+        <p:nvSpPr>
+          <p:cNvPr id="9" name="Text 6"/>
+          <p:cNvSpPr txBox="1"/>
+          <p:nvPr/>
+        </p:nvSpPr>
+        <p:spPr>
+          <a:xfrm>
+            <a:off x="2880360" y="2331720"/>
+            <a:ext cx="1737360" cy="457200"/>
           </a:xfrm>
           <a:prstGeom prst="rect">
             <a:avLst/>
@@ -4565,7 +5279,7 @@
               <a:buNone/>
             </a:pPr>
             <a:r>
-              <a:rPr lang="en-US" sz="1700" b="1" dirty="0">
+              <a:rPr lang="en-US" sz="1550" b="1" dirty="0">
                 <a:solidFill>
                   <a:srgbClr val="FFFFFF"/>
                 </a:solidFill>
@@ -4573,22 +5287,22 @@
                 <a:ea typeface="游ゴシック" pitchFamily="34" charset="-122"/>
                 <a:cs typeface="游ゴシック" pitchFamily="34" charset="-120"/>
               </a:rPr>
-              <a:t>信託銀行</a:t>
-            </a:r>
-            <a:endParaRPr lang="en-US" sz="1700" dirty="0"/>
-          </a:p>
-        </p:txBody>
-      </p:sp>
-      <p:sp>
-        <p:nvSpPr>
-          <p:cNvPr id="12" name="Text 10"/>
-          <p:cNvSpPr txBox="1"/>
-          <p:nvPr/>
-        </p:nvSpPr>
-        <p:spPr>
-          <a:xfrm>
-            <a:off x="3474720" y="2816352"/>
-            <a:ext cx="2103120" cy="365760"/>
+              <a:t>メガバンク</a:t>
+            </a:r>
+            <a:endParaRPr lang="en-US" sz="1550" dirty="0"/>
+          </a:p>
+        </p:txBody>
+      </p:sp>
+      <p:sp>
+        <p:nvSpPr>
+          <p:cNvPr id="10" name="Text 7"/>
+          <p:cNvSpPr txBox="1"/>
+          <p:nvPr/>
+        </p:nvSpPr>
+        <p:spPr>
+          <a:xfrm>
+            <a:off x="2880360" y="2816352"/>
+            <a:ext cx="1737360" cy="365760"/>
           </a:xfrm>
           <a:prstGeom prst="rect">
             <a:avLst/>
@@ -4604,7 +5318,7 @@
               <a:buNone/>
             </a:pPr>
             <a:r>
-              <a:rPr lang="en-US" sz="1100" dirty="0">
+              <a:rPr lang="en-US" sz="1050" dirty="0">
                 <a:solidFill>
                   <a:srgbClr val="E8E8E8"/>
                 </a:solidFill>
@@ -4612,22 +5326,22 @@
                 <a:ea typeface="游ゴシック" pitchFamily="34" charset="-122"/>
                 <a:cs typeface="游ゴシック" pitchFamily="34" charset="-120"/>
               </a:rPr>
-              <a:t>三菱UFJ信託銀行</a:t>
-            </a:r>
-            <a:endParaRPr lang="en-US" sz="1100" dirty="0"/>
-          </a:p>
-        </p:txBody>
-      </p:sp>
-      <p:sp>
-        <p:nvSpPr>
-          <p:cNvPr id="13" name="Text 11"/>
-          <p:cNvSpPr txBox="1"/>
-          <p:nvPr/>
-        </p:nvSpPr>
-        <p:spPr>
-          <a:xfrm>
-            <a:off x="5715000" y="2377440"/>
-            <a:ext cx="320040" cy="457200"/>
+              <a:t>三井住友銀行</a:t>
+            </a:r>
+            <a:endParaRPr lang="en-US" sz="1050" dirty="0"/>
+          </a:p>
+        </p:txBody>
+      </p:sp>
+      <p:sp>
+        <p:nvSpPr>
+          <p:cNvPr id="11" name="Text 8"/>
+          <p:cNvSpPr txBox="1"/>
+          <p:nvPr/>
+        </p:nvSpPr>
+        <p:spPr>
+          <a:xfrm>
+            <a:off x="4754880" y="2377440"/>
+            <a:ext cx="256032" cy="457200"/>
           </a:xfrm>
           <a:prstGeom prst="rect">
             <a:avLst/>
@@ -4643,27 +5357,27 @@
               <a:buNone/>
             </a:pPr>
             <a:r>
-              <a:rPr lang="en-US" sz="1800" dirty="0">
+              <a:rPr lang="en-US" sz="1600" dirty="0">
                 <a:solidFill>
                   <a:srgbClr val="1E3A5F"/>
                 </a:solidFill>
               </a:rPr>
               <a:t>→</a:t>
             </a:r>
-            <a:endParaRPr lang="en-US" sz="1800" dirty="0"/>
-          </a:p>
-        </p:txBody>
-      </p:sp>
-      <p:sp>
-        <p:nvSpPr>
-          <p:cNvPr id="14" name="Shape 12"/>
+            <a:endParaRPr lang="en-US" sz="1600" dirty="0"/>
+          </a:p>
+        </p:txBody>
+      </p:sp>
+      <p:sp>
+        <p:nvSpPr>
+          <p:cNvPr id="12" name="Shape 9"/>
           <p:cNvSpPr/>
           <p:nvPr/>
         </p:nvSpPr>
         <p:spPr>
           <a:xfrm>
-            <a:off x="6035040" y="1920240"/>
-            <a:ext cx="2377440" cy="1371600"/>
+            <a:off x="5010912" y="1920240"/>
+            <a:ext cx="2011680" cy="1371600"/>
           </a:xfrm>
           <a:prstGeom prst="roundRect">
             <a:avLst>
@@ -4685,14 +5399,14 @@
       </p:sp>
       <p:sp>
         <p:nvSpPr>
-          <p:cNvPr id="15" name="Text 13"/>
-          <p:cNvSpPr txBox="1"/>
-          <p:nvPr/>
-        </p:nvSpPr>
-        <p:spPr>
-          <a:xfrm>
-            <a:off x="6172200" y="2057400"/>
-            <a:ext cx="2103120" cy="274320"/>
+          <p:cNvPr id="13" name="Text 10"/>
+          <p:cNvSpPr txBox="1"/>
+          <p:nvPr/>
+        </p:nvSpPr>
+        <p:spPr>
+          <a:xfrm>
+            <a:off x="5148072" y="2057400"/>
+            <a:ext cx="1737360" cy="274320"/>
           </a:xfrm>
           <a:prstGeom prst="rect">
             <a:avLst/>
@@ -4708,7 +5422,7 @@
               <a:buNone/>
             </a:pPr>
             <a:r>
-              <a:rPr lang="en-US" sz="1100" b="1" dirty="0">
+              <a:rPr lang="en-US" sz="1050" b="1" dirty="0">
                 <a:solidFill>
                   <a:srgbClr val="F1DCCF"/>
                 </a:solidFill>
@@ -4716,22 +5430,22 @@
                 <a:ea typeface="游ゴシック" pitchFamily="34" charset="-122"/>
                 <a:cs typeface="游ゴシック" pitchFamily="34" charset="-120"/>
               </a:rPr>
-              <a:t>PART 3</a:t>
-            </a:r>
-            <a:endParaRPr lang="en-US" sz="1100" dirty="0"/>
-          </a:p>
-        </p:txBody>
-      </p:sp>
-      <p:sp>
-        <p:nvSpPr>
-          <p:cNvPr id="16" name="Text 14"/>
-          <p:cNvSpPr txBox="1"/>
-          <p:nvPr/>
-        </p:nvSpPr>
-        <p:spPr>
-          <a:xfrm>
-            <a:off x="6172200" y="2331720"/>
-            <a:ext cx="2103120" cy="457200"/>
+              <a:t>PART 2</a:t>
+            </a:r>
+            <a:endParaRPr lang="en-US" sz="1050" dirty="0"/>
+          </a:p>
+        </p:txBody>
+      </p:sp>
+      <p:sp>
+        <p:nvSpPr>
+          <p:cNvPr id="14" name="Text 11"/>
+          <p:cNvSpPr txBox="1"/>
+          <p:nvPr/>
+        </p:nvSpPr>
+        <p:spPr>
+          <a:xfrm>
+            <a:off x="5148072" y="2331720"/>
+            <a:ext cx="1737360" cy="457200"/>
           </a:xfrm>
           <a:prstGeom prst="rect">
             <a:avLst/>
@@ -4747,7 +5461,7 @@
               <a:buNone/>
             </a:pPr>
             <a:r>
-              <a:rPr lang="en-US" sz="1700" b="1" dirty="0">
+              <a:rPr lang="en-US" sz="1550" b="1" dirty="0">
                 <a:solidFill>
                   <a:srgbClr val="FFFFFF"/>
                 </a:solidFill>
@@ -4755,22 +5469,22 @@
                 <a:ea typeface="游ゴシック" pitchFamily="34" charset="-122"/>
                 <a:cs typeface="游ゴシック" pitchFamily="34" charset="-120"/>
               </a:rPr>
-              <a:t>証券会社</a:t>
-            </a:r>
-            <a:endParaRPr lang="en-US" sz="1700" dirty="0"/>
-          </a:p>
-        </p:txBody>
-      </p:sp>
-      <p:sp>
-        <p:nvSpPr>
-          <p:cNvPr id="17" name="Text 15"/>
-          <p:cNvSpPr txBox="1"/>
-          <p:nvPr/>
-        </p:nvSpPr>
-        <p:spPr>
-          <a:xfrm>
-            <a:off x="6172200" y="2816352"/>
-            <a:ext cx="2103120" cy="365760"/>
+              <a:t>信託銀行</a:t>
+            </a:r>
+            <a:endParaRPr lang="en-US" sz="1550" dirty="0"/>
+          </a:p>
+        </p:txBody>
+      </p:sp>
+      <p:sp>
+        <p:nvSpPr>
+          <p:cNvPr id="15" name="Text 12"/>
+          <p:cNvSpPr txBox="1"/>
+          <p:nvPr/>
+        </p:nvSpPr>
+        <p:spPr>
+          <a:xfrm>
+            <a:off x="5148072" y="2816352"/>
+            <a:ext cx="1737360" cy="365760"/>
           </a:xfrm>
           <a:prstGeom prst="rect">
             <a:avLst/>
@@ -4786,7 +5500,7 @@
               <a:buNone/>
             </a:pPr>
             <a:r>
-              <a:rPr lang="en-US" sz="1100" dirty="0">
+              <a:rPr lang="en-US" sz="1050" dirty="0">
                 <a:solidFill>
                   <a:srgbClr val="E8E8E8"/>
                 </a:solidFill>
@@ -4794,22 +5508,22 @@
                 <a:ea typeface="游ゴシック" pitchFamily="34" charset="-122"/>
                 <a:cs typeface="游ゴシック" pitchFamily="34" charset="-120"/>
               </a:rPr>
-              <a:t>野村證券</a:t>
-            </a:r>
-            <a:endParaRPr lang="en-US" sz="1100" dirty="0"/>
-          </a:p>
-        </p:txBody>
-      </p:sp>
-      <p:sp>
-        <p:nvSpPr>
-          <p:cNvPr id="18" name="Text 16"/>
-          <p:cNvSpPr txBox="1"/>
-          <p:nvPr/>
-        </p:nvSpPr>
-        <p:spPr>
-          <a:xfrm>
-            <a:off x="8412480" y="2377440"/>
-            <a:ext cx="320040" cy="457200"/>
+              <a:t>三菱UFJ信託銀行</a:t>
+            </a:r>
+            <a:endParaRPr lang="en-US" sz="1050" dirty="0"/>
+          </a:p>
+        </p:txBody>
+      </p:sp>
+      <p:sp>
+        <p:nvSpPr>
+          <p:cNvPr id="16" name="Text 13"/>
+          <p:cNvSpPr txBox="1"/>
+          <p:nvPr/>
+        </p:nvSpPr>
+        <p:spPr>
+          <a:xfrm>
+            <a:off x="7022592" y="2377440"/>
+            <a:ext cx="256032" cy="457200"/>
           </a:xfrm>
           <a:prstGeom prst="rect">
             <a:avLst/>
@@ -4825,27 +5539,27 @@
               <a:buNone/>
             </a:pPr>
             <a:r>
-              <a:rPr lang="en-US" sz="1800" dirty="0">
+              <a:rPr lang="en-US" sz="1600" dirty="0">
                 <a:solidFill>
                   <a:srgbClr val="1E3A5F"/>
                 </a:solidFill>
               </a:rPr>
               <a:t>→</a:t>
             </a:r>
-            <a:endParaRPr lang="en-US" sz="1800" dirty="0"/>
-          </a:p>
-        </p:txBody>
-      </p:sp>
-      <p:sp>
-        <p:nvSpPr>
-          <p:cNvPr id="19" name="Shape 17"/>
+            <a:endParaRPr lang="en-US" sz="1600" dirty="0"/>
+          </a:p>
+        </p:txBody>
+      </p:sp>
+      <p:sp>
+        <p:nvSpPr>
+          <p:cNvPr id="17" name="Shape 14"/>
           <p:cNvSpPr/>
           <p:nvPr/>
         </p:nvSpPr>
         <p:spPr>
           <a:xfrm>
-            <a:off x="8732520" y="1920240"/>
-            <a:ext cx="2377440" cy="1371600"/>
+            <a:off x="7278624" y="1920240"/>
+            <a:ext cx="2011680" cy="1371600"/>
           </a:xfrm>
           <a:prstGeom prst="roundRect">
             <a:avLst>
@@ -4853,7 +5567,7 @@
             </a:avLst>
           </a:prstGeom>
           <a:solidFill>
-            <a:srgbClr val="C9603F"/>
+            <a:srgbClr val="1E3A5F"/>
           </a:solidFill>
           <a:ln/>
           <a:effectLst>
@@ -4867,14 +5581,14 @@
       </p:sp>
       <p:sp>
         <p:nvSpPr>
-          <p:cNvPr id="20" name="Text 18"/>
-          <p:cNvSpPr txBox="1"/>
-          <p:nvPr/>
-        </p:nvSpPr>
-        <p:spPr>
-          <a:xfrm>
-            <a:off x="8869680" y="2057400"/>
-            <a:ext cx="2103120" cy="274320"/>
+          <p:cNvPr id="18" name="Text 15"/>
+          <p:cNvSpPr txBox="1"/>
+          <p:nvPr/>
+        </p:nvSpPr>
+        <p:spPr>
+          <a:xfrm>
+            <a:off x="7415784" y="2057400"/>
+            <a:ext cx="1737360" cy="274320"/>
           </a:xfrm>
           <a:prstGeom prst="rect">
             <a:avLst/>
@@ -4890,7 +5604,7 @@
               <a:buNone/>
             </a:pPr>
             <a:r>
-              <a:rPr lang="en-US" sz="1100" b="1" dirty="0">
+              <a:rPr lang="en-US" sz="1050" b="1" dirty="0">
                 <a:solidFill>
                   <a:srgbClr val="F1DCCF"/>
                 </a:solidFill>
@@ -4898,22 +5612,22 @@
                 <a:ea typeface="游ゴシック" pitchFamily="34" charset="-122"/>
                 <a:cs typeface="游ゴシック" pitchFamily="34" charset="-120"/>
               </a:rPr>
-              <a:t>PART 4</a:t>
-            </a:r>
-            <a:endParaRPr lang="en-US" sz="1100" dirty="0"/>
-          </a:p>
-        </p:txBody>
-      </p:sp>
-      <p:sp>
-        <p:nvSpPr>
-          <p:cNvPr id="21" name="Text 19"/>
-          <p:cNvSpPr txBox="1"/>
-          <p:nvPr/>
-        </p:nvSpPr>
-        <p:spPr>
-          <a:xfrm>
-            <a:off x="8869680" y="2331720"/>
-            <a:ext cx="2103120" cy="457200"/>
+              <a:t>PART 3</a:t>
+            </a:r>
+            <a:endParaRPr lang="en-US" sz="1050" dirty="0"/>
+          </a:p>
+        </p:txBody>
+      </p:sp>
+      <p:sp>
+        <p:nvSpPr>
+          <p:cNvPr id="19" name="Text 16"/>
+          <p:cNvSpPr txBox="1"/>
+          <p:nvPr/>
+        </p:nvSpPr>
+        <p:spPr>
+          <a:xfrm>
+            <a:off x="7415784" y="2331720"/>
+            <a:ext cx="1737360" cy="457200"/>
           </a:xfrm>
           <a:prstGeom prst="rect">
             <a:avLst/>
@@ -4929,7 +5643,7 @@
               <a:buNone/>
             </a:pPr>
             <a:r>
-              <a:rPr lang="en-US" sz="1700" b="1" dirty="0">
+              <a:rPr lang="en-US" sz="1550" b="1" dirty="0">
                 <a:solidFill>
                   <a:srgbClr val="FFFFFF"/>
                 </a:solidFill>
@@ -4937,22 +5651,22 @@
                 <a:ea typeface="游ゴシック" pitchFamily="34" charset="-122"/>
                 <a:cs typeface="游ゴシック" pitchFamily="34" charset="-120"/>
               </a:rPr>
-              <a:t>外資系保険会社</a:t>
-            </a:r>
-            <a:endParaRPr lang="en-US" sz="1700" dirty="0"/>
-          </a:p>
-        </p:txBody>
-      </p:sp>
-      <p:sp>
-        <p:nvSpPr>
-          <p:cNvPr id="22" name="Text 20"/>
-          <p:cNvSpPr txBox="1"/>
-          <p:nvPr/>
-        </p:nvSpPr>
-        <p:spPr>
-          <a:xfrm>
-            <a:off x="8869680" y="2816352"/>
-            <a:ext cx="2103120" cy="365760"/>
+              <a:t>証券会社</a:t>
+            </a:r>
+            <a:endParaRPr lang="en-US" sz="1550" dirty="0"/>
+          </a:p>
+        </p:txBody>
+      </p:sp>
+      <p:sp>
+        <p:nvSpPr>
+          <p:cNvPr id="20" name="Text 17"/>
+          <p:cNvSpPr txBox="1"/>
+          <p:nvPr/>
+        </p:nvSpPr>
+        <p:spPr>
+          <a:xfrm>
+            <a:off x="7415784" y="2816352"/>
+            <a:ext cx="1737360" cy="365760"/>
           </a:xfrm>
           <a:prstGeom prst="rect">
             <a:avLst/>
@@ -4968,7 +5682,7 @@
               <a:buNone/>
             </a:pPr>
             <a:r>
-              <a:rPr lang="en-US" sz="1100" dirty="0">
+              <a:rPr lang="en-US" sz="1050" dirty="0">
                 <a:solidFill>
                   <a:srgbClr val="E8E8E8"/>
                 </a:solidFill>
@@ -4976,30 +5690,66 @@
                 <a:ea typeface="游ゴシック" pitchFamily="34" charset="-122"/>
                 <a:cs typeface="游ゴシック" pitchFamily="34" charset="-120"/>
               </a:rPr>
-              <a:t>メットライフ生命</a:t>
-            </a:r>
-            <a:endParaRPr lang="en-US" sz="1100" dirty="0"/>
-          </a:p>
-        </p:txBody>
-      </p:sp>
-      <p:sp>
-        <p:nvSpPr>
-          <p:cNvPr id="23" name="Shape 21"/>
+              <a:t>野村證券</a:t>
+            </a:r>
+            <a:endParaRPr lang="en-US" sz="1050" dirty="0"/>
+          </a:p>
+        </p:txBody>
+      </p:sp>
+      <p:sp>
+        <p:nvSpPr>
+          <p:cNvPr id="21" name="Text 18"/>
+          <p:cNvSpPr txBox="1"/>
+          <p:nvPr/>
+        </p:nvSpPr>
+        <p:spPr>
+          <a:xfrm>
+            <a:off x="9290304" y="2377440"/>
+            <a:ext cx="256032" cy="457200"/>
+          </a:xfrm>
+          <a:prstGeom prst="rect">
+            <a:avLst/>
+          </a:prstGeom>
+          <a:noFill/>
+          <a:ln/>
+        </p:spPr>
+        <p:txBody>
+          <a:bodyPr wrap="square" lIns="0" tIns="0" rIns="0" bIns="0" rtlCol="0" anchor="ctr"/>
+          <a:lstStyle/>
+          <a:p>
+            <a:pPr algn="ctr" indent="0" marL="0">
+              <a:buNone/>
+            </a:pPr>
+            <a:r>
+              <a:rPr lang="en-US" sz="1600" dirty="0">
+                <a:solidFill>
+                  <a:srgbClr val="1E3A5F"/>
+                </a:solidFill>
+              </a:rPr>
+              <a:t>→</a:t>
+            </a:r>
+            <a:endParaRPr lang="en-US" sz="1600" dirty="0"/>
+          </a:p>
+        </p:txBody>
+      </p:sp>
+      <p:sp>
+        <p:nvSpPr>
+          <p:cNvPr id="22" name="Shape 19"/>
           <p:cNvSpPr/>
           <p:nvPr/>
         </p:nvSpPr>
         <p:spPr>
           <a:xfrm>
-            <a:off x="640080" y="3749040"/>
-            <a:ext cx="10881360" cy="1645920"/>
+            <a:off x="9546336" y="1920240"/>
+            <a:ext cx="2011680" cy="1371600"/>
           </a:xfrm>
           <a:prstGeom prst="roundRect">
             <a:avLst>
-              <a:gd name="adj" fmla="val 5556"/>
+              <a:gd name="adj" fmla="val 5333"/>
             </a:avLst>
           </a:prstGeom>
           <a:solidFill>
-            <a:srgbClr val="F6F1EA"/>
+            <a:srgbClr val="C9603F"/>
           </a:solidFill>
           <a:ln/>
           <a:effectLst>
@@ -5013,13 +5763,159 @@
       </p:sp>
       <p:sp>
         <p:nvSpPr>
-          <p:cNvPr id="24" name="Text 22"/>
-          <p:cNvSpPr txBox="1"/>
-          <p:nvPr/>
-        </p:nvSpPr>
-        <p:spPr>
-          <a:xfrm>
-            <a:off x="1005840" y="3977640"/>
+          <p:cNvPr id="23" name="Text 20"/>
+          <p:cNvSpPr txBox="1"/>
+          <p:nvPr/>
+        </p:nvSpPr>
+        <p:spPr>
+          <a:xfrm>
+            <a:off x="9683496" y="2057400"/>
+            <a:ext cx="1737360" cy="274320"/>
+          </a:xfrm>
+          <a:prstGeom prst="rect">
+            <a:avLst/>
+          </a:prstGeom>
+          <a:noFill/>
+          <a:ln/>
+        </p:spPr>
+        <p:txBody>
+          <a:bodyPr wrap="square" lIns="0" tIns="0" rIns="0" bIns="0" rtlCol="0" anchor="ctr"/>
+          <a:lstStyle/>
+          <a:p>
+            <a:pPr indent="0" marL="0">
+              <a:buNone/>
+            </a:pPr>
+            <a:r>
+              <a:rPr lang="en-US" sz="1050" b="1" dirty="0">
+                <a:solidFill>
+                  <a:srgbClr val="F1DCCF"/>
+                </a:solidFill>
+                <a:latin typeface="游ゴシック" pitchFamily="34" charset="0"/>
+                <a:ea typeface="游ゴシック" pitchFamily="34" charset="-122"/>
+                <a:cs typeface="游ゴシック" pitchFamily="34" charset="-120"/>
+              </a:rPr>
+              <a:t>PART 4</a:t>
+            </a:r>
+            <a:endParaRPr lang="en-US" sz="1050" dirty="0"/>
+          </a:p>
+        </p:txBody>
+      </p:sp>
+      <p:sp>
+        <p:nvSpPr>
+          <p:cNvPr id="24" name="Text 21"/>
+          <p:cNvSpPr txBox="1"/>
+          <p:nvPr/>
+        </p:nvSpPr>
+        <p:spPr>
+          <a:xfrm>
+            <a:off x="9683496" y="2331720"/>
+            <a:ext cx="1737360" cy="457200"/>
+          </a:xfrm>
+          <a:prstGeom prst="rect">
+            <a:avLst/>
+          </a:prstGeom>
+          <a:noFill/>
+          <a:ln/>
+        </p:spPr>
+        <p:txBody>
+          <a:bodyPr wrap="square" lIns="0" tIns="0" rIns="0" bIns="0" rtlCol="0" anchor="ctr"/>
+          <a:lstStyle/>
+          <a:p>
+            <a:pPr indent="0" marL="0">
+              <a:buNone/>
+            </a:pPr>
+            <a:r>
+              <a:rPr lang="en-US" sz="1550" b="1" dirty="0">
+                <a:solidFill>
+                  <a:srgbClr val="FFFFFF"/>
+                </a:solidFill>
+                <a:latin typeface="游ゴシック" pitchFamily="34" charset="0"/>
+                <a:ea typeface="游ゴシック" pitchFamily="34" charset="-122"/>
+                <a:cs typeface="游ゴシック" pitchFamily="34" charset="-120"/>
+              </a:rPr>
+              <a:t>外資系保険会社</a:t>
+            </a:r>
+            <a:endParaRPr lang="en-US" sz="1550" dirty="0"/>
+          </a:p>
+        </p:txBody>
+      </p:sp>
+      <p:sp>
+        <p:nvSpPr>
+          <p:cNvPr id="25" name="Text 22"/>
+          <p:cNvSpPr txBox="1"/>
+          <p:nvPr/>
+        </p:nvSpPr>
+        <p:spPr>
+          <a:xfrm>
+            <a:off x="9683496" y="2816352"/>
+            <a:ext cx="1737360" cy="365760"/>
+          </a:xfrm>
+          <a:prstGeom prst="rect">
+            <a:avLst/>
+          </a:prstGeom>
+          <a:noFill/>
+          <a:ln/>
+        </p:spPr>
+        <p:txBody>
+          <a:bodyPr wrap="square" lIns="0" tIns="0" rIns="0" bIns="0" rtlCol="0" anchor="ctr"/>
+          <a:lstStyle/>
+          <a:p>
+            <a:pPr indent="0" marL="0">
+              <a:buNone/>
+            </a:pPr>
+            <a:r>
+              <a:rPr lang="en-US" sz="1050" dirty="0">
+                <a:solidFill>
+                  <a:srgbClr val="E8E8E8"/>
+                </a:solidFill>
+                <a:latin typeface="游ゴシック" pitchFamily="34" charset="0"/>
+                <a:ea typeface="游ゴシック" pitchFamily="34" charset="-122"/>
+                <a:cs typeface="游ゴシック" pitchFamily="34" charset="-120"/>
+              </a:rPr>
+              <a:t>メットライフ生命</a:t>
+            </a:r>
+            <a:endParaRPr lang="en-US" sz="1050" dirty="0"/>
+          </a:p>
+        </p:txBody>
+      </p:sp>
+      <p:sp>
+        <p:nvSpPr>
+          <p:cNvPr id="26" name="Shape 23"/>
+          <p:cNvSpPr/>
+          <p:nvPr/>
+        </p:nvSpPr>
+        <p:spPr>
+          <a:xfrm>
+            <a:off x="640080" y="3931920"/>
+            <a:ext cx="10881360" cy="1691640"/>
+          </a:xfrm>
+          <a:prstGeom prst="roundRect">
+            <a:avLst>
+              <a:gd name="adj" fmla="val 5405"/>
+            </a:avLst>
+          </a:prstGeom>
+          <a:solidFill>
+            <a:srgbClr val="F6F1EA"/>
+          </a:solidFill>
+          <a:ln/>
+          <a:effectLst>
+            <a:outerShdw sx="100000" sy="100000" kx="0" ky="0" algn="bl" rotWithShape="0" blurRad="101600" dist="38100" dir="5400000">
+              <a:srgbClr val="10233A">
+                <a:alpha val="18000"/>
+              </a:srgbClr>
+            </a:outerShdw>
+          </a:effectLst>
+        </p:spPr>
+      </p:sp>
+      <p:sp>
+        <p:nvSpPr>
+          <p:cNvPr id="27" name="Text 24"/>
+          <p:cNvSpPr txBox="1"/>
+          <p:nvPr/>
+        </p:nvSpPr>
+        <p:spPr>
+          <a:xfrm>
+            <a:off x="1005840" y="4160520"/>
             <a:ext cx="10149840" cy="548640"/>
           </a:xfrm>
           <a:prstGeom prst="rect">
@@ -5052,13 +5948,13 @@
       </p:sp>
       <p:sp>
         <p:nvSpPr>
-          <p:cNvPr id="25" name="Text 23"/>
-          <p:cNvSpPr txBox="1"/>
-          <p:nvPr/>
-        </p:nvSpPr>
-        <p:spPr>
-          <a:xfrm>
-            <a:off x="1005840" y="4526280"/>
+          <p:cNvPr id="28" name="Text 25"/>
+          <p:cNvSpPr txBox="1"/>
+          <p:nvPr/>
+        </p:nvSpPr>
+        <p:spPr>
+          <a:xfrm>
+            <a:off x="1005840" y="4709160"/>
             <a:ext cx="10149840" cy="731520"/>
           </a:xfrm>
           <a:prstGeom prst="rect">
@@ -5114,7 +6010,7 @@
       </p:sp>
       <p:sp>
         <p:nvSpPr>
-          <p:cNvPr id="26" name="Text 24"/>
+          <p:cNvPr id="29" name="Text 26"/>
           <p:cNvSpPr txBox="1"/>
           <p:nvPr/>
         </p:nvSpPr>

--- a/manuscript/革新ビジネスアワード2026_プレゼン資料.pptx
+++ b/manuscript/革新ビジネスアワード2026_プレゼン資料.pptx
@@ -18,9 +18,10 @@
     <p:sldId id="266" r:id="rId12"/>
     <p:sldId id="267" r:id="rId13"/>
     <p:sldId id="268" r:id="rId14"/>
+    <p:sldId id="269" r:id="rId15"/>
   </p:sldIdLst>
   <p:notesMasterIdLst>
-    <p:notesMasterId r:id="rId15"/>
+    <p:notesMasterId r:id="rId16"/>
   </p:notesMasterIdLst>
   <p:sldSz cx="12191695" cy="6858000"/>
   <p:notesSz cx="6858000" cy="12191695"/>
@@ -890,6 +891,94 @@
             <a:fld id="{F7021451-1387-4CA6-816F-3879F97B5CBC}" type="slidenum">
               <a:rPr lang="en-US"/>
               <a:t>13</a:t>
+            </a:fld>
+            <a:endParaRPr lang="en-US"/>
+          </a:p>
+        </p:txBody>
+      </p:sp>
+    </p:spTree>
+    <p:extLst>
+      <p:ext uri="{BB962C8B-B14F-4D97-AF65-F5344CB8AC3E}">
+        <p14:creationId xmlns:p14="http://schemas.microsoft.com/office/powerpoint/2010/main" val="1024086991"/>
+      </p:ext>
+    </p:extLst>
+  </p:cSld>
+  <p:clrMapOvr>
+    <a:masterClrMapping/>
+  </p:clrMapOvr>
+</p:notes>
+</file>
+
+<file path=ppt/notesSlides/notesSlide14.xml><?xml version="1.0" encoding="utf-8"?>
+<p:notes xmlns:a="http://schemas.openxmlformats.org/drawingml/2006/main" xmlns:r="http://schemas.openxmlformats.org/officeDocument/2006/relationships" xmlns:p="http://schemas.openxmlformats.org/presentationml/2006/main">
+  <p:cSld>
+    <p:spTree>
+      <p:nvGrpSpPr>
+        <p:cNvPr id="1" name=""/>
+        <p:cNvGrpSpPr/>
+        <p:nvPr/>
+      </p:nvGrpSpPr>
+      <p:grpSpPr>
+        <a:xfrm>
+          <a:off x="0" y="0"/>
+          <a:ext cx="0" cy="0"/>
+          <a:chOff x="0" y="0"/>
+          <a:chExt cx="0" cy="0"/>
+        </a:xfrm>
+      </p:grpSpPr>
+      <p:sp>
+        <p:nvSpPr>
+          <p:cNvPr id="2" name="Slide Image Placeholder 1"/>
+          <p:cNvSpPr>
+            <a:spLocks noGrp="1" noRot="1" noChangeAspect="1"/>
+          </p:cNvSpPr>
+          <p:nvPr>
+            <p:ph type="sldImg"/>
+          </p:nvPr>
+        </p:nvSpPr>
+        <p:spPr/>
+      </p:sp>
+      <p:sp>
+        <p:nvSpPr>
+          <p:cNvPr id="3" name="Notes Placeholder 2"/>
+          <p:cNvSpPr>
+            <a:spLocks noGrp="1"/>
+          </p:cNvSpPr>
+          <p:nvPr>
+            <p:ph type="body" idx="1"/>
+          </p:nvPr>
+        </p:nvSpPr>
+        <p:spPr/>
+        <p:txBody>
+          <a:bodyPr/>
+          <a:lstStyle/>
+          <a:p>
+            <a:r>
+              <a:rPr lang="en-US" dirty="0"/>
+              <a:t/>
+            </a:r>
+            <a:endParaRPr lang="en-US" dirty="0"/>
+          </a:p>
+        </p:txBody>
+      </p:sp>
+      <p:sp>
+        <p:nvSpPr>
+          <p:cNvPr id="4" name="Slide Number Placeholder 3"/>
+          <p:cNvSpPr>
+            <a:spLocks noGrp="1"/>
+          </p:cNvSpPr>
+          <p:nvPr>
+            <p:ph type="sldNum" sz="quarter" idx="10"/>
+          </p:nvPr>
+        </p:nvSpPr>
+        <p:spPr/>
+        <p:txBody>
+          <a:bodyPr/>
+          <a:lstStyle/>
+          <a:p>
+            <a:fld id="{F7021451-1387-4CA6-816F-3879F97B5CBC}" type="slidenum">
+              <a:rPr lang="en-US"/>
+              <a:t>14</a:t>
             </a:fld>
             <a:endParaRPr lang="en-US"/>
           </a:p>
@@ -2309,7 +2398,7 @@
                 <a:ea typeface="游ゴシック" pitchFamily="34" charset="-122"/>
                 <a:cs typeface="游ゴシック" pitchFamily="34" charset="-120"/>
               </a:rPr>
-              <a:t>WELL-BEING</a:t>
+              <a:t>BUSINESS SCALE</a:t>
             </a:r>
             <a:endParaRPr lang="en-US" sz="1300" dirty="0"/>
           </a:p>
@@ -2348,7 +2437,7 @@
                 <a:ea typeface="游ゴシック" pitchFamily="34" charset="-122"/>
                 <a:cs typeface="游ゴシック" pitchFamily="34" charset="-120"/>
               </a:rPr>
-              <a:t>終活・相続対策と幸福度 ― まだ語られていない関係</a:t>
+              <a:t>売上規模 ― 本体が独占しない「分散型モデル」</a:t>
             </a:r>
             <a:endParaRPr lang="en-US" sz="2800" dirty="0"/>
           </a:p>
@@ -2362,16 +2451,16 @@
         </p:nvSpPr>
         <p:spPr>
           <a:xfrm>
-            <a:off x="640080" y="1783080"/>
-            <a:ext cx="3502152" cy="2286000"/>
+            <a:off x="914400" y="1920240"/>
+            <a:ext cx="3291840" cy="2194560"/>
           </a:xfrm>
           <a:prstGeom prst="roundRect">
             <a:avLst>
-              <a:gd name="adj" fmla="val 4000"/>
+              <a:gd name="adj" fmla="val 4167"/>
             </a:avLst>
           </a:prstGeom>
           <a:solidFill>
-            <a:srgbClr val="F6F1EA"/>
+            <a:srgbClr val="1E3A5F"/>
           </a:solidFill>
           <a:ln/>
           <a:effectLst>
@@ -2385,182 +2474,153 @@
       </p:sp>
       <p:sp>
         <p:nvSpPr>
-          <p:cNvPr id="5" name="Shape 3"/>
+          <p:cNvPr id="5" name="Text 3"/>
+          <p:cNvSpPr txBox="1"/>
+          <p:nvPr/>
+        </p:nvSpPr>
+        <p:spPr>
+          <a:xfrm>
+            <a:off x="1097280" y="2240280"/>
+            <a:ext cx="2926080" cy="731520"/>
+          </a:xfrm>
+          <a:prstGeom prst="rect">
+            <a:avLst/>
+          </a:prstGeom>
+          <a:noFill/>
+          <a:ln/>
+        </p:spPr>
+        <p:txBody>
+          <a:bodyPr wrap="square" lIns="0" tIns="0" rIns="0" bIns="0" rtlCol="0" anchor="ctr"/>
+          <a:lstStyle/>
+          <a:p>
+            <a:pPr algn="ctr" indent="0" marL="0">
+              <a:buNone/>
+            </a:pPr>
+            <a:r>
+              <a:rPr lang="en-US" sz="2800" b="1" dirty="0">
+                <a:solidFill>
+                  <a:srgbClr val="FFFFFF"/>
+                </a:solidFill>
+                <a:latin typeface="游ゴシック" pitchFamily="34" charset="0"/>
+                <a:ea typeface="游ゴシック" pitchFamily="34" charset="-122"/>
+                <a:cs typeface="游ゴシック" pitchFamily="34" charset="-120"/>
+              </a:rPr>
+              <a:t>5,000万円</a:t>
+            </a:r>
+            <a:endParaRPr lang="en-US" sz="2800" dirty="0"/>
+          </a:p>
+        </p:txBody>
+      </p:sp>
+      <p:sp>
+        <p:nvSpPr>
+          <p:cNvPr id="6" name="Text 4"/>
+          <p:cNvSpPr txBox="1"/>
+          <p:nvPr/>
+        </p:nvSpPr>
+        <p:spPr>
+          <a:xfrm>
+            <a:off x="1097280" y="3108960"/>
+            <a:ext cx="2926080" cy="822960"/>
+          </a:xfrm>
+          <a:prstGeom prst="rect">
+            <a:avLst/>
+          </a:prstGeom>
+          <a:noFill/>
+          <a:ln/>
+        </p:spPr>
+        <p:txBody>
+          <a:bodyPr wrap="square" lIns="0" tIns="0" rIns="0" bIns="0" rtlCol="0" anchor="t"/>
+          <a:lstStyle/>
+          <a:p>
+            <a:pPr algn="ctr" indent="0" marL="0">
+              <a:buNone/>
+            </a:pPr>
+            <a:r>
+              <a:rPr lang="en-US" sz="1250" dirty="0">
+                <a:solidFill>
+                  <a:srgbClr val="E6EAF0"/>
+                </a:solidFill>
+                <a:latin typeface="游ゴシック" pitchFamily="34" charset="0"/>
+                <a:ea typeface="游ゴシック" pitchFamily="34" charset="-122"/>
+                <a:cs typeface="游ゴシック" pitchFamily="34" charset="-120"/>
+              </a:rPr>
+              <a:t>単体</a:t>
+            </a:r>
+            <a:endParaRPr lang="en-US" sz="1250" dirty="0"/>
+          </a:p>
+          <a:p>
+            <a:pPr algn="ctr" indent="0" marL="0">
+              <a:buNone/>
+            </a:pPr>
+            <a:r>
+              <a:rPr lang="en-US" sz="1250" dirty="0">
+                <a:solidFill>
+                  <a:srgbClr val="E6EAF0"/>
+                </a:solidFill>
+                <a:latin typeface="游ゴシック" pitchFamily="34" charset="0"/>
+                <a:ea typeface="游ゴシック" pitchFamily="34" charset="-122"/>
+                <a:cs typeface="游ゴシック" pitchFamily="34" charset="-120"/>
+              </a:rPr>
+              <a:t>（株式会社繋ぐコンサルタントオフィス）</a:t>
+            </a:r>
+            <a:endParaRPr lang="en-US" sz="1250" dirty="0"/>
+          </a:p>
+        </p:txBody>
+      </p:sp>
+      <p:sp>
+        <p:nvSpPr>
+          <p:cNvPr id="7" name="Text 5"/>
+          <p:cNvSpPr txBox="1"/>
+          <p:nvPr/>
+        </p:nvSpPr>
+        <p:spPr>
+          <a:xfrm>
+            <a:off x="4206240" y="2743200"/>
+            <a:ext cx="548640" cy="548640"/>
+          </a:xfrm>
+          <a:prstGeom prst="rect">
+            <a:avLst/>
+          </a:prstGeom>
+          <a:noFill/>
+          <a:ln/>
+        </p:spPr>
+        <p:txBody>
+          <a:bodyPr wrap="square" lIns="0" tIns="0" rIns="0" bIns="0" rtlCol="0" anchor="ctr"/>
+          <a:lstStyle/>
+          <a:p>
+            <a:pPr algn="ctr" indent="0" marL="0">
+              <a:buNone/>
+            </a:pPr>
+            <a:r>
+              <a:rPr lang="en-US" sz="2200" dirty="0">
+                <a:solidFill>
+                  <a:srgbClr val="1E3A5F"/>
+                </a:solidFill>
+              </a:rPr>
+              <a:t>→</a:t>
+            </a:r>
+            <a:endParaRPr lang="en-US" sz="2200" dirty="0"/>
+          </a:p>
+        </p:txBody>
+      </p:sp>
+      <p:sp>
+        <p:nvSpPr>
+          <p:cNvPr id="8" name="Shape 6"/>
           <p:cNvSpPr/>
           <p:nvPr/>
         </p:nvSpPr>
         <p:spPr>
           <a:xfrm>
-            <a:off x="822960" y="1965960"/>
-            <a:ext cx="548640" cy="548640"/>
-          </a:xfrm>
-          <a:prstGeom prst="ellipse">
-            <a:avLst/>
+            <a:off x="4754880" y="1920240"/>
+            <a:ext cx="3291840" cy="2194560"/>
+          </a:xfrm>
+          <a:prstGeom prst="roundRect">
+            <a:avLst>
+              <a:gd name="adj" fmla="val 4167"/>
+            </a:avLst>
           </a:prstGeom>
           <a:solidFill>
             <a:srgbClr val="C9603F"/>
-          </a:solidFill>
-          <a:ln/>
-        </p:spPr>
-      </p:sp>
-      <p:sp>
-        <p:nvSpPr>
-          <p:cNvPr id="6" name="Text 4"/>
-          <p:cNvSpPr txBox="1"/>
-          <p:nvPr/>
-        </p:nvSpPr>
-        <p:spPr>
-          <a:xfrm>
-            <a:off x="548640" y="1965960"/>
-            <a:ext cx="1097280" cy="548640"/>
-          </a:xfrm>
-          <a:prstGeom prst="rect">
-            <a:avLst/>
-          </a:prstGeom>
-          <a:noFill/>
-          <a:ln/>
-        </p:spPr>
-        <p:txBody>
-          <a:bodyPr wrap="square" lIns="0" tIns="0" rIns="0" bIns="0" rtlCol="0" anchor="ctr"/>
-          <a:lstStyle/>
-          <a:p>
-            <a:pPr algn="ctr" indent="0" marL="0">
-              <a:buNone/>
-            </a:pPr>
-            <a:r>
-              <a:rPr lang="en-US" sz="1600" b="1" dirty="0">
-                <a:solidFill>
-                  <a:srgbClr val="FFFFFF"/>
-                </a:solidFill>
-                <a:latin typeface="游ゴシック" pitchFamily="34" charset="0"/>
-                <a:ea typeface="游ゴシック" pitchFamily="34" charset="-122"/>
-                <a:cs typeface="游ゴシック" pitchFamily="34" charset="-120"/>
-              </a:rPr>
-              <a:t>①</a:t>
-            </a:r>
-            <a:endParaRPr lang="en-US" sz="1600" dirty="0"/>
-          </a:p>
-        </p:txBody>
-      </p:sp>
-      <p:sp>
-        <p:nvSpPr>
-          <p:cNvPr id="7" name="Text 5"/>
-          <p:cNvSpPr txBox="1"/>
-          <p:nvPr/>
-        </p:nvSpPr>
-        <p:spPr>
-          <a:xfrm>
-            <a:off x="822960" y="2651760"/>
-            <a:ext cx="3136392" cy="365760"/>
-          </a:xfrm>
-          <a:prstGeom prst="rect">
-            <a:avLst/>
-          </a:prstGeom>
-          <a:noFill/>
-          <a:ln/>
-        </p:spPr>
-        <p:txBody>
-          <a:bodyPr wrap="square" lIns="0" tIns="0" rIns="0" bIns="0" rtlCol="0" anchor="ctr"/>
-          <a:lstStyle/>
-          <a:p>
-            <a:pPr indent="0" marL="0">
-              <a:buNone/>
-            </a:pPr>
-            <a:r>
-              <a:rPr lang="en-US" sz="1450" b="1" dirty="0">
-                <a:solidFill>
-                  <a:srgbClr val="1E3A5F"/>
-                </a:solidFill>
-                <a:latin typeface="游ゴシック" pitchFamily="34" charset="0"/>
-                <a:ea typeface="游ゴシック" pitchFamily="34" charset="-122"/>
-                <a:cs typeface="游ゴシック" pitchFamily="34" charset="-120"/>
-              </a:rPr>
-              <a:t>国内民間調査</a:t>
-            </a:r>
-            <a:endParaRPr lang="en-US" sz="1450" dirty="0"/>
-          </a:p>
-        </p:txBody>
-      </p:sp>
-      <p:sp>
-        <p:nvSpPr>
-          <p:cNvPr id="8" name="Text 6"/>
-          <p:cNvSpPr txBox="1"/>
-          <p:nvPr/>
-        </p:nvSpPr>
-        <p:spPr>
-          <a:xfrm>
-            <a:off x="822960" y="3017520"/>
-            <a:ext cx="3136392" cy="914400"/>
-          </a:xfrm>
-          <a:prstGeom prst="rect">
-            <a:avLst/>
-          </a:prstGeom>
-          <a:noFill/>
-          <a:ln/>
-        </p:spPr>
-        <p:txBody>
-          <a:bodyPr wrap="square" lIns="0" tIns="0" rIns="0" bIns="0" rtlCol="0" anchor="t"/>
-          <a:lstStyle/>
-          <a:p>
-            <a:pPr indent="0" marL="0">
-              <a:lnSpc>
-                <a:spcPct val="120000"/>
-              </a:lnSpc>
-              <a:buNone/>
-            </a:pPr>
-            <a:r>
-              <a:rPr lang="en-US" sz="1100" dirty="0">
-                <a:solidFill>
-                  <a:srgbClr val="3A3A3A"/>
-                </a:solidFill>
-                <a:latin typeface="游ゴシック" pitchFamily="34" charset="0"/>
-                <a:ea typeface="游ゴシック" pitchFamily="34" charset="-122"/>
-                <a:cs typeface="游ゴシック" pitchFamily="34" charset="-120"/>
-              </a:rPr>
-              <a:t>終活をすでに始めている人（44.0%）は、幸福度・生活満足度が高い傾向</a:t>
-            </a:r>
-            <a:endParaRPr lang="en-US" sz="1100" dirty="0"/>
-          </a:p>
-          <a:p>
-            <a:pPr indent="0" marL="0">
-              <a:lnSpc>
-                <a:spcPct val="120000"/>
-              </a:lnSpc>
-              <a:buNone/>
-            </a:pPr>
-            <a:r>
-              <a:rPr lang="en-US" sz="1100" dirty="0">
-                <a:solidFill>
-                  <a:srgbClr val="3A3A3A"/>
-                </a:solidFill>
-                <a:latin typeface="游ゴシック" pitchFamily="34" charset="0"/>
-                <a:ea typeface="游ゴシック" pitchFamily="34" charset="-122"/>
-                <a:cs typeface="游ゴシック" pitchFamily="34" charset="-120"/>
-              </a:rPr>
-              <a:t>（ハルメク生きかた上手研究所調べ）</a:t>
-            </a:r>
-            <a:endParaRPr lang="en-US" sz="1100" dirty="0"/>
-          </a:p>
-        </p:txBody>
-      </p:sp>
-      <p:sp>
-        <p:nvSpPr>
-          <p:cNvPr id="9" name="Shape 7"/>
-          <p:cNvSpPr/>
-          <p:nvPr/>
-        </p:nvSpPr>
-        <p:spPr>
-          <a:xfrm>
-            <a:off x="4325112" y="1783080"/>
-            <a:ext cx="3502152" cy="2286000"/>
-          </a:xfrm>
-          <a:prstGeom prst="roundRect">
-            <a:avLst>
-              <a:gd name="adj" fmla="val 4000"/>
-            </a:avLst>
-          </a:prstGeom>
-          <a:solidFill>
-            <a:srgbClr val="F6F1EA"/>
           </a:solidFill>
           <a:ln/>
           <a:effectLst>
@@ -2574,182 +2634,153 @@
       </p:sp>
       <p:sp>
         <p:nvSpPr>
-          <p:cNvPr id="10" name="Shape 8"/>
+          <p:cNvPr id="9" name="Text 7"/>
+          <p:cNvSpPr txBox="1"/>
+          <p:nvPr/>
+        </p:nvSpPr>
+        <p:spPr>
+          <a:xfrm>
+            <a:off x="4937760" y="2240280"/>
+            <a:ext cx="2926080" cy="731520"/>
+          </a:xfrm>
+          <a:prstGeom prst="rect">
+            <a:avLst/>
+          </a:prstGeom>
+          <a:noFill/>
+          <a:ln/>
+        </p:spPr>
+        <p:txBody>
+          <a:bodyPr wrap="square" lIns="0" tIns="0" rIns="0" bIns="0" rtlCol="0" anchor="ctr"/>
+          <a:lstStyle/>
+          <a:p>
+            <a:pPr algn="ctr" indent="0" marL="0">
+              <a:buNone/>
+            </a:pPr>
+            <a:r>
+              <a:rPr lang="en-US" sz="2800" b="1" dirty="0">
+                <a:solidFill>
+                  <a:srgbClr val="FFFFFF"/>
+                </a:solidFill>
+                <a:latin typeface="游ゴシック" pitchFamily="34" charset="0"/>
+                <a:ea typeface="游ゴシック" pitchFamily="34" charset="-122"/>
+                <a:cs typeface="游ゴシック" pitchFamily="34" charset="-120"/>
+              </a:rPr>
+              <a:t>2億円規模</a:t>
+            </a:r>
+            <a:endParaRPr lang="en-US" sz="2800" dirty="0"/>
+          </a:p>
+        </p:txBody>
+      </p:sp>
+      <p:sp>
+        <p:nvSpPr>
+          <p:cNvPr id="10" name="Text 8"/>
+          <p:cNvSpPr txBox="1"/>
+          <p:nvPr/>
+        </p:nvSpPr>
+        <p:spPr>
+          <a:xfrm>
+            <a:off x="4937760" y="3108960"/>
+            <a:ext cx="2926080" cy="822960"/>
+          </a:xfrm>
+          <a:prstGeom prst="rect">
+            <a:avLst/>
+          </a:prstGeom>
+          <a:noFill/>
+          <a:ln/>
+        </p:spPr>
+        <p:txBody>
+          <a:bodyPr wrap="square" lIns="0" tIns="0" rIns="0" bIns="0" rtlCol="0" anchor="t"/>
+          <a:lstStyle/>
+          <a:p>
+            <a:pPr algn="ctr" indent="0" marL="0">
+              <a:buNone/>
+            </a:pPr>
+            <a:r>
+              <a:rPr lang="en-US" sz="1250" dirty="0">
+                <a:solidFill>
+                  <a:srgbClr val="E6EAF0"/>
+                </a:solidFill>
+                <a:latin typeface="游ゴシック" pitchFamily="34" charset="0"/>
+                <a:ea typeface="游ゴシック" pitchFamily="34" charset="-122"/>
+                <a:cs typeface="游ゴシック" pitchFamily="34" charset="-120"/>
+              </a:rPr>
+              <a:t>FC全体</a:t>
+            </a:r>
+            <a:endParaRPr lang="en-US" sz="1250" dirty="0"/>
+          </a:p>
+          <a:p>
+            <a:pPr algn="ctr" indent="0" marL="0">
+              <a:buNone/>
+            </a:pPr>
+            <a:r>
+              <a:rPr lang="en-US" sz="1250" dirty="0">
+                <a:solidFill>
+                  <a:srgbClr val="E6EAF0"/>
+                </a:solidFill>
+                <a:latin typeface="游ゴシック" pitchFamily="34" charset="0"/>
+                <a:ea typeface="游ゴシック" pitchFamily="34" charset="-122"/>
+                <a:cs typeface="游ゴシック" pitchFamily="34" charset="-120"/>
+              </a:rPr>
+              <a:t>（繋ぐ相続サロン® ネットワーク）</a:t>
+            </a:r>
+            <a:endParaRPr lang="en-US" sz="1250" dirty="0"/>
+          </a:p>
+        </p:txBody>
+      </p:sp>
+      <p:sp>
+        <p:nvSpPr>
+          <p:cNvPr id="11" name="Text 9"/>
+          <p:cNvSpPr txBox="1"/>
+          <p:nvPr/>
+        </p:nvSpPr>
+        <p:spPr>
+          <a:xfrm>
+            <a:off x="8046720" y="2743200"/>
+            <a:ext cx="548640" cy="548640"/>
+          </a:xfrm>
+          <a:prstGeom prst="rect">
+            <a:avLst/>
+          </a:prstGeom>
+          <a:noFill/>
+          <a:ln/>
+        </p:spPr>
+        <p:txBody>
+          <a:bodyPr wrap="square" lIns="0" tIns="0" rIns="0" bIns="0" rtlCol="0" anchor="ctr"/>
+          <a:lstStyle/>
+          <a:p>
+            <a:pPr algn="ctr" indent="0" marL="0">
+              <a:buNone/>
+            </a:pPr>
+            <a:r>
+              <a:rPr lang="en-US" sz="2200" dirty="0">
+                <a:solidFill>
+                  <a:srgbClr val="1E3A5F"/>
+                </a:solidFill>
+              </a:rPr>
+              <a:t>→</a:t>
+            </a:r>
+            <a:endParaRPr lang="en-US" sz="2200" dirty="0"/>
+          </a:p>
+        </p:txBody>
+      </p:sp>
+      <p:sp>
+        <p:nvSpPr>
+          <p:cNvPr id="12" name="Shape 10"/>
           <p:cNvSpPr/>
           <p:nvPr/>
         </p:nvSpPr>
         <p:spPr>
           <a:xfrm>
-            <a:off x="4507992" y="1965960"/>
-            <a:ext cx="548640" cy="548640"/>
-          </a:xfrm>
-          <a:prstGeom prst="ellipse">
-            <a:avLst/>
-          </a:prstGeom>
-          <a:solidFill>
-            <a:srgbClr val="C9603F"/>
-          </a:solidFill>
-          <a:ln/>
-        </p:spPr>
-      </p:sp>
-      <p:sp>
-        <p:nvSpPr>
-          <p:cNvPr id="11" name="Text 9"/>
-          <p:cNvSpPr txBox="1"/>
-          <p:nvPr/>
-        </p:nvSpPr>
-        <p:spPr>
-          <a:xfrm>
-            <a:off x="4233672" y="1965960"/>
-            <a:ext cx="1097280" cy="548640"/>
-          </a:xfrm>
-          <a:prstGeom prst="rect">
-            <a:avLst/>
-          </a:prstGeom>
-          <a:noFill/>
-          <a:ln/>
-        </p:spPr>
-        <p:txBody>
-          <a:bodyPr wrap="square" lIns="0" tIns="0" rIns="0" bIns="0" rtlCol="0" anchor="ctr"/>
-          <a:lstStyle/>
-          <a:p>
-            <a:pPr algn="ctr" indent="0" marL="0">
-              <a:buNone/>
-            </a:pPr>
-            <a:r>
-              <a:rPr lang="en-US" sz="1600" b="1" dirty="0">
-                <a:solidFill>
-                  <a:srgbClr val="FFFFFF"/>
-                </a:solidFill>
-                <a:latin typeface="游ゴシック" pitchFamily="34" charset="0"/>
-                <a:ea typeface="游ゴシック" pitchFamily="34" charset="-122"/>
-                <a:cs typeface="游ゴシック" pitchFamily="34" charset="-120"/>
-              </a:rPr>
-              <a:t>②</a:t>
-            </a:r>
-            <a:endParaRPr lang="en-US" sz="1600" dirty="0"/>
-          </a:p>
-        </p:txBody>
-      </p:sp>
-      <p:sp>
-        <p:nvSpPr>
-          <p:cNvPr id="12" name="Text 10"/>
-          <p:cNvSpPr txBox="1"/>
-          <p:nvPr/>
-        </p:nvSpPr>
-        <p:spPr>
-          <a:xfrm>
-            <a:off x="4507992" y="2651760"/>
-            <a:ext cx="3136392" cy="365760"/>
-          </a:xfrm>
-          <a:prstGeom prst="rect">
-            <a:avLst/>
-          </a:prstGeom>
-          <a:noFill/>
-          <a:ln/>
-        </p:spPr>
-        <p:txBody>
-          <a:bodyPr wrap="square" lIns="0" tIns="0" rIns="0" bIns="0" rtlCol="0" anchor="ctr"/>
-          <a:lstStyle/>
-          <a:p>
-            <a:pPr indent="0" marL="0">
-              <a:buNone/>
-            </a:pPr>
-            <a:r>
-              <a:rPr lang="en-US" sz="1450" b="1" dirty="0">
-                <a:solidFill>
-                  <a:srgbClr val="1E3A5F"/>
-                </a:solidFill>
-                <a:latin typeface="游ゴシック" pitchFamily="34" charset="0"/>
-                <a:ea typeface="游ゴシック" pitchFamily="34" charset="-122"/>
-                <a:cs typeface="游ゴシック" pitchFamily="34" charset="-120"/>
-              </a:rPr>
-              <a:t>国内公的調査</a:t>
-            </a:r>
-            <a:endParaRPr lang="en-US" sz="1450" dirty="0"/>
-          </a:p>
-        </p:txBody>
-      </p:sp>
-      <p:sp>
-        <p:nvSpPr>
-          <p:cNvPr id="13" name="Text 11"/>
-          <p:cNvSpPr txBox="1"/>
-          <p:nvPr/>
-        </p:nvSpPr>
-        <p:spPr>
-          <a:xfrm>
-            <a:off x="4507992" y="3017520"/>
-            <a:ext cx="3136392" cy="914400"/>
-          </a:xfrm>
-          <a:prstGeom prst="rect">
-            <a:avLst/>
-          </a:prstGeom>
-          <a:noFill/>
-          <a:ln/>
-        </p:spPr>
-        <p:txBody>
-          <a:bodyPr wrap="square" lIns="0" tIns="0" rIns="0" bIns="0" rtlCol="0" anchor="t"/>
-          <a:lstStyle/>
-          <a:p>
-            <a:pPr indent="0" marL="0">
-              <a:lnSpc>
-                <a:spcPct val="120000"/>
-              </a:lnSpc>
-              <a:buNone/>
-            </a:pPr>
-            <a:r>
-              <a:rPr lang="en-US" sz="1100" dirty="0">
-                <a:solidFill>
-                  <a:srgbClr val="3A3A3A"/>
-                </a:solidFill>
-                <a:latin typeface="游ゴシック" pitchFamily="34" charset="0"/>
-                <a:ea typeface="游ゴシック" pitchFamily="34" charset="-122"/>
-                <a:cs typeface="游ゴシック" pitchFamily="34" charset="-120"/>
-              </a:rPr>
-              <a:t>65歳以上の約6割が終活を実施。最多は「財産以外の所有物の整理」</a:t>
-            </a:r>
-            <a:endParaRPr lang="en-US" sz="1100" dirty="0"/>
-          </a:p>
-          <a:p>
-            <a:pPr indent="0" marL="0">
-              <a:lnSpc>
-                <a:spcPct val="120000"/>
-              </a:lnSpc>
-              <a:buNone/>
-            </a:pPr>
-            <a:r>
-              <a:rPr lang="en-US" sz="1100" dirty="0">
-                <a:solidFill>
-                  <a:srgbClr val="3A3A3A"/>
-                </a:solidFill>
-                <a:latin typeface="游ゴシック" pitchFamily="34" charset="0"/>
-                <a:ea typeface="游ゴシック" pitchFamily="34" charset="-122"/>
-                <a:cs typeface="游ゴシック" pitchFamily="34" charset="-120"/>
-              </a:rPr>
-              <a:t>（内閣府 令和6年度調査）</a:t>
-            </a:r>
-            <a:endParaRPr lang="en-US" sz="1100" dirty="0"/>
-          </a:p>
-        </p:txBody>
-      </p:sp>
-      <p:sp>
-        <p:nvSpPr>
-          <p:cNvPr id="14" name="Shape 12"/>
-          <p:cNvSpPr/>
-          <p:nvPr/>
-        </p:nvSpPr>
-        <p:spPr>
-          <a:xfrm>
-            <a:off x="8010144" y="1783080"/>
-            <a:ext cx="3502152" cy="2286000"/>
+            <a:off x="8595360" y="1920240"/>
+            <a:ext cx="3291840" cy="2194560"/>
           </a:xfrm>
           <a:prstGeom prst="roundRect">
             <a:avLst>
-              <a:gd name="adj" fmla="val 4000"/>
+              <a:gd name="adj" fmla="val 4167"/>
             </a:avLst>
           </a:prstGeom>
           <a:solidFill>
-            <a:srgbClr val="F6F1EA"/>
+            <a:srgbClr val="10233A"/>
           </a:solidFill>
           <a:ln/>
           <a:effectLst>
@@ -2763,182 +2794,117 @@
       </p:sp>
       <p:sp>
         <p:nvSpPr>
+          <p:cNvPr id="13" name="Text 11"/>
+          <p:cNvSpPr txBox="1"/>
+          <p:nvPr/>
+        </p:nvSpPr>
+        <p:spPr>
+          <a:xfrm>
+            <a:off x="8778240" y="2240280"/>
+            <a:ext cx="2926080" cy="731520"/>
+          </a:xfrm>
+          <a:prstGeom prst="rect">
+            <a:avLst/>
+          </a:prstGeom>
+          <a:noFill/>
+          <a:ln/>
+        </p:spPr>
+        <p:txBody>
+          <a:bodyPr wrap="square" lIns="0" tIns="0" rIns="0" bIns="0" rtlCol="0" anchor="ctr"/>
+          <a:lstStyle/>
+          <a:p>
+            <a:pPr algn="ctr" indent="0" marL="0">
+              <a:buNone/>
+            </a:pPr>
+            <a:r>
+              <a:rPr lang="en-US" sz="2800" b="1" dirty="0">
+                <a:solidFill>
+                  <a:srgbClr val="FFFFFF"/>
+                </a:solidFill>
+                <a:latin typeface="游ゴシック" pitchFamily="34" charset="0"/>
+                <a:ea typeface="游ゴシック" pitchFamily="34" charset="-122"/>
+                <a:cs typeface="游ゴシック" pitchFamily="34" charset="-120"/>
+              </a:rPr>
+              <a:t>3億円規模</a:t>
+            </a:r>
+            <a:endParaRPr lang="en-US" sz="2800" dirty="0"/>
+          </a:p>
+        </p:txBody>
+      </p:sp>
+      <p:sp>
+        <p:nvSpPr>
+          <p:cNvPr id="14" name="Text 12"/>
+          <p:cNvSpPr txBox="1"/>
+          <p:nvPr/>
+        </p:nvSpPr>
+        <p:spPr>
+          <a:xfrm>
+            <a:off x="8778240" y="3108960"/>
+            <a:ext cx="2926080" cy="822960"/>
+          </a:xfrm>
+          <a:prstGeom prst="rect">
+            <a:avLst/>
+          </a:prstGeom>
+          <a:noFill/>
+          <a:ln/>
+        </p:spPr>
+        <p:txBody>
+          <a:bodyPr wrap="square" lIns="0" tIns="0" rIns="0" bIns="0" rtlCol="0" anchor="t"/>
+          <a:lstStyle/>
+          <a:p>
+            <a:pPr algn="ctr" indent="0" marL="0">
+              <a:buNone/>
+            </a:pPr>
+            <a:r>
+              <a:rPr lang="en-US" sz="1250" dirty="0">
+                <a:solidFill>
+                  <a:srgbClr val="E6EAF0"/>
+                </a:solidFill>
+                <a:latin typeface="游ゴシック" pitchFamily="34" charset="0"/>
+                <a:ea typeface="游ゴシック" pitchFamily="34" charset="-122"/>
+                <a:cs typeface="游ゴシック" pitchFamily="34" charset="-120"/>
+              </a:rPr>
+              <a:t>繋ぐグループ全体</a:t>
+            </a:r>
+            <a:endParaRPr lang="en-US" sz="1250" dirty="0"/>
+          </a:p>
+          <a:p>
+            <a:pPr algn="ctr" indent="0" marL="0">
+              <a:buNone/>
+            </a:pPr>
+            <a:r>
+              <a:rPr lang="en-US" sz="1250" dirty="0">
+                <a:solidFill>
+                  <a:srgbClr val="E6EAF0"/>
+                </a:solidFill>
+                <a:latin typeface="游ゴシック" pitchFamily="34" charset="0"/>
+                <a:ea typeface="游ゴシック" pitchFamily="34" charset="-122"/>
+                <a:cs typeface="游ゴシック" pitchFamily="34" charset="-120"/>
+              </a:rPr>
+              <a:t>（繋ぐライクファミリーサポート等含む）</a:t>
+            </a:r>
+            <a:endParaRPr lang="en-US" sz="1250" dirty="0"/>
+          </a:p>
+        </p:txBody>
+      </p:sp>
+      <p:sp>
+        <p:nvSpPr>
           <p:cNvPr id="15" name="Shape 13"/>
           <p:cNvSpPr/>
           <p:nvPr/>
         </p:nvSpPr>
         <p:spPr>
           <a:xfrm>
-            <a:off x="8193024" y="1965960"/>
-            <a:ext cx="548640" cy="548640"/>
-          </a:xfrm>
-          <a:prstGeom prst="ellipse">
-            <a:avLst/>
-          </a:prstGeom>
-          <a:solidFill>
-            <a:srgbClr val="C9603F"/>
-          </a:solidFill>
-          <a:ln/>
-        </p:spPr>
-      </p:sp>
-      <p:sp>
-        <p:nvSpPr>
-          <p:cNvPr id="16" name="Text 14"/>
-          <p:cNvSpPr txBox="1"/>
-          <p:nvPr/>
-        </p:nvSpPr>
-        <p:spPr>
-          <a:xfrm>
-            <a:off x="7918704" y="1965960"/>
-            <a:ext cx="1097280" cy="548640"/>
-          </a:xfrm>
-          <a:prstGeom prst="rect">
-            <a:avLst/>
-          </a:prstGeom>
-          <a:noFill/>
-          <a:ln/>
-        </p:spPr>
-        <p:txBody>
-          <a:bodyPr wrap="square" lIns="0" tIns="0" rIns="0" bIns="0" rtlCol="0" anchor="ctr"/>
-          <a:lstStyle/>
-          <a:p>
-            <a:pPr algn="ctr" indent="0" marL="0">
-              <a:buNone/>
-            </a:pPr>
-            <a:r>
-              <a:rPr lang="en-US" sz="1600" b="1" dirty="0">
-                <a:solidFill>
-                  <a:srgbClr val="FFFFFF"/>
-                </a:solidFill>
-                <a:latin typeface="游ゴシック" pitchFamily="34" charset="0"/>
-                <a:ea typeface="游ゴシック" pitchFamily="34" charset="-122"/>
-                <a:cs typeface="游ゴシック" pitchFamily="34" charset="-120"/>
-              </a:rPr>
-              <a:t>③</a:t>
-            </a:r>
-            <a:endParaRPr lang="en-US" sz="1600" dirty="0"/>
-          </a:p>
-        </p:txBody>
-      </p:sp>
-      <p:sp>
-        <p:nvSpPr>
-          <p:cNvPr id="17" name="Text 15"/>
-          <p:cNvSpPr txBox="1"/>
-          <p:nvPr/>
-        </p:nvSpPr>
-        <p:spPr>
-          <a:xfrm>
-            <a:off x="8193024" y="2651760"/>
-            <a:ext cx="3136392" cy="365760"/>
-          </a:xfrm>
-          <a:prstGeom prst="rect">
-            <a:avLst/>
-          </a:prstGeom>
-          <a:noFill/>
-          <a:ln/>
-        </p:spPr>
-        <p:txBody>
-          <a:bodyPr wrap="square" lIns="0" tIns="0" rIns="0" bIns="0" rtlCol="0" anchor="ctr"/>
-          <a:lstStyle/>
-          <a:p>
-            <a:pPr indent="0" marL="0">
-              <a:buNone/>
-            </a:pPr>
-            <a:r>
-              <a:rPr lang="en-US" sz="1450" b="1" dirty="0">
-                <a:solidFill>
-                  <a:srgbClr val="1E3A5F"/>
-                </a:solidFill>
-                <a:latin typeface="游ゴシック" pitchFamily="34" charset="0"/>
-                <a:ea typeface="游ゴシック" pitchFamily="34" charset="-122"/>
-                <a:cs typeface="游ゴシック" pitchFamily="34" charset="-120"/>
-              </a:rPr>
-              <a:t>海外の学術研究</a:t>
-            </a:r>
-            <a:endParaRPr lang="en-US" sz="1450" dirty="0"/>
-          </a:p>
-        </p:txBody>
-      </p:sp>
-      <p:sp>
-        <p:nvSpPr>
-          <p:cNvPr id="18" name="Text 16"/>
-          <p:cNvSpPr txBox="1"/>
-          <p:nvPr/>
-        </p:nvSpPr>
-        <p:spPr>
-          <a:xfrm>
-            <a:off x="8193024" y="3017520"/>
-            <a:ext cx="3136392" cy="914400"/>
-          </a:xfrm>
-          <a:prstGeom prst="rect">
-            <a:avLst/>
-          </a:prstGeom>
-          <a:noFill/>
-          <a:ln/>
-        </p:spPr>
-        <p:txBody>
-          <a:bodyPr wrap="square" lIns="0" tIns="0" rIns="0" bIns="0" rtlCol="0" anchor="t"/>
-          <a:lstStyle/>
-          <a:p>
-            <a:pPr indent="0" marL="0">
-              <a:lnSpc>
-                <a:spcPct val="120000"/>
-              </a:lnSpc>
-              <a:buNone/>
-            </a:pPr>
-            <a:r>
-              <a:rPr lang="en-US" sz="1100" dirty="0">
-                <a:solidFill>
-                  <a:srgbClr val="3A3A3A"/>
-                </a:solidFill>
-                <a:latin typeface="游ゴシック" pitchFamily="34" charset="0"/>
-                <a:ea typeface="游ゴシック" pitchFamily="34" charset="-122"/>
-                <a:cs typeface="游ゴシック" pitchFamily="34" charset="-120"/>
-              </a:rPr>
-              <a:t>ACPは、家族を巻き込んだ“対話”を伴う場合にQOLを改善</a:t>
-            </a:r>
-            <a:endParaRPr lang="en-US" sz="1100" dirty="0"/>
-          </a:p>
-          <a:p>
-            <a:pPr indent="0" marL="0">
-              <a:lnSpc>
-                <a:spcPct val="120000"/>
-              </a:lnSpc>
-              <a:buNone/>
-            </a:pPr>
-            <a:r>
-              <a:rPr lang="en-US" sz="1100" dirty="0">
-                <a:solidFill>
-                  <a:srgbClr val="3A3A3A"/>
-                </a:solidFill>
-                <a:latin typeface="游ゴシック" pitchFamily="34" charset="0"/>
-                <a:ea typeface="游ゴシック" pitchFamily="34" charset="-122"/>
-                <a:cs typeface="游ゴシック" pitchFamily="34" charset="-120"/>
-              </a:rPr>
-              <a:t>（心不全患者対象の系統的レビュー等）</a:t>
-            </a:r>
-            <a:endParaRPr lang="en-US" sz="1100" dirty="0"/>
-          </a:p>
-        </p:txBody>
-      </p:sp>
-      <p:sp>
-        <p:nvSpPr>
-          <p:cNvPr id="19" name="Shape 17"/>
-          <p:cNvSpPr/>
-          <p:nvPr/>
-        </p:nvSpPr>
-        <p:spPr>
-          <a:xfrm>
-            <a:off x="640080" y="4251960"/>
-            <a:ext cx="10881360" cy="1417320"/>
+            <a:off x="640080" y="4434840"/>
+            <a:ext cx="10881360" cy="1645920"/>
           </a:xfrm>
           <a:prstGeom prst="roundRect">
             <a:avLst>
-              <a:gd name="adj" fmla="val 6452"/>
+              <a:gd name="adj" fmla="val 5556"/>
             </a:avLst>
           </a:prstGeom>
           <a:solidFill>
-            <a:srgbClr val="1E3A5F"/>
+            <a:srgbClr val="F6F1EA"/>
           </a:solidFill>
           <a:ln/>
           <a:effectLst>
@@ -2952,14 +2918,14 @@
       </p:sp>
       <p:sp>
         <p:nvSpPr>
-          <p:cNvPr id="20" name="Text 18"/>
-          <p:cNvSpPr txBox="1"/>
-          <p:nvPr/>
-        </p:nvSpPr>
-        <p:spPr>
-          <a:xfrm>
-            <a:off x="1005840" y="4434840"/>
-            <a:ext cx="10149840" cy="502920"/>
+          <p:cNvPr id="16" name="Text 14"/>
+          <p:cNvSpPr txBox="1"/>
+          <p:nvPr/>
+        </p:nvSpPr>
+        <p:spPr>
+          <a:xfrm>
+            <a:off x="1005840" y="4617720"/>
+            <a:ext cx="10149840" cy="365760"/>
           </a:xfrm>
           <a:prstGeom prst="rect">
             <a:avLst/>
@@ -2975,30 +2941,30 @@
               <a:buNone/>
             </a:pPr>
             <a:r>
-              <a:rPr lang="en-US" sz="2200" b="1" dirty="0">
-                <a:solidFill>
-                  <a:srgbClr val="F1DCCF"/>
-                </a:solidFill>
-                <a:latin typeface="游ゴシック" pitchFamily="34" charset="0"/>
-                <a:ea typeface="游ゴシック" pitchFamily="34" charset="-122"/>
-                <a:cs typeface="游ゴシック" pitchFamily="34" charset="-120"/>
-              </a:rPr>
-              <a:t>鍵は「書類」ではなく、「対話」</a:t>
-            </a:r>
-            <a:endParaRPr lang="en-US" sz="2200" dirty="0"/>
-          </a:p>
-        </p:txBody>
-      </p:sp>
-      <p:sp>
-        <p:nvSpPr>
-          <p:cNvPr id="21" name="Text 19"/>
-          <p:cNvSpPr txBox="1"/>
-          <p:nvPr/>
-        </p:nvSpPr>
-        <p:spPr>
-          <a:xfrm>
-            <a:off x="1005840" y="4937760"/>
-            <a:ext cx="10149840" cy="640080"/>
+              <a:rPr lang="en-US" sz="1500" b="1" dirty="0">
+                <a:solidFill>
+                  <a:srgbClr val="1E3A5F"/>
+                </a:solidFill>
+                <a:latin typeface="游ゴシック" pitchFamily="34" charset="0"/>
+                <a:ea typeface="游ゴシック" pitchFamily="34" charset="-122"/>
+                <a:cs typeface="游ゴシック" pitchFamily="34" charset="-120"/>
+              </a:rPr>
+              <a:t>なぜ本体の売上が大きくないのか？</a:t>
+            </a:r>
+            <a:endParaRPr lang="en-US" sz="1500" dirty="0"/>
+          </a:p>
+        </p:txBody>
+      </p:sp>
+      <p:sp>
+        <p:nvSpPr>
+          <p:cNvPr id="17" name="Text 15"/>
+          <p:cNvSpPr txBox="1"/>
+          <p:nvPr/>
+        </p:nvSpPr>
+        <p:spPr>
+          <a:xfrm>
+            <a:off x="1005840" y="4983480"/>
+            <a:ext cx="10149840" cy="1005840"/>
           </a:xfrm>
           <a:prstGeom prst="rect">
             <a:avLst/>
@@ -3011,26 +2977,29 @@
           <a:lstStyle/>
           <a:p>
             <a:pPr indent="0" marL="0">
-              <a:buNone/>
-            </a:pPr>
-            <a:r>
-              <a:rPr lang="en-US" sz="1250" dirty="0">
-                <a:solidFill>
-                  <a:srgbClr val="C7CEDA"/>
-                </a:solidFill>
-                <a:latin typeface="游ゴシック" pitchFamily="34" charset="0"/>
-                <a:ea typeface="游ゴシック" pitchFamily="34" charset="-122"/>
-                <a:cs typeface="游ゴシック" pitchFamily="34" charset="-120"/>
-              </a:rPr>
-              <a:t>相関関係であり因果関係ではない点に留意しつつ、対話というメカニズムに絞って語ることで、誠実かつ厳密な説明になる</a:t>
-            </a:r>
-            <a:endParaRPr lang="en-US" sz="1250" dirty="0"/>
-          </a:p>
-        </p:txBody>
-      </p:sp>
-      <p:sp>
-        <p:nvSpPr>
-          <p:cNvPr id="22" name="Text 20"/>
+              <a:lnSpc>
+                <a:spcPct val="130000"/>
+              </a:lnSpc>
+              <a:buNone/>
+            </a:pPr>
+            <a:r>
+              <a:rPr lang="en-US" sz="1300" dirty="0">
+                <a:solidFill>
+                  <a:srgbClr val="3A3A3A"/>
+                </a:solidFill>
+                <a:latin typeface="游ゴシック" pitchFamily="34" charset="0"/>
+                <a:ea typeface="游ゴシック" pitchFamily="34" charset="-122"/>
+                <a:cs typeface="游ゴシック" pitchFamily="34" charset="-120"/>
+              </a:rPr>
+              <a:t>本体が売上を独占するのではなく、全国の加盟事業者が自律的に事業を営む分散型のネットワークだから。これは弱みではなく、「競争から共存へ」という経営思想と直結する強みです。</a:t>
+            </a:r>
+            <a:endParaRPr lang="en-US" sz="1300" dirty="0"/>
+          </a:p>
+        </p:txBody>
+      </p:sp>
+      <p:sp>
+        <p:nvSpPr>
+          <p:cNvPr id="18" name="Text 16"/>
           <p:cNvSpPr txBox="1"/>
           <p:nvPr/>
         </p:nvSpPr>
@@ -3132,7 +3101,7 @@
                 <a:ea typeface="游ゴシック" pitchFamily="34" charset="-122"/>
                 <a:cs typeface="游ゴシック" pitchFamily="34" charset="-120"/>
               </a:rPr>
-              <a:t>PHILOSOPHY</a:t>
+              <a:t>WELL-BEING</a:t>
             </a:r>
             <a:endParaRPr lang="en-US" sz="1300" dirty="0"/>
           </a:p>
@@ -3171,7 +3140,7 @@
                 <a:ea typeface="游ゴシック" pitchFamily="34" charset="-122"/>
                 <a:cs typeface="游ゴシック" pitchFamily="34" charset="-120"/>
               </a:rPr>
-              <a:t>経営思想 ― 「競争」から「共存」へ</a:t>
+              <a:t>終活・相続対策と幸福度 ― まだ語られていない関係</a:t>
             </a:r>
             <a:endParaRPr lang="en-US" sz="2800" dirty="0"/>
           </a:p>
@@ -3185,8 +3154,37 @@
         </p:nvSpPr>
         <p:spPr>
           <a:xfrm>
-            <a:off x="5806440" y="3200400"/>
-            <a:ext cx="1828800" cy="1828800"/>
+            <a:off x="640080" y="1783080"/>
+            <a:ext cx="3502152" cy="2286000"/>
+          </a:xfrm>
+          <a:prstGeom prst="roundRect">
+            <a:avLst>
+              <a:gd name="adj" fmla="val 4000"/>
+            </a:avLst>
+          </a:prstGeom>
+          <a:solidFill>
+            <a:srgbClr val="F6F1EA"/>
+          </a:solidFill>
+          <a:ln/>
+          <a:effectLst>
+            <a:outerShdw sx="100000" sy="100000" kx="0" ky="0" algn="bl" rotWithShape="0" blurRad="101600" dist="38100" dir="5400000">
+              <a:srgbClr val="10233A">
+                <a:alpha val="18000"/>
+              </a:srgbClr>
+            </a:outerShdw>
+          </a:effectLst>
+        </p:spPr>
+      </p:sp>
+      <p:sp>
+        <p:nvSpPr>
+          <p:cNvPr id="5" name="Shape 3"/>
+          <p:cNvSpPr/>
+          <p:nvPr/>
+        </p:nvSpPr>
+        <p:spPr>
+          <a:xfrm>
+            <a:off x="822960" y="1965960"/>
+            <a:ext cx="548640" cy="548640"/>
           </a:xfrm>
           <a:prstGeom prst="ellipse">
             <a:avLst/>
@@ -3199,14 +3197,14 @@
       </p:sp>
       <p:sp>
         <p:nvSpPr>
-          <p:cNvPr id="5" name="Text 3"/>
-          <p:cNvSpPr txBox="1"/>
-          <p:nvPr/>
-        </p:nvSpPr>
-        <p:spPr>
-          <a:xfrm>
-            <a:off x="5532120" y="3200400"/>
-            <a:ext cx="2377440" cy="1828800"/>
+          <p:cNvPr id="6" name="Text 4"/>
+          <p:cNvSpPr txBox="1"/>
+          <p:nvPr/>
+        </p:nvSpPr>
+        <p:spPr>
+          <a:xfrm>
+            <a:off x="548640" y="1965960"/>
+            <a:ext cx="1097280" cy="548640"/>
           </a:xfrm>
           <a:prstGeom prst="rect">
             <a:avLst/>
@@ -3222,7 +3220,7 @@
               <a:buNone/>
             </a:pPr>
             <a:r>
-              <a:rPr lang="en-US" sz="1300" b="1" dirty="0">
+              <a:rPr lang="en-US" sz="1600" b="1" dirty="0">
                 <a:solidFill>
                   <a:srgbClr val="FFFFFF"/>
                 </a:solidFill>
@@ -3230,114 +3228,112 @@
                 <a:ea typeface="游ゴシック" pitchFamily="34" charset="-122"/>
                 <a:cs typeface="游ゴシック" pitchFamily="34" charset="-120"/>
               </a:rPr>
-              <a:t>繋ぐグループ</a:t>
-            </a:r>
-            <a:endParaRPr lang="en-US" sz="1300" dirty="0"/>
-          </a:p>
-          <a:p>
-            <a:pPr algn="ctr" indent="0" marL="0">
-              <a:buNone/>
-            </a:pPr>
-            <a:r>
-              <a:rPr lang="en-US" sz="1300" b="1" dirty="0">
-                <a:solidFill>
-                  <a:srgbClr val="FFFFFF"/>
-                </a:solidFill>
-                <a:latin typeface="游ゴシック" pitchFamily="34" charset="0"/>
-                <a:ea typeface="游ゴシック" pitchFamily="34" charset="-122"/>
-                <a:cs typeface="游ゴシック" pitchFamily="34" charset="-120"/>
-              </a:rPr>
-              <a:t>（生きる準備</a:t>
-            </a:r>
-            <a:endParaRPr lang="en-US" sz="1300" dirty="0"/>
-          </a:p>
-          <a:p>
-            <a:pPr algn="ctr" indent="0" marL="0">
-              <a:buNone/>
-            </a:pPr>
-            <a:r>
-              <a:rPr lang="en-US" sz="1300" b="1" dirty="0">
-                <a:solidFill>
-                  <a:srgbClr val="FFFFFF"/>
-                </a:solidFill>
-                <a:latin typeface="游ゴシック" pitchFamily="34" charset="0"/>
-                <a:ea typeface="游ゴシック" pitchFamily="34" charset="-122"/>
-                <a:cs typeface="游ゴシック" pitchFamily="34" charset="-120"/>
-              </a:rPr>
-              <a:t>の入口）</a:t>
-            </a:r>
-            <a:endParaRPr lang="en-US" sz="1300" dirty="0"/>
-          </a:p>
-        </p:txBody>
-      </p:sp>
-      <p:sp>
-        <p:nvSpPr>
-          <p:cNvPr id="6" name="Shape 4"/>
-          <p:cNvSpPr/>
-          <p:nvPr/>
-        </p:nvSpPr>
-        <p:spPr>
-          <a:xfrm>
-            <a:off x="6720840" y="2638044"/>
-            <a:ext cx="9144" cy="1476756"/>
-          </a:xfrm>
-          <a:prstGeom prst="line">
-            <a:avLst/>
-          </a:prstGeom>
-          <a:noFill/>
-          <a:ln w="19050">
-            <a:solidFill>
-              <a:srgbClr val="C9C2B6"/>
-            </a:solidFill>
-            <a:prstDash val="sysDot"/>
-          </a:ln>
-        </p:spPr>
-      </p:sp>
-      <p:sp>
-        <p:nvSpPr>
-          <p:cNvPr id="7" name="Shape 5"/>
-          <p:cNvSpPr/>
-          <p:nvPr/>
-        </p:nvSpPr>
-        <p:spPr>
-          <a:xfrm>
-            <a:off x="6720840" y="3658457"/>
-            <a:ext cx="1652328" cy="456343"/>
-          </a:xfrm>
-          <a:prstGeom prst="line">
-            <a:avLst/>
-          </a:prstGeom>
-          <a:noFill/>
-          <a:ln w="19050">
-            <a:solidFill>
-              <a:srgbClr val="C9C2B6"/>
-            </a:solidFill>
-            <a:prstDash val="sysDot"/>
-          </a:ln>
-        </p:spPr>
-      </p:sp>
-      <p:sp>
-        <p:nvSpPr>
-          <p:cNvPr id="8" name="Shape 6"/>
-          <p:cNvSpPr/>
-          <p:nvPr/>
-        </p:nvSpPr>
-        <p:spPr>
-          <a:xfrm>
-            <a:off x="6720840" y="4114800"/>
-            <a:ext cx="1021195" cy="1194721"/>
-          </a:xfrm>
-          <a:prstGeom prst="line">
-            <a:avLst/>
-          </a:prstGeom>
-          <a:noFill/>
-          <a:ln w="19050">
-            <a:solidFill>
-              <a:srgbClr val="C9C2B6"/>
-            </a:solidFill>
-            <a:prstDash val="sysDot"/>
-          </a:ln>
-        </p:spPr>
+              <a:t>①</a:t>
+            </a:r>
+            <a:endParaRPr lang="en-US" sz="1600" dirty="0"/>
+          </a:p>
+        </p:txBody>
+      </p:sp>
+      <p:sp>
+        <p:nvSpPr>
+          <p:cNvPr id="7" name="Text 5"/>
+          <p:cNvSpPr txBox="1"/>
+          <p:nvPr/>
+        </p:nvSpPr>
+        <p:spPr>
+          <a:xfrm>
+            <a:off x="822960" y="2651760"/>
+            <a:ext cx="3136392" cy="365760"/>
+          </a:xfrm>
+          <a:prstGeom prst="rect">
+            <a:avLst/>
+          </a:prstGeom>
+          <a:noFill/>
+          <a:ln/>
+        </p:spPr>
+        <p:txBody>
+          <a:bodyPr wrap="square" lIns="0" tIns="0" rIns="0" bIns="0" rtlCol="0" anchor="ctr"/>
+          <a:lstStyle/>
+          <a:p>
+            <a:pPr indent="0" marL="0">
+              <a:buNone/>
+            </a:pPr>
+            <a:r>
+              <a:rPr lang="en-US" sz="1450" b="1" dirty="0">
+                <a:solidFill>
+                  <a:srgbClr val="1E3A5F"/>
+                </a:solidFill>
+                <a:latin typeface="游ゴシック" pitchFamily="34" charset="0"/>
+                <a:ea typeface="游ゴシック" pitchFamily="34" charset="-122"/>
+                <a:cs typeface="游ゴシック" pitchFamily="34" charset="-120"/>
+              </a:rPr>
+              <a:t>国内民間調査</a:t>
+            </a:r>
+            <a:endParaRPr lang="en-US" sz="1450" dirty="0"/>
+          </a:p>
+        </p:txBody>
+      </p:sp>
+      <p:sp>
+        <p:nvSpPr>
+          <p:cNvPr id="8" name="Text 6"/>
+          <p:cNvSpPr txBox="1"/>
+          <p:nvPr/>
+        </p:nvSpPr>
+        <p:spPr>
+          <a:xfrm>
+            <a:off x="822960" y="3017520"/>
+            <a:ext cx="3136392" cy="914400"/>
+          </a:xfrm>
+          <a:prstGeom prst="rect">
+            <a:avLst/>
+          </a:prstGeom>
+          <a:noFill/>
+          <a:ln/>
+        </p:spPr>
+        <p:txBody>
+          <a:bodyPr wrap="square" lIns="0" tIns="0" rIns="0" bIns="0" rtlCol="0" anchor="t"/>
+          <a:lstStyle/>
+          <a:p>
+            <a:pPr indent="0" marL="0">
+              <a:lnSpc>
+                <a:spcPct val="120000"/>
+              </a:lnSpc>
+              <a:buNone/>
+            </a:pPr>
+            <a:r>
+              <a:rPr lang="en-US" sz="1100" dirty="0">
+                <a:solidFill>
+                  <a:srgbClr val="3A3A3A"/>
+                </a:solidFill>
+                <a:latin typeface="游ゴシック" pitchFamily="34" charset="0"/>
+                <a:ea typeface="游ゴシック" pitchFamily="34" charset="-122"/>
+                <a:cs typeface="游ゴシック" pitchFamily="34" charset="-120"/>
+              </a:rPr>
+              <a:t>終活をすでに始めている人（44.0%）は、幸福度・生活満足度が高い傾向</a:t>
+            </a:r>
+            <a:endParaRPr lang="en-US" sz="1100" dirty="0"/>
+          </a:p>
+          <a:p>
+            <a:pPr indent="0" marL="0">
+              <a:lnSpc>
+                <a:spcPct val="120000"/>
+              </a:lnSpc>
+              <a:buNone/>
+            </a:pPr>
+            <a:r>
+              <a:rPr lang="en-US" sz="1100" dirty="0">
+                <a:solidFill>
+                  <a:srgbClr val="3A3A3A"/>
+                </a:solidFill>
+                <a:latin typeface="游ゴシック" pitchFamily="34" charset="0"/>
+                <a:ea typeface="游ゴシック" pitchFamily="34" charset="-122"/>
+                <a:cs typeface="游ゴシック" pitchFamily="34" charset="-120"/>
+              </a:rPr>
+              <a:t>（ハルメク生きかた上手研究所調べ）</a:t>
+            </a:r>
+            <a:endParaRPr lang="en-US" sz="1100" dirty="0"/>
+          </a:p>
+        </p:txBody>
       </p:sp>
       <p:sp>
         <p:nvSpPr>
@@ -3347,19 +3343,25 @@
         </p:nvSpPr>
         <p:spPr>
           <a:xfrm>
-            <a:off x="5699645" y="4114800"/>
-            <a:ext cx="1021195" cy="1194721"/>
-          </a:xfrm>
-          <a:prstGeom prst="line">
-            <a:avLst/>
-          </a:prstGeom>
-          <a:noFill/>
-          <a:ln w="19050">
-            <a:solidFill>
-              <a:srgbClr val="C9C2B6"/>
-            </a:solidFill>
-            <a:prstDash val="sysDot"/>
-          </a:ln>
+            <a:off x="4325112" y="1783080"/>
+            <a:ext cx="3502152" cy="2286000"/>
+          </a:xfrm>
+          <a:prstGeom prst="roundRect">
+            <a:avLst>
+              <a:gd name="adj" fmla="val 4000"/>
+            </a:avLst>
+          </a:prstGeom>
+          <a:solidFill>
+            <a:srgbClr val="F6F1EA"/>
+          </a:solidFill>
+          <a:ln/>
+          <a:effectLst>
+            <a:outerShdw sx="100000" sy="100000" kx="0" ky="0" algn="bl" rotWithShape="0" blurRad="101600" dist="38100" dir="5400000">
+              <a:srgbClr val="10233A">
+                <a:alpha val="18000"/>
+              </a:srgbClr>
+            </a:outerShdw>
+          </a:effectLst>
         </p:spPr>
       </p:sp>
       <p:sp>
@@ -3370,275 +3372,374 @@
         </p:nvSpPr>
         <p:spPr>
           <a:xfrm>
-            <a:off x="5068512" y="3658457"/>
-            <a:ext cx="1652328" cy="456343"/>
-          </a:xfrm>
-          <a:prstGeom prst="line">
-            <a:avLst/>
-          </a:prstGeom>
-          <a:noFill/>
-          <a:ln w="19050">
-            <a:solidFill>
-              <a:srgbClr val="C9C2B6"/>
-            </a:solidFill>
-            <a:prstDash val="sysDot"/>
-          </a:ln>
-        </p:spPr>
-      </p:sp>
-      <p:sp>
-        <p:nvSpPr>
-          <p:cNvPr id="11" name="Shape 9"/>
+            <a:off x="4507992" y="1965960"/>
+            <a:ext cx="548640" cy="548640"/>
+          </a:xfrm>
+          <a:prstGeom prst="ellipse">
+            <a:avLst/>
+          </a:prstGeom>
+          <a:solidFill>
+            <a:srgbClr val="C9603F"/>
+          </a:solidFill>
+          <a:ln/>
+        </p:spPr>
+      </p:sp>
+      <p:sp>
+        <p:nvSpPr>
+          <p:cNvPr id="11" name="Text 9"/>
+          <p:cNvSpPr txBox="1"/>
+          <p:nvPr/>
+        </p:nvSpPr>
+        <p:spPr>
+          <a:xfrm>
+            <a:off x="4233672" y="1965960"/>
+            <a:ext cx="1097280" cy="548640"/>
+          </a:xfrm>
+          <a:prstGeom prst="rect">
+            <a:avLst/>
+          </a:prstGeom>
+          <a:noFill/>
+          <a:ln/>
+        </p:spPr>
+        <p:txBody>
+          <a:bodyPr wrap="square" lIns="0" tIns="0" rIns="0" bIns="0" rtlCol="0" anchor="ctr"/>
+          <a:lstStyle/>
+          <a:p>
+            <a:pPr algn="ctr" indent="0" marL="0">
+              <a:buNone/>
+            </a:pPr>
+            <a:r>
+              <a:rPr lang="en-US" sz="1600" b="1" dirty="0">
+                <a:solidFill>
+                  <a:srgbClr val="FFFFFF"/>
+                </a:solidFill>
+                <a:latin typeface="游ゴシック" pitchFamily="34" charset="0"/>
+                <a:ea typeface="游ゴシック" pitchFamily="34" charset="-122"/>
+                <a:cs typeface="游ゴシック" pitchFamily="34" charset="-120"/>
+              </a:rPr>
+              <a:t>②</a:t>
+            </a:r>
+            <a:endParaRPr lang="en-US" sz="1600" dirty="0"/>
+          </a:p>
+        </p:txBody>
+      </p:sp>
+      <p:sp>
+        <p:nvSpPr>
+          <p:cNvPr id="12" name="Text 10"/>
+          <p:cNvSpPr txBox="1"/>
+          <p:nvPr/>
+        </p:nvSpPr>
+        <p:spPr>
+          <a:xfrm>
+            <a:off x="4507992" y="2651760"/>
+            <a:ext cx="3136392" cy="365760"/>
+          </a:xfrm>
+          <a:prstGeom prst="rect">
+            <a:avLst/>
+          </a:prstGeom>
+          <a:noFill/>
+          <a:ln/>
+        </p:spPr>
+        <p:txBody>
+          <a:bodyPr wrap="square" lIns="0" tIns="0" rIns="0" bIns="0" rtlCol="0" anchor="ctr"/>
+          <a:lstStyle/>
+          <a:p>
+            <a:pPr indent="0" marL="0">
+              <a:buNone/>
+            </a:pPr>
+            <a:r>
+              <a:rPr lang="en-US" sz="1450" b="1" dirty="0">
+                <a:solidFill>
+                  <a:srgbClr val="1E3A5F"/>
+                </a:solidFill>
+                <a:latin typeface="游ゴシック" pitchFamily="34" charset="0"/>
+                <a:ea typeface="游ゴシック" pitchFamily="34" charset="-122"/>
+                <a:cs typeface="游ゴシック" pitchFamily="34" charset="-120"/>
+              </a:rPr>
+              <a:t>国内公的調査</a:t>
+            </a:r>
+            <a:endParaRPr lang="en-US" sz="1450" dirty="0"/>
+          </a:p>
+        </p:txBody>
+      </p:sp>
+      <p:sp>
+        <p:nvSpPr>
+          <p:cNvPr id="13" name="Text 11"/>
+          <p:cNvSpPr txBox="1"/>
+          <p:nvPr/>
+        </p:nvSpPr>
+        <p:spPr>
+          <a:xfrm>
+            <a:off x="4507992" y="3017520"/>
+            <a:ext cx="3136392" cy="914400"/>
+          </a:xfrm>
+          <a:prstGeom prst="rect">
+            <a:avLst/>
+          </a:prstGeom>
+          <a:noFill/>
+          <a:ln/>
+        </p:spPr>
+        <p:txBody>
+          <a:bodyPr wrap="square" lIns="0" tIns="0" rIns="0" bIns="0" rtlCol="0" anchor="t"/>
+          <a:lstStyle/>
+          <a:p>
+            <a:pPr indent="0" marL="0">
+              <a:lnSpc>
+                <a:spcPct val="120000"/>
+              </a:lnSpc>
+              <a:buNone/>
+            </a:pPr>
+            <a:r>
+              <a:rPr lang="en-US" sz="1100" dirty="0">
+                <a:solidFill>
+                  <a:srgbClr val="3A3A3A"/>
+                </a:solidFill>
+                <a:latin typeface="游ゴシック" pitchFamily="34" charset="0"/>
+                <a:ea typeface="游ゴシック" pitchFamily="34" charset="-122"/>
+                <a:cs typeface="游ゴシック" pitchFamily="34" charset="-120"/>
+              </a:rPr>
+              <a:t>65歳以上の約6割が終活を実施。最多は「財産以外の所有物の整理」</a:t>
+            </a:r>
+            <a:endParaRPr lang="en-US" sz="1100" dirty="0"/>
+          </a:p>
+          <a:p>
+            <a:pPr indent="0" marL="0">
+              <a:lnSpc>
+                <a:spcPct val="120000"/>
+              </a:lnSpc>
+              <a:buNone/>
+            </a:pPr>
+            <a:r>
+              <a:rPr lang="en-US" sz="1100" dirty="0">
+                <a:solidFill>
+                  <a:srgbClr val="3A3A3A"/>
+                </a:solidFill>
+                <a:latin typeface="游ゴシック" pitchFamily="34" charset="0"/>
+                <a:ea typeface="游ゴシック" pitchFamily="34" charset="-122"/>
+                <a:cs typeface="游ゴシック" pitchFamily="34" charset="-120"/>
+              </a:rPr>
+              <a:t>（内閣府 令和6年度調査）</a:t>
+            </a:r>
+            <a:endParaRPr lang="en-US" sz="1100" dirty="0"/>
+          </a:p>
+        </p:txBody>
+      </p:sp>
+      <p:sp>
+        <p:nvSpPr>
+          <p:cNvPr id="14" name="Shape 12"/>
           <p:cNvSpPr/>
           <p:nvPr/>
         </p:nvSpPr>
         <p:spPr>
           <a:xfrm>
-            <a:off x="6103620" y="2020824"/>
-            <a:ext cx="1234440" cy="1234440"/>
+            <a:off x="8010144" y="1783080"/>
+            <a:ext cx="3502152" cy="2286000"/>
+          </a:xfrm>
+          <a:prstGeom prst="roundRect">
+            <a:avLst>
+              <a:gd name="adj" fmla="val 4000"/>
+            </a:avLst>
+          </a:prstGeom>
+          <a:solidFill>
+            <a:srgbClr val="F6F1EA"/>
+          </a:solidFill>
+          <a:ln/>
+          <a:effectLst>
+            <a:outerShdw sx="100000" sy="100000" kx="0" ky="0" algn="bl" rotWithShape="0" blurRad="101600" dist="38100" dir="5400000">
+              <a:srgbClr val="10233A">
+                <a:alpha val="18000"/>
+              </a:srgbClr>
+            </a:outerShdw>
+          </a:effectLst>
+        </p:spPr>
+      </p:sp>
+      <p:sp>
+        <p:nvSpPr>
+          <p:cNvPr id="15" name="Shape 13"/>
+          <p:cNvSpPr/>
+          <p:nvPr/>
+        </p:nvSpPr>
+        <p:spPr>
+          <a:xfrm>
+            <a:off x="8193024" y="1965960"/>
+            <a:ext cx="548640" cy="548640"/>
           </a:xfrm>
           <a:prstGeom prst="ellipse">
             <a:avLst/>
+          </a:prstGeom>
+          <a:solidFill>
+            <a:srgbClr val="C9603F"/>
+          </a:solidFill>
+          <a:ln/>
+        </p:spPr>
+      </p:sp>
+      <p:sp>
+        <p:nvSpPr>
+          <p:cNvPr id="16" name="Text 14"/>
+          <p:cNvSpPr txBox="1"/>
+          <p:nvPr/>
+        </p:nvSpPr>
+        <p:spPr>
+          <a:xfrm>
+            <a:off x="7918704" y="1965960"/>
+            <a:ext cx="1097280" cy="548640"/>
+          </a:xfrm>
+          <a:prstGeom prst="rect">
+            <a:avLst/>
+          </a:prstGeom>
+          <a:noFill/>
+          <a:ln/>
+        </p:spPr>
+        <p:txBody>
+          <a:bodyPr wrap="square" lIns="0" tIns="0" rIns="0" bIns="0" rtlCol="0" anchor="ctr"/>
+          <a:lstStyle/>
+          <a:p>
+            <a:pPr algn="ctr" indent="0" marL="0">
+              <a:buNone/>
+            </a:pPr>
+            <a:r>
+              <a:rPr lang="en-US" sz="1600" b="1" dirty="0">
+                <a:solidFill>
+                  <a:srgbClr val="FFFFFF"/>
+                </a:solidFill>
+                <a:latin typeface="游ゴシック" pitchFamily="34" charset="0"/>
+                <a:ea typeface="游ゴシック" pitchFamily="34" charset="-122"/>
+                <a:cs typeface="游ゴシック" pitchFamily="34" charset="-120"/>
+              </a:rPr>
+              <a:t>③</a:t>
+            </a:r>
+            <a:endParaRPr lang="en-US" sz="1600" dirty="0"/>
+          </a:p>
+        </p:txBody>
+      </p:sp>
+      <p:sp>
+        <p:nvSpPr>
+          <p:cNvPr id="17" name="Text 15"/>
+          <p:cNvSpPr txBox="1"/>
+          <p:nvPr/>
+        </p:nvSpPr>
+        <p:spPr>
+          <a:xfrm>
+            <a:off x="8193024" y="2651760"/>
+            <a:ext cx="3136392" cy="365760"/>
+          </a:xfrm>
+          <a:prstGeom prst="rect">
+            <a:avLst/>
+          </a:prstGeom>
+          <a:noFill/>
+          <a:ln/>
+        </p:spPr>
+        <p:txBody>
+          <a:bodyPr wrap="square" lIns="0" tIns="0" rIns="0" bIns="0" rtlCol="0" anchor="ctr"/>
+          <a:lstStyle/>
+          <a:p>
+            <a:pPr indent="0" marL="0">
+              <a:buNone/>
+            </a:pPr>
+            <a:r>
+              <a:rPr lang="en-US" sz="1450" b="1" dirty="0">
+                <a:solidFill>
+                  <a:srgbClr val="1E3A5F"/>
+                </a:solidFill>
+                <a:latin typeface="游ゴシック" pitchFamily="34" charset="0"/>
+                <a:ea typeface="游ゴシック" pitchFamily="34" charset="-122"/>
+                <a:cs typeface="游ゴシック" pitchFamily="34" charset="-120"/>
+              </a:rPr>
+              <a:t>海外の学術研究</a:t>
+            </a:r>
+            <a:endParaRPr lang="en-US" sz="1450" dirty="0"/>
+          </a:p>
+        </p:txBody>
+      </p:sp>
+      <p:sp>
+        <p:nvSpPr>
+          <p:cNvPr id="18" name="Text 16"/>
+          <p:cNvSpPr txBox="1"/>
+          <p:nvPr/>
+        </p:nvSpPr>
+        <p:spPr>
+          <a:xfrm>
+            <a:off x="8193024" y="3017520"/>
+            <a:ext cx="3136392" cy="914400"/>
+          </a:xfrm>
+          <a:prstGeom prst="rect">
+            <a:avLst/>
+          </a:prstGeom>
+          <a:noFill/>
+          <a:ln/>
+        </p:spPr>
+        <p:txBody>
+          <a:bodyPr wrap="square" lIns="0" tIns="0" rIns="0" bIns="0" rtlCol="0" anchor="t"/>
+          <a:lstStyle/>
+          <a:p>
+            <a:pPr indent="0" marL="0">
+              <a:lnSpc>
+                <a:spcPct val="120000"/>
+              </a:lnSpc>
+              <a:buNone/>
+            </a:pPr>
+            <a:r>
+              <a:rPr lang="en-US" sz="1100" dirty="0">
+                <a:solidFill>
+                  <a:srgbClr val="3A3A3A"/>
+                </a:solidFill>
+                <a:latin typeface="游ゴシック" pitchFamily="34" charset="0"/>
+                <a:ea typeface="游ゴシック" pitchFamily="34" charset="-122"/>
+                <a:cs typeface="游ゴシック" pitchFamily="34" charset="-120"/>
+              </a:rPr>
+              <a:t>ACPは、家族を巻き込んだ“対話”を伴う場合にQOLを改善</a:t>
+            </a:r>
+            <a:endParaRPr lang="en-US" sz="1100" dirty="0"/>
+          </a:p>
+          <a:p>
+            <a:pPr indent="0" marL="0">
+              <a:lnSpc>
+                <a:spcPct val="120000"/>
+              </a:lnSpc>
+              <a:buNone/>
+            </a:pPr>
+            <a:r>
+              <a:rPr lang="en-US" sz="1100" dirty="0">
+                <a:solidFill>
+                  <a:srgbClr val="3A3A3A"/>
+                </a:solidFill>
+                <a:latin typeface="游ゴシック" pitchFamily="34" charset="0"/>
+                <a:ea typeface="游ゴシック" pitchFamily="34" charset="-122"/>
+                <a:cs typeface="游ゴシック" pitchFamily="34" charset="-120"/>
+              </a:rPr>
+              <a:t>（心不全患者対象の系統的レビュー等）</a:t>
+            </a:r>
+            <a:endParaRPr lang="en-US" sz="1100" dirty="0"/>
+          </a:p>
+        </p:txBody>
+      </p:sp>
+      <p:sp>
+        <p:nvSpPr>
+          <p:cNvPr id="19" name="Shape 17"/>
+          <p:cNvSpPr/>
+          <p:nvPr/>
+        </p:nvSpPr>
+        <p:spPr>
+          <a:xfrm>
+            <a:off x="640080" y="4251960"/>
+            <a:ext cx="10881360" cy="1417320"/>
+          </a:xfrm>
+          <a:prstGeom prst="roundRect">
+            <a:avLst>
+              <a:gd name="adj" fmla="val 6452"/>
+            </a:avLst>
           </a:prstGeom>
           <a:solidFill>
             <a:srgbClr val="1E3A5F"/>
           </a:solidFill>
           <a:ln/>
-        </p:spPr>
-      </p:sp>
-      <p:sp>
-        <p:nvSpPr>
-          <p:cNvPr id="12" name="Text 10"/>
-          <p:cNvSpPr txBox="1"/>
-          <p:nvPr/>
-        </p:nvSpPr>
-        <p:spPr>
-          <a:xfrm>
-            <a:off x="5829300" y="2020824"/>
-            <a:ext cx="1783080" cy="1234440"/>
-          </a:xfrm>
-          <a:prstGeom prst="rect">
-            <a:avLst/>
-          </a:prstGeom>
-          <a:noFill/>
-          <a:ln/>
-        </p:spPr>
-        <p:txBody>
-          <a:bodyPr wrap="square" lIns="0" tIns="0" rIns="0" bIns="0" rtlCol="0" anchor="ctr"/>
-          <a:lstStyle/>
-          <a:p>
-            <a:pPr algn="ctr" indent="0" marL="0">
-              <a:buNone/>
-            </a:pPr>
-            <a:r>
-              <a:rPr lang="en-US" sz="1200" b="1" dirty="0">
-                <a:solidFill>
-                  <a:srgbClr val="FFFFFF"/>
-                </a:solidFill>
-                <a:latin typeface="游ゴシック" pitchFamily="34" charset="0"/>
-                <a:ea typeface="游ゴシック" pitchFamily="34" charset="-122"/>
-                <a:cs typeface="游ゴシック" pitchFamily="34" charset="-120"/>
-              </a:rPr>
-              <a:t>金融機関</a:t>
-            </a:r>
-            <a:endParaRPr lang="en-US" sz="1200" dirty="0"/>
-          </a:p>
-        </p:txBody>
-      </p:sp>
-      <p:sp>
-        <p:nvSpPr>
-          <p:cNvPr id="13" name="Shape 11"/>
-          <p:cNvSpPr/>
-          <p:nvPr/>
-        </p:nvSpPr>
-        <p:spPr>
-          <a:xfrm>
-            <a:off x="7755948" y="3041237"/>
-            <a:ext cx="1234440" cy="1234440"/>
-          </a:xfrm>
-          <a:prstGeom prst="ellipse">
-            <a:avLst/>
-          </a:prstGeom>
-          <a:solidFill>
-            <a:srgbClr val="1E3A5F"/>
-          </a:solidFill>
-          <a:ln/>
-        </p:spPr>
-      </p:sp>
-      <p:sp>
-        <p:nvSpPr>
-          <p:cNvPr id="14" name="Text 12"/>
-          <p:cNvSpPr txBox="1"/>
-          <p:nvPr/>
-        </p:nvSpPr>
-        <p:spPr>
-          <a:xfrm>
-            <a:off x="7481628" y="3041237"/>
-            <a:ext cx="1783080" cy="1234440"/>
-          </a:xfrm>
-          <a:prstGeom prst="rect">
-            <a:avLst/>
-          </a:prstGeom>
-          <a:noFill/>
-          <a:ln/>
-        </p:spPr>
-        <p:txBody>
-          <a:bodyPr wrap="square" lIns="0" tIns="0" rIns="0" bIns="0" rtlCol="0" anchor="ctr"/>
-          <a:lstStyle/>
-          <a:p>
-            <a:pPr algn="ctr" indent="0" marL="0">
-              <a:buNone/>
-            </a:pPr>
-            <a:r>
-              <a:rPr lang="en-US" sz="1200" b="1" dirty="0">
-                <a:solidFill>
-                  <a:srgbClr val="FFFFFF"/>
-                </a:solidFill>
-                <a:latin typeface="游ゴシック" pitchFamily="34" charset="0"/>
-                <a:ea typeface="游ゴシック" pitchFamily="34" charset="-122"/>
-                <a:cs typeface="游ゴシック" pitchFamily="34" charset="-120"/>
-              </a:rPr>
-              <a:t>士業</a:t>
-            </a:r>
-            <a:endParaRPr lang="en-US" sz="1200" dirty="0"/>
-          </a:p>
-        </p:txBody>
-      </p:sp>
-      <p:sp>
-        <p:nvSpPr>
-          <p:cNvPr id="15" name="Shape 13"/>
-          <p:cNvSpPr/>
-          <p:nvPr/>
-        </p:nvSpPr>
-        <p:spPr>
-          <a:xfrm>
-            <a:off x="7124815" y="4692301"/>
-            <a:ext cx="1234440" cy="1234440"/>
-          </a:xfrm>
-          <a:prstGeom prst="ellipse">
-            <a:avLst/>
-          </a:prstGeom>
-          <a:solidFill>
-            <a:srgbClr val="1E3A5F"/>
-          </a:solidFill>
-          <a:ln/>
-        </p:spPr>
-      </p:sp>
-      <p:sp>
-        <p:nvSpPr>
-          <p:cNvPr id="16" name="Text 14"/>
-          <p:cNvSpPr txBox="1"/>
-          <p:nvPr/>
-        </p:nvSpPr>
-        <p:spPr>
-          <a:xfrm>
-            <a:off x="6850495" y="4692301"/>
-            <a:ext cx="1783080" cy="1234440"/>
-          </a:xfrm>
-          <a:prstGeom prst="rect">
-            <a:avLst/>
-          </a:prstGeom>
-          <a:noFill/>
-          <a:ln/>
-        </p:spPr>
-        <p:txBody>
-          <a:bodyPr wrap="square" lIns="0" tIns="0" rIns="0" bIns="0" rtlCol="0" anchor="ctr"/>
-          <a:lstStyle/>
-          <a:p>
-            <a:pPr algn="ctr" indent="0" marL="0">
-              <a:buNone/>
-            </a:pPr>
-            <a:r>
-              <a:rPr lang="en-US" sz="1200" b="1" dirty="0">
-                <a:solidFill>
-                  <a:srgbClr val="FFFFFF"/>
-                </a:solidFill>
-                <a:latin typeface="游ゴシック" pitchFamily="34" charset="0"/>
-                <a:ea typeface="游ゴシック" pitchFamily="34" charset="-122"/>
-                <a:cs typeface="游ゴシック" pitchFamily="34" charset="-120"/>
-              </a:rPr>
-              <a:t>福祉・介護</a:t>
-            </a:r>
-            <a:endParaRPr lang="en-US" sz="1200" dirty="0"/>
-          </a:p>
-        </p:txBody>
-      </p:sp>
-      <p:sp>
-        <p:nvSpPr>
-          <p:cNvPr id="17" name="Shape 15"/>
-          <p:cNvSpPr/>
-          <p:nvPr/>
-        </p:nvSpPr>
-        <p:spPr>
-          <a:xfrm>
-            <a:off x="5082425" y="4692301"/>
-            <a:ext cx="1234440" cy="1234440"/>
-          </a:xfrm>
-          <a:prstGeom prst="ellipse">
-            <a:avLst/>
-          </a:prstGeom>
-          <a:solidFill>
-            <a:srgbClr val="1E3A5F"/>
-          </a:solidFill>
-          <a:ln/>
-        </p:spPr>
-      </p:sp>
-      <p:sp>
-        <p:nvSpPr>
-          <p:cNvPr id="18" name="Text 16"/>
-          <p:cNvSpPr txBox="1"/>
-          <p:nvPr/>
-        </p:nvSpPr>
-        <p:spPr>
-          <a:xfrm>
-            <a:off x="4808105" y="4692301"/>
-            <a:ext cx="1783080" cy="1234440"/>
-          </a:xfrm>
-          <a:prstGeom prst="rect">
-            <a:avLst/>
-          </a:prstGeom>
-          <a:noFill/>
-          <a:ln/>
-        </p:spPr>
-        <p:txBody>
-          <a:bodyPr wrap="square" lIns="0" tIns="0" rIns="0" bIns="0" rtlCol="0" anchor="ctr"/>
-          <a:lstStyle/>
-          <a:p>
-            <a:pPr algn="ctr" indent="0" marL="0">
-              <a:buNone/>
-            </a:pPr>
-            <a:r>
-              <a:rPr lang="en-US" sz="1200" b="1" dirty="0">
-                <a:solidFill>
-                  <a:srgbClr val="FFFFFF"/>
-                </a:solidFill>
-                <a:latin typeface="游ゴシック" pitchFamily="34" charset="0"/>
-                <a:ea typeface="游ゴシック" pitchFamily="34" charset="-122"/>
-                <a:cs typeface="游ゴシック" pitchFamily="34" charset="-120"/>
-              </a:rPr>
-              <a:t>不動産</a:t>
-            </a:r>
-            <a:endParaRPr lang="en-US" sz="1200" dirty="0"/>
-          </a:p>
-        </p:txBody>
-      </p:sp>
-      <p:sp>
-        <p:nvSpPr>
-          <p:cNvPr id="19" name="Shape 17"/>
-          <p:cNvSpPr/>
-          <p:nvPr/>
-        </p:nvSpPr>
-        <p:spPr>
-          <a:xfrm>
-            <a:off x="4451292" y="3041237"/>
-            <a:ext cx="1234440" cy="1234440"/>
-          </a:xfrm>
-          <a:prstGeom prst="ellipse">
-            <a:avLst/>
-          </a:prstGeom>
-          <a:solidFill>
-            <a:srgbClr val="1E3A5F"/>
-          </a:solidFill>
-          <a:ln/>
+          <a:effectLst>
+            <a:outerShdw sx="100000" sy="100000" kx="0" ky="0" algn="bl" rotWithShape="0" blurRad="101600" dist="38100" dir="5400000">
+              <a:srgbClr val="10233A">
+                <a:alpha val="18000"/>
+              </a:srgbClr>
+            </a:outerShdw>
+          </a:effectLst>
         </p:spPr>
       </p:sp>
       <p:sp>
@@ -3649,34 +3750,34 @@
         </p:nvSpPr>
         <p:spPr>
           <a:xfrm>
-            <a:off x="4176972" y="3041237"/>
-            <a:ext cx="1783080" cy="1234440"/>
-          </a:xfrm>
-          <a:prstGeom prst="rect">
-            <a:avLst/>
-          </a:prstGeom>
-          <a:noFill/>
-          <a:ln/>
-        </p:spPr>
-        <p:txBody>
-          <a:bodyPr wrap="square" lIns="0" tIns="0" rIns="0" bIns="0" rtlCol="0" anchor="ctr"/>
-          <a:lstStyle/>
-          <a:p>
-            <a:pPr algn="ctr" indent="0" marL="0">
-              <a:buNone/>
-            </a:pPr>
-            <a:r>
-              <a:rPr lang="en-US" sz="1200" b="1" dirty="0">
-                <a:solidFill>
-                  <a:srgbClr val="FFFFFF"/>
-                </a:solidFill>
-                <a:latin typeface="游ゴシック" pitchFamily="34" charset="0"/>
-                <a:ea typeface="游ゴシック" pitchFamily="34" charset="-122"/>
-                <a:cs typeface="游ゴシック" pitchFamily="34" charset="-120"/>
-              </a:rPr>
-              <a:t>教育機関</a:t>
-            </a:r>
-            <a:endParaRPr lang="en-US" sz="1200" dirty="0"/>
+            <a:off x="1005840" y="4434840"/>
+            <a:ext cx="10149840" cy="502920"/>
+          </a:xfrm>
+          <a:prstGeom prst="rect">
+            <a:avLst/>
+          </a:prstGeom>
+          <a:noFill/>
+          <a:ln/>
+        </p:spPr>
+        <p:txBody>
+          <a:bodyPr wrap="square" lIns="0" tIns="0" rIns="0" bIns="0" rtlCol="0" anchor="ctr"/>
+          <a:lstStyle/>
+          <a:p>
+            <a:pPr indent="0" marL="0">
+              <a:buNone/>
+            </a:pPr>
+            <a:r>
+              <a:rPr lang="en-US" sz="2200" b="1" dirty="0">
+                <a:solidFill>
+                  <a:srgbClr val="F1DCCF"/>
+                </a:solidFill>
+                <a:latin typeface="游ゴシック" pitchFamily="34" charset="0"/>
+                <a:ea typeface="游ゴシック" pitchFamily="34" charset="-122"/>
+                <a:cs typeface="游ゴシック" pitchFamily="34" charset="-120"/>
+              </a:rPr>
+              <a:t>鍵は「書類」ではなく、「対話」</a:t>
+            </a:r>
+            <a:endParaRPr lang="en-US" sz="2200" dirty="0"/>
           </a:p>
         </p:txBody>
       </p:sp>
@@ -3688,8 +3789,8 @@
         </p:nvSpPr>
         <p:spPr>
           <a:xfrm>
-            <a:off x="640080" y="1920240"/>
-            <a:ext cx="3246120" cy="3931920"/>
+            <a:off x="1005840" y="4937760"/>
+            <a:ext cx="10149840" cy="640080"/>
           </a:xfrm>
           <a:prstGeom prst="rect">
             <a:avLst/>
@@ -3701,52 +3802,21 @@
           <a:bodyPr wrap="square" lIns="0" tIns="0" rIns="0" bIns="0" rtlCol="0" anchor="t"/>
           <a:lstStyle/>
           <a:p>
-            <a:pPr marL="342900" indent="-342900">
-              <a:lnSpc>
-                <a:spcPct val="130000"/>
-              </a:lnSpc>
-              <a:spcAft>
-                <a:spcPts val="1000"/>
-              </a:spcAft>
-              <a:buSzPct val="100000"/>
-              <a:buChar char="●"/>
-            </a:pPr>
-            <a:r>
-              <a:rPr lang="en-US" sz="1350" dirty="0">
-                <a:solidFill>
-                  <a:srgbClr val="3A3A3A"/>
-                </a:solidFill>
-                <a:latin typeface="游ゴシック" pitchFamily="34" charset="0"/>
-                <a:ea typeface="游ゴシック" pitchFamily="34" charset="-122"/>
-                <a:cs typeface="游ゴシック" pitchFamily="34" charset="-120"/>
-              </a:rPr>
-              <a:t>専門家の仕事を奪うのではなく、「生きる準備」の入口を開き、必要な専門家へ橋渡しする結節点でありたい</a:t>
-            </a:r>
-            <a:endParaRPr lang="en-US" sz="1350" dirty="0"/>
-          </a:p>
-          <a:p>
-            <a:pPr marL="342900" indent="-342900">
-              <a:lnSpc>
-                <a:spcPct val="130000"/>
-              </a:lnSpc>
-              <a:spcAft>
-                <a:spcPts val="1400"/>
-              </a:spcAft>
-              <a:buSzPct val="100000"/>
-              <a:buChar char="●"/>
-            </a:pPr>
-            <a:r>
-              <a:rPr lang="en-US" sz="1350" dirty="0">
-                <a:solidFill>
-                  <a:srgbClr val="3A3A3A"/>
-                </a:solidFill>
-                <a:latin typeface="游ゴシック" pitchFamily="34" charset="0"/>
-                <a:ea typeface="游ゴシック" pitchFamily="34" charset="-122"/>
-                <a:cs typeface="游ゴシック" pitchFamily="34" charset="-120"/>
-              </a:rPr>
-              <a:t>士業・金融機関にこそ「繋ぐノートサポートアドバイザー®」を取得していただき、共に「心置きなく生ききる社会」をつくる</a:t>
-            </a:r>
-            <a:endParaRPr lang="en-US" sz="1350" dirty="0"/>
+            <a:pPr indent="0" marL="0">
+              <a:buNone/>
+            </a:pPr>
+            <a:r>
+              <a:rPr lang="en-US" sz="1250" dirty="0">
+                <a:solidFill>
+                  <a:srgbClr val="C7CEDA"/>
+                </a:solidFill>
+                <a:latin typeface="游ゴシック" pitchFamily="34" charset="0"/>
+                <a:ea typeface="游ゴシック" pitchFamily="34" charset="-122"/>
+                <a:cs typeface="游ゴシック" pitchFamily="34" charset="-120"/>
+              </a:rPr>
+              <a:t>相関関係であり因果関係ではない点に留意しつつ、対話というメカニズムに絞って語ることで、誠実かつ厳密な説明になる</a:t>
+            </a:r>
+            <a:endParaRPr lang="en-US" sz="1250" dirty="0"/>
           </a:p>
         </p:txBody>
       </p:sp>
@@ -3854,7 +3924,7 @@
                 <a:ea typeface="游ゴシック" pitchFamily="34" charset="-122"/>
                 <a:cs typeface="游ゴシック" pitchFamily="34" charset="-120"/>
               </a:rPr>
-              <a:t>CASE STUDY</a:t>
+              <a:t>PHILOSOPHY</a:t>
             </a:r>
             <a:endParaRPr lang="en-US" sz="1300" dirty="0"/>
           </a:p>
@@ -3893,7 +3963,7 @@
                 <a:ea typeface="游ゴシック" pitchFamily="34" charset="-122"/>
                 <a:cs typeface="游ゴシック" pitchFamily="34" charset="-120"/>
               </a:rPr>
-              <a:t>実例 ― 「社会貢献」が開く、新しい扉</a:t>
+              <a:t>経営思想 ― 「競争」から「共存」へ</a:t>
             </a:r>
             <a:endParaRPr lang="en-US" sz="2800" dirty="0"/>
           </a:p>
@@ -3907,25 +3977,16 @@
         </p:nvSpPr>
         <p:spPr>
           <a:xfrm>
-            <a:off x="640080" y="1737360"/>
-            <a:ext cx="5257800" cy="3931920"/>
-          </a:xfrm>
-          <a:prstGeom prst="roundRect">
-            <a:avLst>
-              <a:gd name="adj" fmla="val 2326"/>
-            </a:avLst>
+            <a:off x="5806440" y="3200400"/>
+            <a:ext cx="1828800" cy="1828800"/>
+          </a:xfrm>
+          <a:prstGeom prst="ellipse">
+            <a:avLst/>
           </a:prstGeom>
           <a:solidFill>
-            <a:srgbClr val="F6F1EA"/>
+            <a:srgbClr val="C9603F"/>
           </a:solidFill>
           <a:ln/>
-          <a:effectLst>
-            <a:outerShdw sx="100000" sy="100000" kx="0" ky="0" algn="bl" rotWithShape="0" blurRad="101600" dist="38100" dir="5400000">
-              <a:srgbClr val="10233A">
-                <a:alpha val="18000"/>
-              </a:srgbClr>
-            </a:outerShdw>
-          </a:effectLst>
         </p:spPr>
       </p:sp>
       <p:sp>
@@ -3936,86 +3997,491 @@
         </p:nvSpPr>
         <p:spPr>
           <a:xfrm>
-            <a:off x="914400" y="1965960"/>
-            <a:ext cx="4709160" cy="457200"/>
-          </a:xfrm>
-          <a:prstGeom prst="rect">
-            <a:avLst/>
-          </a:prstGeom>
-          <a:noFill/>
-          <a:ln/>
-        </p:spPr>
-        <p:txBody>
-          <a:bodyPr wrap="square" lIns="0" tIns="0" rIns="0" bIns="0" rtlCol="0" anchor="ctr"/>
-          <a:lstStyle/>
-          <a:p>
-            <a:pPr indent="0" marL="0">
-              <a:buNone/>
-            </a:pPr>
-            <a:r>
-              <a:rPr lang="en-US" sz="1700" b="1" dirty="0">
-                <a:solidFill>
-                  <a:srgbClr val="1E3A5F"/>
-                </a:solidFill>
-                <a:latin typeface="游ゴシック" pitchFamily="34" charset="0"/>
-                <a:ea typeface="游ゴシック" pitchFamily="34" charset="-122"/>
-                <a:cs typeface="游ゴシック" pitchFamily="34" charset="-120"/>
-              </a:rPr>
-              <a:t>法人開拓は、ドアノックから</a:t>
-            </a:r>
-            <a:endParaRPr lang="en-US" sz="1700" dirty="0"/>
-          </a:p>
-        </p:txBody>
-      </p:sp>
-      <p:sp>
-        <p:nvSpPr>
-          <p:cNvPr id="6" name="Text 4"/>
-          <p:cNvSpPr txBox="1"/>
-          <p:nvPr/>
-        </p:nvSpPr>
-        <p:spPr>
-          <a:xfrm>
-            <a:off x="914400" y="2395728"/>
-            <a:ext cx="4709160" cy="365760"/>
-          </a:xfrm>
-          <a:prstGeom prst="rect">
-            <a:avLst/>
-          </a:prstGeom>
-          <a:noFill/>
-          <a:ln/>
-        </p:spPr>
-        <p:txBody>
-          <a:bodyPr wrap="square" lIns="0" tIns="0" rIns="0" bIns="0" rtlCol="0" anchor="ctr"/>
-          <a:lstStyle/>
-          <a:p>
-            <a:pPr indent="0" marL="0">
-              <a:buNone/>
-            </a:pPr>
-            <a:r>
-              <a:rPr lang="en-US" sz="1150" dirty="0">
-                <a:solidFill>
-                  <a:srgbClr val="6B6B6B"/>
-                </a:solidFill>
-                <a:latin typeface="游ゴシック" pitchFamily="34" charset="0"/>
-                <a:ea typeface="游ゴシック" pitchFamily="34" charset="-122"/>
-                <a:cs typeface="游ゴシック" pitchFamily="34" charset="-120"/>
-              </a:rPr>
-              <a:t>運送業・従業員約200名規模の企業への導入事例</a:t>
-            </a:r>
-            <a:endParaRPr lang="en-US" sz="1150" dirty="0"/>
-          </a:p>
-        </p:txBody>
-      </p:sp>
-      <p:sp>
-        <p:nvSpPr>
-          <p:cNvPr id="7" name="Text 5"/>
-          <p:cNvSpPr txBox="1"/>
-          <p:nvPr/>
-        </p:nvSpPr>
-        <p:spPr>
-          <a:xfrm>
-            <a:off x="914400" y="2880360"/>
-            <a:ext cx="4709160" cy="1920240"/>
+            <a:off x="5532120" y="3200400"/>
+            <a:ext cx="2377440" cy="1828800"/>
+          </a:xfrm>
+          <a:prstGeom prst="rect">
+            <a:avLst/>
+          </a:prstGeom>
+          <a:noFill/>
+          <a:ln/>
+        </p:spPr>
+        <p:txBody>
+          <a:bodyPr wrap="square" lIns="0" tIns="0" rIns="0" bIns="0" rtlCol="0" anchor="ctr"/>
+          <a:lstStyle/>
+          <a:p>
+            <a:pPr algn="ctr" indent="0" marL="0">
+              <a:buNone/>
+            </a:pPr>
+            <a:r>
+              <a:rPr lang="en-US" sz="1300" b="1" dirty="0">
+                <a:solidFill>
+                  <a:srgbClr val="FFFFFF"/>
+                </a:solidFill>
+                <a:latin typeface="游ゴシック" pitchFamily="34" charset="0"/>
+                <a:ea typeface="游ゴシック" pitchFamily="34" charset="-122"/>
+                <a:cs typeface="游ゴシック" pitchFamily="34" charset="-120"/>
+              </a:rPr>
+              <a:t>繋ぐグループ</a:t>
+            </a:r>
+            <a:endParaRPr lang="en-US" sz="1300" dirty="0"/>
+          </a:p>
+          <a:p>
+            <a:pPr algn="ctr" indent="0" marL="0">
+              <a:buNone/>
+            </a:pPr>
+            <a:r>
+              <a:rPr lang="en-US" sz="1300" b="1" dirty="0">
+                <a:solidFill>
+                  <a:srgbClr val="FFFFFF"/>
+                </a:solidFill>
+                <a:latin typeface="游ゴシック" pitchFamily="34" charset="0"/>
+                <a:ea typeface="游ゴシック" pitchFamily="34" charset="-122"/>
+                <a:cs typeface="游ゴシック" pitchFamily="34" charset="-120"/>
+              </a:rPr>
+              <a:t>（生きる準備</a:t>
+            </a:r>
+            <a:endParaRPr lang="en-US" sz="1300" dirty="0"/>
+          </a:p>
+          <a:p>
+            <a:pPr algn="ctr" indent="0" marL="0">
+              <a:buNone/>
+            </a:pPr>
+            <a:r>
+              <a:rPr lang="en-US" sz="1300" b="1" dirty="0">
+                <a:solidFill>
+                  <a:srgbClr val="FFFFFF"/>
+                </a:solidFill>
+                <a:latin typeface="游ゴシック" pitchFamily="34" charset="0"/>
+                <a:ea typeface="游ゴシック" pitchFamily="34" charset="-122"/>
+                <a:cs typeface="游ゴシック" pitchFamily="34" charset="-120"/>
+              </a:rPr>
+              <a:t>の入口）</a:t>
+            </a:r>
+            <a:endParaRPr lang="en-US" sz="1300" dirty="0"/>
+          </a:p>
+        </p:txBody>
+      </p:sp>
+      <p:sp>
+        <p:nvSpPr>
+          <p:cNvPr id="6" name="Shape 4"/>
+          <p:cNvSpPr/>
+          <p:nvPr/>
+        </p:nvSpPr>
+        <p:spPr>
+          <a:xfrm>
+            <a:off x="6720840" y="2638044"/>
+            <a:ext cx="9144" cy="1476756"/>
+          </a:xfrm>
+          <a:prstGeom prst="line">
+            <a:avLst/>
+          </a:prstGeom>
+          <a:noFill/>
+          <a:ln w="19050">
+            <a:solidFill>
+              <a:srgbClr val="C9C2B6"/>
+            </a:solidFill>
+            <a:prstDash val="sysDot"/>
+          </a:ln>
+        </p:spPr>
+      </p:sp>
+      <p:sp>
+        <p:nvSpPr>
+          <p:cNvPr id="7" name="Shape 5"/>
+          <p:cNvSpPr/>
+          <p:nvPr/>
+        </p:nvSpPr>
+        <p:spPr>
+          <a:xfrm>
+            <a:off x="6720840" y="3658457"/>
+            <a:ext cx="1652328" cy="456343"/>
+          </a:xfrm>
+          <a:prstGeom prst="line">
+            <a:avLst/>
+          </a:prstGeom>
+          <a:noFill/>
+          <a:ln w="19050">
+            <a:solidFill>
+              <a:srgbClr val="C9C2B6"/>
+            </a:solidFill>
+            <a:prstDash val="sysDot"/>
+          </a:ln>
+        </p:spPr>
+      </p:sp>
+      <p:sp>
+        <p:nvSpPr>
+          <p:cNvPr id="8" name="Shape 6"/>
+          <p:cNvSpPr/>
+          <p:nvPr/>
+        </p:nvSpPr>
+        <p:spPr>
+          <a:xfrm>
+            <a:off x="6720840" y="4114800"/>
+            <a:ext cx="1021195" cy="1194721"/>
+          </a:xfrm>
+          <a:prstGeom prst="line">
+            <a:avLst/>
+          </a:prstGeom>
+          <a:noFill/>
+          <a:ln w="19050">
+            <a:solidFill>
+              <a:srgbClr val="C9C2B6"/>
+            </a:solidFill>
+            <a:prstDash val="sysDot"/>
+          </a:ln>
+        </p:spPr>
+      </p:sp>
+      <p:sp>
+        <p:nvSpPr>
+          <p:cNvPr id="9" name="Shape 7"/>
+          <p:cNvSpPr/>
+          <p:nvPr/>
+        </p:nvSpPr>
+        <p:spPr>
+          <a:xfrm>
+            <a:off x="5699645" y="4114800"/>
+            <a:ext cx="1021195" cy="1194721"/>
+          </a:xfrm>
+          <a:prstGeom prst="line">
+            <a:avLst/>
+          </a:prstGeom>
+          <a:noFill/>
+          <a:ln w="19050">
+            <a:solidFill>
+              <a:srgbClr val="C9C2B6"/>
+            </a:solidFill>
+            <a:prstDash val="sysDot"/>
+          </a:ln>
+        </p:spPr>
+      </p:sp>
+      <p:sp>
+        <p:nvSpPr>
+          <p:cNvPr id="10" name="Shape 8"/>
+          <p:cNvSpPr/>
+          <p:nvPr/>
+        </p:nvSpPr>
+        <p:spPr>
+          <a:xfrm>
+            <a:off x="5068512" y="3658457"/>
+            <a:ext cx="1652328" cy="456343"/>
+          </a:xfrm>
+          <a:prstGeom prst="line">
+            <a:avLst/>
+          </a:prstGeom>
+          <a:noFill/>
+          <a:ln w="19050">
+            <a:solidFill>
+              <a:srgbClr val="C9C2B6"/>
+            </a:solidFill>
+            <a:prstDash val="sysDot"/>
+          </a:ln>
+        </p:spPr>
+      </p:sp>
+      <p:sp>
+        <p:nvSpPr>
+          <p:cNvPr id="11" name="Shape 9"/>
+          <p:cNvSpPr/>
+          <p:nvPr/>
+        </p:nvSpPr>
+        <p:spPr>
+          <a:xfrm>
+            <a:off x="6103620" y="2020824"/>
+            <a:ext cx="1234440" cy="1234440"/>
+          </a:xfrm>
+          <a:prstGeom prst="ellipse">
+            <a:avLst/>
+          </a:prstGeom>
+          <a:solidFill>
+            <a:srgbClr val="1E3A5F"/>
+          </a:solidFill>
+          <a:ln/>
+        </p:spPr>
+      </p:sp>
+      <p:sp>
+        <p:nvSpPr>
+          <p:cNvPr id="12" name="Text 10"/>
+          <p:cNvSpPr txBox="1"/>
+          <p:nvPr/>
+        </p:nvSpPr>
+        <p:spPr>
+          <a:xfrm>
+            <a:off x="5829300" y="2020824"/>
+            <a:ext cx="1783080" cy="1234440"/>
+          </a:xfrm>
+          <a:prstGeom prst="rect">
+            <a:avLst/>
+          </a:prstGeom>
+          <a:noFill/>
+          <a:ln/>
+        </p:spPr>
+        <p:txBody>
+          <a:bodyPr wrap="square" lIns="0" tIns="0" rIns="0" bIns="0" rtlCol="0" anchor="ctr"/>
+          <a:lstStyle/>
+          <a:p>
+            <a:pPr algn="ctr" indent="0" marL="0">
+              <a:buNone/>
+            </a:pPr>
+            <a:r>
+              <a:rPr lang="en-US" sz="1200" b="1" dirty="0">
+                <a:solidFill>
+                  <a:srgbClr val="FFFFFF"/>
+                </a:solidFill>
+                <a:latin typeface="游ゴシック" pitchFamily="34" charset="0"/>
+                <a:ea typeface="游ゴシック" pitchFamily="34" charset="-122"/>
+                <a:cs typeface="游ゴシック" pitchFamily="34" charset="-120"/>
+              </a:rPr>
+              <a:t>金融機関</a:t>
+            </a:r>
+            <a:endParaRPr lang="en-US" sz="1200" dirty="0"/>
+          </a:p>
+        </p:txBody>
+      </p:sp>
+      <p:sp>
+        <p:nvSpPr>
+          <p:cNvPr id="13" name="Shape 11"/>
+          <p:cNvSpPr/>
+          <p:nvPr/>
+        </p:nvSpPr>
+        <p:spPr>
+          <a:xfrm>
+            <a:off x="7755948" y="3041237"/>
+            <a:ext cx="1234440" cy="1234440"/>
+          </a:xfrm>
+          <a:prstGeom prst="ellipse">
+            <a:avLst/>
+          </a:prstGeom>
+          <a:solidFill>
+            <a:srgbClr val="1E3A5F"/>
+          </a:solidFill>
+          <a:ln/>
+        </p:spPr>
+      </p:sp>
+      <p:sp>
+        <p:nvSpPr>
+          <p:cNvPr id="14" name="Text 12"/>
+          <p:cNvSpPr txBox="1"/>
+          <p:nvPr/>
+        </p:nvSpPr>
+        <p:spPr>
+          <a:xfrm>
+            <a:off x="7481628" y="3041237"/>
+            <a:ext cx="1783080" cy="1234440"/>
+          </a:xfrm>
+          <a:prstGeom prst="rect">
+            <a:avLst/>
+          </a:prstGeom>
+          <a:noFill/>
+          <a:ln/>
+        </p:spPr>
+        <p:txBody>
+          <a:bodyPr wrap="square" lIns="0" tIns="0" rIns="0" bIns="0" rtlCol="0" anchor="ctr"/>
+          <a:lstStyle/>
+          <a:p>
+            <a:pPr algn="ctr" indent="0" marL="0">
+              <a:buNone/>
+            </a:pPr>
+            <a:r>
+              <a:rPr lang="en-US" sz="1200" b="1" dirty="0">
+                <a:solidFill>
+                  <a:srgbClr val="FFFFFF"/>
+                </a:solidFill>
+                <a:latin typeface="游ゴシック" pitchFamily="34" charset="0"/>
+                <a:ea typeface="游ゴシック" pitchFamily="34" charset="-122"/>
+                <a:cs typeface="游ゴシック" pitchFamily="34" charset="-120"/>
+              </a:rPr>
+              <a:t>士業</a:t>
+            </a:r>
+            <a:endParaRPr lang="en-US" sz="1200" dirty="0"/>
+          </a:p>
+        </p:txBody>
+      </p:sp>
+      <p:sp>
+        <p:nvSpPr>
+          <p:cNvPr id="15" name="Shape 13"/>
+          <p:cNvSpPr/>
+          <p:nvPr/>
+        </p:nvSpPr>
+        <p:spPr>
+          <a:xfrm>
+            <a:off x="7124815" y="4692301"/>
+            <a:ext cx="1234440" cy="1234440"/>
+          </a:xfrm>
+          <a:prstGeom prst="ellipse">
+            <a:avLst/>
+          </a:prstGeom>
+          <a:solidFill>
+            <a:srgbClr val="1E3A5F"/>
+          </a:solidFill>
+          <a:ln/>
+        </p:spPr>
+      </p:sp>
+      <p:sp>
+        <p:nvSpPr>
+          <p:cNvPr id="16" name="Text 14"/>
+          <p:cNvSpPr txBox="1"/>
+          <p:nvPr/>
+        </p:nvSpPr>
+        <p:spPr>
+          <a:xfrm>
+            <a:off x="6850495" y="4692301"/>
+            <a:ext cx="1783080" cy="1234440"/>
+          </a:xfrm>
+          <a:prstGeom prst="rect">
+            <a:avLst/>
+          </a:prstGeom>
+          <a:noFill/>
+          <a:ln/>
+        </p:spPr>
+        <p:txBody>
+          <a:bodyPr wrap="square" lIns="0" tIns="0" rIns="0" bIns="0" rtlCol="0" anchor="ctr"/>
+          <a:lstStyle/>
+          <a:p>
+            <a:pPr algn="ctr" indent="0" marL="0">
+              <a:buNone/>
+            </a:pPr>
+            <a:r>
+              <a:rPr lang="en-US" sz="1200" b="1" dirty="0">
+                <a:solidFill>
+                  <a:srgbClr val="FFFFFF"/>
+                </a:solidFill>
+                <a:latin typeface="游ゴシック" pitchFamily="34" charset="0"/>
+                <a:ea typeface="游ゴシック" pitchFamily="34" charset="-122"/>
+                <a:cs typeface="游ゴシック" pitchFamily="34" charset="-120"/>
+              </a:rPr>
+              <a:t>福祉・介護</a:t>
+            </a:r>
+            <a:endParaRPr lang="en-US" sz="1200" dirty="0"/>
+          </a:p>
+        </p:txBody>
+      </p:sp>
+      <p:sp>
+        <p:nvSpPr>
+          <p:cNvPr id="17" name="Shape 15"/>
+          <p:cNvSpPr/>
+          <p:nvPr/>
+        </p:nvSpPr>
+        <p:spPr>
+          <a:xfrm>
+            <a:off x="5082425" y="4692301"/>
+            <a:ext cx="1234440" cy="1234440"/>
+          </a:xfrm>
+          <a:prstGeom prst="ellipse">
+            <a:avLst/>
+          </a:prstGeom>
+          <a:solidFill>
+            <a:srgbClr val="1E3A5F"/>
+          </a:solidFill>
+          <a:ln/>
+        </p:spPr>
+      </p:sp>
+      <p:sp>
+        <p:nvSpPr>
+          <p:cNvPr id="18" name="Text 16"/>
+          <p:cNvSpPr txBox="1"/>
+          <p:nvPr/>
+        </p:nvSpPr>
+        <p:spPr>
+          <a:xfrm>
+            <a:off x="4808105" y="4692301"/>
+            <a:ext cx="1783080" cy="1234440"/>
+          </a:xfrm>
+          <a:prstGeom prst="rect">
+            <a:avLst/>
+          </a:prstGeom>
+          <a:noFill/>
+          <a:ln/>
+        </p:spPr>
+        <p:txBody>
+          <a:bodyPr wrap="square" lIns="0" tIns="0" rIns="0" bIns="0" rtlCol="0" anchor="ctr"/>
+          <a:lstStyle/>
+          <a:p>
+            <a:pPr algn="ctr" indent="0" marL="0">
+              <a:buNone/>
+            </a:pPr>
+            <a:r>
+              <a:rPr lang="en-US" sz="1200" b="1" dirty="0">
+                <a:solidFill>
+                  <a:srgbClr val="FFFFFF"/>
+                </a:solidFill>
+                <a:latin typeface="游ゴシック" pitchFamily="34" charset="0"/>
+                <a:ea typeface="游ゴシック" pitchFamily="34" charset="-122"/>
+                <a:cs typeface="游ゴシック" pitchFamily="34" charset="-120"/>
+              </a:rPr>
+              <a:t>不動産</a:t>
+            </a:r>
+            <a:endParaRPr lang="en-US" sz="1200" dirty="0"/>
+          </a:p>
+        </p:txBody>
+      </p:sp>
+      <p:sp>
+        <p:nvSpPr>
+          <p:cNvPr id="19" name="Shape 17"/>
+          <p:cNvSpPr/>
+          <p:nvPr/>
+        </p:nvSpPr>
+        <p:spPr>
+          <a:xfrm>
+            <a:off x="4451292" y="3041237"/>
+            <a:ext cx="1234440" cy="1234440"/>
+          </a:xfrm>
+          <a:prstGeom prst="ellipse">
+            <a:avLst/>
+          </a:prstGeom>
+          <a:solidFill>
+            <a:srgbClr val="1E3A5F"/>
+          </a:solidFill>
+          <a:ln/>
+        </p:spPr>
+      </p:sp>
+      <p:sp>
+        <p:nvSpPr>
+          <p:cNvPr id="20" name="Text 18"/>
+          <p:cNvSpPr txBox="1"/>
+          <p:nvPr/>
+        </p:nvSpPr>
+        <p:spPr>
+          <a:xfrm>
+            <a:off x="4176972" y="3041237"/>
+            <a:ext cx="1783080" cy="1234440"/>
+          </a:xfrm>
+          <a:prstGeom prst="rect">
+            <a:avLst/>
+          </a:prstGeom>
+          <a:noFill/>
+          <a:ln/>
+        </p:spPr>
+        <p:txBody>
+          <a:bodyPr wrap="square" lIns="0" tIns="0" rIns="0" bIns="0" rtlCol="0" anchor="ctr"/>
+          <a:lstStyle/>
+          <a:p>
+            <a:pPr algn="ctr" indent="0" marL="0">
+              <a:buNone/>
+            </a:pPr>
+            <a:r>
+              <a:rPr lang="en-US" sz="1200" b="1" dirty="0">
+                <a:solidFill>
+                  <a:srgbClr val="FFFFFF"/>
+                </a:solidFill>
+                <a:latin typeface="游ゴシック" pitchFamily="34" charset="0"/>
+                <a:ea typeface="游ゴシック" pitchFamily="34" charset="-122"/>
+                <a:cs typeface="游ゴシック" pitchFamily="34" charset="-120"/>
+              </a:rPr>
+              <a:t>教育機関</a:t>
+            </a:r>
+            <a:endParaRPr lang="en-US" sz="1200" dirty="0"/>
+          </a:p>
+        </p:txBody>
+      </p:sp>
+      <p:sp>
+        <p:nvSpPr>
+          <p:cNvPr id="21" name="Text 19"/>
+          <p:cNvSpPr txBox="1"/>
+          <p:nvPr/>
+        </p:nvSpPr>
+        <p:spPr>
+          <a:xfrm>
+            <a:off x="640080" y="1920240"/>
+            <a:ext cx="3246120" cy="3931920"/>
           </a:xfrm>
           <a:prstGeom prst="rect">
             <a:avLst/>
@@ -4029,7 +4495,7 @@
           <a:p>
             <a:pPr marL="342900" indent="-342900">
               <a:lnSpc>
-                <a:spcPct val="125000"/>
+                <a:spcPct val="130000"/>
               </a:lnSpc>
               <a:spcAft>
                 <a:spcPts val="1000"/>
@@ -4038,7 +4504,7 @@
               <a:buChar char="●"/>
             </a:pPr>
             <a:r>
-              <a:rPr lang="en-US" sz="1250" dirty="0">
+              <a:rPr lang="en-US" sz="1350" dirty="0">
                 <a:solidFill>
                   <a:srgbClr val="3A3A3A"/>
                 </a:solidFill>
@@ -4046,23 +4512,23 @@
                 <a:ea typeface="游ゴシック" pitchFamily="34" charset="-122"/>
                 <a:cs typeface="游ゴシック" pitchFamily="34" charset="-120"/>
               </a:rPr>
-              <a:t>「繋ぐノートワークセミナー」を本社・支社で複数回開催し、従業員全員に接点を持つ</a:t>
-            </a:r>
-            <a:endParaRPr lang="en-US" sz="1250" dirty="0"/>
+              <a:t>専門家の仕事を奪うのではなく、「生きる準備」の入口を開き、必要な専門家へ橋渡しする結節点でありたい</a:t>
+            </a:r>
+            <a:endParaRPr lang="en-US" sz="1350" dirty="0"/>
           </a:p>
           <a:p>
             <a:pPr marL="342900" indent="-342900">
               <a:lnSpc>
-                <a:spcPct val="125000"/>
+                <a:spcPct val="130000"/>
               </a:lnSpc>
               <a:spcAft>
-                <a:spcPts val="1000"/>
+                <a:spcPts val="1400"/>
               </a:spcAft>
               <a:buSzPct val="100000"/>
               <a:buChar char="●"/>
             </a:pPr>
             <a:r>
-              <a:rPr lang="en-US" sz="1250" dirty="0">
+              <a:rPr lang="en-US" sz="1350" dirty="0">
                 <a:solidFill>
                   <a:srgbClr val="3A3A3A"/>
                 </a:solidFill>
@@ -4070,401 +4536,15 @@
                 <a:ea typeface="游ゴシック" pitchFamily="34" charset="-122"/>
                 <a:cs typeface="游ゴシック" pitchFamily="34" charset="-120"/>
               </a:rPr>
-              <a:t>持ち込んだのは“商品”ではなく、従業員と家族の命・これからを考える機会</a:t>
-            </a:r>
-            <a:endParaRPr lang="en-US" sz="1250" dirty="0"/>
-          </a:p>
-          <a:p>
-            <a:pPr marL="342900" indent="-342900">
-              <a:lnSpc>
-                <a:spcPct val="125000"/>
-              </a:lnSpc>
-              <a:spcAft>
-                <a:spcPts val="800"/>
-              </a:spcAft>
-              <a:buSzPct val="100000"/>
-              <a:buChar char="●"/>
-            </a:pPr>
-            <a:r>
-              <a:rPr lang="en-US" sz="1250" dirty="0">
-                <a:solidFill>
-                  <a:srgbClr val="3A3A3A"/>
-                </a:solidFill>
-                <a:latin typeface="游ゴシック" pitchFamily="34" charset="0"/>
-                <a:ea typeface="游ゴシック" pitchFamily="34" charset="-122"/>
-                <a:cs typeface="游ゴシック" pitchFamily="34" charset="-120"/>
-              </a:rPr>
-              <a:t>セミナー後、自然な形で保険見直しの相談へ。本業は信頼の後からついてきた</a:t>
-            </a:r>
-            <a:endParaRPr lang="en-US" sz="1250" dirty="0"/>
-          </a:p>
-        </p:txBody>
-      </p:sp>
-      <p:sp>
-        <p:nvSpPr>
-          <p:cNvPr id="8" name="Shape 6"/>
-          <p:cNvSpPr/>
-          <p:nvPr/>
-        </p:nvSpPr>
-        <p:spPr>
-          <a:xfrm>
-            <a:off x="914400" y="4846320"/>
-            <a:ext cx="4709160" cy="640080"/>
-          </a:xfrm>
-          <a:prstGeom prst="roundRect">
-            <a:avLst>
-              <a:gd name="adj" fmla="val 11429"/>
-            </a:avLst>
-          </a:prstGeom>
-          <a:solidFill>
-            <a:srgbClr val="1E3A5F"/>
-          </a:solidFill>
-          <a:ln/>
-        </p:spPr>
-      </p:sp>
-      <p:sp>
-        <p:nvSpPr>
-          <p:cNvPr id="9" name="Text 7"/>
-          <p:cNvSpPr txBox="1"/>
-          <p:nvPr/>
-        </p:nvSpPr>
-        <p:spPr>
-          <a:xfrm>
-            <a:off x="914400" y="4846320"/>
-            <a:ext cx="4709160" cy="640080"/>
-          </a:xfrm>
-          <a:prstGeom prst="rect">
-            <a:avLst/>
-          </a:prstGeom>
-          <a:noFill/>
-          <a:ln/>
-        </p:spPr>
-        <p:txBody>
-          <a:bodyPr wrap="square" lIns="0" tIns="0" rIns="0" bIns="0" rtlCol="0" anchor="ctr"/>
-          <a:lstStyle/>
-          <a:p>
-            <a:pPr algn="ctr" indent="0" marL="0">
-              <a:buNone/>
-            </a:pPr>
-            <a:r>
-              <a:rPr lang="en-US" sz="1550" b="1" dirty="0">
-                <a:solidFill>
-                  <a:srgbClr val="F1DCCF"/>
-                </a:solidFill>
-                <a:latin typeface="游ゴシック" pitchFamily="34" charset="0"/>
-                <a:ea typeface="游ゴシック" pitchFamily="34" charset="-122"/>
-                <a:cs typeface="游ゴシック" pitchFamily="34" charset="-120"/>
-              </a:rPr>
-              <a:t>「ドアノックは、社会貢献。」</a:t>
-            </a:r>
-            <a:endParaRPr lang="en-US" sz="1550" dirty="0"/>
-          </a:p>
-        </p:txBody>
-      </p:sp>
-      <p:sp>
-        <p:nvSpPr>
-          <p:cNvPr id="10" name="Shape 8"/>
-          <p:cNvSpPr/>
-          <p:nvPr/>
-        </p:nvSpPr>
-        <p:spPr>
-          <a:xfrm>
-            <a:off x="6263640" y="1737360"/>
-            <a:ext cx="5257800" cy="3931920"/>
-          </a:xfrm>
-          <a:prstGeom prst="roundRect">
-            <a:avLst>
-              <a:gd name="adj" fmla="val 2326"/>
-            </a:avLst>
-          </a:prstGeom>
-          <a:solidFill>
-            <a:srgbClr val="F6F1EA"/>
-          </a:solidFill>
-          <a:ln/>
-          <a:effectLst>
-            <a:outerShdw sx="100000" sy="100000" kx="0" ky="0" algn="bl" rotWithShape="0" blurRad="101600" dist="38100" dir="5400000">
-              <a:srgbClr val="10233A">
-                <a:alpha val="18000"/>
-              </a:srgbClr>
-            </a:outerShdw>
-          </a:effectLst>
-        </p:spPr>
-      </p:sp>
-      <p:sp>
-        <p:nvSpPr>
-          <p:cNvPr id="11" name="Text 9"/>
-          <p:cNvSpPr txBox="1"/>
-          <p:nvPr/>
-        </p:nvSpPr>
-        <p:spPr>
-          <a:xfrm>
-            <a:off x="6537960" y="1965960"/>
-            <a:ext cx="4709160" cy="457200"/>
-          </a:xfrm>
-          <a:prstGeom prst="rect">
-            <a:avLst/>
-          </a:prstGeom>
-          <a:noFill/>
-          <a:ln/>
-        </p:spPr>
-        <p:txBody>
-          <a:bodyPr wrap="square" lIns="0" tIns="0" rIns="0" bIns="0" rtlCol="0" anchor="ctr"/>
-          <a:lstStyle/>
-          <a:p>
-            <a:pPr indent="0" marL="0">
-              <a:buNone/>
-            </a:pPr>
-            <a:r>
-              <a:rPr lang="en-US" sz="1700" b="1" dirty="0">
-                <a:solidFill>
-                  <a:srgbClr val="1E3A5F"/>
-                </a:solidFill>
-                <a:latin typeface="游ゴシック" pitchFamily="34" charset="0"/>
-                <a:ea typeface="游ゴシック" pitchFamily="34" charset="-122"/>
-                <a:cs typeface="游ゴシック" pitchFamily="34" charset="-120"/>
-              </a:rPr>
-              <a:t>一つの自治体から、全国モデルへ</a:t>
-            </a:r>
-            <a:endParaRPr lang="en-US" sz="1700" dirty="0"/>
-          </a:p>
-        </p:txBody>
-      </p:sp>
-      <p:sp>
-        <p:nvSpPr>
-          <p:cNvPr id="12" name="Text 10"/>
-          <p:cNvSpPr txBox="1"/>
-          <p:nvPr/>
-        </p:nvSpPr>
-        <p:spPr>
-          <a:xfrm>
-            <a:off x="6537960" y="2395728"/>
-            <a:ext cx="4709160" cy="365760"/>
-          </a:xfrm>
-          <a:prstGeom prst="rect">
-            <a:avLst/>
-          </a:prstGeom>
-          <a:noFill/>
-          <a:ln/>
-        </p:spPr>
-        <p:txBody>
-          <a:bodyPr wrap="square" lIns="0" tIns="0" rIns="0" bIns="0" rtlCol="0" anchor="ctr"/>
-          <a:lstStyle/>
-          <a:p>
-            <a:pPr indent="0" marL="0">
-              <a:buNone/>
-            </a:pPr>
-            <a:r>
-              <a:rPr lang="en-US" sz="1150" dirty="0">
-                <a:solidFill>
-                  <a:srgbClr val="6B6B6B"/>
-                </a:solidFill>
-                <a:latin typeface="游ゴシック" pitchFamily="34" charset="0"/>
-                <a:ea typeface="游ゴシック" pitchFamily="34" charset="-122"/>
-                <a:cs typeface="游ゴシック" pitchFamily="34" charset="-120"/>
-              </a:rPr>
-              <a:t>行政連携の広がり（朝来市 → 岸和田市）</a:t>
-            </a:r>
-            <a:endParaRPr lang="en-US" sz="1150" dirty="0"/>
-          </a:p>
-        </p:txBody>
-      </p:sp>
-      <p:sp>
-        <p:nvSpPr>
-          <p:cNvPr id="13" name="Text 11"/>
-          <p:cNvSpPr txBox="1"/>
-          <p:nvPr/>
-        </p:nvSpPr>
-        <p:spPr>
-          <a:xfrm>
-            <a:off x="6537960" y="2880360"/>
-            <a:ext cx="4709160" cy="1920240"/>
-          </a:xfrm>
-          <a:prstGeom prst="rect">
-            <a:avLst/>
-          </a:prstGeom>
-          <a:noFill/>
-          <a:ln/>
-        </p:spPr>
-        <p:txBody>
-          <a:bodyPr wrap="square" lIns="0" tIns="0" rIns="0" bIns="0" rtlCol="0" anchor="t"/>
-          <a:lstStyle/>
-          <a:p>
-            <a:pPr marL="342900" indent="-342900">
-              <a:lnSpc>
-                <a:spcPct val="125000"/>
-              </a:lnSpc>
-              <a:spcAft>
-                <a:spcPts val="1000"/>
-              </a:spcAft>
-              <a:buSzPct val="100000"/>
-              <a:buChar char="●"/>
-            </a:pPr>
-            <a:r>
-              <a:rPr lang="en-US" sz="1250" dirty="0">
-                <a:solidFill>
-                  <a:srgbClr val="3A3A3A"/>
-                </a:solidFill>
-                <a:latin typeface="游ゴシック" pitchFamily="34" charset="0"/>
-                <a:ea typeface="游ゴシック" pitchFamily="34" charset="-122"/>
-                <a:cs typeface="游ゴシック" pitchFamily="34" charset="-120"/>
-              </a:rPr>
-              <a:t>朝来市在宅医療・介護連携会議「身寄りのない人への支援検討ワーキング」への参画から始まった行政連携</a:t>
-            </a:r>
-            <a:endParaRPr lang="en-US" sz="1250" dirty="0"/>
-          </a:p>
-          <a:p>
-            <a:pPr marL="342900" indent="-342900">
-              <a:lnSpc>
-                <a:spcPct val="125000"/>
-              </a:lnSpc>
-              <a:spcAft>
-                <a:spcPts val="1000"/>
-              </a:spcAft>
-              <a:buSzPct val="100000"/>
-              <a:buChar char="●"/>
-            </a:pPr>
-            <a:r>
-              <a:rPr lang="en-US" sz="1250" dirty="0">
-                <a:solidFill>
-                  <a:srgbClr val="3A3A3A"/>
-                </a:solidFill>
-                <a:latin typeface="游ゴシック" pitchFamily="34" charset="0"/>
-                <a:ea typeface="游ゴシック" pitchFamily="34" charset="-122"/>
-                <a:cs typeface="游ゴシック" pitchFamily="34" charset="-120"/>
-              </a:rPr>
-              <a:t>岸和田市社会福祉協議会の研修（2026年10月）でも、専門職の縦割りを越えた「資源マップ」づくりを展開中</a:t>
-            </a:r>
-            <a:endParaRPr lang="en-US" sz="1250" dirty="0"/>
-          </a:p>
-          <a:p>
-            <a:pPr marL="342900" indent="-342900">
-              <a:lnSpc>
-                <a:spcPct val="125000"/>
-              </a:lnSpc>
-              <a:spcAft>
-                <a:spcPts val="800"/>
-              </a:spcAft>
-              <a:buSzPct val="100000"/>
-              <a:buChar char="●"/>
-            </a:pPr>
-            <a:r>
-              <a:rPr lang="en-US" sz="1250" dirty="0">
-                <a:solidFill>
-                  <a:srgbClr val="3A3A3A"/>
-                </a:solidFill>
-                <a:latin typeface="游ゴシック" pitchFamily="34" charset="0"/>
-                <a:ea typeface="游ゴシック" pitchFamily="34" charset="-122"/>
-                <a:cs typeface="游ゴシック" pitchFamily="34" charset="-120"/>
-              </a:rPr>
-              <a:t>一つの自治体で実証した手法を、他の自治体でも再現できる「型」として横展開している</a:t>
-            </a:r>
-            <a:endParaRPr lang="en-US" sz="1250" dirty="0"/>
-          </a:p>
-        </p:txBody>
-      </p:sp>
-      <p:sp>
-        <p:nvSpPr>
-          <p:cNvPr id="14" name="Shape 12"/>
-          <p:cNvSpPr/>
-          <p:nvPr/>
-        </p:nvSpPr>
-        <p:spPr>
-          <a:xfrm>
-            <a:off x="6537960" y="4846320"/>
-            <a:ext cx="4709160" cy="640080"/>
-          </a:xfrm>
-          <a:prstGeom prst="roundRect">
-            <a:avLst>
-              <a:gd name="adj" fmla="val 11429"/>
-            </a:avLst>
-          </a:prstGeom>
-          <a:solidFill>
-            <a:srgbClr val="C9603F"/>
-          </a:solidFill>
-          <a:ln/>
-        </p:spPr>
-      </p:sp>
-      <p:sp>
-        <p:nvSpPr>
-          <p:cNvPr id="15" name="Text 13"/>
-          <p:cNvSpPr txBox="1"/>
-          <p:nvPr/>
-        </p:nvSpPr>
-        <p:spPr>
-          <a:xfrm>
-            <a:off x="6537960" y="4846320"/>
-            <a:ext cx="4709160" cy="640080"/>
-          </a:xfrm>
-          <a:prstGeom prst="rect">
-            <a:avLst/>
-          </a:prstGeom>
-          <a:noFill/>
-          <a:ln/>
-        </p:spPr>
-        <p:txBody>
-          <a:bodyPr wrap="square" lIns="0" tIns="0" rIns="0" bIns="0" rtlCol="0" anchor="ctr"/>
-          <a:lstStyle/>
-          <a:p>
-            <a:pPr algn="ctr" indent="0" marL="0">
-              <a:buNone/>
-            </a:pPr>
-            <a:r>
-              <a:rPr lang="en-US" sz="1450" b="1" dirty="0">
-                <a:solidFill>
-                  <a:srgbClr val="FFFFFF"/>
-                </a:solidFill>
-                <a:latin typeface="游ゴシック" pitchFamily="34" charset="0"/>
-                <a:ea typeface="游ゴシック" pitchFamily="34" charset="-122"/>
-                <a:cs typeface="游ゴシック" pitchFamily="34" charset="-120"/>
-              </a:rPr>
-              <a:t>一つの街の実証を、次の街の手引きに。</a:t>
-            </a:r>
-            <a:endParaRPr lang="en-US" sz="1450" dirty="0"/>
-          </a:p>
-        </p:txBody>
-      </p:sp>
-      <p:sp>
-        <p:nvSpPr>
-          <p:cNvPr id="16" name="Text 14"/>
-          <p:cNvSpPr txBox="1"/>
-          <p:nvPr/>
-        </p:nvSpPr>
-        <p:spPr>
-          <a:xfrm>
-            <a:off x="640080" y="5989320"/>
-            <a:ext cx="10881360" cy="457200"/>
-          </a:xfrm>
-          <a:prstGeom prst="rect">
-            <a:avLst/>
-          </a:prstGeom>
-          <a:noFill/>
-          <a:ln/>
-        </p:spPr>
-        <p:txBody>
-          <a:bodyPr wrap="square" lIns="0" tIns="0" rIns="0" bIns="0" rtlCol="0" anchor="ctr"/>
-          <a:lstStyle/>
-          <a:p>
-            <a:pPr indent="0" marL="0">
-              <a:buNone/>
-            </a:pPr>
-            <a:r>
-              <a:rPr lang="en-US" sz="1250" i="1" dirty="0">
-                <a:solidFill>
-                  <a:srgbClr val="6B6B6B"/>
-                </a:solidFill>
-                <a:latin typeface="游ゴシック" pitchFamily="34" charset="0"/>
-                <a:ea typeface="游ゴシック" pitchFamily="34" charset="-122"/>
-                <a:cs typeface="游ゴシック" pitchFamily="34" charset="-120"/>
-              </a:rPr>
-              <a:t>「競争から共存へ」という経営思想が、実際の売上・連携へと転化している証拠です。</a:t>
-            </a:r>
-            <a:endParaRPr lang="en-US" sz="1250" dirty="0"/>
-          </a:p>
-        </p:txBody>
-      </p:sp>
-      <p:sp>
-        <p:nvSpPr>
-          <p:cNvPr id="17" name="Text 15"/>
+              <a:t>士業・金融機関にこそ「繋ぐノートサポートアドバイザー®」を取得していただき、共に「心置きなく生ききる社会」をつくる</a:t>
+            </a:r>
+            <a:endParaRPr lang="en-US" sz="1350" dirty="0"/>
+          </a:p>
+        </p:txBody>
+      </p:sp>
+      <p:sp>
+        <p:nvSpPr>
+          <p:cNvPr id="22" name="Text 20"/>
           <p:cNvSpPr txBox="1"/>
           <p:nvPr/>
         </p:nvSpPr>
@@ -4512,6 +4592,718 @@
 <file path=ppt/slides/slide13.xml><?xml version="1.0" encoding="utf-8"?>
 <p:sld xmlns:a="http://schemas.openxmlformats.org/drawingml/2006/main" xmlns:r="http://schemas.openxmlformats.org/officeDocument/2006/relationships" xmlns:p="http://schemas.openxmlformats.org/presentationml/2006/main">
   <p:cSld name="Slide 13">
+    <p:bg>
+      <p:bgPr>
+        <a:solidFill>
+          <a:srgbClr val="FFFFFF"/>
+        </a:solidFill>
+      </p:bgPr>
+    </p:bg>
+    <p:spTree>
+      <p:nvGrpSpPr>
+        <p:cNvPr id="1" name=""/>
+        <p:cNvGrpSpPr/>
+        <p:nvPr/>
+      </p:nvGrpSpPr>
+      <p:grpSpPr>
+        <a:xfrm>
+          <a:off x="0" y="0"/>
+          <a:ext cx="0" cy="0"/>
+          <a:chOff x="0" y="0"/>
+          <a:chExt cx="0" cy="0"/>
+        </a:xfrm>
+      </p:grpSpPr>
+      <p:sp>
+        <p:nvSpPr>
+          <p:cNvPr id="2" name="Text 0"/>
+          <p:cNvSpPr txBox="1"/>
+          <p:nvPr/>
+        </p:nvSpPr>
+        <p:spPr>
+          <a:xfrm>
+            <a:off x="640080" y="411480"/>
+            <a:ext cx="9144000" cy="320040"/>
+          </a:xfrm>
+          <a:prstGeom prst="rect">
+            <a:avLst/>
+          </a:prstGeom>
+          <a:noFill/>
+          <a:ln/>
+        </p:spPr>
+        <p:txBody>
+          <a:bodyPr wrap="square" lIns="0" tIns="0" rIns="0" bIns="0" rtlCol="0" anchor="ctr"/>
+          <a:lstStyle/>
+          <a:p>
+            <a:pPr indent="0" marL="0">
+              <a:buNone/>
+            </a:pPr>
+            <a:r>
+              <a:rPr lang="en-US" sz="1300" b="1" spc="100" kern="0" dirty="0">
+                <a:solidFill>
+                  <a:srgbClr val="C9603F"/>
+                </a:solidFill>
+                <a:latin typeface="游ゴシック" pitchFamily="34" charset="0"/>
+                <a:ea typeface="游ゴシック" pitchFamily="34" charset="-122"/>
+                <a:cs typeface="游ゴシック" pitchFamily="34" charset="-120"/>
+              </a:rPr>
+              <a:t>CASE STUDY</a:t>
+            </a:r>
+            <a:endParaRPr lang="en-US" sz="1300" dirty="0"/>
+          </a:p>
+        </p:txBody>
+      </p:sp>
+      <p:sp>
+        <p:nvSpPr>
+          <p:cNvPr id="3" name="Text 1"/>
+          <p:cNvSpPr txBox="1"/>
+          <p:nvPr/>
+        </p:nvSpPr>
+        <p:spPr>
+          <a:xfrm>
+            <a:off x="640080" y="713232"/>
+            <a:ext cx="10881360" cy="731520"/>
+          </a:xfrm>
+          <a:prstGeom prst="rect">
+            <a:avLst/>
+          </a:prstGeom>
+          <a:noFill/>
+          <a:ln/>
+        </p:spPr>
+        <p:txBody>
+          <a:bodyPr wrap="square" lIns="0" tIns="0" rIns="0" bIns="0" rtlCol="0" anchor="ctr"/>
+          <a:lstStyle/>
+          <a:p>
+            <a:pPr indent="0" marL="0">
+              <a:buNone/>
+            </a:pPr>
+            <a:r>
+              <a:rPr lang="en-US" sz="2800" b="1" dirty="0">
+                <a:solidFill>
+                  <a:srgbClr val="1E3A5F"/>
+                </a:solidFill>
+                <a:latin typeface="游ゴシック" pitchFamily="34" charset="0"/>
+                <a:ea typeface="游ゴシック" pitchFamily="34" charset="-122"/>
+                <a:cs typeface="游ゴシック" pitchFamily="34" charset="-120"/>
+              </a:rPr>
+              <a:t>実例 ― 「社会貢献」が開く、新しい扉</a:t>
+            </a:r>
+            <a:endParaRPr lang="en-US" sz="2800" dirty="0"/>
+          </a:p>
+        </p:txBody>
+      </p:sp>
+      <p:sp>
+        <p:nvSpPr>
+          <p:cNvPr id="4" name="Shape 2"/>
+          <p:cNvSpPr/>
+          <p:nvPr/>
+        </p:nvSpPr>
+        <p:spPr>
+          <a:xfrm>
+            <a:off x="640080" y="1737360"/>
+            <a:ext cx="5257800" cy="3931920"/>
+          </a:xfrm>
+          <a:prstGeom prst="roundRect">
+            <a:avLst>
+              <a:gd name="adj" fmla="val 2326"/>
+            </a:avLst>
+          </a:prstGeom>
+          <a:solidFill>
+            <a:srgbClr val="F6F1EA"/>
+          </a:solidFill>
+          <a:ln/>
+          <a:effectLst>
+            <a:outerShdw sx="100000" sy="100000" kx="0" ky="0" algn="bl" rotWithShape="0" blurRad="101600" dist="38100" dir="5400000">
+              <a:srgbClr val="10233A">
+                <a:alpha val="18000"/>
+              </a:srgbClr>
+            </a:outerShdw>
+          </a:effectLst>
+        </p:spPr>
+      </p:sp>
+      <p:sp>
+        <p:nvSpPr>
+          <p:cNvPr id="5" name="Text 3"/>
+          <p:cNvSpPr txBox="1"/>
+          <p:nvPr/>
+        </p:nvSpPr>
+        <p:spPr>
+          <a:xfrm>
+            <a:off x="914400" y="1965960"/>
+            <a:ext cx="4709160" cy="457200"/>
+          </a:xfrm>
+          <a:prstGeom prst="rect">
+            <a:avLst/>
+          </a:prstGeom>
+          <a:noFill/>
+          <a:ln/>
+        </p:spPr>
+        <p:txBody>
+          <a:bodyPr wrap="square" lIns="0" tIns="0" rIns="0" bIns="0" rtlCol="0" anchor="ctr"/>
+          <a:lstStyle/>
+          <a:p>
+            <a:pPr indent="0" marL="0">
+              <a:buNone/>
+            </a:pPr>
+            <a:r>
+              <a:rPr lang="en-US" sz="1700" b="1" dirty="0">
+                <a:solidFill>
+                  <a:srgbClr val="1E3A5F"/>
+                </a:solidFill>
+                <a:latin typeface="游ゴシック" pitchFamily="34" charset="0"/>
+                <a:ea typeface="游ゴシック" pitchFamily="34" charset="-122"/>
+                <a:cs typeface="游ゴシック" pitchFamily="34" charset="-120"/>
+              </a:rPr>
+              <a:t>法人開拓は、ドアノックから</a:t>
+            </a:r>
+            <a:endParaRPr lang="en-US" sz="1700" dirty="0"/>
+          </a:p>
+        </p:txBody>
+      </p:sp>
+      <p:sp>
+        <p:nvSpPr>
+          <p:cNvPr id="6" name="Text 4"/>
+          <p:cNvSpPr txBox="1"/>
+          <p:nvPr/>
+        </p:nvSpPr>
+        <p:spPr>
+          <a:xfrm>
+            <a:off x="914400" y="2395728"/>
+            <a:ext cx="4709160" cy="365760"/>
+          </a:xfrm>
+          <a:prstGeom prst="rect">
+            <a:avLst/>
+          </a:prstGeom>
+          <a:noFill/>
+          <a:ln/>
+        </p:spPr>
+        <p:txBody>
+          <a:bodyPr wrap="square" lIns="0" tIns="0" rIns="0" bIns="0" rtlCol="0" anchor="ctr"/>
+          <a:lstStyle/>
+          <a:p>
+            <a:pPr indent="0" marL="0">
+              <a:buNone/>
+            </a:pPr>
+            <a:r>
+              <a:rPr lang="en-US" sz="1150" dirty="0">
+                <a:solidFill>
+                  <a:srgbClr val="6B6B6B"/>
+                </a:solidFill>
+                <a:latin typeface="游ゴシック" pitchFamily="34" charset="0"/>
+                <a:ea typeface="游ゴシック" pitchFamily="34" charset="-122"/>
+                <a:cs typeface="游ゴシック" pitchFamily="34" charset="-120"/>
+              </a:rPr>
+              <a:t>運送業・従業員約200名規模の企業への導入事例</a:t>
+            </a:r>
+            <a:endParaRPr lang="en-US" sz="1150" dirty="0"/>
+          </a:p>
+        </p:txBody>
+      </p:sp>
+      <p:sp>
+        <p:nvSpPr>
+          <p:cNvPr id="7" name="Text 5"/>
+          <p:cNvSpPr txBox="1"/>
+          <p:nvPr/>
+        </p:nvSpPr>
+        <p:spPr>
+          <a:xfrm>
+            <a:off x="914400" y="2880360"/>
+            <a:ext cx="4709160" cy="1920240"/>
+          </a:xfrm>
+          <a:prstGeom prst="rect">
+            <a:avLst/>
+          </a:prstGeom>
+          <a:noFill/>
+          <a:ln/>
+        </p:spPr>
+        <p:txBody>
+          <a:bodyPr wrap="square" lIns="0" tIns="0" rIns="0" bIns="0" rtlCol="0" anchor="t"/>
+          <a:lstStyle/>
+          <a:p>
+            <a:pPr marL="342900" indent="-342900">
+              <a:lnSpc>
+                <a:spcPct val="125000"/>
+              </a:lnSpc>
+              <a:spcAft>
+                <a:spcPts val="1000"/>
+              </a:spcAft>
+              <a:buSzPct val="100000"/>
+              <a:buChar char="●"/>
+            </a:pPr>
+            <a:r>
+              <a:rPr lang="en-US" sz="1250" dirty="0">
+                <a:solidFill>
+                  <a:srgbClr val="3A3A3A"/>
+                </a:solidFill>
+                <a:latin typeface="游ゴシック" pitchFamily="34" charset="0"/>
+                <a:ea typeface="游ゴシック" pitchFamily="34" charset="-122"/>
+                <a:cs typeface="游ゴシック" pitchFamily="34" charset="-120"/>
+              </a:rPr>
+              <a:t>「繋ぐノートワークセミナー」を本社・支社で複数回開催し、従業員全員に接点を持つ</a:t>
+            </a:r>
+            <a:endParaRPr lang="en-US" sz="1250" dirty="0"/>
+          </a:p>
+          <a:p>
+            <a:pPr marL="342900" indent="-342900">
+              <a:lnSpc>
+                <a:spcPct val="125000"/>
+              </a:lnSpc>
+              <a:spcAft>
+                <a:spcPts val="1000"/>
+              </a:spcAft>
+              <a:buSzPct val="100000"/>
+              <a:buChar char="●"/>
+            </a:pPr>
+            <a:r>
+              <a:rPr lang="en-US" sz="1250" dirty="0">
+                <a:solidFill>
+                  <a:srgbClr val="3A3A3A"/>
+                </a:solidFill>
+                <a:latin typeface="游ゴシック" pitchFamily="34" charset="0"/>
+                <a:ea typeface="游ゴシック" pitchFamily="34" charset="-122"/>
+                <a:cs typeface="游ゴシック" pitchFamily="34" charset="-120"/>
+              </a:rPr>
+              <a:t>持ち込んだのは“商品”ではなく、従業員と家族の命・これからを考える機会</a:t>
+            </a:r>
+            <a:endParaRPr lang="en-US" sz="1250" dirty="0"/>
+          </a:p>
+          <a:p>
+            <a:pPr marL="342900" indent="-342900">
+              <a:lnSpc>
+                <a:spcPct val="125000"/>
+              </a:lnSpc>
+              <a:spcAft>
+                <a:spcPts val="800"/>
+              </a:spcAft>
+              <a:buSzPct val="100000"/>
+              <a:buChar char="●"/>
+            </a:pPr>
+            <a:r>
+              <a:rPr lang="en-US" sz="1250" dirty="0">
+                <a:solidFill>
+                  <a:srgbClr val="3A3A3A"/>
+                </a:solidFill>
+                <a:latin typeface="游ゴシック" pitchFamily="34" charset="0"/>
+                <a:ea typeface="游ゴシック" pitchFamily="34" charset="-122"/>
+                <a:cs typeface="游ゴシック" pitchFamily="34" charset="-120"/>
+              </a:rPr>
+              <a:t>セミナー後、自然な形で保険見直しの相談へ。本業は信頼の後からついてきた</a:t>
+            </a:r>
+            <a:endParaRPr lang="en-US" sz="1250" dirty="0"/>
+          </a:p>
+        </p:txBody>
+      </p:sp>
+      <p:sp>
+        <p:nvSpPr>
+          <p:cNvPr id="8" name="Shape 6"/>
+          <p:cNvSpPr/>
+          <p:nvPr/>
+        </p:nvSpPr>
+        <p:spPr>
+          <a:xfrm>
+            <a:off x="914400" y="4846320"/>
+            <a:ext cx="4709160" cy="640080"/>
+          </a:xfrm>
+          <a:prstGeom prst="roundRect">
+            <a:avLst>
+              <a:gd name="adj" fmla="val 11429"/>
+            </a:avLst>
+          </a:prstGeom>
+          <a:solidFill>
+            <a:srgbClr val="1E3A5F"/>
+          </a:solidFill>
+          <a:ln/>
+        </p:spPr>
+      </p:sp>
+      <p:sp>
+        <p:nvSpPr>
+          <p:cNvPr id="9" name="Text 7"/>
+          <p:cNvSpPr txBox="1"/>
+          <p:nvPr/>
+        </p:nvSpPr>
+        <p:spPr>
+          <a:xfrm>
+            <a:off x="914400" y="4846320"/>
+            <a:ext cx="4709160" cy="640080"/>
+          </a:xfrm>
+          <a:prstGeom prst="rect">
+            <a:avLst/>
+          </a:prstGeom>
+          <a:noFill/>
+          <a:ln/>
+        </p:spPr>
+        <p:txBody>
+          <a:bodyPr wrap="square" lIns="0" tIns="0" rIns="0" bIns="0" rtlCol="0" anchor="ctr"/>
+          <a:lstStyle/>
+          <a:p>
+            <a:pPr algn="ctr" indent="0" marL="0">
+              <a:buNone/>
+            </a:pPr>
+            <a:r>
+              <a:rPr lang="en-US" sz="1550" b="1" dirty="0">
+                <a:solidFill>
+                  <a:srgbClr val="F1DCCF"/>
+                </a:solidFill>
+                <a:latin typeface="游ゴシック" pitchFamily="34" charset="0"/>
+                <a:ea typeface="游ゴシック" pitchFamily="34" charset="-122"/>
+                <a:cs typeface="游ゴシック" pitchFamily="34" charset="-120"/>
+              </a:rPr>
+              <a:t>「ドアノックは、社会貢献。」</a:t>
+            </a:r>
+            <a:endParaRPr lang="en-US" sz="1550" dirty="0"/>
+          </a:p>
+        </p:txBody>
+      </p:sp>
+      <p:sp>
+        <p:nvSpPr>
+          <p:cNvPr id="10" name="Shape 8"/>
+          <p:cNvSpPr/>
+          <p:nvPr/>
+        </p:nvSpPr>
+        <p:spPr>
+          <a:xfrm>
+            <a:off x="6263640" y="1737360"/>
+            <a:ext cx="5257800" cy="3931920"/>
+          </a:xfrm>
+          <a:prstGeom prst="roundRect">
+            <a:avLst>
+              <a:gd name="adj" fmla="val 2326"/>
+            </a:avLst>
+          </a:prstGeom>
+          <a:solidFill>
+            <a:srgbClr val="F6F1EA"/>
+          </a:solidFill>
+          <a:ln/>
+          <a:effectLst>
+            <a:outerShdw sx="100000" sy="100000" kx="0" ky="0" algn="bl" rotWithShape="0" blurRad="101600" dist="38100" dir="5400000">
+              <a:srgbClr val="10233A">
+                <a:alpha val="18000"/>
+              </a:srgbClr>
+            </a:outerShdw>
+          </a:effectLst>
+        </p:spPr>
+      </p:sp>
+      <p:sp>
+        <p:nvSpPr>
+          <p:cNvPr id="11" name="Text 9"/>
+          <p:cNvSpPr txBox="1"/>
+          <p:nvPr/>
+        </p:nvSpPr>
+        <p:spPr>
+          <a:xfrm>
+            <a:off x="6537960" y="1965960"/>
+            <a:ext cx="4709160" cy="457200"/>
+          </a:xfrm>
+          <a:prstGeom prst="rect">
+            <a:avLst/>
+          </a:prstGeom>
+          <a:noFill/>
+          <a:ln/>
+        </p:spPr>
+        <p:txBody>
+          <a:bodyPr wrap="square" lIns="0" tIns="0" rIns="0" bIns="0" rtlCol="0" anchor="ctr"/>
+          <a:lstStyle/>
+          <a:p>
+            <a:pPr indent="0" marL="0">
+              <a:buNone/>
+            </a:pPr>
+            <a:r>
+              <a:rPr lang="en-US" sz="1700" b="1" dirty="0">
+                <a:solidFill>
+                  <a:srgbClr val="1E3A5F"/>
+                </a:solidFill>
+                <a:latin typeface="游ゴシック" pitchFamily="34" charset="0"/>
+                <a:ea typeface="游ゴシック" pitchFamily="34" charset="-122"/>
+                <a:cs typeface="游ゴシック" pitchFamily="34" charset="-120"/>
+              </a:rPr>
+              <a:t>一つの自治体から、全国モデルへ</a:t>
+            </a:r>
+            <a:endParaRPr lang="en-US" sz="1700" dirty="0"/>
+          </a:p>
+        </p:txBody>
+      </p:sp>
+      <p:sp>
+        <p:nvSpPr>
+          <p:cNvPr id="12" name="Text 10"/>
+          <p:cNvSpPr txBox="1"/>
+          <p:nvPr/>
+        </p:nvSpPr>
+        <p:spPr>
+          <a:xfrm>
+            <a:off x="6537960" y="2395728"/>
+            <a:ext cx="4709160" cy="365760"/>
+          </a:xfrm>
+          <a:prstGeom prst="rect">
+            <a:avLst/>
+          </a:prstGeom>
+          <a:noFill/>
+          <a:ln/>
+        </p:spPr>
+        <p:txBody>
+          <a:bodyPr wrap="square" lIns="0" tIns="0" rIns="0" bIns="0" rtlCol="0" anchor="ctr"/>
+          <a:lstStyle/>
+          <a:p>
+            <a:pPr indent="0" marL="0">
+              <a:buNone/>
+            </a:pPr>
+            <a:r>
+              <a:rPr lang="en-US" sz="1150" dirty="0">
+                <a:solidFill>
+                  <a:srgbClr val="6B6B6B"/>
+                </a:solidFill>
+                <a:latin typeface="游ゴシック" pitchFamily="34" charset="0"/>
+                <a:ea typeface="游ゴシック" pitchFamily="34" charset="-122"/>
+                <a:cs typeface="游ゴシック" pitchFamily="34" charset="-120"/>
+              </a:rPr>
+              <a:t>行政連携の広がり（朝来市 → 岸和田市）</a:t>
+            </a:r>
+            <a:endParaRPr lang="en-US" sz="1150" dirty="0"/>
+          </a:p>
+        </p:txBody>
+      </p:sp>
+      <p:sp>
+        <p:nvSpPr>
+          <p:cNvPr id="13" name="Text 11"/>
+          <p:cNvSpPr txBox="1"/>
+          <p:nvPr/>
+        </p:nvSpPr>
+        <p:spPr>
+          <a:xfrm>
+            <a:off x="6537960" y="2880360"/>
+            <a:ext cx="4709160" cy="1920240"/>
+          </a:xfrm>
+          <a:prstGeom prst="rect">
+            <a:avLst/>
+          </a:prstGeom>
+          <a:noFill/>
+          <a:ln/>
+        </p:spPr>
+        <p:txBody>
+          <a:bodyPr wrap="square" lIns="0" tIns="0" rIns="0" bIns="0" rtlCol="0" anchor="t"/>
+          <a:lstStyle/>
+          <a:p>
+            <a:pPr marL="342900" indent="-342900">
+              <a:lnSpc>
+                <a:spcPct val="125000"/>
+              </a:lnSpc>
+              <a:spcAft>
+                <a:spcPts val="1000"/>
+              </a:spcAft>
+              <a:buSzPct val="100000"/>
+              <a:buChar char="●"/>
+            </a:pPr>
+            <a:r>
+              <a:rPr lang="en-US" sz="1250" dirty="0">
+                <a:solidFill>
+                  <a:srgbClr val="3A3A3A"/>
+                </a:solidFill>
+                <a:latin typeface="游ゴシック" pitchFamily="34" charset="0"/>
+                <a:ea typeface="游ゴシック" pitchFamily="34" charset="-122"/>
+                <a:cs typeface="游ゴシック" pitchFamily="34" charset="-120"/>
+              </a:rPr>
+              <a:t>朝来市在宅医療・介護連携会議「身寄りのない人への支援検討ワーキング」への参画から始まった行政連携</a:t>
+            </a:r>
+            <a:endParaRPr lang="en-US" sz="1250" dirty="0"/>
+          </a:p>
+          <a:p>
+            <a:pPr marL="342900" indent="-342900">
+              <a:lnSpc>
+                <a:spcPct val="125000"/>
+              </a:lnSpc>
+              <a:spcAft>
+                <a:spcPts val="1000"/>
+              </a:spcAft>
+              <a:buSzPct val="100000"/>
+              <a:buChar char="●"/>
+            </a:pPr>
+            <a:r>
+              <a:rPr lang="en-US" sz="1250" dirty="0">
+                <a:solidFill>
+                  <a:srgbClr val="3A3A3A"/>
+                </a:solidFill>
+                <a:latin typeface="游ゴシック" pitchFamily="34" charset="0"/>
+                <a:ea typeface="游ゴシック" pitchFamily="34" charset="-122"/>
+                <a:cs typeface="游ゴシック" pitchFamily="34" charset="-120"/>
+              </a:rPr>
+              <a:t>岸和田市社会福祉協議会の研修（2026年10月）でも、専門職の縦割りを越えた「資源マップ」づくりを展開中</a:t>
+            </a:r>
+            <a:endParaRPr lang="en-US" sz="1250" dirty="0"/>
+          </a:p>
+          <a:p>
+            <a:pPr marL="342900" indent="-342900">
+              <a:lnSpc>
+                <a:spcPct val="125000"/>
+              </a:lnSpc>
+              <a:spcAft>
+                <a:spcPts val="800"/>
+              </a:spcAft>
+              <a:buSzPct val="100000"/>
+              <a:buChar char="●"/>
+            </a:pPr>
+            <a:r>
+              <a:rPr lang="en-US" sz="1250" dirty="0">
+                <a:solidFill>
+                  <a:srgbClr val="3A3A3A"/>
+                </a:solidFill>
+                <a:latin typeface="游ゴシック" pitchFamily="34" charset="0"/>
+                <a:ea typeface="游ゴシック" pitchFamily="34" charset="-122"/>
+                <a:cs typeface="游ゴシック" pitchFamily="34" charset="-120"/>
+              </a:rPr>
+              <a:t>一つの自治体で実証した手法を、他の自治体でも再現できる「型」として横展開している</a:t>
+            </a:r>
+            <a:endParaRPr lang="en-US" sz="1250" dirty="0"/>
+          </a:p>
+        </p:txBody>
+      </p:sp>
+      <p:sp>
+        <p:nvSpPr>
+          <p:cNvPr id="14" name="Shape 12"/>
+          <p:cNvSpPr/>
+          <p:nvPr/>
+        </p:nvSpPr>
+        <p:spPr>
+          <a:xfrm>
+            <a:off x="6537960" y="4846320"/>
+            <a:ext cx="4709160" cy="640080"/>
+          </a:xfrm>
+          <a:prstGeom prst="roundRect">
+            <a:avLst>
+              <a:gd name="adj" fmla="val 11429"/>
+            </a:avLst>
+          </a:prstGeom>
+          <a:solidFill>
+            <a:srgbClr val="C9603F"/>
+          </a:solidFill>
+          <a:ln/>
+        </p:spPr>
+      </p:sp>
+      <p:sp>
+        <p:nvSpPr>
+          <p:cNvPr id="15" name="Text 13"/>
+          <p:cNvSpPr txBox="1"/>
+          <p:nvPr/>
+        </p:nvSpPr>
+        <p:spPr>
+          <a:xfrm>
+            <a:off x="6537960" y="4846320"/>
+            <a:ext cx="4709160" cy="640080"/>
+          </a:xfrm>
+          <a:prstGeom prst="rect">
+            <a:avLst/>
+          </a:prstGeom>
+          <a:noFill/>
+          <a:ln/>
+        </p:spPr>
+        <p:txBody>
+          <a:bodyPr wrap="square" lIns="0" tIns="0" rIns="0" bIns="0" rtlCol="0" anchor="ctr"/>
+          <a:lstStyle/>
+          <a:p>
+            <a:pPr algn="ctr" indent="0" marL="0">
+              <a:buNone/>
+            </a:pPr>
+            <a:r>
+              <a:rPr lang="en-US" sz="1450" b="1" dirty="0">
+                <a:solidFill>
+                  <a:srgbClr val="FFFFFF"/>
+                </a:solidFill>
+                <a:latin typeface="游ゴシック" pitchFamily="34" charset="0"/>
+                <a:ea typeface="游ゴシック" pitchFamily="34" charset="-122"/>
+                <a:cs typeface="游ゴシック" pitchFamily="34" charset="-120"/>
+              </a:rPr>
+              <a:t>一つの街の実証を、次の街の手引きに。</a:t>
+            </a:r>
+            <a:endParaRPr lang="en-US" sz="1450" dirty="0"/>
+          </a:p>
+        </p:txBody>
+      </p:sp>
+      <p:sp>
+        <p:nvSpPr>
+          <p:cNvPr id="16" name="Text 14"/>
+          <p:cNvSpPr txBox="1"/>
+          <p:nvPr/>
+        </p:nvSpPr>
+        <p:spPr>
+          <a:xfrm>
+            <a:off x="640080" y="5989320"/>
+            <a:ext cx="10881360" cy="457200"/>
+          </a:xfrm>
+          <a:prstGeom prst="rect">
+            <a:avLst/>
+          </a:prstGeom>
+          <a:noFill/>
+          <a:ln/>
+        </p:spPr>
+        <p:txBody>
+          <a:bodyPr wrap="square" lIns="0" tIns="0" rIns="0" bIns="0" rtlCol="0" anchor="ctr"/>
+          <a:lstStyle/>
+          <a:p>
+            <a:pPr indent="0" marL="0">
+              <a:buNone/>
+            </a:pPr>
+            <a:r>
+              <a:rPr lang="en-US" sz="1250" i="1" dirty="0">
+                <a:solidFill>
+                  <a:srgbClr val="6B6B6B"/>
+                </a:solidFill>
+                <a:latin typeface="游ゴシック" pitchFamily="34" charset="0"/>
+                <a:ea typeface="游ゴシック" pitchFamily="34" charset="-122"/>
+                <a:cs typeface="游ゴシック" pitchFamily="34" charset="-120"/>
+              </a:rPr>
+              <a:t>「競争から共存へ」という経営思想が、実際の売上・連携へと転化している証拠です。</a:t>
+            </a:r>
+            <a:endParaRPr lang="en-US" sz="1250" dirty="0"/>
+          </a:p>
+        </p:txBody>
+      </p:sp>
+      <p:sp>
+        <p:nvSpPr>
+          <p:cNvPr id="17" name="Text 15"/>
+          <p:cNvSpPr txBox="1"/>
+          <p:nvPr/>
+        </p:nvSpPr>
+        <p:spPr>
+          <a:xfrm>
+            <a:off x="11551615" y="6400800"/>
+            <a:ext cx="457200" cy="274320"/>
+          </a:xfrm>
+          <a:prstGeom prst="rect">
+            <a:avLst/>
+          </a:prstGeom>
+          <a:noFill/>
+          <a:ln/>
+        </p:spPr>
+        <p:txBody>
+          <a:bodyPr wrap="square" lIns="0" tIns="0" rIns="0" bIns="0" rtlCol="0" anchor="ctr"/>
+          <a:lstStyle/>
+          <a:p>
+            <a:pPr algn="r" indent="0" marL="0">
+              <a:buNone/>
+            </a:pPr>
+            <a:r>
+              <a:rPr lang="en-US" sz="1000" dirty="0">
+                <a:solidFill>
+                  <a:srgbClr val="6B6B6B"/>
+                </a:solidFill>
+                <a:latin typeface="游ゴシック" pitchFamily="34" charset="0"/>
+                <a:ea typeface="游ゴシック" pitchFamily="34" charset="-122"/>
+                <a:cs typeface="游ゴシック" pitchFamily="34" charset="-120"/>
+              </a:rPr>
+              <a:t>13</a:t>
+            </a:r>
+            <a:endParaRPr lang="en-US" sz="1000" dirty="0"/>
+          </a:p>
+        </p:txBody>
+      </p:sp>
+    </p:spTree>
+  </p:cSld>
+  <p:clrMapOvr>
+    <a:masterClrMapping/>
+  </p:clrMapOvr>
+</p:sld>
+</file>
+
+<file path=ppt/slides/slide14.xml><?xml version="1.0" encoding="utf-8"?>
+<p:sld xmlns:a="http://schemas.openxmlformats.org/drawingml/2006/main" xmlns:r="http://schemas.openxmlformats.org/officeDocument/2006/relationships" xmlns:p="http://schemas.openxmlformats.org/presentationml/2006/main">
+  <p:cSld name="Slide 14">
     <p:bg>
       <p:bgPr>
         <a:solidFill>
@@ -6623,7 +7415,7 @@
                 <a:ea typeface="游ゴシック" pitchFamily="34" charset="-122"/>
                 <a:cs typeface="游ゴシック" pitchFamily="34" charset="-120"/>
               </a:rPr>
-              <a:t>THE INSIGHT</a:t>
+              <a:t>OFFICIAL CONTEXT</a:t>
             </a:r>
             <a:endParaRPr lang="en-US" sz="1300" dirty="0"/>
           </a:p>
@@ -6662,7 +7454,7 @@
                 <a:ea typeface="游ゴシック" pitchFamily="34" charset="-122"/>
                 <a:cs typeface="游ゴシック" pitchFamily="34" charset="-120"/>
               </a:rPr>
-              <a:t>本質的な気づき ― 財産ではなく、「対話」</a:t>
+              <a:t>厚生労働省も推進する「人生会議（ACP）」</a:t>
             </a:r>
             <a:endParaRPr lang="en-US" sz="2800" dirty="0"/>
           </a:p>
@@ -6670,24 +7462,68 @@
       </p:sp>
       <p:sp>
         <p:nvSpPr>
-          <p:cNvPr id="4" name="Shape 2"/>
+          <p:cNvPr id="4" name="Text 2"/>
+          <p:cNvSpPr txBox="1"/>
+          <p:nvPr/>
+        </p:nvSpPr>
+        <p:spPr>
+          <a:xfrm>
+            <a:off x="640080" y="1664208"/>
+            <a:ext cx="10881360" cy="365760"/>
+          </a:xfrm>
+          <a:prstGeom prst="rect">
+            <a:avLst/>
+          </a:prstGeom>
+          <a:noFill/>
+          <a:ln/>
+        </p:spPr>
+        <p:txBody>
+          <a:bodyPr wrap="square" lIns="0" tIns="0" rIns="0" bIns="0" rtlCol="0" anchor="ctr"/>
+          <a:lstStyle/>
+          <a:p>
+            <a:pPr indent="0" marL="0">
+              <a:buNone/>
+            </a:pPr>
+            <a:r>
+              <a:rPr lang="en-US" sz="1400" dirty="0">
+                <a:solidFill>
+                  <a:srgbClr val="3A3A3A"/>
+                </a:solidFill>
+                <a:latin typeface="游ゴシック" pitchFamily="34" charset="0"/>
+                <a:ea typeface="游ゴシック" pitchFamily="34" charset="-122"/>
+                <a:cs typeface="游ゴシック" pitchFamily="34" charset="-120"/>
+              </a:rPr>
+              <a:t>もしもの時の医療・ケアを、大切な人と前もって話し合っておく国の取り組み</a:t>
+            </a:r>
+            <a:endParaRPr lang="en-US" sz="1400" dirty="0"/>
+          </a:p>
+        </p:txBody>
+      </p:sp>
+      <p:sp>
+        <p:nvSpPr>
+          <p:cNvPr id="5" name="Shape 3"/>
           <p:cNvSpPr/>
           <p:nvPr/>
         </p:nvSpPr>
         <p:spPr>
           <a:xfrm>
-            <a:off x="640080" y="1737360"/>
-            <a:ext cx="10881360" cy="2103120"/>
+            <a:off x="1816456" y="2075688"/>
+            <a:ext cx="8558784" cy="3461140"/>
           </a:xfrm>
           <a:prstGeom prst="roundRect">
             <a:avLst>
-              <a:gd name="adj" fmla="val 5217"/>
+              <a:gd name="adj" fmla="val 1585"/>
             </a:avLst>
           </a:prstGeom>
           <a:solidFill>
-            <a:srgbClr val="1E3A5F"/>
+            <a:srgbClr val="FFFFFF"/>
           </a:solidFill>
-          <a:ln/>
+          <a:ln w="12700">
+            <a:solidFill>
+              <a:srgbClr val="E2DACE"/>
+            </a:solidFill>
+            <a:prstDash val="solid"/>
+          </a:ln>
           <a:effectLst>
             <a:outerShdw sx="100000" sy="100000" kx="0" ky="0" algn="bl" rotWithShape="0" blurRad="101600" dist="38100" dir="5400000">
               <a:srgbClr val="10233A">
@@ -6697,16 +7533,79 @@
           </a:effectLst>
         </p:spPr>
       </p:sp>
-      <p:sp>
-        <p:nvSpPr>
-          <p:cNvPr id="5" name="Text 3"/>
-          <p:cNvSpPr txBox="1"/>
-          <p:nvPr/>
-        </p:nvSpPr>
-        <p:spPr>
-          <a:xfrm>
-            <a:off x="1051560" y="1965960"/>
-            <a:ext cx="10058400" cy="1188720"/>
+      <p:pic>
+        <p:nvPicPr>
+          <p:cNvPr id="6" name="Image 0" descr="mhlw_illustration.jpg">    </p:cNvPr>
+          <p:cNvPicPr>
+            <a:picLocks noChangeAspect="1"/>
+          </p:cNvPicPr>
+          <p:nvPr/>
+        </p:nvPicPr>
+        <p:blipFill>
+          <a:blip r:embed="rId1"/>
+          <a:stretch>
+            <a:fillRect/>
+          </a:stretch>
+        </p:blipFill>
+        <p:spPr>
+          <a:xfrm>
+            <a:off x="1889608" y="2148840"/>
+            <a:ext cx="8412480" cy="3314836"/>
+          </a:xfrm>
+          <a:prstGeom prst="rect">
+            <a:avLst/>
+          </a:prstGeom>
+        </p:spPr>
+      </p:pic>
+      <p:sp>
+        <p:nvSpPr>
+          <p:cNvPr id="7" name="Text 4"/>
+          <p:cNvSpPr txBox="1"/>
+          <p:nvPr/>
+        </p:nvSpPr>
+        <p:spPr>
+          <a:xfrm>
+            <a:off x="1889608" y="5628268"/>
+            <a:ext cx="8412480" cy="274320"/>
+          </a:xfrm>
+          <a:prstGeom prst="rect">
+            <a:avLst/>
+          </a:prstGeom>
+          <a:noFill/>
+          <a:ln/>
+        </p:spPr>
+        <p:txBody>
+          <a:bodyPr wrap="square" lIns="0" tIns="0" rIns="0" bIns="0" rtlCol="0" anchor="ctr"/>
+          <a:lstStyle/>
+          <a:p>
+            <a:pPr algn="r" indent="0" marL="0">
+              <a:buNone/>
+            </a:pPr>
+            <a:r>
+              <a:rPr lang="en-US" sz="1050" i="1" dirty="0">
+                <a:solidFill>
+                  <a:srgbClr val="6B6B6B"/>
+                </a:solidFill>
+                <a:latin typeface="游ゴシック" pitchFamily="34" charset="0"/>
+                <a:ea typeface="游ゴシック" pitchFamily="34" charset="-122"/>
+                <a:cs typeface="游ゴシック" pitchFamily="34" charset="-120"/>
+              </a:rPr>
+              <a:t>出典：厚生労働省「人生会議」ポータルサイト</a:t>
+            </a:r>
+            <a:endParaRPr lang="en-US" sz="1050" dirty="0"/>
+          </a:p>
+        </p:txBody>
+      </p:sp>
+      <p:sp>
+        <p:nvSpPr>
+          <p:cNvPr id="8" name="Text 5"/>
+          <p:cNvSpPr txBox="1"/>
+          <p:nvPr/>
+        </p:nvSpPr>
+        <p:spPr>
+          <a:xfrm>
+            <a:off x="640080" y="5966596"/>
+            <a:ext cx="10881360" cy="457200"/>
           </a:xfrm>
           <a:prstGeom prst="rect">
             <a:avLst/>
@@ -6719,80 +7618,18 @@
           <a:lstStyle/>
           <a:p>
             <a:pPr indent="0" marL="0">
-              <a:lnSpc>
-                <a:spcPct val="125000"/>
-              </a:lnSpc>
-              <a:buNone/>
-            </a:pPr>
-            <a:r>
-              <a:rPr lang="en-US" sz="2400" b="1" i="1" dirty="0">
-                <a:solidFill>
-                  <a:srgbClr val="FFFFFF"/>
-                </a:solidFill>
-                <a:latin typeface="游ゴシック" pitchFamily="34" charset="0"/>
-                <a:ea typeface="游ゴシック" pitchFamily="34" charset="-122"/>
-                <a:cs typeface="游ゴシック" pitchFamily="34" charset="-120"/>
-              </a:rPr>
-              <a:t>「遺言書を創っただけで、未来に二人にとって、</a:t>
-            </a:r>
-            <a:endParaRPr lang="en-US" sz="2400" dirty="0"/>
-          </a:p>
-          <a:p>
-            <a:pPr indent="0" marL="0">
-              <a:lnSpc>
-                <a:spcPct val="125000"/>
-              </a:lnSpc>
-              <a:buNone/>
-            </a:pPr>
-            <a:r>
-              <a:rPr lang="en-US" sz="2400" b="1" i="1" dirty="0">
-                <a:solidFill>
-                  <a:srgbClr val="FFFFFF"/>
-                </a:solidFill>
-                <a:latin typeface="游ゴシック" pitchFamily="34" charset="0"/>
-                <a:ea typeface="游ゴシック" pitchFamily="34" charset="-122"/>
-                <a:cs typeface="游ゴシック" pitchFamily="34" charset="-120"/>
-              </a:rPr>
-              <a:t>生きてる時の不安の方が多すぎて」</a:t>
-            </a:r>
-            <a:endParaRPr lang="en-US" sz="2400" dirty="0"/>
-          </a:p>
-        </p:txBody>
-      </p:sp>
-      <p:sp>
-        <p:nvSpPr>
-          <p:cNvPr id="6" name="Text 4"/>
-          <p:cNvSpPr txBox="1"/>
-          <p:nvPr/>
-        </p:nvSpPr>
-        <p:spPr>
-          <a:xfrm>
-            <a:off x="1051560" y="3246120"/>
-            <a:ext cx="10058400" cy="411480"/>
-          </a:xfrm>
-          <a:prstGeom prst="rect">
-            <a:avLst/>
-          </a:prstGeom>
-          <a:noFill/>
-          <a:ln/>
-        </p:spPr>
-        <p:txBody>
-          <a:bodyPr wrap="square" lIns="0" tIns="0" rIns="0" bIns="0" rtlCol="0" anchor="ctr"/>
-          <a:lstStyle/>
-          <a:p>
-            <a:pPr indent="0" marL="0">
-              <a:buNone/>
-            </a:pPr>
-            <a:r>
-              <a:rPr lang="en-US" sz="1300" dirty="0">
-                <a:solidFill>
-                  <a:srgbClr val="F1DCCF"/>
-                </a:solidFill>
-                <a:latin typeface="游ゴシック" pitchFamily="34" charset="0"/>
-                <a:ea typeface="游ゴシック" pitchFamily="34" charset="-122"/>
-                <a:cs typeface="游ゴシック" pitchFamily="34" charset="-120"/>
-              </a:rPr>
-              <a:t>― 遺言書を作成した直後の、74歳のご夫妻の言葉</a:t>
+              <a:buNone/>
+            </a:pPr>
+            <a:r>
+              <a:rPr lang="en-US" sz="1300" b="1" dirty="0">
+                <a:solidFill>
+                  <a:srgbClr val="1E3A5F"/>
+                </a:solidFill>
+                <a:latin typeface="游ゴシック" pitchFamily="34" charset="0"/>
+                <a:ea typeface="游ゴシック" pitchFamily="34" charset="-122"/>
+                <a:cs typeface="游ゴシック" pitchFamily="34" charset="-120"/>
+              </a:rPr>
+              <a:t>しかし、行政の呼びかけだけでは、生活者一人ひとりの「自分事」にはまだ変わっていません（前頁：認知度72.1%）。</a:t>
             </a:r>
             <a:endParaRPr lang="en-US" sz="1300" dirty="0"/>
           </a:p>
@@ -6800,92 +7637,7 @@
       </p:sp>
       <p:sp>
         <p:nvSpPr>
-          <p:cNvPr id="7" name="Text 5"/>
-          <p:cNvSpPr txBox="1"/>
-          <p:nvPr/>
-        </p:nvSpPr>
-        <p:spPr>
-          <a:xfrm>
-            <a:off x="640080" y="4160520"/>
-            <a:ext cx="10881360" cy="2103120"/>
-          </a:xfrm>
-          <a:prstGeom prst="rect">
-            <a:avLst/>
-          </a:prstGeom>
-          <a:noFill/>
-          <a:ln/>
-        </p:spPr>
-        <p:txBody>
-          <a:bodyPr wrap="square" lIns="0" tIns="0" rIns="0" bIns="0" rtlCol="0" anchor="t"/>
-          <a:lstStyle/>
-          <a:p>
-            <a:pPr marL="342900" indent="-342900">
-              <a:spcAft>
-                <a:spcPts val="1200"/>
-              </a:spcAft>
-              <a:buSzPct val="100000"/>
-              <a:buChar char="●"/>
-            </a:pPr>
-            <a:r>
-              <a:rPr lang="en-US" sz="1600" dirty="0">
-                <a:solidFill>
-                  <a:srgbClr val="3A3A3A"/>
-                </a:solidFill>
-                <a:latin typeface="游ゴシック" pitchFamily="34" charset="0"/>
-                <a:ea typeface="游ゴシック" pitchFamily="34" charset="-122"/>
-                <a:cs typeface="游ゴシック" pitchFamily="34" charset="-120"/>
-              </a:rPr>
-              <a:t>遺言書は、旅立った後の財産の行き先を定めるもの</a:t>
-            </a:r>
-            <a:endParaRPr lang="en-US" sz="1600" dirty="0"/>
-          </a:p>
-          <a:p>
-            <a:pPr marL="342900" indent="-342900">
-              <a:spcAft>
-                <a:spcPts val="1200"/>
-              </a:spcAft>
-              <a:buSzPct val="100000"/>
-              <a:buChar char="●"/>
-            </a:pPr>
-            <a:r>
-              <a:rPr lang="en-US" sz="1600" dirty="0">
-                <a:solidFill>
-                  <a:srgbClr val="3A3A3A"/>
-                </a:solidFill>
-                <a:latin typeface="游ゴシック" pitchFamily="34" charset="0"/>
-                <a:ea typeface="游ゴシック" pitchFamily="34" charset="-122"/>
-                <a:cs typeface="游ゴシック" pitchFamily="34" charset="-120"/>
-              </a:rPr>
-              <a:t>しかし、生きている間に何かあったとき、心身ともにどう対処するのかという不安には応えてくれない</a:t>
-            </a:r>
-            <a:endParaRPr lang="en-US" sz="1600" dirty="0"/>
-          </a:p>
-          <a:p>
-            <a:pPr marL="342900" indent="-342900">
-              <a:spcAft>
-                <a:spcPts val="1000"/>
-              </a:spcAft>
-              <a:buSzPct val="100000"/>
-              <a:buChar char="●"/>
-            </a:pPr>
-            <a:r>
-              <a:rPr lang="en-US" sz="1600" b="1" dirty="0">
-                <a:solidFill>
-                  <a:srgbClr val="C9603F"/>
-                </a:solidFill>
-                <a:latin typeface="游ゴシック" pitchFamily="34" charset="0"/>
-                <a:ea typeface="游ゴシック" pitchFamily="34" charset="-122"/>
-                <a:cs typeface="游ゴシック" pitchFamily="34" charset="-120"/>
-              </a:rPr>
-              <a:t>本当に安心・幸福につながるのは、書類の完成ではなく、「誰かとの対話」そのもの</a:t>
-            </a:r>
-            <a:endParaRPr lang="en-US" sz="1600" dirty="0"/>
-          </a:p>
-        </p:txBody>
-      </p:sp>
-      <p:sp>
-        <p:nvSpPr>
-          <p:cNvPr id="8" name="Text 6"/>
+          <p:cNvPr id="9" name="Text 6"/>
           <p:cNvSpPr txBox="1"/>
           <p:nvPr/>
         </p:nvSpPr>
@@ -6987,7 +7739,7 @@
                 <a:ea typeface="游ゴシック" pitchFamily="34" charset="-122"/>
                 <a:cs typeface="游ゴシック" pitchFamily="34" charset="-120"/>
               </a:rPr>
-              <a:t>SOLUTION 1</a:t>
+              <a:t>THE INSIGHT</a:t>
             </a:r>
             <a:endParaRPr lang="en-US" sz="1300" dirty="0"/>
           </a:p>
@@ -7026,7 +7778,7 @@
                 <a:ea typeface="游ゴシック" pitchFamily="34" charset="-122"/>
                 <a:cs typeface="游ゴシック" pitchFamily="34" charset="-120"/>
               </a:rPr>
-              <a:t>解決策① 独自ツール「生きるための繋ぐノート」</a:t>
+              <a:t>本質的な気づき ― 財産ではなく、「対話」</a:t>
             </a:r>
             <a:endParaRPr lang="en-US" sz="2800" dirty="0"/>
           </a:p>
@@ -7040,16 +7792,16 @@
         </p:nvSpPr>
         <p:spPr>
           <a:xfrm>
-            <a:off x="640080" y="1828800"/>
-            <a:ext cx="3383280" cy="1828800"/>
+            <a:off x="640080" y="1737360"/>
+            <a:ext cx="10881360" cy="2103120"/>
           </a:xfrm>
           <a:prstGeom prst="roundRect">
             <a:avLst>
-              <a:gd name="adj" fmla="val 5000"/>
+              <a:gd name="adj" fmla="val 5217"/>
             </a:avLst>
           </a:prstGeom>
           <a:solidFill>
-            <a:srgbClr val="F6F1EA"/>
+            <a:srgbClr val="1E3A5F"/>
           </a:solidFill>
           <a:ln/>
           <a:effectLst>
@@ -7063,23 +7815,65 @@
       </p:sp>
       <p:sp>
         <p:nvSpPr>
-          <p:cNvPr id="5" name="Shape 3"/>
-          <p:cNvSpPr/>
-          <p:nvPr/>
-        </p:nvSpPr>
-        <p:spPr>
-          <a:xfrm>
-            <a:off x="914400" y="2011680"/>
-            <a:ext cx="640080" cy="640080"/>
-          </a:xfrm>
-          <a:prstGeom prst="ellipse">
-            <a:avLst/>
-          </a:prstGeom>
-          <a:solidFill>
-            <a:srgbClr val="C9603F"/>
-          </a:solidFill>
-          <a:ln/>
-        </p:spPr>
+          <p:cNvPr id="5" name="Text 3"/>
+          <p:cNvSpPr txBox="1"/>
+          <p:nvPr/>
+        </p:nvSpPr>
+        <p:spPr>
+          <a:xfrm>
+            <a:off x="1051560" y="1965960"/>
+            <a:ext cx="10058400" cy="1188720"/>
+          </a:xfrm>
+          <a:prstGeom prst="rect">
+            <a:avLst/>
+          </a:prstGeom>
+          <a:noFill/>
+          <a:ln/>
+        </p:spPr>
+        <p:txBody>
+          <a:bodyPr wrap="square" lIns="0" tIns="0" rIns="0" bIns="0" rtlCol="0" anchor="ctr"/>
+          <a:lstStyle/>
+          <a:p>
+            <a:pPr indent="0" marL="0">
+              <a:lnSpc>
+                <a:spcPct val="125000"/>
+              </a:lnSpc>
+              <a:buNone/>
+            </a:pPr>
+            <a:r>
+              <a:rPr lang="en-US" sz="2400" b="1" i="1" dirty="0">
+                <a:solidFill>
+                  <a:srgbClr val="FFFFFF"/>
+                </a:solidFill>
+                <a:latin typeface="游ゴシック" pitchFamily="34" charset="0"/>
+                <a:ea typeface="游ゴシック" pitchFamily="34" charset="-122"/>
+                <a:cs typeface="游ゴシック" pitchFamily="34" charset="-120"/>
+              </a:rPr>
+              <a:t>「遺言書を創っただけで、未来に二人にとって、</a:t>
+            </a:r>
+            <a:endParaRPr lang="en-US" sz="2400" dirty="0"/>
+          </a:p>
+          <a:p>
+            <a:pPr indent="0" marL="0">
+              <a:lnSpc>
+                <a:spcPct val="125000"/>
+              </a:lnSpc>
+              <a:buNone/>
+            </a:pPr>
+            <a:r>
+              <a:rPr lang="en-US" sz="2400" b="1" i="1" dirty="0">
+                <a:solidFill>
+                  <a:srgbClr val="FFFFFF"/>
+                </a:solidFill>
+                <a:latin typeface="游ゴシック" pitchFamily="34" charset="0"/>
+                <a:ea typeface="游ゴシック" pitchFamily="34" charset="-122"/>
+                <a:cs typeface="游ゴシック" pitchFamily="34" charset="-120"/>
+              </a:rPr>
+              <a:t>生きてる時の不安の方が多すぎて」</a:t>
+            </a:r>
+            <a:endParaRPr lang="en-US" sz="2400" dirty="0"/>
+          </a:p>
+        </p:txBody>
       </p:sp>
       <p:sp>
         <p:nvSpPr>
@@ -7089,34 +7883,34 @@
         </p:nvSpPr>
         <p:spPr>
           <a:xfrm>
-            <a:off x="640080" y="2011680"/>
-            <a:ext cx="1188720" cy="640080"/>
-          </a:xfrm>
-          <a:prstGeom prst="rect">
-            <a:avLst/>
-          </a:prstGeom>
-          <a:noFill/>
-          <a:ln/>
-        </p:spPr>
-        <p:txBody>
-          <a:bodyPr wrap="square" lIns="0" tIns="0" rIns="0" bIns="0" rtlCol="0" anchor="ctr"/>
-          <a:lstStyle/>
-          <a:p>
-            <a:pPr algn="ctr" indent="0" marL="0">
-              <a:buNone/>
-            </a:pPr>
-            <a:r>
-              <a:rPr lang="en-US" sz="1200" b="1" dirty="0">
-                <a:solidFill>
-                  <a:srgbClr val="FFFFFF"/>
-                </a:solidFill>
-                <a:latin typeface="游ゴシック" pitchFamily="34" charset="0"/>
-                <a:ea typeface="游ゴシック" pitchFamily="34" charset="-122"/>
-                <a:cs typeface="游ゴシック" pitchFamily="34" charset="-120"/>
-              </a:rPr>
-              <a:t>1</a:t>
-            </a:r>
-            <a:endParaRPr lang="en-US" sz="1200" dirty="0"/>
+            <a:off x="1051560" y="3246120"/>
+            <a:ext cx="10058400" cy="411480"/>
+          </a:xfrm>
+          <a:prstGeom prst="rect">
+            <a:avLst/>
+          </a:prstGeom>
+          <a:noFill/>
+          <a:ln/>
+        </p:spPr>
+        <p:txBody>
+          <a:bodyPr wrap="square" lIns="0" tIns="0" rIns="0" bIns="0" rtlCol="0" anchor="ctr"/>
+          <a:lstStyle/>
+          <a:p>
+            <a:pPr indent="0" marL="0">
+              <a:buNone/>
+            </a:pPr>
+            <a:r>
+              <a:rPr lang="en-US" sz="1300" dirty="0">
+                <a:solidFill>
+                  <a:srgbClr val="F1DCCF"/>
+                </a:solidFill>
+                <a:latin typeface="游ゴシック" pitchFamily="34" charset="0"/>
+                <a:ea typeface="游ゴシック" pitchFamily="34" charset="-122"/>
+                <a:cs typeface="游ゴシック" pitchFamily="34" charset="-120"/>
+              </a:rPr>
+              <a:t>― 遺言書を作成した直後の、74歳のご夫妻の言葉</a:t>
+            </a:r>
+            <a:endParaRPr lang="en-US" sz="1300" dirty="0"/>
           </a:p>
         </p:txBody>
       </p:sp>
@@ -7128,486 +7922,8 @@
         </p:nvSpPr>
         <p:spPr>
           <a:xfrm>
-            <a:off x="1691640" y="2057400"/>
-            <a:ext cx="2194560" cy="457200"/>
-          </a:xfrm>
-          <a:prstGeom prst="rect">
-            <a:avLst/>
-          </a:prstGeom>
-          <a:noFill/>
-          <a:ln/>
-        </p:spPr>
-        <p:txBody>
-          <a:bodyPr wrap="square" lIns="0" tIns="0" rIns="0" bIns="0" rtlCol="0" anchor="ctr"/>
-          <a:lstStyle/>
-          <a:p>
-            <a:pPr indent="0" marL="0">
-              <a:buNone/>
-            </a:pPr>
-            <a:r>
-              <a:rPr lang="en-US" sz="1800" b="1" dirty="0">
-                <a:solidFill>
-                  <a:srgbClr val="1E3A5F"/>
-                </a:solidFill>
-                <a:latin typeface="游ゴシック" pitchFamily="34" charset="0"/>
-                <a:ea typeface="游ゴシック" pitchFamily="34" charset="-122"/>
-                <a:cs typeface="游ゴシック" pitchFamily="34" charset="-120"/>
-              </a:rPr>
-              <a:t>命を繋ぐ</a:t>
-            </a:r>
-            <a:endParaRPr lang="en-US" sz="1800" dirty="0"/>
-          </a:p>
-        </p:txBody>
-      </p:sp>
-      <p:sp>
-        <p:nvSpPr>
-          <p:cNvPr id="8" name="Text 6"/>
-          <p:cNvSpPr txBox="1"/>
-          <p:nvPr/>
-        </p:nvSpPr>
-        <p:spPr>
-          <a:xfrm>
-            <a:off x="868680" y="2834640"/>
-            <a:ext cx="2926080" cy="685800"/>
-          </a:xfrm>
-          <a:prstGeom prst="rect">
-            <a:avLst/>
-          </a:prstGeom>
-          <a:noFill/>
-          <a:ln/>
-        </p:spPr>
-        <p:txBody>
-          <a:bodyPr wrap="square" lIns="0" tIns="0" rIns="0" bIns="0" rtlCol="0" anchor="t"/>
-          <a:lstStyle/>
-          <a:p>
-            <a:pPr indent="0" marL="0">
-              <a:buNone/>
-            </a:pPr>
-            <a:r>
-              <a:rPr lang="en-US" sz="1250" dirty="0">
-                <a:solidFill>
-                  <a:srgbClr val="3A3A3A"/>
-                </a:solidFill>
-                <a:latin typeface="游ゴシック" pitchFamily="34" charset="0"/>
-                <a:ea typeface="游ゴシック" pitchFamily="34" charset="-122"/>
-                <a:cs typeface="游ゴシック" pitchFamily="34" charset="-120"/>
-              </a:rPr>
-              <a:t>もしもの時に備え、想いや希望を整理</a:t>
-            </a:r>
-            <a:endParaRPr lang="en-US" sz="1250" dirty="0"/>
-          </a:p>
-        </p:txBody>
-      </p:sp>
-      <p:sp>
-        <p:nvSpPr>
-          <p:cNvPr id="9" name="Shape 7"/>
-          <p:cNvSpPr/>
-          <p:nvPr/>
-        </p:nvSpPr>
-        <p:spPr>
-          <a:xfrm>
-            <a:off x="4297680" y="1828800"/>
-            <a:ext cx="3383280" cy="1828800"/>
-          </a:xfrm>
-          <a:prstGeom prst="roundRect">
-            <a:avLst>
-              <a:gd name="adj" fmla="val 5000"/>
-            </a:avLst>
-          </a:prstGeom>
-          <a:solidFill>
-            <a:srgbClr val="F6F1EA"/>
-          </a:solidFill>
-          <a:ln/>
-          <a:effectLst>
-            <a:outerShdw sx="100000" sy="100000" kx="0" ky="0" algn="bl" rotWithShape="0" blurRad="101600" dist="38100" dir="5400000">
-              <a:srgbClr val="10233A">
-                <a:alpha val="18000"/>
-              </a:srgbClr>
-            </a:outerShdw>
-          </a:effectLst>
-        </p:spPr>
-      </p:sp>
-      <p:sp>
-        <p:nvSpPr>
-          <p:cNvPr id="10" name="Shape 8"/>
-          <p:cNvSpPr/>
-          <p:nvPr/>
-        </p:nvSpPr>
-        <p:spPr>
-          <a:xfrm>
-            <a:off x="4572000" y="2011680"/>
-            <a:ext cx="640080" cy="640080"/>
-          </a:xfrm>
-          <a:prstGeom prst="ellipse">
-            <a:avLst/>
-          </a:prstGeom>
-          <a:solidFill>
-            <a:srgbClr val="C9603F"/>
-          </a:solidFill>
-          <a:ln/>
-        </p:spPr>
-      </p:sp>
-      <p:sp>
-        <p:nvSpPr>
-          <p:cNvPr id="11" name="Text 9"/>
-          <p:cNvSpPr txBox="1"/>
-          <p:nvPr/>
-        </p:nvSpPr>
-        <p:spPr>
-          <a:xfrm>
-            <a:off x="4297680" y="2011680"/>
-            <a:ext cx="1188720" cy="640080"/>
-          </a:xfrm>
-          <a:prstGeom prst="rect">
-            <a:avLst/>
-          </a:prstGeom>
-          <a:noFill/>
-          <a:ln/>
-        </p:spPr>
-        <p:txBody>
-          <a:bodyPr wrap="square" lIns="0" tIns="0" rIns="0" bIns="0" rtlCol="0" anchor="ctr"/>
-          <a:lstStyle/>
-          <a:p>
-            <a:pPr algn="ctr" indent="0" marL="0">
-              <a:buNone/>
-            </a:pPr>
-            <a:r>
-              <a:rPr lang="en-US" sz="1200" b="1" dirty="0">
-                <a:solidFill>
-                  <a:srgbClr val="FFFFFF"/>
-                </a:solidFill>
-                <a:latin typeface="游ゴシック" pitchFamily="34" charset="0"/>
-                <a:ea typeface="游ゴシック" pitchFamily="34" charset="-122"/>
-                <a:cs typeface="游ゴシック" pitchFamily="34" charset="-120"/>
-              </a:rPr>
-              <a:t>2</a:t>
-            </a:r>
-            <a:endParaRPr lang="en-US" sz="1200" dirty="0"/>
-          </a:p>
-        </p:txBody>
-      </p:sp>
-      <p:sp>
-        <p:nvSpPr>
-          <p:cNvPr id="12" name="Text 10"/>
-          <p:cNvSpPr txBox="1"/>
-          <p:nvPr/>
-        </p:nvSpPr>
-        <p:spPr>
-          <a:xfrm>
-            <a:off x="5349240" y="2057400"/>
-            <a:ext cx="2194560" cy="457200"/>
-          </a:xfrm>
-          <a:prstGeom prst="rect">
-            <a:avLst/>
-          </a:prstGeom>
-          <a:noFill/>
-          <a:ln/>
-        </p:spPr>
-        <p:txBody>
-          <a:bodyPr wrap="square" lIns="0" tIns="0" rIns="0" bIns="0" rtlCol="0" anchor="ctr"/>
-          <a:lstStyle/>
-          <a:p>
-            <a:pPr indent="0" marL="0">
-              <a:buNone/>
-            </a:pPr>
-            <a:r>
-              <a:rPr lang="en-US" sz="1800" b="1" dirty="0">
-                <a:solidFill>
-                  <a:srgbClr val="1E3A5F"/>
-                </a:solidFill>
-                <a:latin typeface="游ゴシック" pitchFamily="34" charset="0"/>
-                <a:ea typeface="游ゴシック" pitchFamily="34" charset="-122"/>
-                <a:cs typeface="游ゴシック" pitchFamily="34" charset="-120"/>
-              </a:rPr>
-              <a:t>誰かに繋ぐ</a:t>
-            </a:r>
-            <a:endParaRPr lang="en-US" sz="1800" dirty="0"/>
-          </a:p>
-        </p:txBody>
-      </p:sp>
-      <p:sp>
-        <p:nvSpPr>
-          <p:cNvPr id="13" name="Text 11"/>
-          <p:cNvSpPr txBox="1"/>
-          <p:nvPr/>
-        </p:nvSpPr>
-        <p:spPr>
-          <a:xfrm>
-            <a:off x="4526280" y="2834640"/>
-            <a:ext cx="2926080" cy="685800"/>
-          </a:xfrm>
-          <a:prstGeom prst="rect">
-            <a:avLst/>
-          </a:prstGeom>
-          <a:noFill/>
-          <a:ln/>
-        </p:spPr>
-        <p:txBody>
-          <a:bodyPr wrap="square" lIns="0" tIns="0" rIns="0" bIns="0" rtlCol="0" anchor="t"/>
-          <a:lstStyle/>
-          <a:p>
-            <a:pPr indent="0" marL="0">
-              <a:buNone/>
-            </a:pPr>
-            <a:r>
-              <a:rPr lang="en-US" sz="1250" dirty="0">
-                <a:solidFill>
-                  <a:srgbClr val="3A3A3A"/>
-                </a:solidFill>
-                <a:latin typeface="游ゴシック" pitchFamily="34" charset="0"/>
-                <a:ea typeface="游ゴシック" pitchFamily="34" charset="-122"/>
-                <a:cs typeface="游ゴシック" pitchFamily="34" charset="-120"/>
-              </a:rPr>
-              <a:t>家族や大切な人と対話するきっかけに</a:t>
-            </a:r>
-            <a:endParaRPr lang="en-US" sz="1250" dirty="0"/>
-          </a:p>
-        </p:txBody>
-      </p:sp>
-      <p:sp>
-        <p:nvSpPr>
-          <p:cNvPr id="14" name="Shape 12"/>
-          <p:cNvSpPr/>
-          <p:nvPr/>
-        </p:nvSpPr>
-        <p:spPr>
-          <a:xfrm>
-            <a:off x="7955280" y="1828800"/>
-            <a:ext cx="3383280" cy="1828800"/>
-          </a:xfrm>
-          <a:prstGeom prst="roundRect">
-            <a:avLst>
-              <a:gd name="adj" fmla="val 5000"/>
-            </a:avLst>
-          </a:prstGeom>
-          <a:solidFill>
-            <a:srgbClr val="F6F1EA"/>
-          </a:solidFill>
-          <a:ln/>
-          <a:effectLst>
-            <a:outerShdw sx="100000" sy="100000" kx="0" ky="0" algn="bl" rotWithShape="0" blurRad="101600" dist="38100" dir="5400000">
-              <a:srgbClr val="10233A">
-                <a:alpha val="18000"/>
-              </a:srgbClr>
-            </a:outerShdw>
-          </a:effectLst>
-        </p:spPr>
-      </p:sp>
-      <p:sp>
-        <p:nvSpPr>
-          <p:cNvPr id="15" name="Shape 13"/>
-          <p:cNvSpPr/>
-          <p:nvPr/>
-        </p:nvSpPr>
-        <p:spPr>
-          <a:xfrm>
-            <a:off x="8229600" y="2011680"/>
-            <a:ext cx="640080" cy="640080"/>
-          </a:xfrm>
-          <a:prstGeom prst="ellipse">
-            <a:avLst/>
-          </a:prstGeom>
-          <a:solidFill>
-            <a:srgbClr val="C9603F"/>
-          </a:solidFill>
-          <a:ln/>
-        </p:spPr>
-      </p:sp>
-      <p:sp>
-        <p:nvSpPr>
-          <p:cNvPr id="16" name="Text 14"/>
-          <p:cNvSpPr txBox="1"/>
-          <p:nvPr/>
-        </p:nvSpPr>
-        <p:spPr>
-          <a:xfrm>
-            <a:off x="7955280" y="2011680"/>
-            <a:ext cx="1188720" cy="640080"/>
-          </a:xfrm>
-          <a:prstGeom prst="rect">
-            <a:avLst/>
-          </a:prstGeom>
-          <a:noFill/>
-          <a:ln/>
-        </p:spPr>
-        <p:txBody>
-          <a:bodyPr wrap="square" lIns="0" tIns="0" rIns="0" bIns="0" rtlCol="0" anchor="ctr"/>
-          <a:lstStyle/>
-          <a:p>
-            <a:pPr algn="ctr" indent="0" marL="0">
-              <a:buNone/>
-            </a:pPr>
-            <a:r>
-              <a:rPr lang="en-US" sz="1200" b="1" dirty="0">
-                <a:solidFill>
-                  <a:srgbClr val="FFFFFF"/>
-                </a:solidFill>
-                <a:latin typeface="游ゴシック" pitchFamily="34" charset="0"/>
-                <a:ea typeface="游ゴシック" pitchFamily="34" charset="-122"/>
-                <a:cs typeface="游ゴシック" pitchFamily="34" charset="-120"/>
-              </a:rPr>
-              <a:t>3</a:t>
-            </a:r>
-            <a:endParaRPr lang="en-US" sz="1200" dirty="0"/>
-          </a:p>
-        </p:txBody>
-      </p:sp>
-      <p:sp>
-        <p:nvSpPr>
-          <p:cNvPr id="17" name="Text 15"/>
-          <p:cNvSpPr txBox="1"/>
-          <p:nvPr/>
-        </p:nvSpPr>
-        <p:spPr>
-          <a:xfrm>
-            <a:off x="9006840" y="2057400"/>
-            <a:ext cx="2194560" cy="457200"/>
-          </a:xfrm>
-          <a:prstGeom prst="rect">
-            <a:avLst/>
-          </a:prstGeom>
-          <a:noFill/>
-          <a:ln/>
-        </p:spPr>
-        <p:txBody>
-          <a:bodyPr wrap="square" lIns="0" tIns="0" rIns="0" bIns="0" rtlCol="0" anchor="ctr"/>
-          <a:lstStyle/>
-          <a:p>
-            <a:pPr indent="0" marL="0">
-              <a:buNone/>
-            </a:pPr>
-            <a:r>
-              <a:rPr lang="en-US" sz="1800" b="1" dirty="0">
-                <a:solidFill>
-                  <a:srgbClr val="1E3A5F"/>
-                </a:solidFill>
-                <a:latin typeface="游ゴシック" pitchFamily="34" charset="0"/>
-                <a:ea typeface="游ゴシック" pitchFamily="34" charset="-122"/>
-                <a:cs typeface="游ゴシック" pitchFamily="34" charset="-120"/>
-              </a:rPr>
-              <a:t>未来に繋ぐ</a:t>
-            </a:r>
-            <a:endParaRPr lang="en-US" sz="1800" dirty="0"/>
-          </a:p>
-        </p:txBody>
-      </p:sp>
-      <p:sp>
-        <p:nvSpPr>
-          <p:cNvPr id="18" name="Text 16"/>
-          <p:cNvSpPr txBox="1"/>
-          <p:nvPr/>
-        </p:nvSpPr>
-        <p:spPr>
-          <a:xfrm>
-            <a:off x="8183880" y="2834640"/>
-            <a:ext cx="2926080" cy="685800"/>
-          </a:xfrm>
-          <a:prstGeom prst="rect">
-            <a:avLst/>
-          </a:prstGeom>
-          <a:noFill/>
-          <a:ln/>
-        </p:spPr>
-        <p:txBody>
-          <a:bodyPr wrap="square" lIns="0" tIns="0" rIns="0" bIns="0" rtlCol="0" anchor="t"/>
-          <a:lstStyle/>
-          <a:p>
-            <a:pPr indent="0" marL="0">
-              <a:buNone/>
-            </a:pPr>
-            <a:r>
-              <a:rPr lang="en-US" sz="1250" dirty="0">
-                <a:solidFill>
-                  <a:srgbClr val="3A3A3A"/>
-                </a:solidFill>
-                <a:latin typeface="游ゴシック" pitchFamily="34" charset="0"/>
-                <a:ea typeface="游ゴシック" pitchFamily="34" charset="-122"/>
-                <a:cs typeface="游ゴシック" pitchFamily="34" charset="-120"/>
-              </a:rPr>
-              <a:t>これからの人生を、自分らしく前向きに</a:t>
-            </a:r>
-            <a:endParaRPr lang="en-US" sz="1250" dirty="0"/>
-          </a:p>
-        </p:txBody>
-      </p:sp>
-      <p:sp>
-        <p:nvSpPr>
-          <p:cNvPr id="19" name="Shape 17"/>
-          <p:cNvSpPr/>
-          <p:nvPr/>
-        </p:nvSpPr>
-        <p:spPr>
-          <a:xfrm>
-            <a:off x="640080" y="3977640"/>
-            <a:ext cx="10881360" cy="1920240"/>
-          </a:xfrm>
-          <a:prstGeom prst="roundRect">
-            <a:avLst>
-              <a:gd name="adj" fmla="val 4762"/>
-            </a:avLst>
-          </a:prstGeom>
-          <a:solidFill>
-            <a:srgbClr val="1E3A5F"/>
-          </a:solidFill>
-          <a:ln/>
-          <a:effectLst>
-            <a:outerShdw sx="100000" sy="100000" kx="0" ky="0" algn="bl" rotWithShape="0" blurRad="101600" dist="38100" dir="5400000">
-              <a:srgbClr val="10233A">
-                <a:alpha val="18000"/>
-              </a:srgbClr>
-            </a:outerShdw>
-          </a:effectLst>
-        </p:spPr>
-      </p:sp>
-      <p:sp>
-        <p:nvSpPr>
-          <p:cNvPr id="20" name="Text 18"/>
-          <p:cNvSpPr txBox="1"/>
-          <p:nvPr/>
-        </p:nvSpPr>
-        <p:spPr>
-          <a:xfrm>
-            <a:off x="1005840" y="4160520"/>
-            <a:ext cx="10149840" cy="411480"/>
-          </a:xfrm>
-          <a:prstGeom prst="rect">
-            <a:avLst/>
-          </a:prstGeom>
-          <a:noFill/>
-          <a:ln/>
-        </p:spPr>
-        <p:txBody>
-          <a:bodyPr wrap="square" lIns="0" tIns="0" rIns="0" bIns="0" rtlCol="0" anchor="ctr"/>
-          <a:lstStyle/>
-          <a:p>
-            <a:pPr indent="0" marL="0">
-              <a:buNone/>
-            </a:pPr>
-            <a:r>
-              <a:rPr lang="en-US" sz="1600" b="1" dirty="0">
-                <a:solidFill>
-                  <a:srgbClr val="F1DCCF"/>
-                </a:solidFill>
-                <a:latin typeface="游ゴシック" pitchFamily="34" charset="0"/>
-                <a:ea typeface="游ゴシック" pitchFamily="34" charset="-122"/>
-                <a:cs typeface="游ゴシック" pitchFamily="34" charset="-120"/>
-              </a:rPr>
-              <a:t>専門的な視点から作られた、命を守るノート</a:t>
-            </a:r>
-            <a:endParaRPr lang="en-US" sz="1600" dirty="0"/>
-          </a:p>
-        </p:txBody>
-      </p:sp>
-      <p:sp>
-        <p:nvSpPr>
-          <p:cNvPr id="21" name="Text 19"/>
-          <p:cNvSpPr txBox="1"/>
-          <p:nvPr/>
-        </p:nvSpPr>
-        <p:spPr>
-          <a:xfrm>
-            <a:off x="1005840" y="4617720"/>
-            <a:ext cx="10149840" cy="1188720"/>
+            <a:off x="640080" y="4160520"/>
+            <a:ext cx="10881360" cy="2103120"/>
           </a:xfrm>
           <a:prstGeom prst="rect">
             <a:avLst/>
@@ -7621,50 +7937,71 @@
           <a:p>
             <a:pPr marL="342900" indent="-342900">
               <a:spcAft>
-                <a:spcPts val="800"/>
+                <a:spcPts val="1200"/>
               </a:spcAft>
               <a:buSzPct val="100000"/>
               <a:buChar char="●"/>
             </a:pPr>
             <a:r>
-              <a:rPr lang="en-US" sz="1350" dirty="0">
-                <a:solidFill>
-                  <a:srgbClr val="E6EAF0"/>
-                </a:solidFill>
-                <a:latin typeface="游ゴシック" pitchFamily="34" charset="0"/>
-                <a:ea typeface="游ゴシック" pitchFamily="34" charset="-122"/>
-                <a:cs typeface="游ゴシック" pitchFamily="34" charset="-120"/>
-              </a:rPr>
-              <a:t>B6サイズ・全24ページ＋表紙。大病院の問診票を参考に構成し、意識を失っても問診票代わりに機能</a:t>
-            </a:r>
-            <a:endParaRPr lang="en-US" sz="1350" dirty="0"/>
+              <a:rPr lang="en-US" sz="1600" dirty="0">
+                <a:solidFill>
+                  <a:srgbClr val="3A3A3A"/>
+                </a:solidFill>
+                <a:latin typeface="游ゴシック" pitchFamily="34" charset="0"/>
+                <a:ea typeface="游ゴシック" pitchFamily="34" charset="-122"/>
+                <a:cs typeface="游ゴシック" pitchFamily="34" charset="-120"/>
+              </a:rPr>
+              <a:t>遺言書は、旅立った後の財産の行き先を定めるもの</a:t>
+            </a:r>
+            <a:endParaRPr lang="en-US" sz="1600" dirty="0"/>
           </a:p>
           <a:p>
             <a:pPr marL="342900" indent="-342900">
               <a:spcAft>
-                <a:spcPts val="600"/>
+                <a:spcPts val="1200"/>
               </a:spcAft>
               <a:buSzPct val="100000"/>
               <a:buChar char="●"/>
             </a:pPr>
             <a:r>
-              <a:rPr lang="en-US" sz="1350" dirty="0">
-                <a:solidFill>
-                  <a:srgbClr val="E6EAF0"/>
-                </a:solidFill>
-                <a:latin typeface="游ゴシック" pitchFamily="34" charset="0"/>
-                <a:ea typeface="游ゴシック" pitchFamily="34" charset="-122"/>
-                <a:cs typeface="游ゴシック" pitchFamily="34" charset="-120"/>
-              </a:rPr>
-              <a:t>大阪市消防局で34年間現場に立った元救急救命士・上田雄一氏の「命の火を消さない」という経験から考案</a:t>
-            </a:r>
-            <a:endParaRPr lang="en-US" sz="1350" dirty="0"/>
-          </a:p>
-        </p:txBody>
-      </p:sp>
-      <p:sp>
-        <p:nvSpPr>
-          <p:cNvPr id="22" name="Text 20"/>
+              <a:rPr lang="en-US" sz="1600" dirty="0">
+                <a:solidFill>
+                  <a:srgbClr val="3A3A3A"/>
+                </a:solidFill>
+                <a:latin typeface="游ゴシック" pitchFamily="34" charset="0"/>
+                <a:ea typeface="游ゴシック" pitchFamily="34" charset="-122"/>
+                <a:cs typeface="游ゴシック" pitchFamily="34" charset="-120"/>
+              </a:rPr>
+              <a:t>しかし、生きている間に何かあったとき、心身ともにどう対処するのかという不安には応えてくれない</a:t>
+            </a:r>
+            <a:endParaRPr lang="en-US" sz="1600" dirty="0"/>
+          </a:p>
+          <a:p>
+            <a:pPr marL="342900" indent="-342900">
+              <a:spcAft>
+                <a:spcPts val="1000"/>
+              </a:spcAft>
+              <a:buSzPct val="100000"/>
+              <a:buChar char="●"/>
+            </a:pPr>
+            <a:r>
+              <a:rPr lang="en-US" sz="1600" b="1" dirty="0">
+                <a:solidFill>
+                  <a:srgbClr val="C9603F"/>
+                </a:solidFill>
+                <a:latin typeface="游ゴシック" pitchFamily="34" charset="0"/>
+                <a:ea typeface="游ゴシック" pitchFamily="34" charset="-122"/>
+                <a:cs typeface="游ゴシック" pitchFamily="34" charset="-120"/>
+              </a:rPr>
+              <a:t>本当に安心・幸福につながるのは、書類の完成ではなく、「誰かとの対話」そのもの</a:t>
+            </a:r>
+            <a:endParaRPr lang="en-US" sz="1600" dirty="0"/>
+          </a:p>
+        </p:txBody>
+      </p:sp>
+      <p:sp>
+        <p:nvSpPr>
+          <p:cNvPr id="8" name="Text 6"/>
           <p:cNvSpPr txBox="1"/>
           <p:nvPr/>
         </p:nvSpPr>
@@ -7766,7 +8103,7 @@
                 <a:ea typeface="游ゴシック" pitchFamily="34" charset="-122"/>
                 <a:cs typeface="游ゴシック" pitchFamily="34" charset="-120"/>
               </a:rPr>
-              <a:t>SOLUTION 2</a:t>
+              <a:t>SOLUTION 1</a:t>
             </a:r>
             <a:endParaRPr lang="en-US" sz="1300" dirty="0"/>
           </a:p>
@@ -7805,7 +8142,7 @@
                 <a:ea typeface="游ゴシック" pitchFamily="34" charset="-122"/>
                 <a:cs typeface="游ゴシック" pitchFamily="34" charset="-120"/>
               </a:rPr>
-              <a:t>解決策② 日本初「繋ぐノートサポートアドバイザー®」</a:t>
+              <a:t>解決策① 独自ツール「生きるための繋ぐノート」</a:t>
             </a:r>
             <a:endParaRPr lang="en-US" sz="2800" dirty="0"/>
           </a:p>
@@ -7813,375 +8150,29 @@
       </p:sp>
       <p:sp>
         <p:nvSpPr>
-          <p:cNvPr id="4" name="Text 2"/>
-          <p:cNvSpPr txBox="1"/>
-          <p:nvPr/>
-        </p:nvSpPr>
-        <p:spPr>
-          <a:xfrm>
-            <a:off x="640080" y="1691640"/>
-            <a:ext cx="10881360" cy="457200"/>
-          </a:xfrm>
-          <a:prstGeom prst="rect">
-            <a:avLst/>
-          </a:prstGeom>
-          <a:noFill/>
-          <a:ln/>
-        </p:spPr>
-        <p:txBody>
-          <a:bodyPr wrap="square" lIns="0" tIns="0" rIns="0" bIns="0" rtlCol="0" anchor="ctr"/>
-          <a:lstStyle/>
-          <a:p>
-            <a:pPr indent="0" marL="0">
-              <a:buNone/>
-            </a:pPr>
-            <a:r>
-              <a:rPr lang="en-US" sz="1500" dirty="0">
-                <a:solidFill>
-                  <a:srgbClr val="3A3A3A"/>
-                </a:solidFill>
-                <a:latin typeface="游ゴシック" pitchFamily="34" charset="0"/>
-                <a:ea typeface="游ゴシック" pitchFamily="34" charset="-122"/>
-                <a:cs typeface="游ゴシック" pitchFamily="34" charset="-120"/>
-              </a:rPr>
-              <a:t>“生きる準備”の推進を目的に創設した、日本で初めての民間資格</a:t>
-            </a:r>
-            <a:endParaRPr lang="en-US" sz="1500" dirty="0"/>
-          </a:p>
-        </p:txBody>
-      </p:sp>
-      <p:sp>
-        <p:nvSpPr>
-          <p:cNvPr id="5" name="Shape 3"/>
+          <p:cNvPr id="4" name="Shape 2"/>
           <p:cNvSpPr/>
           <p:nvPr/>
         </p:nvSpPr>
         <p:spPr>
           <a:xfrm>
-            <a:off x="1042416" y="2514600"/>
-            <a:ext cx="1371600" cy="1371600"/>
-          </a:xfrm>
-          <a:prstGeom prst="ellipse">
-            <a:avLst/>
-          </a:prstGeom>
-          <a:solidFill>
-            <a:srgbClr val="1E3A5F"/>
-          </a:solidFill>
-          <a:ln/>
-        </p:spPr>
-      </p:sp>
-      <p:sp>
-        <p:nvSpPr>
-          <p:cNvPr id="6" name="Text 4"/>
-          <p:cNvSpPr txBox="1"/>
-          <p:nvPr/>
-        </p:nvSpPr>
-        <p:spPr>
-          <a:xfrm>
-            <a:off x="768096" y="2514600"/>
-            <a:ext cx="1920240" cy="1371600"/>
-          </a:xfrm>
-          <a:prstGeom prst="rect">
-            <a:avLst/>
-          </a:prstGeom>
-          <a:noFill/>
-          <a:ln/>
-        </p:spPr>
-        <p:txBody>
-          <a:bodyPr wrap="square" lIns="0" tIns="0" rIns="0" bIns="0" rtlCol="0" anchor="ctr"/>
-          <a:lstStyle/>
-          <a:p>
-            <a:pPr algn="ctr" indent="0" marL="0">
-              <a:buNone/>
-            </a:pPr>
-            <a:r>
-              <a:rPr lang="en-US" sz="1400" b="1" dirty="0">
-                <a:solidFill>
-                  <a:srgbClr val="FFFFFF"/>
-                </a:solidFill>
-                <a:latin typeface="游ゴシック" pitchFamily="34" charset="0"/>
-                <a:ea typeface="游ゴシック" pitchFamily="34" charset="-122"/>
-                <a:cs typeface="游ゴシック" pitchFamily="34" charset="-120"/>
-              </a:rPr>
-              <a:t>医療機関</a:t>
-            </a:r>
-            <a:endParaRPr lang="en-US" sz="1400" dirty="0"/>
-          </a:p>
-        </p:txBody>
-      </p:sp>
-      <p:sp>
-        <p:nvSpPr>
-          <p:cNvPr id="7" name="Shape 5"/>
-          <p:cNvSpPr/>
-          <p:nvPr/>
-        </p:nvSpPr>
-        <p:spPr>
-          <a:xfrm>
-            <a:off x="3218688" y="2514600"/>
-            <a:ext cx="1371600" cy="1371600"/>
-          </a:xfrm>
-          <a:prstGeom prst="ellipse">
-            <a:avLst/>
-          </a:prstGeom>
-          <a:solidFill>
-            <a:srgbClr val="C9603F"/>
-          </a:solidFill>
-          <a:ln/>
-        </p:spPr>
-      </p:sp>
-      <p:sp>
-        <p:nvSpPr>
-          <p:cNvPr id="8" name="Text 6"/>
-          <p:cNvSpPr txBox="1"/>
-          <p:nvPr/>
-        </p:nvSpPr>
-        <p:spPr>
-          <a:xfrm>
-            <a:off x="2944368" y="2514600"/>
-            <a:ext cx="1920240" cy="1371600"/>
-          </a:xfrm>
-          <a:prstGeom prst="rect">
-            <a:avLst/>
-          </a:prstGeom>
-          <a:noFill/>
-          <a:ln/>
-        </p:spPr>
-        <p:txBody>
-          <a:bodyPr wrap="square" lIns="0" tIns="0" rIns="0" bIns="0" rtlCol="0" anchor="ctr"/>
-          <a:lstStyle/>
-          <a:p>
-            <a:pPr algn="ctr" indent="0" marL="0">
-              <a:buNone/>
-            </a:pPr>
-            <a:r>
-              <a:rPr lang="en-US" sz="1400" b="1" dirty="0">
-                <a:solidFill>
-                  <a:srgbClr val="FFFFFF"/>
-                </a:solidFill>
-                <a:latin typeface="游ゴシック" pitchFamily="34" charset="0"/>
-                <a:ea typeface="游ゴシック" pitchFamily="34" charset="-122"/>
-                <a:cs typeface="游ゴシック" pitchFamily="34" charset="-120"/>
-              </a:rPr>
-              <a:t>行政</a:t>
-            </a:r>
-            <a:endParaRPr lang="en-US" sz="1400" dirty="0"/>
-          </a:p>
-        </p:txBody>
-      </p:sp>
-      <p:sp>
-        <p:nvSpPr>
-          <p:cNvPr id="9" name="Shape 7"/>
-          <p:cNvSpPr/>
-          <p:nvPr/>
-        </p:nvSpPr>
-        <p:spPr>
-          <a:xfrm>
-            <a:off x="5394960" y="2514600"/>
-            <a:ext cx="1371600" cy="1371600"/>
-          </a:xfrm>
-          <a:prstGeom prst="ellipse">
-            <a:avLst/>
-          </a:prstGeom>
-          <a:solidFill>
-            <a:srgbClr val="1E3A5F"/>
-          </a:solidFill>
-          <a:ln/>
-        </p:spPr>
-      </p:sp>
-      <p:sp>
-        <p:nvSpPr>
-          <p:cNvPr id="10" name="Text 8"/>
-          <p:cNvSpPr txBox="1"/>
-          <p:nvPr/>
-        </p:nvSpPr>
-        <p:spPr>
-          <a:xfrm>
-            <a:off x="5120640" y="2514600"/>
-            <a:ext cx="1920240" cy="1371600"/>
-          </a:xfrm>
-          <a:prstGeom prst="rect">
-            <a:avLst/>
-          </a:prstGeom>
-          <a:noFill/>
-          <a:ln/>
-        </p:spPr>
-        <p:txBody>
-          <a:bodyPr wrap="square" lIns="0" tIns="0" rIns="0" bIns="0" rtlCol="0" anchor="ctr"/>
-          <a:lstStyle/>
-          <a:p>
-            <a:pPr algn="ctr" indent="0" marL="0">
-              <a:buNone/>
-            </a:pPr>
-            <a:r>
-              <a:rPr lang="en-US" sz="1400" b="1" dirty="0">
-                <a:solidFill>
-                  <a:srgbClr val="FFFFFF"/>
-                </a:solidFill>
-                <a:latin typeface="游ゴシック" pitchFamily="34" charset="0"/>
-                <a:ea typeface="游ゴシック" pitchFamily="34" charset="-122"/>
-                <a:cs typeface="游ゴシック" pitchFamily="34" charset="-120"/>
-              </a:rPr>
-              <a:t>地域</a:t>
-            </a:r>
-            <a:endParaRPr lang="en-US" sz="1400" dirty="0"/>
-          </a:p>
-          <a:p>
-            <a:pPr algn="ctr" indent="0" marL="0">
-              <a:buNone/>
-            </a:pPr>
-            <a:r>
-              <a:rPr lang="en-US" sz="1400" b="1" dirty="0">
-                <a:solidFill>
-                  <a:srgbClr val="FFFFFF"/>
-                </a:solidFill>
-                <a:latin typeface="游ゴシック" pitchFamily="34" charset="0"/>
-                <a:ea typeface="游ゴシック" pitchFamily="34" charset="-122"/>
-                <a:cs typeface="游ゴシック" pitchFamily="34" charset="-120"/>
-              </a:rPr>
-              <a:t>コミュニティ</a:t>
-            </a:r>
-            <a:endParaRPr lang="en-US" sz="1400" dirty="0"/>
-          </a:p>
-        </p:txBody>
-      </p:sp>
-      <p:sp>
-        <p:nvSpPr>
-          <p:cNvPr id="11" name="Shape 9"/>
-          <p:cNvSpPr/>
-          <p:nvPr/>
-        </p:nvSpPr>
-        <p:spPr>
-          <a:xfrm>
-            <a:off x="7571232" y="2514600"/>
-            <a:ext cx="1371600" cy="1371600"/>
-          </a:xfrm>
-          <a:prstGeom prst="ellipse">
-            <a:avLst/>
-          </a:prstGeom>
-          <a:solidFill>
-            <a:srgbClr val="C9603F"/>
-          </a:solidFill>
-          <a:ln/>
-        </p:spPr>
-      </p:sp>
-      <p:sp>
-        <p:nvSpPr>
-          <p:cNvPr id="12" name="Text 10"/>
-          <p:cNvSpPr txBox="1"/>
-          <p:nvPr/>
-        </p:nvSpPr>
-        <p:spPr>
-          <a:xfrm>
-            <a:off x="7296912" y="2514600"/>
-            <a:ext cx="1920240" cy="1371600"/>
-          </a:xfrm>
-          <a:prstGeom prst="rect">
-            <a:avLst/>
-          </a:prstGeom>
-          <a:noFill/>
-          <a:ln/>
-        </p:spPr>
-        <p:txBody>
-          <a:bodyPr wrap="square" lIns="0" tIns="0" rIns="0" bIns="0" rtlCol="0" anchor="ctr"/>
-          <a:lstStyle/>
-          <a:p>
-            <a:pPr algn="ctr" indent="0" marL="0">
-              <a:buNone/>
-            </a:pPr>
-            <a:r>
-              <a:rPr lang="en-US" sz="1400" b="1" dirty="0">
-                <a:solidFill>
-                  <a:srgbClr val="FFFFFF"/>
-                </a:solidFill>
-                <a:latin typeface="游ゴシック" pitchFamily="34" charset="0"/>
-                <a:ea typeface="游ゴシック" pitchFamily="34" charset="-122"/>
-                <a:cs typeface="游ゴシック" pitchFamily="34" charset="-120"/>
-              </a:rPr>
-              <a:t>企業</a:t>
-            </a:r>
-            <a:endParaRPr lang="en-US" sz="1400" dirty="0"/>
-          </a:p>
-        </p:txBody>
-      </p:sp>
-      <p:sp>
-        <p:nvSpPr>
-          <p:cNvPr id="13" name="Shape 11"/>
-          <p:cNvSpPr/>
-          <p:nvPr/>
-        </p:nvSpPr>
-        <p:spPr>
-          <a:xfrm>
-            <a:off x="9747504" y="2514600"/>
-            <a:ext cx="1371600" cy="1371600"/>
-          </a:xfrm>
-          <a:prstGeom prst="ellipse">
-            <a:avLst/>
-          </a:prstGeom>
-          <a:solidFill>
-            <a:srgbClr val="1E3A5F"/>
-          </a:solidFill>
-          <a:ln/>
-        </p:spPr>
-      </p:sp>
-      <p:sp>
-        <p:nvSpPr>
-          <p:cNvPr id="14" name="Text 12"/>
-          <p:cNvSpPr txBox="1"/>
-          <p:nvPr/>
-        </p:nvSpPr>
-        <p:spPr>
-          <a:xfrm>
-            <a:off x="9473184" y="2514600"/>
-            <a:ext cx="1920240" cy="1371600"/>
-          </a:xfrm>
-          <a:prstGeom prst="rect">
-            <a:avLst/>
-          </a:prstGeom>
-          <a:noFill/>
-          <a:ln/>
-        </p:spPr>
-        <p:txBody>
-          <a:bodyPr wrap="square" lIns="0" tIns="0" rIns="0" bIns="0" rtlCol="0" anchor="ctr"/>
-          <a:lstStyle/>
-          <a:p>
-            <a:pPr algn="ctr" indent="0" marL="0">
-              <a:buNone/>
-            </a:pPr>
-            <a:r>
-              <a:rPr lang="en-US" sz="1400" b="1" dirty="0">
-                <a:solidFill>
-                  <a:srgbClr val="FFFFFF"/>
-                </a:solidFill>
-                <a:latin typeface="游ゴシック" pitchFamily="34" charset="0"/>
-                <a:ea typeface="游ゴシック" pitchFamily="34" charset="-122"/>
-                <a:cs typeface="游ゴシック" pitchFamily="34" charset="-120"/>
-              </a:rPr>
-              <a:t>教育機関</a:t>
-            </a:r>
-            <a:endParaRPr lang="en-US" sz="1400" dirty="0"/>
-          </a:p>
-        </p:txBody>
-      </p:sp>
-      <p:sp>
-        <p:nvSpPr>
-          <p:cNvPr id="15" name="Shape 13"/>
-          <p:cNvSpPr/>
-          <p:nvPr/>
-        </p:nvSpPr>
-        <p:spPr>
-          <a:xfrm>
-            <a:off x="640080" y="4572000"/>
-            <a:ext cx="10881360" cy="1371600"/>
+            <a:off x="566928" y="1709928"/>
+            <a:ext cx="4626864" cy="2433257"/>
           </a:xfrm>
           <a:prstGeom prst="roundRect">
             <a:avLst>
-              <a:gd name="adj" fmla="val 6667"/>
+              <a:gd name="adj" fmla="val 2255"/>
             </a:avLst>
           </a:prstGeom>
           <a:solidFill>
-            <a:srgbClr val="F6F1EA"/>
+            <a:srgbClr val="FFFFFF"/>
           </a:solidFill>
-          <a:ln/>
+          <a:ln w="12700">
+            <a:solidFill>
+              <a:srgbClr val="E2DACE"/>
+            </a:solidFill>
+            <a:prstDash val="solid"/>
+          </a:ln>
           <a:effectLst>
             <a:outerShdw sx="100000" sy="100000" kx="0" ky="0" algn="bl" rotWithShape="0" blurRad="101600" dist="38100" dir="5400000">
               <a:srgbClr val="10233A">
@@ -8191,16 +8182,40 @@
           </a:effectLst>
         </p:spPr>
       </p:sp>
-      <p:sp>
-        <p:nvSpPr>
-          <p:cNvPr id="16" name="Text 14"/>
-          <p:cNvSpPr txBox="1"/>
-          <p:nvPr/>
-        </p:nvSpPr>
-        <p:spPr>
-          <a:xfrm>
-            <a:off x="1005840" y="4800600"/>
-            <a:ext cx="10149840" cy="914400"/>
+      <p:pic>
+        <p:nvPicPr>
+          <p:cNvPr id="5" name="Image 0" descr="notebook_photo.jpg">    </p:cNvPr>
+          <p:cNvPicPr>
+            <a:picLocks noChangeAspect="1"/>
+          </p:cNvPicPr>
+          <p:nvPr/>
+        </p:nvPicPr>
+        <p:blipFill>
+          <a:blip r:embed="rId1"/>
+          <a:stretch>
+            <a:fillRect/>
+          </a:stretch>
+        </p:blipFill>
+        <p:spPr>
+          <a:xfrm>
+            <a:off x="640080" y="1783080"/>
+            <a:ext cx="4480560" cy="2286953"/>
+          </a:xfrm>
+          <a:prstGeom prst="rect">
+            <a:avLst/>
+          </a:prstGeom>
+        </p:spPr>
+      </p:pic>
+      <p:sp>
+        <p:nvSpPr>
+          <p:cNvPr id="6" name="Text 3"/>
+          <p:cNvSpPr txBox="1"/>
+          <p:nvPr/>
+        </p:nvSpPr>
+        <p:spPr>
+          <a:xfrm>
+            <a:off x="640080" y="4207193"/>
+            <a:ext cx="4480560" cy="320040"/>
           </a:xfrm>
           <a:prstGeom prst="rect">
             <a:avLst/>
@@ -8213,49 +8228,662 @@
           <a:lstStyle/>
           <a:p>
             <a:pPr indent="0" marL="0">
+              <a:buNone/>
+            </a:pPr>
+            <a:r>
+              <a:rPr lang="en-US" sz="1100" i="1" dirty="0">
+                <a:solidFill>
+                  <a:srgbClr val="6B6B6B"/>
+                </a:solidFill>
+                <a:latin typeface="游ゴシック" pitchFamily="34" charset="0"/>
+                <a:ea typeface="游ゴシック" pitchFamily="34" charset="-122"/>
+                <a:cs typeface="游ゴシック" pitchFamily="34" charset="-120"/>
+              </a:rPr>
+              <a:t>実際の「生きるための繋ぐノート」（救急隊員の方へ／本文ページ）</a:t>
+            </a:r>
+            <a:endParaRPr lang="en-US" sz="1100" dirty="0"/>
+          </a:p>
+        </p:txBody>
+      </p:sp>
+      <p:sp>
+        <p:nvSpPr>
+          <p:cNvPr id="7" name="Shape 4"/>
+          <p:cNvSpPr/>
+          <p:nvPr/>
+        </p:nvSpPr>
+        <p:spPr>
+          <a:xfrm>
+            <a:off x="5943600" y="1783080"/>
+            <a:ext cx="5623560" cy="768096"/>
+          </a:xfrm>
+          <a:prstGeom prst="roundRect">
+            <a:avLst>
+              <a:gd name="adj" fmla="val 9524"/>
+            </a:avLst>
+          </a:prstGeom>
+          <a:solidFill>
+            <a:srgbClr val="F6F1EA"/>
+          </a:solidFill>
+          <a:ln/>
+          <a:effectLst>
+            <a:outerShdw sx="100000" sy="100000" kx="0" ky="0" algn="bl" rotWithShape="0" blurRad="101600" dist="38100" dir="5400000">
+              <a:srgbClr val="10233A">
+                <a:alpha val="18000"/>
+              </a:srgbClr>
+            </a:outerShdw>
+          </a:effectLst>
+        </p:spPr>
+      </p:sp>
+      <p:sp>
+        <p:nvSpPr>
+          <p:cNvPr id="8" name="Shape 5"/>
+          <p:cNvSpPr/>
+          <p:nvPr/>
+        </p:nvSpPr>
+        <p:spPr>
+          <a:xfrm>
+            <a:off x="6195060" y="1915668"/>
+            <a:ext cx="502920" cy="502920"/>
+          </a:xfrm>
+          <a:prstGeom prst="ellipse">
+            <a:avLst/>
+          </a:prstGeom>
+          <a:solidFill>
+            <a:srgbClr val="C9603F"/>
+          </a:solidFill>
+          <a:ln/>
+        </p:spPr>
+      </p:sp>
+      <p:sp>
+        <p:nvSpPr>
+          <p:cNvPr id="9" name="Text 6"/>
+          <p:cNvSpPr txBox="1"/>
+          <p:nvPr/>
+        </p:nvSpPr>
+        <p:spPr>
+          <a:xfrm>
+            <a:off x="5920740" y="1915668"/>
+            <a:ext cx="1051560" cy="502920"/>
+          </a:xfrm>
+          <a:prstGeom prst="rect">
+            <a:avLst/>
+          </a:prstGeom>
+          <a:noFill/>
+          <a:ln/>
+        </p:spPr>
+        <p:txBody>
+          <a:bodyPr wrap="square" lIns="0" tIns="0" rIns="0" bIns="0" rtlCol="0" anchor="ctr"/>
+          <a:lstStyle/>
+          <a:p>
+            <a:pPr algn="ctr" indent="0" marL="0">
+              <a:buNone/>
+            </a:pPr>
+            <a:r>
+              <a:rPr lang="en-US" sz="1400" b="1" dirty="0">
+                <a:solidFill>
+                  <a:srgbClr val="FFFFFF"/>
+                </a:solidFill>
+                <a:latin typeface="游ゴシック" pitchFamily="34" charset="0"/>
+                <a:ea typeface="游ゴシック" pitchFamily="34" charset="-122"/>
+                <a:cs typeface="游ゴシック" pitchFamily="34" charset="-120"/>
+              </a:rPr>
+              <a:t>1</a:t>
+            </a:r>
+            <a:endParaRPr lang="en-US" sz="1400" dirty="0"/>
+          </a:p>
+        </p:txBody>
+      </p:sp>
+      <p:sp>
+        <p:nvSpPr>
+          <p:cNvPr id="10" name="Text 7"/>
+          <p:cNvSpPr txBox="1"/>
+          <p:nvPr/>
+        </p:nvSpPr>
+        <p:spPr>
+          <a:xfrm>
+            <a:off x="6858000" y="1874520"/>
+            <a:ext cx="4526280" cy="320040"/>
+          </a:xfrm>
+          <a:prstGeom prst="rect">
+            <a:avLst/>
+          </a:prstGeom>
+          <a:noFill/>
+          <a:ln/>
+        </p:spPr>
+        <p:txBody>
+          <a:bodyPr wrap="square" lIns="0" tIns="0" rIns="0" bIns="0" rtlCol="0" anchor="ctr"/>
+          <a:lstStyle/>
+          <a:p>
+            <a:pPr indent="0" marL="0">
+              <a:buNone/>
+            </a:pPr>
+            <a:r>
+              <a:rPr lang="en-US" sz="1550" b="1" dirty="0">
+                <a:solidFill>
+                  <a:srgbClr val="1E3A5F"/>
+                </a:solidFill>
+                <a:latin typeface="游ゴシック" pitchFamily="34" charset="0"/>
+                <a:ea typeface="游ゴシック" pitchFamily="34" charset="-122"/>
+                <a:cs typeface="游ゴシック" pitchFamily="34" charset="-120"/>
+              </a:rPr>
+              <a:t>命を繋ぐ</a:t>
+            </a:r>
+            <a:endParaRPr lang="en-US" sz="1550" dirty="0"/>
+          </a:p>
+        </p:txBody>
+      </p:sp>
+      <p:sp>
+        <p:nvSpPr>
+          <p:cNvPr id="11" name="Text 8"/>
+          <p:cNvSpPr txBox="1"/>
+          <p:nvPr/>
+        </p:nvSpPr>
+        <p:spPr>
+          <a:xfrm>
+            <a:off x="6858000" y="2194560"/>
+            <a:ext cx="4526280" cy="320040"/>
+          </a:xfrm>
+          <a:prstGeom prst="rect">
+            <a:avLst/>
+          </a:prstGeom>
+          <a:noFill/>
+          <a:ln/>
+        </p:spPr>
+        <p:txBody>
+          <a:bodyPr wrap="square" lIns="0" tIns="0" rIns="0" bIns="0" rtlCol="0" anchor="ctr"/>
+          <a:lstStyle/>
+          <a:p>
+            <a:pPr indent="0" marL="0">
+              <a:buNone/>
+            </a:pPr>
+            <a:r>
+              <a:rPr lang="en-US" sz="1150" dirty="0">
+                <a:solidFill>
+                  <a:srgbClr val="3A3A3A"/>
+                </a:solidFill>
+                <a:latin typeface="游ゴシック" pitchFamily="34" charset="0"/>
+                <a:ea typeface="游ゴシック" pitchFamily="34" charset="-122"/>
+                <a:cs typeface="游ゴシック" pitchFamily="34" charset="-120"/>
+              </a:rPr>
+              <a:t>もしもの時に備え、想いや希望を整理</a:t>
+            </a:r>
+            <a:endParaRPr lang="en-US" sz="1150" dirty="0"/>
+          </a:p>
+        </p:txBody>
+      </p:sp>
+      <p:sp>
+        <p:nvSpPr>
+          <p:cNvPr id="12" name="Shape 9"/>
+          <p:cNvSpPr/>
+          <p:nvPr/>
+        </p:nvSpPr>
+        <p:spPr>
+          <a:xfrm>
+            <a:off x="5943600" y="2679192"/>
+            <a:ext cx="5623560" cy="768096"/>
+          </a:xfrm>
+          <a:prstGeom prst="roundRect">
+            <a:avLst>
+              <a:gd name="adj" fmla="val 9524"/>
+            </a:avLst>
+          </a:prstGeom>
+          <a:solidFill>
+            <a:srgbClr val="F6F1EA"/>
+          </a:solidFill>
+          <a:ln/>
+          <a:effectLst>
+            <a:outerShdw sx="100000" sy="100000" kx="0" ky="0" algn="bl" rotWithShape="0" blurRad="101600" dist="38100" dir="5400000">
+              <a:srgbClr val="10233A">
+                <a:alpha val="18000"/>
+              </a:srgbClr>
+            </a:outerShdw>
+          </a:effectLst>
+        </p:spPr>
+      </p:sp>
+      <p:sp>
+        <p:nvSpPr>
+          <p:cNvPr id="13" name="Shape 10"/>
+          <p:cNvSpPr/>
+          <p:nvPr/>
+        </p:nvSpPr>
+        <p:spPr>
+          <a:xfrm>
+            <a:off x="6195060" y="2811780"/>
+            <a:ext cx="502920" cy="502920"/>
+          </a:xfrm>
+          <a:prstGeom prst="ellipse">
+            <a:avLst/>
+          </a:prstGeom>
+          <a:solidFill>
+            <a:srgbClr val="C9603F"/>
+          </a:solidFill>
+          <a:ln/>
+        </p:spPr>
+      </p:sp>
+      <p:sp>
+        <p:nvSpPr>
+          <p:cNvPr id="14" name="Text 11"/>
+          <p:cNvSpPr txBox="1"/>
+          <p:nvPr/>
+        </p:nvSpPr>
+        <p:spPr>
+          <a:xfrm>
+            <a:off x="5920740" y="2811780"/>
+            <a:ext cx="1051560" cy="502920"/>
+          </a:xfrm>
+          <a:prstGeom prst="rect">
+            <a:avLst/>
+          </a:prstGeom>
+          <a:noFill/>
+          <a:ln/>
+        </p:spPr>
+        <p:txBody>
+          <a:bodyPr wrap="square" lIns="0" tIns="0" rIns="0" bIns="0" rtlCol="0" anchor="ctr"/>
+          <a:lstStyle/>
+          <a:p>
+            <a:pPr algn="ctr" indent="0" marL="0">
+              <a:buNone/>
+            </a:pPr>
+            <a:r>
+              <a:rPr lang="en-US" sz="1400" b="1" dirty="0">
+                <a:solidFill>
+                  <a:srgbClr val="FFFFFF"/>
+                </a:solidFill>
+                <a:latin typeface="游ゴシック" pitchFamily="34" charset="0"/>
+                <a:ea typeface="游ゴシック" pitchFamily="34" charset="-122"/>
+                <a:cs typeface="游ゴシック" pitchFamily="34" charset="-120"/>
+              </a:rPr>
+              <a:t>2</a:t>
+            </a:r>
+            <a:endParaRPr lang="en-US" sz="1400" dirty="0"/>
+          </a:p>
+        </p:txBody>
+      </p:sp>
+      <p:sp>
+        <p:nvSpPr>
+          <p:cNvPr id="15" name="Text 12"/>
+          <p:cNvSpPr txBox="1"/>
+          <p:nvPr/>
+        </p:nvSpPr>
+        <p:spPr>
+          <a:xfrm>
+            <a:off x="6858000" y="2770632"/>
+            <a:ext cx="4526280" cy="320040"/>
+          </a:xfrm>
+          <a:prstGeom prst="rect">
+            <a:avLst/>
+          </a:prstGeom>
+          <a:noFill/>
+          <a:ln/>
+        </p:spPr>
+        <p:txBody>
+          <a:bodyPr wrap="square" lIns="0" tIns="0" rIns="0" bIns="0" rtlCol="0" anchor="ctr"/>
+          <a:lstStyle/>
+          <a:p>
+            <a:pPr indent="0" marL="0">
+              <a:buNone/>
+            </a:pPr>
+            <a:r>
+              <a:rPr lang="en-US" sz="1550" b="1" dirty="0">
+                <a:solidFill>
+                  <a:srgbClr val="1E3A5F"/>
+                </a:solidFill>
+                <a:latin typeface="游ゴシック" pitchFamily="34" charset="0"/>
+                <a:ea typeface="游ゴシック" pitchFamily="34" charset="-122"/>
+                <a:cs typeface="游ゴシック" pitchFamily="34" charset="-120"/>
+              </a:rPr>
+              <a:t>誰かに繋ぐ</a:t>
+            </a:r>
+            <a:endParaRPr lang="en-US" sz="1550" dirty="0"/>
+          </a:p>
+        </p:txBody>
+      </p:sp>
+      <p:sp>
+        <p:nvSpPr>
+          <p:cNvPr id="16" name="Text 13"/>
+          <p:cNvSpPr txBox="1"/>
+          <p:nvPr/>
+        </p:nvSpPr>
+        <p:spPr>
+          <a:xfrm>
+            <a:off x="6858000" y="3090672"/>
+            <a:ext cx="4526280" cy="320040"/>
+          </a:xfrm>
+          <a:prstGeom prst="rect">
+            <a:avLst/>
+          </a:prstGeom>
+          <a:noFill/>
+          <a:ln/>
+        </p:spPr>
+        <p:txBody>
+          <a:bodyPr wrap="square" lIns="0" tIns="0" rIns="0" bIns="0" rtlCol="0" anchor="ctr"/>
+          <a:lstStyle/>
+          <a:p>
+            <a:pPr indent="0" marL="0">
+              <a:buNone/>
+            </a:pPr>
+            <a:r>
+              <a:rPr lang="en-US" sz="1150" dirty="0">
+                <a:solidFill>
+                  <a:srgbClr val="3A3A3A"/>
+                </a:solidFill>
+                <a:latin typeface="游ゴシック" pitchFamily="34" charset="0"/>
+                <a:ea typeface="游ゴシック" pitchFamily="34" charset="-122"/>
+                <a:cs typeface="游ゴシック" pitchFamily="34" charset="-120"/>
+              </a:rPr>
+              <a:t>家族や大切な人と対話するきっかけに</a:t>
+            </a:r>
+            <a:endParaRPr lang="en-US" sz="1150" dirty="0"/>
+          </a:p>
+        </p:txBody>
+      </p:sp>
+      <p:sp>
+        <p:nvSpPr>
+          <p:cNvPr id="17" name="Shape 14"/>
+          <p:cNvSpPr/>
+          <p:nvPr/>
+        </p:nvSpPr>
+        <p:spPr>
+          <a:xfrm>
+            <a:off x="5943600" y="3575304"/>
+            <a:ext cx="5623560" cy="768096"/>
+          </a:xfrm>
+          <a:prstGeom prst="roundRect">
+            <a:avLst>
+              <a:gd name="adj" fmla="val 9524"/>
+            </a:avLst>
+          </a:prstGeom>
+          <a:solidFill>
+            <a:srgbClr val="F6F1EA"/>
+          </a:solidFill>
+          <a:ln/>
+          <a:effectLst>
+            <a:outerShdw sx="100000" sy="100000" kx="0" ky="0" algn="bl" rotWithShape="0" blurRad="101600" dist="38100" dir="5400000">
+              <a:srgbClr val="10233A">
+                <a:alpha val="18000"/>
+              </a:srgbClr>
+            </a:outerShdw>
+          </a:effectLst>
+        </p:spPr>
+      </p:sp>
+      <p:sp>
+        <p:nvSpPr>
+          <p:cNvPr id="18" name="Shape 15"/>
+          <p:cNvSpPr/>
+          <p:nvPr/>
+        </p:nvSpPr>
+        <p:spPr>
+          <a:xfrm>
+            <a:off x="6195060" y="3707892"/>
+            <a:ext cx="502920" cy="502920"/>
+          </a:xfrm>
+          <a:prstGeom prst="ellipse">
+            <a:avLst/>
+          </a:prstGeom>
+          <a:solidFill>
+            <a:srgbClr val="C9603F"/>
+          </a:solidFill>
+          <a:ln/>
+        </p:spPr>
+      </p:sp>
+      <p:sp>
+        <p:nvSpPr>
+          <p:cNvPr id="19" name="Text 16"/>
+          <p:cNvSpPr txBox="1"/>
+          <p:nvPr/>
+        </p:nvSpPr>
+        <p:spPr>
+          <a:xfrm>
+            <a:off x="5920740" y="3707892"/>
+            <a:ext cx="1051560" cy="502920"/>
+          </a:xfrm>
+          <a:prstGeom prst="rect">
+            <a:avLst/>
+          </a:prstGeom>
+          <a:noFill/>
+          <a:ln/>
+        </p:spPr>
+        <p:txBody>
+          <a:bodyPr wrap="square" lIns="0" tIns="0" rIns="0" bIns="0" rtlCol="0" anchor="ctr"/>
+          <a:lstStyle/>
+          <a:p>
+            <a:pPr algn="ctr" indent="0" marL="0">
+              <a:buNone/>
+            </a:pPr>
+            <a:r>
+              <a:rPr lang="en-US" sz="1400" b="1" dirty="0">
+                <a:solidFill>
+                  <a:srgbClr val="FFFFFF"/>
+                </a:solidFill>
+                <a:latin typeface="游ゴシック" pitchFamily="34" charset="0"/>
+                <a:ea typeface="游ゴシック" pitchFamily="34" charset="-122"/>
+                <a:cs typeface="游ゴシック" pitchFamily="34" charset="-120"/>
+              </a:rPr>
+              <a:t>3</a:t>
+            </a:r>
+            <a:endParaRPr lang="en-US" sz="1400" dirty="0"/>
+          </a:p>
+        </p:txBody>
+      </p:sp>
+      <p:sp>
+        <p:nvSpPr>
+          <p:cNvPr id="20" name="Text 17"/>
+          <p:cNvSpPr txBox="1"/>
+          <p:nvPr/>
+        </p:nvSpPr>
+        <p:spPr>
+          <a:xfrm>
+            <a:off x="6858000" y="3666744"/>
+            <a:ext cx="4526280" cy="320040"/>
+          </a:xfrm>
+          <a:prstGeom prst="rect">
+            <a:avLst/>
+          </a:prstGeom>
+          <a:noFill/>
+          <a:ln/>
+        </p:spPr>
+        <p:txBody>
+          <a:bodyPr wrap="square" lIns="0" tIns="0" rIns="0" bIns="0" rtlCol="0" anchor="ctr"/>
+          <a:lstStyle/>
+          <a:p>
+            <a:pPr indent="0" marL="0">
+              <a:buNone/>
+            </a:pPr>
+            <a:r>
+              <a:rPr lang="en-US" sz="1550" b="1" dirty="0">
+                <a:solidFill>
+                  <a:srgbClr val="1E3A5F"/>
+                </a:solidFill>
+                <a:latin typeface="游ゴシック" pitchFamily="34" charset="0"/>
+                <a:ea typeface="游ゴシック" pitchFamily="34" charset="-122"/>
+                <a:cs typeface="游ゴシック" pitchFamily="34" charset="-120"/>
+              </a:rPr>
+              <a:t>未来に繋ぐ</a:t>
+            </a:r>
+            <a:endParaRPr lang="en-US" sz="1550" dirty="0"/>
+          </a:p>
+        </p:txBody>
+      </p:sp>
+      <p:sp>
+        <p:nvSpPr>
+          <p:cNvPr id="21" name="Text 18"/>
+          <p:cNvSpPr txBox="1"/>
+          <p:nvPr/>
+        </p:nvSpPr>
+        <p:spPr>
+          <a:xfrm>
+            <a:off x="6858000" y="3986784"/>
+            <a:ext cx="4526280" cy="320040"/>
+          </a:xfrm>
+          <a:prstGeom prst="rect">
+            <a:avLst/>
+          </a:prstGeom>
+          <a:noFill/>
+          <a:ln/>
+        </p:spPr>
+        <p:txBody>
+          <a:bodyPr wrap="square" lIns="0" tIns="0" rIns="0" bIns="0" rtlCol="0" anchor="ctr"/>
+          <a:lstStyle/>
+          <a:p>
+            <a:pPr indent="0" marL="0">
+              <a:buNone/>
+            </a:pPr>
+            <a:r>
+              <a:rPr lang="en-US" sz="1150" dirty="0">
+                <a:solidFill>
+                  <a:srgbClr val="3A3A3A"/>
+                </a:solidFill>
+                <a:latin typeface="游ゴシック" pitchFamily="34" charset="0"/>
+                <a:ea typeface="游ゴシック" pitchFamily="34" charset="-122"/>
+                <a:cs typeface="游ゴシック" pitchFamily="34" charset="-120"/>
+              </a:rPr>
+              <a:t>これからの人生を、自分らしく前向きに</a:t>
+            </a:r>
+            <a:endParaRPr lang="en-US" sz="1150" dirty="0"/>
+          </a:p>
+        </p:txBody>
+      </p:sp>
+      <p:sp>
+        <p:nvSpPr>
+          <p:cNvPr id="22" name="Shape 19"/>
+          <p:cNvSpPr/>
+          <p:nvPr/>
+        </p:nvSpPr>
+        <p:spPr>
+          <a:xfrm>
+            <a:off x="640080" y="4663440"/>
+            <a:ext cx="10881360" cy="1600200"/>
+          </a:xfrm>
+          <a:prstGeom prst="roundRect">
+            <a:avLst>
+              <a:gd name="adj" fmla="val 5714"/>
+            </a:avLst>
+          </a:prstGeom>
+          <a:solidFill>
+            <a:srgbClr val="1E3A5F"/>
+          </a:solidFill>
+          <a:ln/>
+          <a:effectLst>
+            <a:outerShdw sx="100000" sy="100000" kx="0" ky="0" algn="bl" rotWithShape="0" blurRad="101600" dist="38100" dir="5400000">
+              <a:srgbClr val="10233A">
+                <a:alpha val="18000"/>
+              </a:srgbClr>
+            </a:outerShdw>
+          </a:effectLst>
+        </p:spPr>
+      </p:sp>
+      <p:sp>
+        <p:nvSpPr>
+          <p:cNvPr id="23" name="Text 20"/>
+          <p:cNvSpPr txBox="1"/>
+          <p:nvPr/>
+        </p:nvSpPr>
+        <p:spPr>
+          <a:xfrm>
+            <a:off x="1005840" y="4828032"/>
+            <a:ext cx="10149840" cy="365760"/>
+          </a:xfrm>
+          <a:prstGeom prst="rect">
+            <a:avLst/>
+          </a:prstGeom>
+          <a:noFill/>
+          <a:ln/>
+        </p:spPr>
+        <p:txBody>
+          <a:bodyPr wrap="square" lIns="0" tIns="0" rIns="0" bIns="0" rtlCol="0" anchor="ctr"/>
+          <a:lstStyle/>
+          <a:p>
+            <a:pPr indent="0" marL="0">
+              <a:buNone/>
+            </a:pPr>
+            <a:r>
+              <a:rPr lang="en-US" sz="1500" b="1" dirty="0">
+                <a:solidFill>
+                  <a:srgbClr val="F1DCCF"/>
+                </a:solidFill>
+                <a:latin typeface="游ゴシック" pitchFamily="34" charset="0"/>
+                <a:ea typeface="游ゴシック" pitchFamily="34" charset="-122"/>
+                <a:cs typeface="游ゴシック" pitchFamily="34" charset="-120"/>
+              </a:rPr>
+              <a:t>専門的な視点から作られた、命を守るノート</a:t>
+            </a:r>
+            <a:endParaRPr lang="en-US" sz="1500" dirty="0"/>
+          </a:p>
+        </p:txBody>
+      </p:sp>
+      <p:sp>
+        <p:nvSpPr>
+          <p:cNvPr id="24" name="Text 21"/>
+          <p:cNvSpPr txBox="1"/>
+          <p:nvPr/>
+        </p:nvSpPr>
+        <p:spPr>
+          <a:xfrm>
+            <a:off x="1005840" y="5230368"/>
+            <a:ext cx="10149840" cy="960120"/>
+          </a:xfrm>
+          <a:prstGeom prst="rect">
+            <a:avLst/>
+          </a:prstGeom>
+          <a:noFill/>
+          <a:ln/>
+        </p:spPr>
+        <p:txBody>
+          <a:bodyPr wrap="square" lIns="0" tIns="0" rIns="0" bIns="0" rtlCol="0" anchor="t"/>
+          <a:lstStyle/>
+          <a:p>
+            <a:pPr marL="342900" indent="-342900">
               <a:lnSpc>
-                <a:spcPct val="130000"/>
+                <a:spcPct val="115000"/>
               </a:lnSpc>
-              <a:buNone/>
-            </a:pPr>
-            <a:r>
-              <a:rPr lang="en-US" sz="1450" dirty="0">
-                <a:solidFill>
-                  <a:srgbClr val="1E3A5F"/>
-                </a:solidFill>
-                <a:latin typeface="游ゴシック" pitchFamily="34" charset="0"/>
-                <a:ea typeface="游ゴシック" pitchFamily="34" charset="-122"/>
-                <a:cs typeface="游ゴシック" pitchFamily="34" charset="-120"/>
-              </a:rPr>
-              <a:t>金融・保険・福祉・介護・不動産など、異業種の方にこそ取得していただきたい資格です。</a:t>
-            </a:r>
-            <a:endParaRPr lang="en-US" sz="1450" dirty="0"/>
-          </a:p>
-          <a:p>
-            <a:pPr indent="0" marL="0">
+              <a:spcAft>
+                <a:spcPts val="600"/>
+              </a:spcAft>
+              <a:buSzPct val="100000"/>
+              <a:buChar char="●"/>
+            </a:pPr>
+            <a:r>
+              <a:rPr lang="en-US" sz="1250" dirty="0">
+                <a:solidFill>
+                  <a:srgbClr val="E6EAF0"/>
+                </a:solidFill>
+                <a:latin typeface="游ゴシック" pitchFamily="34" charset="0"/>
+                <a:ea typeface="游ゴシック" pitchFamily="34" charset="-122"/>
+                <a:cs typeface="游ゴシック" pitchFamily="34" charset="-120"/>
+              </a:rPr>
+              <a:t>B6サイズ・全24ページ＋表紙。大病院の問診票を参考に構成し、意識を失っても問診票代わりに機能</a:t>
+            </a:r>
+            <a:endParaRPr lang="en-US" sz="1250" dirty="0"/>
+          </a:p>
+          <a:p>
+            <a:pPr marL="342900" indent="-342900">
               <a:lnSpc>
-                <a:spcPct val="130000"/>
+                <a:spcPct val="115000"/>
               </a:lnSpc>
-              <a:buNone/>
-            </a:pPr>
-            <a:r>
-              <a:rPr lang="en-US" sz="1450" dirty="0">
-                <a:solidFill>
-                  <a:srgbClr val="1E3A5F"/>
-                </a:solidFill>
-                <a:latin typeface="游ゴシック" pitchFamily="34" charset="0"/>
-                <a:ea typeface="游ゴシック" pitchFamily="34" charset="-122"/>
-                <a:cs typeface="游ゴシック" pitchFamily="34" charset="-120"/>
-              </a:rPr>
-              <a:t>「財産の専門家」ではなく、「生きる準備」の入口を開く人を全国に増やしていきます。</a:t>
-            </a:r>
-            <a:endParaRPr lang="en-US" sz="1450" dirty="0"/>
-          </a:p>
-        </p:txBody>
-      </p:sp>
-      <p:sp>
-        <p:nvSpPr>
-          <p:cNvPr id="17" name="Text 15"/>
+              <a:spcAft>
+                <a:spcPts val="500"/>
+              </a:spcAft>
+              <a:buSzPct val="100000"/>
+              <a:buChar char="●"/>
+            </a:pPr>
+            <a:r>
+              <a:rPr lang="en-US" sz="1250" dirty="0">
+                <a:solidFill>
+                  <a:srgbClr val="E6EAF0"/>
+                </a:solidFill>
+                <a:latin typeface="游ゴシック" pitchFamily="34" charset="0"/>
+                <a:ea typeface="游ゴシック" pitchFamily="34" charset="-122"/>
+                <a:cs typeface="游ゴシック" pitchFamily="34" charset="-120"/>
+              </a:rPr>
+              <a:t>大阪市消防局で34年間現場に立った元救急救命士・上田雄一氏の「命の火を消さない」という経験から考案</a:t>
+            </a:r>
+            <a:endParaRPr lang="en-US" sz="1250" dirty="0"/>
+          </a:p>
+        </p:txBody>
+      </p:sp>
+      <p:sp>
+        <p:nvSpPr>
+          <p:cNvPr id="25" name="Text 22"/>
           <p:cNvSpPr txBox="1"/>
           <p:nvPr/>
         </p:nvSpPr>
@@ -8357,7 +8985,7 @@
                 <a:ea typeface="游ゴシック" pitchFamily="34" charset="-122"/>
                 <a:cs typeface="游ゴシック" pitchFamily="34" charset="-120"/>
               </a:rPr>
-              <a:t>OUR JOURNEY</a:t>
+              <a:t>SOLUTION 2</a:t>
             </a:r>
             <a:endParaRPr lang="en-US" sz="1300" dirty="0"/>
           </a:p>
@@ -8396,7 +9024,7 @@
                 <a:ea typeface="游ゴシック" pitchFamily="34" charset="-122"/>
                 <a:cs typeface="游ゴシック" pitchFamily="34" charset="-120"/>
               </a:rPr>
-              <a:t>8年間の歩み ― 「実証フェーズ」</a:t>
+              <a:t>解決策② 日本初「繋ぐノートサポートアドバイザー®」</a:t>
             </a:r>
             <a:endParaRPr lang="en-US" sz="2800" dirty="0"/>
           </a:p>
@@ -8404,26 +9032,42 @@
       </p:sp>
       <p:sp>
         <p:nvSpPr>
-          <p:cNvPr id="4" name="Shape 2"/>
-          <p:cNvSpPr/>
-          <p:nvPr/>
-        </p:nvSpPr>
-        <p:spPr>
-          <a:xfrm>
-            <a:off x="1623060" y="2880360"/>
-            <a:ext cx="8595360" cy="0"/>
-          </a:xfrm>
-          <a:prstGeom prst="line">
-            <a:avLst/>
-          </a:prstGeom>
-          <a:noFill/>
-          <a:ln w="25400">
-            <a:solidFill>
-              <a:srgbClr val="1E3A5F"/>
-            </a:solidFill>
-            <a:prstDash val="dash"/>
-          </a:ln>
-        </p:spPr>
+          <p:cNvPr id="4" name="Text 2"/>
+          <p:cNvSpPr txBox="1"/>
+          <p:nvPr/>
+        </p:nvSpPr>
+        <p:spPr>
+          <a:xfrm>
+            <a:off x="640080" y="1691640"/>
+            <a:ext cx="10881360" cy="457200"/>
+          </a:xfrm>
+          <a:prstGeom prst="rect">
+            <a:avLst/>
+          </a:prstGeom>
+          <a:noFill/>
+          <a:ln/>
+        </p:spPr>
+        <p:txBody>
+          <a:bodyPr wrap="square" lIns="0" tIns="0" rIns="0" bIns="0" rtlCol="0" anchor="ctr"/>
+          <a:lstStyle/>
+          <a:p>
+            <a:pPr indent="0" marL="0">
+              <a:buNone/>
+            </a:pPr>
+            <a:r>
+              <a:rPr lang="en-US" sz="1500" dirty="0">
+                <a:solidFill>
+                  <a:srgbClr val="3A3A3A"/>
+                </a:solidFill>
+                <a:latin typeface="游ゴシック" pitchFamily="34" charset="0"/>
+                <a:ea typeface="游ゴシック" pitchFamily="34" charset="-122"/>
+                <a:cs typeface="游ゴシック" pitchFamily="34" charset="-120"/>
+              </a:rPr>
+              <a:t>“生きる準備”の推進を目的に創設した、日本で初めての民間資格</a:t>
+            </a:r>
+            <a:endParaRPr lang="en-US" sz="1500" dirty="0"/>
+          </a:p>
+        </p:txBody>
       </p:sp>
       <p:sp>
         <p:nvSpPr>
@@ -8433,8 +9077,8 @@
         </p:nvSpPr>
         <p:spPr>
           <a:xfrm>
-            <a:off x="1280160" y="2537460"/>
-            <a:ext cx="685800" cy="685800"/>
+            <a:off x="1042416" y="2514600"/>
+            <a:ext cx="1371600" cy="1371600"/>
           </a:xfrm>
           <a:prstGeom prst="ellipse">
             <a:avLst/>
@@ -8453,8 +9097,8 @@
         </p:nvSpPr>
         <p:spPr>
           <a:xfrm>
-            <a:off x="1005840" y="2537460"/>
-            <a:ext cx="1234440" cy="685800"/>
+            <a:off x="768096" y="2514600"/>
+            <a:ext cx="1920240" cy="1371600"/>
           </a:xfrm>
           <a:prstGeom prst="rect">
             <a:avLst/>
@@ -8470,7 +9114,7 @@
               <a:buNone/>
             </a:pPr>
             <a:r>
-              <a:rPr lang="en-US" sz="1200" b="1" dirty="0">
+              <a:rPr lang="en-US" sz="1400" b="1" dirty="0">
                 <a:solidFill>
                   <a:srgbClr val="FFFFFF"/>
                 </a:solidFill>
@@ -8478,22 +9122,42 @@
                 <a:ea typeface="游ゴシック" pitchFamily="34" charset="-122"/>
                 <a:cs typeface="游ゴシック" pitchFamily="34" charset="-120"/>
               </a:rPr>
-              <a:t>1</a:t>
-            </a:r>
-            <a:endParaRPr lang="en-US" sz="1200" dirty="0"/>
-          </a:p>
-        </p:txBody>
-      </p:sp>
-      <p:sp>
-        <p:nvSpPr>
-          <p:cNvPr id="7" name="Text 5"/>
-          <p:cNvSpPr txBox="1"/>
-          <p:nvPr/>
-        </p:nvSpPr>
-        <p:spPr>
-          <a:xfrm>
-            <a:off x="502920" y="3474720"/>
-            <a:ext cx="2240280" cy="457200"/>
+              <a:t>医療機関</a:t>
+            </a:r>
+            <a:endParaRPr lang="en-US" sz="1400" dirty="0"/>
+          </a:p>
+        </p:txBody>
+      </p:sp>
+      <p:sp>
+        <p:nvSpPr>
+          <p:cNvPr id="7" name="Shape 5"/>
+          <p:cNvSpPr/>
+          <p:nvPr/>
+        </p:nvSpPr>
+        <p:spPr>
+          <a:xfrm>
+            <a:off x="3218688" y="2514600"/>
+            <a:ext cx="1371600" cy="1371600"/>
+          </a:xfrm>
+          <a:prstGeom prst="ellipse">
+            <a:avLst/>
+          </a:prstGeom>
+          <a:solidFill>
+            <a:srgbClr val="C9603F"/>
+          </a:solidFill>
+          <a:ln/>
+        </p:spPr>
+      </p:sp>
+      <p:sp>
+        <p:nvSpPr>
+          <p:cNvPr id="8" name="Text 6"/>
+          <p:cNvSpPr txBox="1"/>
+          <p:nvPr/>
+        </p:nvSpPr>
+        <p:spPr>
+          <a:xfrm>
+            <a:off x="2944368" y="2514600"/>
+            <a:ext cx="1920240" cy="1371600"/>
           </a:xfrm>
           <a:prstGeom prst="rect">
             <a:avLst/>
@@ -8509,73 +9173,17 @@
               <a:buNone/>
             </a:pPr>
             <a:r>
-              <a:rPr lang="en-US" sz="1350" b="1" dirty="0">
-                <a:solidFill>
-                  <a:srgbClr val="1E3A5F"/>
-                </a:solidFill>
-                <a:latin typeface="游ゴシック" pitchFamily="34" charset="0"/>
-                <a:ea typeface="游ゴシック" pitchFamily="34" charset="-122"/>
-                <a:cs typeface="游ゴシック" pitchFamily="34" charset="-120"/>
-              </a:rPr>
-              <a:t>個人事業</a:t>
-            </a:r>
-            <a:endParaRPr lang="en-US" sz="1350" dirty="0"/>
-          </a:p>
-        </p:txBody>
-      </p:sp>
-      <p:sp>
-        <p:nvSpPr>
-          <p:cNvPr id="8" name="Text 6"/>
-          <p:cNvSpPr txBox="1"/>
-          <p:nvPr/>
-        </p:nvSpPr>
-        <p:spPr>
-          <a:xfrm>
-            <a:off x="502920" y="3931920"/>
-            <a:ext cx="2240280" cy="822960"/>
-          </a:xfrm>
-          <a:prstGeom prst="rect">
-            <a:avLst/>
-          </a:prstGeom>
-          <a:noFill/>
-          <a:ln/>
-        </p:spPr>
-        <p:txBody>
-          <a:bodyPr wrap="square" lIns="0" tIns="0" rIns="0" bIns="0" rtlCol="0" anchor="t"/>
-          <a:lstStyle/>
-          <a:p>
-            <a:pPr algn="ctr" indent="0" marL="0">
-              <a:buNone/>
-            </a:pPr>
-            <a:r>
-              <a:rPr lang="en-US" sz="1050" dirty="0">
-                <a:solidFill>
-                  <a:srgbClr val="6B6B6B"/>
-                </a:solidFill>
-                <a:latin typeface="游ゴシック" pitchFamily="34" charset="0"/>
-                <a:ea typeface="游ゴシック" pitchFamily="34" charset="-122"/>
-                <a:cs typeface="游ゴシック" pitchFamily="34" charset="-120"/>
-              </a:rPr>
-              <a:t>相続コンサルタント</a:t>
-            </a:r>
-            <a:endParaRPr lang="en-US" sz="1050" dirty="0"/>
-          </a:p>
-          <a:p>
-            <a:pPr algn="ctr" indent="0" marL="0">
-              <a:buNone/>
-            </a:pPr>
-            <a:r>
-              <a:rPr lang="en-US" sz="1050" dirty="0">
-                <a:solidFill>
-                  <a:srgbClr val="6B6B6B"/>
-                </a:solidFill>
-                <a:latin typeface="游ゴシック" pitchFamily="34" charset="0"/>
-                <a:ea typeface="游ゴシック" pitchFamily="34" charset="-122"/>
-                <a:cs typeface="游ゴシック" pitchFamily="34" charset="-120"/>
-              </a:rPr>
-              <a:t>事務所〜繋ぐ〜</a:t>
-            </a:r>
-            <a:endParaRPr lang="en-US" sz="1050" dirty="0"/>
+              <a:rPr lang="en-US" sz="1400" b="1" dirty="0">
+                <a:solidFill>
+                  <a:srgbClr val="FFFFFF"/>
+                </a:solidFill>
+                <a:latin typeface="游ゴシック" pitchFamily="34" charset="0"/>
+                <a:ea typeface="游ゴシック" pitchFamily="34" charset="-122"/>
+                <a:cs typeface="游ゴシック" pitchFamily="34" charset="-120"/>
+              </a:rPr>
+              <a:t>行政</a:t>
+            </a:r>
+            <a:endParaRPr lang="en-US" sz="1400" dirty="0"/>
           </a:p>
         </p:txBody>
       </p:sp>
@@ -8587,8 +9195,8 @@
         </p:nvSpPr>
         <p:spPr>
           <a:xfrm>
-            <a:off x="3429000" y="2537460"/>
-            <a:ext cx="685800" cy="685800"/>
+            <a:off x="5394960" y="2514600"/>
+            <a:ext cx="1371600" cy="1371600"/>
           </a:xfrm>
           <a:prstGeom prst="ellipse">
             <a:avLst/>
@@ -8607,8 +9215,8 @@
         </p:nvSpPr>
         <p:spPr>
           <a:xfrm>
-            <a:off x="3154680" y="2537460"/>
-            <a:ext cx="1234440" cy="685800"/>
+            <a:off x="5120640" y="2514600"/>
+            <a:ext cx="1920240" cy="1371600"/>
           </a:xfrm>
           <a:prstGeom prst="rect">
             <a:avLst/>
@@ -8624,7 +9232,7 @@
               <a:buNone/>
             </a:pPr>
             <a:r>
-              <a:rPr lang="en-US" sz="1200" b="1" dirty="0">
+              <a:rPr lang="en-US" sz="1400" b="1" dirty="0">
                 <a:solidFill>
                   <a:srgbClr val="FFFFFF"/>
                 </a:solidFill>
@@ -8632,50 +9240,48 @@
                 <a:ea typeface="游ゴシック" pitchFamily="34" charset="-122"/>
                 <a:cs typeface="游ゴシック" pitchFamily="34" charset="-120"/>
               </a:rPr>
-              <a:t>2</a:t>
-            </a:r>
-            <a:endParaRPr lang="en-US" sz="1200" dirty="0"/>
-          </a:p>
-        </p:txBody>
-      </p:sp>
-      <p:sp>
-        <p:nvSpPr>
-          <p:cNvPr id="11" name="Text 9"/>
-          <p:cNvSpPr txBox="1"/>
-          <p:nvPr/>
-        </p:nvSpPr>
-        <p:spPr>
-          <a:xfrm>
-            <a:off x="2651760" y="3474720"/>
-            <a:ext cx="2240280" cy="457200"/>
-          </a:xfrm>
-          <a:prstGeom prst="rect">
-            <a:avLst/>
-          </a:prstGeom>
-          <a:noFill/>
-          <a:ln/>
-        </p:spPr>
-        <p:txBody>
-          <a:bodyPr wrap="square" lIns="0" tIns="0" rIns="0" bIns="0" rtlCol="0" anchor="ctr"/>
-          <a:lstStyle/>
+              <a:t>地域</a:t>
+            </a:r>
+            <a:endParaRPr lang="en-US" sz="1400" dirty="0"/>
+          </a:p>
           <a:p>
             <a:pPr algn="ctr" indent="0" marL="0">
               <a:buNone/>
             </a:pPr>
             <a:r>
-              <a:rPr lang="en-US" sz="1350" b="1" dirty="0">
-                <a:solidFill>
-                  <a:srgbClr val="1E3A5F"/>
-                </a:solidFill>
-                <a:latin typeface="游ゴシック" pitchFamily="34" charset="0"/>
-                <a:ea typeface="游ゴシック" pitchFamily="34" charset="-122"/>
-                <a:cs typeface="游ゴシック" pitchFamily="34" charset="-120"/>
-              </a:rPr>
-              <a:t>法人化</a:t>
-            </a:r>
-            <a:endParaRPr lang="en-US" sz="1350" dirty="0"/>
-          </a:p>
-        </p:txBody>
+              <a:rPr lang="en-US" sz="1400" b="1" dirty="0">
+                <a:solidFill>
+                  <a:srgbClr val="FFFFFF"/>
+                </a:solidFill>
+                <a:latin typeface="游ゴシック" pitchFamily="34" charset="0"/>
+                <a:ea typeface="游ゴシック" pitchFamily="34" charset="-122"/>
+                <a:cs typeface="游ゴシック" pitchFamily="34" charset="-120"/>
+              </a:rPr>
+              <a:t>コミュニティ</a:t>
+            </a:r>
+            <a:endParaRPr lang="en-US" sz="1400" dirty="0"/>
+          </a:p>
+        </p:txBody>
+      </p:sp>
+      <p:sp>
+        <p:nvSpPr>
+          <p:cNvPr id="11" name="Shape 9"/>
+          <p:cNvSpPr/>
+          <p:nvPr/>
+        </p:nvSpPr>
+        <p:spPr>
+          <a:xfrm>
+            <a:off x="7571232" y="2514600"/>
+            <a:ext cx="1371600" cy="1371600"/>
+          </a:xfrm>
+          <a:prstGeom prst="ellipse">
+            <a:avLst/>
+          </a:prstGeom>
+          <a:solidFill>
+            <a:srgbClr val="C9603F"/>
+          </a:solidFill>
+          <a:ln/>
+        </p:spPr>
       </p:sp>
       <p:sp>
         <p:nvSpPr>
@@ -8685,68 +9291,34 @@
         </p:nvSpPr>
         <p:spPr>
           <a:xfrm>
-            <a:off x="2651760" y="3931920"/>
-            <a:ext cx="2240280" cy="822960"/>
-          </a:xfrm>
-          <a:prstGeom prst="rect">
-            <a:avLst/>
-          </a:prstGeom>
-          <a:noFill/>
-          <a:ln/>
-        </p:spPr>
-        <p:txBody>
-          <a:bodyPr wrap="square" lIns="0" tIns="0" rIns="0" bIns="0" rtlCol="0" anchor="t"/>
+            <a:off x="7296912" y="2514600"/>
+            <a:ext cx="1920240" cy="1371600"/>
+          </a:xfrm>
+          <a:prstGeom prst="rect">
+            <a:avLst/>
+          </a:prstGeom>
+          <a:noFill/>
+          <a:ln/>
+        </p:spPr>
+        <p:txBody>
+          <a:bodyPr wrap="square" lIns="0" tIns="0" rIns="0" bIns="0" rtlCol="0" anchor="ctr"/>
           <a:lstStyle/>
           <a:p>
             <a:pPr algn="ctr" indent="0" marL="0">
               <a:buNone/>
             </a:pPr>
             <a:r>
-              <a:rPr lang="en-US" sz="1050" dirty="0">
-                <a:solidFill>
-                  <a:srgbClr val="6B6B6B"/>
-                </a:solidFill>
-                <a:latin typeface="游ゴシック" pitchFamily="34" charset="0"/>
-                <a:ea typeface="游ゴシック" pitchFamily="34" charset="-122"/>
-                <a:cs typeface="游ゴシック" pitchFamily="34" charset="-120"/>
-              </a:rPr>
-              <a:t>株式会社繋ぐ</a:t>
-            </a:r>
-            <a:endParaRPr lang="en-US" sz="1050" dirty="0"/>
-          </a:p>
-          <a:p>
-            <a:pPr algn="ctr" indent="0" marL="0">
-              <a:buNone/>
-            </a:pPr>
-            <a:r>
-              <a:rPr lang="en-US" sz="1050" dirty="0">
-                <a:solidFill>
-                  <a:srgbClr val="6B6B6B"/>
-                </a:solidFill>
-                <a:latin typeface="游ゴシック" pitchFamily="34" charset="0"/>
-                <a:ea typeface="游ゴシック" pitchFamily="34" charset="-122"/>
-                <a:cs typeface="游ゴシック" pitchFamily="34" charset="-120"/>
-              </a:rPr>
-              <a:t>コンサルタントオフィス</a:t>
-            </a:r>
-            <a:endParaRPr lang="en-US" sz="1050" dirty="0"/>
-          </a:p>
-          <a:p>
-            <a:pPr algn="ctr" indent="0" marL="0">
-              <a:buNone/>
-            </a:pPr>
-            <a:r>
-              <a:rPr lang="en-US" sz="1050" dirty="0">
-                <a:solidFill>
-                  <a:srgbClr val="6B6B6B"/>
-                </a:solidFill>
-                <a:latin typeface="游ゴシック" pitchFamily="34" charset="0"/>
-                <a:ea typeface="游ゴシック" pitchFamily="34" charset="-122"/>
-                <a:cs typeface="游ゴシック" pitchFamily="34" charset="-120"/>
-              </a:rPr>
-              <a:t>（2020年2月）</a:t>
-            </a:r>
-            <a:endParaRPr lang="en-US" sz="1050" dirty="0"/>
+              <a:rPr lang="en-US" sz="1400" b="1" dirty="0">
+                <a:solidFill>
+                  <a:srgbClr val="FFFFFF"/>
+                </a:solidFill>
+                <a:latin typeface="游ゴシック" pitchFamily="34" charset="0"/>
+                <a:ea typeface="游ゴシック" pitchFamily="34" charset="-122"/>
+                <a:cs typeface="游ゴシック" pitchFamily="34" charset="-120"/>
+              </a:rPr>
+              <a:t>企業</a:t>
+            </a:r>
+            <a:endParaRPr lang="en-US" sz="1400" dirty="0"/>
           </a:p>
         </p:txBody>
       </p:sp>
@@ -8758,8 +9330,8 @@
         </p:nvSpPr>
         <p:spPr>
           <a:xfrm>
-            <a:off x="5577840" y="2537460"/>
-            <a:ext cx="685800" cy="685800"/>
+            <a:off x="9747504" y="2514600"/>
+            <a:ext cx="1371600" cy="1371600"/>
           </a:xfrm>
           <a:prstGeom prst="ellipse">
             <a:avLst/>
@@ -8778,8 +9350,8 @@
         </p:nvSpPr>
         <p:spPr>
           <a:xfrm>
-            <a:off x="5303520" y="2537460"/>
-            <a:ext cx="1234440" cy="685800"/>
+            <a:off x="9473184" y="2514600"/>
+            <a:ext cx="1920240" cy="1371600"/>
           </a:xfrm>
           <a:prstGeom prst="rect">
             <a:avLst/>
@@ -8795,7 +9367,7 @@
               <a:buNone/>
             </a:pPr>
             <a:r>
-              <a:rPr lang="en-US" sz="1200" b="1" dirty="0">
+              <a:rPr lang="en-US" sz="1400" b="1" dirty="0">
                 <a:solidFill>
                   <a:srgbClr val="FFFFFF"/>
                 </a:solidFill>
@@ -8803,391 +9375,22 @@
                 <a:ea typeface="游ゴシック" pitchFamily="34" charset="-122"/>
                 <a:cs typeface="游ゴシック" pitchFamily="34" charset="-120"/>
               </a:rPr>
-              <a:t>3</a:t>
-            </a:r>
-            <a:endParaRPr lang="en-US" sz="1200" dirty="0"/>
-          </a:p>
-        </p:txBody>
-      </p:sp>
-      <p:sp>
-        <p:nvSpPr>
-          <p:cNvPr id="15" name="Text 13"/>
-          <p:cNvSpPr txBox="1"/>
-          <p:nvPr/>
-        </p:nvSpPr>
-        <p:spPr>
-          <a:xfrm>
-            <a:off x="4800600" y="3474720"/>
-            <a:ext cx="2240280" cy="457200"/>
-          </a:xfrm>
-          <a:prstGeom prst="rect">
-            <a:avLst/>
-          </a:prstGeom>
-          <a:noFill/>
-          <a:ln/>
-        </p:spPr>
-        <p:txBody>
-          <a:bodyPr wrap="square" lIns="0" tIns="0" rIns="0" bIns="0" rtlCol="0" anchor="ctr"/>
-          <a:lstStyle/>
-          <a:p>
-            <a:pPr algn="ctr" indent="0" marL="0">
-              <a:buNone/>
-            </a:pPr>
-            <a:r>
-              <a:rPr lang="en-US" sz="1350" b="1" dirty="0">
-                <a:solidFill>
-                  <a:srgbClr val="1E3A5F"/>
-                </a:solidFill>
-                <a:latin typeface="游ゴシック" pitchFamily="34" charset="0"/>
-                <a:ea typeface="游ゴシック" pitchFamily="34" charset="-122"/>
-                <a:cs typeface="游ゴシック" pitchFamily="34" charset="-120"/>
-              </a:rPr>
-              <a:t>FC展開</a:t>
-            </a:r>
-            <a:endParaRPr lang="en-US" sz="1350" dirty="0"/>
-          </a:p>
-        </p:txBody>
-      </p:sp>
-      <p:sp>
-        <p:nvSpPr>
-          <p:cNvPr id="16" name="Text 14"/>
-          <p:cNvSpPr txBox="1"/>
-          <p:nvPr/>
-        </p:nvSpPr>
-        <p:spPr>
-          <a:xfrm>
-            <a:off x="4800600" y="3931920"/>
-            <a:ext cx="2240280" cy="822960"/>
-          </a:xfrm>
-          <a:prstGeom prst="rect">
-            <a:avLst/>
-          </a:prstGeom>
-          <a:noFill/>
-          <a:ln/>
-        </p:spPr>
-        <p:txBody>
-          <a:bodyPr wrap="square" lIns="0" tIns="0" rIns="0" bIns="0" rtlCol="0" anchor="t"/>
-          <a:lstStyle/>
-          <a:p>
-            <a:pPr algn="ctr" indent="0" marL="0">
-              <a:buNone/>
-            </a:pPr>
-            <a:r>
-              <a:rPr lang="en-US" sz="1050" dirty="0">
-                <a:solidFill>
-                  <a:srgbClr val="6B6B6B"/>
-                </a:solidFill>
-                <a:latin typeface="游ゴシック" pitchFamily="34" charset="0"/>
-                <a:ea typeface="游ゴシック" pitchFamily="34" charset="-122"/>
-                <a:cs typeface="游ゴシック" pitchFamily="34" charset="-120"/>
-              </a:rPr>
-              <a:t>繋ぐ相続サロン®</a:t>
-            </a:r>
-            <a:endParaRPr lang="en-US" sz="1050" dirty="0"/>
-          </a:p>
-        </p:txBody>
-      </p:sp>
-      <p:sp>
-        <p:nvSpPr>
-          <p:cNvPr id="17" name="Shape 15"/>
+              <a:t>教育機関</a:t>
+            </a:r>
+            <a:endParaRPr lang="en-US" sz="1400" dirty="0"/>
+          </a:p>
+        </p:txBody>
+      </p:sp>
+      <p:sp>
+        <p:nvSpPr>
+          <p:cNvPr id="15" name="Shape 13"/>
           <p:cNvSpPr/>
           <p:nvPr/>
         </p:nvSpPr>
         <p:spPr>
           <a:xfrm>
-            <a:off x="7726680" y="2537460"/>
-            <a:ext cx="685800" cy="685800"/>
-          </a:xfrm>
-          <a:prstGeom prst="ellipse">
-            <a:avLst/>
-          </a:prstGeom>
-          <a:solidFill>
-            <a:srgbClr val="1E3A5F"/>
-          </a:solidFill>
-          <a:ln/>
-        </p:spPr>
-      </p:sp>
-      <p:sp>
-        <p:nvSpPr>
-          <p:cNvPr id="18" name="Text 16"/>
-          <p:cNvSpPr txBox="1"/>
-          <p:nvPr/>
-        </p:nvSpPr>
-        <p:spPr>
-          <a:xfrm>
-            <a:off x="7452360" y="2537460"/>
-            <a:ext cx="1234440" cy="685800"/>
-          </a:xfrm>
-          <a:prstGeom prst="rect">
-            <a:avLst/>
-          </a:prstGeom>
-          <a:noFill/>
-          <a:ln/>
-        </p:spPr>
-        <p:txBody>
-          <a:bodyPr wrap="square" lIns="0" tIns="0" rIns="0" bIns="0" rtlCol="0" anchor="ctr"/>
-          <a:lstStyle/>
-          <a:p>
-            <a:pPr algn="ctr" indent="0" marL="0">
-              <a:buNone/>
-            </a:pPr>
-            <a:r>
-              <a:rPr lang="en-US" sz="1200" b="1" dirty="0">
-                <a:solidFill>
-                  <a:srgbClr val="FFFFFF"/>
-                </a:solidFill>
-                <a:latin typeface="游ゴシック" pitchFamily="34" charset="0"/>
-                <a:ea typeface="游ゴシック" pitchFamily="34" charset="-122"/>
-                <a:cs typeface="游ゴシック" pitchFamily="34" charset="-120"/>
-              </a:rPr>
-              <a:t>4</a:t>
-            </a:r>
-            <a:endParaRPr lang="en-US" sz="1200" dirty="0"/>
-          </a:p>
-        </p:txBody>
-      </p:sp>
-      <p:sp>
-        <p:nvSpPr>
-          <p:cNvPr id="19" name="Text 17"/>
-          <p:cNvSpPr txBox="1"/>
-          <p:nvPr/>
-        </p:nvSpPr>
-        <p:spPr>
-          <a:xfrm>
-            <a:off x="6949440" y="3474720"/>
-            <a:ext cx="2240280" cy="457200"/>
-          </a:xfrm>
-          <a:prstGeom prst="rect">
-            <a:avLst/>
-          </a:prstGeom>
-          <a:noFill/>
-          <a:ln/>
-        </p:spPr>
-        <p:txBody>
-          <a:bodyPr wrap="square" lIns="0" tIns="0" rIns="0" bIns="0" rtlCol="0" anchor="ctr"/>
-          <a:lstStyle/>
-          <a:p>
-            <a:pPr algn="ctr" indent="0" marL="0">
-              <a:buNone/>
-            </a:pPr>
-            <a:r>
-              <a:rPr lang="en-US" sz="1350" b="1" dirty="0">
-                <a:solidFill>
-                  <a:srgbClr val="1E3A5F"/>
-                </a:solidFill>
-                <a:latin typeface="游ゴシック" pitchFamily="34" charset="0"/>
-                <a:ea typeface="游ゴシック" pitchFamily="34" charset="-122"/>
-                <a:cs typeface="游ゴシック" pitchFamily="34" charset="-120"/>
-              </a:rPr>
-              <a:t>一般社団法人設立</a:t>
-            </a:r>
-            <a:endParaRPr lang="en-US" sz="1350" dirty="0"/>
-          </a:p>
-        </p:txBody>
-      </p:sp>
-      <p:sp>
-        <p:nvSpPr>
-          <p:cNvPr id="20" name="Text 18"/>
-          <p:cNvSpPr txBox="1"/>
-          <p:nvPr/>
-        </p:nvSpPr>
-        <p:spPr>
-          <a:xfrm>
-            <a:off x="6949440" y="3931920"/>
-            <a:ext cx="2240280" cy="822960"/>
-          </a:xfrm>
-          <a:prstGeom prst="rect">
-            <a:avLst/>
-          </a:prstGeom>
-          <a:noFill/>
-          <a:ln/>
-        </p:spPr>
-        <p:txBody>
-          <a:bodyPr wrap="square" lIns="0" tIns="0" rIns="0" bIns="0" rtlCol="0" anchor="t"/>
-          <a:lstStyle/>
-          <a:p>
-            <a:pPr algn="ctr" indent="0" marL="0">
-              <a:buNone/>
-            </a:pPr>
-            <a:r>
-              <a:rPr lang="en-US" sz="1050" dirty="0">
-                <a:solidFill>
-                  <a:srgbClr val="6B6B6B"/>
-                </a:solidFill>
-                <a:latin typeface="游ゴシック" pitchFamily="34" charset="0"/>
-                <a:ea typeface="游ゴシック" pitchFamily="34" charset="-122"/>
-                <a:cs typeface="游ゴシック" pitchFamily="34" charset="-120"/>
-              </a:rPr>
-              <a:t>繋ぐライク</a:t>
-            </a:r>
-            <a:endParaRPr lang="en-US" sz="1050" dirty="0"/>
-          </a:p>
-          <a:p>
-            <a:pPr algn="ctr" indent="0" marL="0">
-              <a:buNone/>
-            </a:pPr>
-            <a:r>
-              <a:rPr lang="en-US" sz="1050" dirty="0">
-                <a:solidFill>
-                  <a:srgbClr val="6B6B6B"/>
-                </a:solidFill>
-                <a:latin typeface="游ゴシック" pitchFamily="34" charset="0"/>
-                <a:ea typeface="游ゴシック" pitchFamily="34" charset="-122"/>
-                <a:cs typeface="游ゴシック" pitchFamily="34" charset="-120"/>
-              </a:rPr>
-              <a:t>ファミリーサポート</a:t>
-            </a:r>
-            <a:endParaRPr lang="en-US" sz="1050" dirty="0"/>
-          </a:p>
-        </p:txBody>
-      </p:sp>
-      <p:sp>
-        <p:nvSpPr>
-          <p:cNvPr id="21" name="Shape 19"/>
-          <p:cNvSpPr/>
-          <p:nvPr/>
-        </p:nvSpPr>
-        <p:spPr>
-          <a:xfrm>
-            <a:off x="9875520" y="2537460"/>
-            <a:ext cx="685800" cy="685800"/>
-          </a:xfrm>
-          <a:prstGeom prst="ellipse">
-            <a:avLst/>
-          </a:prstGeom>
-          <a:solidFill>
-            <a:srgbClr val="C9603F"/>
-          </a:solidFill>
-          <a:ln/>
-        </p:spPr>
-      </p:sp>
-      <p:sp>
-        <p:nvSpPr>
-          <p:cNvPr id="22" name="Text 20"/>
-          <p:cNvSpPr txBox="1"/>
-          <p:nvPr/>
-        </p:nvSpPr>
-        <p:spPr>
-          <a:xfrm>
-            <a:off x="9601200" y="2537460"/>
-            <a:ext cx="1234440" cy="685800"/>
-          </a:xfrm>
-          <a:prstGeom prst="rect">
-            <a:avLst/>
-          </a:prstGeom>
-          <a:noFill/>
-          <a:ln/>
-        </p:spPr>
-        <p:txBody>
-          <a:bodyPr wrap="square" lIns="0" tIns="0" rIns="0" bIns="0" rtlCol="0" anchor="ctr"/>
-          <a:lstStyle/>
-          <a:p>
-            <a:pPr algn="ctr" indent="0" marL="0">
-              <a:buNone/>
-            </a:pPr>
-            <a:r>
-              <a:rPr lang="en-US" sz="1200" b="1" dirty="0">
-                <a:solidFill>
-                  <a:srgbClr val="FFFFFF"/>
-                </a:solidFill>
-                <a:latin typeface="游ゴシック" pitchFamily="34" charset="0"/>
-                <a:ea typeface="游ゴシック" pitchFamily="34" charset="-122"/>
-                <a:cs typeface="游ゴシック" pitchFamily="34" charset="-120"/>
-              </a:rPr>
-              <a:t>5</a:t>
-            </a:r>
-            <a:endParaRPr lang="en-US" sz="1200" dirty="0"/>
-          </a:p>
-        </p:txBody>
-      </p:sp>
-      <p:sp>
-        <p:nvSpPr>
-          <p:cNvPr id="23" name="Text 21"/>
-          <p:cNvSpPr txBox="1"/>
-          <p:nvPr/>
-        </p:nvSpPr>
-        <p:spPr>
-          <a:xfrm>
-            <a:off x="9098280" y="3474720"/>
-            <a:ext cx="2240280" cy="457200"/>
-          </a:xfrm>
-          <a:prstGeom prst="rect">
-            <a:avLst/>
-          </a:prstGeom>
-          <a:noFill/>
-          <a:ln/>
-        </p:spPr>
-        <p:txBody>
-          <a:bodyPr wrap="square" lIns="0" tIns="0" rIns="0" bIns="0" rtlCol="0" anchor="ctr"/>
-          <a:lstStyle/>
-          <a:p>
-            <a:pPr algn="ctr" indent="0" marL="0">
-              <a:buNone/>
-            </a:pPr>
-            <a:r>
-              <a:rPr lang="en-US" sz="1350" b="1" dirty="0">
-                <a:solidFill>
-                  <a:srgbClr val="1E3A5F"/>
-                </a:solidFill>
-                <a:latin typeface="游ゴシック" pitchFamily="34" charset="0"/>
-                <a:ea typeface="游ゴシック" pitchFamily="34" charset="-122"/>
-                <a:cs typeface="游ゴシック" pitchFamily="34" charset="-120"/>
-              </a:rPr>
-              <a:t>企業タイアップ</a:t>
-            </a:r>
-            <a:endParaRPr lang="en-US" sz="1350" dirty="0"/>
-          </a:p>
-        </p:txBody>
-      </p:sp>
-      <p:sp>
-        <p:nvSpPr>
-          <p:cNvPr id="24" name="Text 22"/>
-          <p:cNvSpPr txBox="1"/>
-          <p:nvPr/>
-        </p:nvSpPr>
-        <p:spPr>
-          <a:xfrm>
-            <a:off x="9098280" y="3931920"/>
-            <a:ext cx="2240280" cy="822960"/>
-          </a:xfrm>
-          <a:prstGeom prst="rect">
-            <a:avLst/>
-          </a:prstGeom>
-          <a:noFill/>
-          <a:ln/>
-        </p:spPr>
-        <p:txBody>
-          <a:bodyPr wrap="square" lIns="0" tIns="0" rIns="0" bIns="0" rtlCol="0" anchor="t"/>
-          <a:lstStyle/>
-          <a:p>
-            <a:pPr algn="ctr" indent="0" marL="0">
-              <a:buNone/>
-            </a:pPr>
-            <a:r>
-              <a:rPr lang="en-US" sz="1050" dirty="0">
-                <a:solidFill>
-                  <a:srgbClr val="6B6B6B"/>
-                </a:solidFill>
-                <a:latin typeface="游ゴシック" pitchFamily="34" charset="0"/>
-                <a:ea typeface="游ゴシック" pitchFamily="34" charset="-122"/>
-                <a:cs typeface="游ゴシック" pitchFamily="34" charset="-120"/>
-              </a:rPr>
-              <a:t>異業種との連携</a:t>
-            </a:r>
-            <a:endParaRPr lang="en-US" sz="1050" dirty="0"/>
-          </a:p>
-        </p:txBody>
-      </p:sp>
-      <p:sp>
-        <p:nvSpPr>
-          <p:cNvPr id="25" name="Shape 23"/>
-          <p:cNvSpPr/>
-          <p:nvPr/>
-        </p:nvSpPr>
-        <p:spPr>
-          <a:xfrm>
-            <a:off x="2651760" y="4892040"/>
-            <a:ext cx="6858000" cy="1371600"/>
+            <a:off x="640080" y="4572000"/>
+            <a:ext cx="10881360" cy="1371600"/>
           </a:xfrm>
           <a:prstGeom prst="roundRect">
             <a:avLst>
@@ -9195,7 +9398,7 @@
             </a:avLst>
           </a:prstGeom>
           <a:solidFill>
-            <a:srgbClr val="1E3A5F"/>
+            <a:srgbClr val="F6F1EA"/>
           </a:solidFill>
           <a:ln/>
           <a:effectLst>
@@ -9209,85 +9412,69 @@
       </p:sp>
       <p:sp>
         <p:nvSpPr>
-          <p:cNvPr id="26" name="Text 24"/>
-          <p:cNvSpPr txBox="1"/>
-          <p:nvPr/>
-        </p:nvSpPr>
-        <p:spPr>
-          <a:xfrm>
-            <a:off x="2926080" y="5029200"/>
-            <a:ext cx="6309360" cy="594360"/>
-          </a:xfrm>
-          <a:prstGeom prst="rect">
-            <a:avLst/>
-          </a:prstGeom>
-          <a:noFill/>
-          <a:ln/>
-        </p:spPr>
-        <p:txBody>
-          <a:bodyPr wrap="square" lIns="0" tIns="0" rIns="0" bIns="0" rtlCol="0" anchor="ctr"/>
-          <a:lstStyle/>
-          <a:p>
-            <a:pPr algn="ctr" indent="0" marL="0">
-              <a:buNone/>
-            </a:pPr>
-            <a:r>
-              <a:rPr lang="en-US" sz="3000" b="1" dirty="0">
-                <a:solidFill>
-                  <a:srgbClr val="FFFFFF"/>
-                </a:solidFill>
-                <a:latin typeface="游ゴシック" pitchFamily="34" charset="0"/>
-                <a:ea typeface="游ゴシック" pitchFamily="34" charset="-122"/>
-                <a:cs typeface="游ゴシック" pitchFamily="34" charset="-120"/>
-              </a:rPr>
-              <a:t>全国50事業所</a:t>
-            </a:r>
-            <a:endParaRPr lang="en-US" sz="3000" dirty="0"/>
-          </a:p>
-        </p:txBody>
-      </p:sp>
-      <p:sp>
-        <p:nvSpPr>
-          <p:cNvPr id="27" name="Text 25"/>
-          <p:cNvSpPr txBox="1"/>
-          <p:nvPr/>
-        </p:nvSpPr>
-        <p:spPr>
-          <a:xfrm>
-            <a:off x="2926080" y="5623560"/>
-            <a:ext cx="6309360" cy="502920"/>
-          </a:xfrm>
-          <a:prstGeom prst="rect">
-            <a:avLst/>
-          </a:prstGeom>
-          <a:noFill/>
-          <a:ln/>
-        </p:spPr>
-        <p:txBody>
-          <a:bodyPr wrap="square" lIns="0" tIns="0" rIns="0" bIns="0" rtlCol="0" anchor="ctr"/>
-          <a:lstStyle/>
-          <a:p>
-            <a:pPr algn="ctr" indent="0" marL="0">
-              <a:buNone/>
-            </a:pPr>
-            <a:r>
-              <a:rPr lang="en-US" sz="1200" dirty="0">
-                <a:solidFill>
-                  <a:srgbClr val="F1DCCF"/>
-                </a:solidFill>
-                <a:latin typeface="游ゴシック" pitchFamily="34" charset="0"/>
-                <a:ea typeface="游ゴシック" pitchFamily="34" charset="-122"/>
-                <a:cs typeface="游ゴシック" pitchFamily="34" charset="-120"/>
-              </a:rPr>
-              <a:t>広告で一気に拡大したのではなく、一件一件の信頼で積み上げた8年間</a:t>
-            </a:r>
-            <a:endParaRPr lang="en-US" sz="1200" dirty="0"/>
-          </a:p>
-        </p:txBody>
-      </p:sp>
-      <p:sp>
-        <p:nvSpPr>
-          <p:cNvPr id="28" name="Text 26"/>
+          <p:cNvPr id="16" name="Text 14"/>
+          <p:cNvSpPr txBox="1"/>
+          <p:nvPr/>
+        </p:nvSpPr>
+        <p:spPr>
+          <a:xfrm>
+            <a:off x="1005840" y="4800600"/>
+            <a:ext cx="10149840" cy="914400"/>
+          </a:xfrm>
+          <a:prstGeom prst="rect">
+            <a:avLst/>
+          </a:prstGeom>
+          <a:noFill/>
+          <a:ln/>
+        </p:spPr>
+        <p:txBody>
+          <a:bodyPr wrap="square" lIns="0" tIns="0" rIns="0" bIns="0" rtlCol="0" anchor="ctr"/>
+          <a:lstStyle/>
+          <a:p>
+            <a:pPr indent="0" marL="0">
+              <a:lnSpc>
+                <a:spcPct val="130000"/>
+              </a:lnSpc>
+              <a:buNone/>
+            </a:pPr>
+            <a:r>
+              <a:rPr lang="en-US" sz="1450" dirty="0">
+                <a:solidFill>
+                  <a:srgbClr val="1E3A5F"/>
+                </a:solidFill>
+                <a:latin typeface="游ゴシック" pitchFamily="34" charset="0"/>
+                <a:ea typeface="游ゴシック" pitchFamily="34" charset="-122"/>
+                <a:cs typeface="游ゴシック" pitchFamily="34" charset="-120"/>
+              </a:rPr>
+              <a:t>金融・保険・福祉・介護・不動産など、異業種の方にこそ取得していただきたい資格です。</a:t>
+            </a:r>
+            <a:endParaRPr lang="en-US" sz="1450" dirty="0"/>
+          </a:p>
+          <a:p>
+            <a:pPr indent="0" marL="0">
+              <a:lnSpc>
+                <a:spcPct val="130000"/>
+              </a:lnSpc>
+              <a:buNone/>
+            </a:pPr>
+            <a:r>
+              <a:rPr lang="en-US" sz="1450" dirty="0">
+                <a:solidFill>
+                  <a:srgbClr val="1E3A5F"/>
+                </a:solidFill>
+                <a:latin typeface="游ゴシック" pitchFamily="34" charset="0"/>
+                <a:ea typeface="游ゴシック" pitchFamily="34" charset="-122"/>
+                <a:cs typeface="游ゴシック" pitchFamily="34" charset="-120"/>
+              </a:rPr>
+              <a:t>「財産の専門家」ではなく、「生きる準備」の入口を開く人を全国に増やしていきます。</a:t>
+            </a:r>
+            <a:endParaRPr lang="en-US" sz="1450" dirty="0"/>
+          </a:p>
+        </p:txBody>
+      </p:sp>
+      <p:sp>
+        <p:nvSpPr>
+          <p:cNvPr id="17" name="Text 15"/>
           <p:cNvSpPr txBox="1"/>
           <p:nvPr/>
         </p:nvSpPr>
@@ -9389,7 +9576,7 @@
                 <a:ea typeface="游ゴシック" pitchFamily="34" charset="-122"/>
                 <a:cs typeface="游ゴシック" pitchFamily="34" charset="-120"/>
               </a:rPr>
-              <a:t>RESULTS</a:t>
+              <a:t>OUR JOURNEY</a:t>
             </a:r>
             <a:endParaRPr lang="en-US" sz="1300" dirty="0"/>
           </a:p>
@@ -9428,7 +9615,7 @@
                 <a:ea typeface="游ゴシック" pitchFamily="34" charset="-122"/>
                 <a:cs typeface="游ゴシック" pitchFamily="34" charset="-120"/>
               </a:rPr>
-              <a:t>実績・成果</a:t>
+              <a:t>8年間の歩み ― 「実証フェーズ」</a:t>
             </a:r>
             <a:endParaRPr lang="en-US" sz="2800" dirty="0"/>
           </a:p>
@@ -9442,16 +9629,792 @@
         </p:nvSpPr>
         <p:spPr>
           <a:xfrm>
-            <a:off x="640080" y="2103120"/>
-            <a:ext cx="2011680" cy="2377440"/>
+            <a:off x="1623060" y="2880360"/>
+            <a:ext cx="8595360" cy="0"/>
+          </a:xfrm>
+          <a:prstGeom prst="line">
+            <a:avLst/>
+          </a:prstGeom>
+          <a:noFill/>
+          <a:ln w="25400">
+            <a:solidFill>
+              <a:srgbClr val="1E3A5F"/>
+            </a:solidFill>
+            <a:prstDash val="dash"/>
+          </a:ln>
+        </p:spPr>
+      </p:sp>
+      <p:sp>
+        <p:nvSpPr>
+          <p:cNvPr id="5" name="Shape 3"/>
+          <p:cNvSpPr/>
+          <p:nvPr/>
+        </p:nvSpPr>
+        <p:spPr>
+          <a:xfrm>
+            <a:off x="1280160" y="2537460"/>
+            <a:ext cx="685800" cy="685800"/>
+          </a:xfrm>
+          <a:prstGeom prst="ellipse">
+            <a:avLst/>
+          </a:prstGeom>
+          <a:solidFill>
+            <a:srgbClr val="1E3A5F"/>
+          </a:solidFill>
+          <a:ln/>
+        </p:spPr>
+      </p:sp>
+      <p:sp>
+        <p:nvSpPr>
+          <p:cNvPr id="6" name="Text 4"/>
+          <p:cNvSpPr txBox="1"/>
+          <p:nvPr/>
+        </p:nvSpPr>
+        <p:spPr>
+          <a:xfrm>
+            <a:off x="1005840" y="2537460"/>
+            <a:ext cx="1234440" cy="685800"/>
+          </a:xfrm>
+          <a:prstGeom prst="rect">
+            <a:avLst/>
+          </a:prstGeom>
+          <a:noFill/>
+          <a:ln/>
+        </p:spPr>
+        <p:txBody>
+          <a:bodyPr wrap="square" lIns="0" tIns="0" rIns="0" bIns="0" rtlCol="0" anchor="ctr"/>
+          <a:lstStyle/>
+          <a:p>
+            <a:pPr algn="ctr" indent="0" marL="0">
+              <a:buNone/>
+            </a:pPr>
+            <a:r>
+              <a:rPr lang="en-US" sz="1200" b="1" dirty="0">
+                <a:solidFill>
+                  <a:srgbClr val="FFFFFF"/>
+                </a:solidFill>
+                <a:latin typeface="游ゴシック" pitchFamily="34" charset="0"/>
+                <a:ea typeface="游ゴシック" pitchFamily="34" charset="-122"/>
+                <a:cs typeface="游ゴシック" pitchFamily="34" charset="-120"/>
+              </a:rPr>
+              <a:t>1</a:t>
+            </a:r>
+            <a:endParaRPr lang="en-US" sz="1200" dirty="0"/>
+          </a:p>
+        </p:txBody>
+      </p:sp>
+      <p:sp>
+        <p:nvSpPr>
+          <p:cNvPr id="7" name="Text 5"/>
+          <p:cNvSpPr txBox="1"/>
+          <p:nvPr/>
+        </p:nvSpPr>
+        <p:spPr>
+          <a:xfrm>
+            <a:off x="502920" y="3474720"/>
+            <a:ext cx="2240280" cy="457200"/>
+          </a:xfrm>
+          <a:prstGeom prst="rect">
+            <a:avLst/>
+          </a:prstGeom>
+          <a:noFill/>
+          <a:ln/>
+        </p:spPr>
+        <p:txBody>
+          <a:bodyPr wrap="square" lIns="0" tIns="0" rIns="0" bIns="0" rtlCol="0" anchor="ctr"/>
+          <a:lstStyle/>
+          <a:p>
+            <a:pPr algn="ctr" indent="0" marL="0">
+              <a:buNone/>
+            </a:pPr>
+            <a:r>
+              <a:rPr lang="en-US" sz="1350" b="1" dirty="0">
+                <a:solidFill>
+                  <a:srgbClr val="1E3A5F"/>
+                </a:solidFill>
+                <a:latin typeface="游ゴシック" pitchFamily="34" charset="0"/>
+                <a:ea typeface="游ゴシック" pitchFamily="34" charset="-122"/>
+                <a:cs typeface="游ゴシック" pitchFamily="34" charset="-120"/>
+              </a:rPr>
+              <a:t>個人事業</a:t>
+            </a:r>
+            <a:endParaRPr lang="en-US" sz="1350" dirty="0"/>
+          </a:p>
+        </p:txBody>
+      </p:sp>
+      <p:sp>
+        <p:nvSpPr>
+          <p:cNvPr id="8" name="Text 6"/>
+          <p:cNvSpPr txBox="1"/>
+          <p:nvPr/>
+        </p:nvSpPr>
+        <p:spPr>
+          <a:xfrm>
+            <a:off x="502920" y="3931920"/>
+            <a:ext cx="2240280" cy="822960"/>
+          </a:xfrm>
+          <a:prstGeom prst="rect">
+            <a:avLst/>
+          </a:prstGeom>
+          <a:noFill/>
+          <a:ln/>
+        </p:spPr>
+        <p:txBody>
+          <a:bodyPr wrap="square" lIns="0" tIns="0" rIns="0" bIns="0" rtlCol="0" anchor="t"/>
+          <a:lstStyle/>
+          <a:p>
+            <a:pPr algn="ctr" indent="0" marL="0">
+              <a:buNone/>
+            </a:pPr>
+            <a:r>
+              <a:rPr lang="en-US" sz="1050" dirty="0">
+                <a:solidFill>
+                  <a:srgbClr val="6B6B6B"/>
+                </a:solidFill>
+                <a:latin typeface="游ゴシック" pitchFamily="34" charset="0"/>
+                <a:ea typeface="游ゴシック" pitchFamily="34" charset="-122"/>
+                <a:cs typeface="游ゴシック" pitchFamily="34" charset="-120"/>
+              </a:rPr>
+              <a:t>相続コンサルタント</a:t>
+            </a:r>
+            <a:endParaRPr lang="en-US" sz="1050" dirty="0"/>
+          </a:p>
+          <a:p>
+            <a:pPr algn="ctr" indent="0" marL="0">
+              <a:buNone/>
+            </a:pPr>
+            <a:r>
+              <a:rPr lang="en-US" sz="1050" dirty="0">
+                <a:solidFill>
+                  <a:srgbClr val="6B6B6B"/>
+                </a:solidFill>
+                <a:latin typeface="游ゴシック" pitchFamily="34" charset="0"/>
+                <a:ea typeface="游ゴシック" pitchFamily="34" charset="-122"/>
+                <a:cs typeface="游ゴシック" pitchFamily="34" charset="-120"/>
+              </a:rPr>
+              <a:t>事務所〜繋ぐ〜</a:t>
+            </a:r>
+            <a:endParaRPr lang="en-US" sz="1050" dirty="0"/>
+          </a:p>
+        </p:txBody>
+      </p:sp>
+      <p:sp>
+        <p:nvSpPr>
+          <p:cNvPr id="9" name="Shape 7"/>
+          <p:cNvSpPr/>
+          <p:nvPr/>
+        </p:nvSpPr>
+        <p:spPr>
+          <a:xfrm>
+            <a:off x="3429000" y="2537460"/>
+            <a:ext cx="685800" cy="685800"/>
+          </a:xfrm>
+          <a:prstGeom prst="ellipse">
+            <a:avLst/>
+          </a:prstGeom>
+          <a:solidFill>
+            <a:srgbClr val="1E3A5F"/>
+          </a:solidFill>
+          <a:ln/>
+        </p:spPr>
+      </p:sp>
+      <p:sp>
+        <p:nvSpPr>
+          <p:cNvPr id="10" name="Text 8"/>
+          <p:cNvSpPr txBox="1"/>
+          <p:nvPr/>
+        </p:nvSpPr>
+        <p:spPr>
+          <a:xfrm>
+            <a:off x="3154680" y="2537460"/>
+            <a:ext cx="1234440" cy="685800"/>
+          </a:xfrm>
+          <a:prstGeom prst="rect">
+            <a:avLst/>
+          </a:prstGeom>
+          <a:noFill/>
+          <a:ln/>
+        </p:spPr>
+        <p:txBody>
+          <a:bodyPr wrap="square" lIns="0" tIns="0" rIns="0" bIns="0" rtlCol="0" anchor="ctr"/>
+          <a:lstStyle/>
+          <a:p>
+            <a:pPr algn="ctr" indent="0" marL="0">
+              <a:buNone/>
+            </a:pPr>
+            <a:r>
+              <a:rPr lang="en-US" sz="1200" b="1" dirty="0">
+                <a:solidFill>
+                  <a:srgbClr val="FFFFFF"/>
+                </a:solidFill>
+                <a:latin typeface="游ゴシック" pitchFamily="34" charset="0"/>
+                <a:ea typeface="游ゴシック" pitchFamily="34" charset="-122"/>
+                <a:cs typeface="游ゴシック" pitchFamily="34" charset="-120"/>
+              </a:rPr>
+              <a:t>2</a:t>
+            </a:r>
+            <a:endParaRPr lang="en-US" sz="1200" dirty="0"/>
+          </a:p>
+        </p:txBody>
+      </p:sp>
+      <p:sp>
+        <p:nvSpPr>
+          <p:cNvPr id="11" name="Text 9"/>
+          <p:cNvSpPr txBox="1"/>
+          <p:nvPr/>
+        </p:nvSpPr>
+        <p:spPr>
+          <a:xfrm>
+            <a:off x="2651760" y="3474720"/>
+            <a:ext cx="2240280" cy="457200"/>
+          </a:xfrm>
+          <a:prstGeom prst="rect">
+            <a:avLst/>
+          </a:prstGeom>
+          <a:noFill/>
+          <a:ln/>
+        </p:spPr>
+        <p:txBody>
+          <a:bodyPr wrap="square" lIns="0" tIns="0" rIns="0" bIns="0" rtlCol="0" anchor="ctr"/>
+          <a:lstStyle/>
+          <a:p>
+            <a:pPr algn="ctr" indent="0" marL="0">
+              <a:buNone/>
+            </a:pPr>
+            <a:r>
+              <a:rPr lang="en-US" sz="1350" b="1" dirty="0">
+                <a:solidFill>
+                  <a:srgbClr val="1E3A5F"/>
+                </a:solidFill>
+                <a:latin typeface="游ゴシック" pitchFamily="34" charset="0"/>
+                <a:ea typeface="游ゴシック" pitchFamily="34" charset="-122"/>
+                <a:cs typeface="游ゴシック" pitchFamily="34" charset="-120"/>
+              </a:rPr>
+              <a:t>法人化</a:t>
+            </a:r>
+            <a:endParaRPr lang="en-US" sz="1350" dirty="0"/>
+          </a:p>
+        </p:txBody>
+      </p:sp>
+      <p:sp>
+        <p:nvSpPr>
+          <p:cNvPr id="12" name="Text 10"/>
+          <p:cNvSpPr txBox="1"/>
+          <p:nvPr/>
+        </p:nvSpPr>
+        <p:spPr>
+          <a:xfrm>
+            <a:off x="2651760" y="3931920"/>
+            <a:ext cx="2240280" cy="822960"/>
+          </a:xfrm>
+          <a:prstGeom prst="rect">
+            <a:avLst/>
+          </a:prstGeom>
+          <a:noFill/>
+          <a:ln/>
+        </p:spPr>
+        <p:txBody>
+          <a:bodyPr wrap="square" lIns="0" tIns="0" rIns="0" bIns="0" rtlCol="0" anchor="t"/>
+          <a:lstStyle/>
+          <a:p>
+            <a:pPr algn="ctr" indent="0" marL="0">
+              <a:buNone/>
+            </a:pPr>
+            <a:r>
+              <a:rPr lang="en-US" sz="1050" dirty="0">
+                <a:solidFill>
+                  <a:srgbClr val="6B6B6B"/>
+                </a:solidFill>
+                <a:latin typeface="游ゴシック" pitchFamily="34" charset="0"/>
+                <a:ea typeface="游ゴシック" pitchFamily="34" charset="-122"/>
+                <a:cs typeface="游ゴシック" pitchFamily="34" charset="-120"/>
+              </a:rPr>
+              <a:t>株式会社繋ぐ</a:t>
+            </a:r>
+            <a:endParaRPr lang="en-US" sz="1050" dirty="0"/>
+          </a:p>
+          <a:p>
+            <a:pPr algn="ctr" indent="0" marL="0">
+              <a:buNone/>
+            </a:pPr>
+            <a:r>
+              <a:rPr lang="en-US" sz="1050" dirty="0">
+                <a:solidFill>
+                  <a:srgbClr val="6B6B6B"/>
+                </a:solidFill>
+                <a:latin typeface="游ゴシック" pitchFamily="34" charset="0"/>
+                <a:ea typeface="游ゴシック" pitchFamily="34" charset="-122"/>
+                <a:cs typeface="游ゴシック" pitchFamily="34" charset="-120"/>
+              </a:rPr>
+              <a:t>コンサルタントオフィス</a:t>
+            </a:r>
+            <a:endParaRPr lang="en-US" sz="1050" dirty="0"/>
+          </a:p>
+          <a:p>
+            <a:pPr algn="ctr" indent="0" marL="0">
+              <a:buNone/>
+            </a:pPr>
+            <a:r>
+              <a:rPr lang="en-US" sz="1050" dirty="0">
+                <a:solidFill>
+                  <a:srgbClr val="6B6B6B"/>
+                </a:solidFill>
+                <a:latin typeface="游ゴシック" pitchFamily="34" charset="0"/>
+                <a:ea typeface="游ゴシック" pitchFamily="34" charset="-122"/>
+                <a:cs typeface="游ゴシック" pitchFamily="34" charset="-120"/>
+              </a:rPr>
+              <a:t>（2020年2月）</a:t>
+            </a:r>
+            <a:endParaRPr lang="en-US" sz="1050" dirty="0"/>
+          </a:p>
+        </p:txBody>
+      </p:sp>
+      <p:sp>
+        <p:nvSpPr>
+          <p:cNvPr id="13" name="Shape 11"/>
+          <p:cNvSpPr/>
+          <p:nvPr/>
+        </p:nvSpPr>
+        <p:spPr>
+          <a:xfrm>
+            <a:off x="5577840" y="2537460"/>
+            <a:ext cx="685800" cy="685800"/>
+          </a:xfrm>
+          <a:prstGeom prst="ellipse">
+            <a:avLst/>
+          </a:prstGeom>
+          <a:solidFill>
+            <a:srgbClr val="1E3A5F"/>
+          </a:solidFill>
+          <a:ln/>
+        </p:spPr>
+      </p:sp>
+      <p:sp>
+        <p:nvSpPr>
+          <p:cNvPr id="14" name="Text 12"/>
+          <p:cNvSpPr txBox="1"/>
+          <p:nvPr/>
+        </p:nvSpPr>
+        <p:spPr>
+          <a:xfrm>
+            <a:off x="5303520" y="2537460"/>
+            <a:ext cx="1234440" cy="685800"/>
+          </a:xfrm>
+          <a:prstGeom prst="rect">
+            <a:avLst/>
+          </a:prstGeom>
+          <a:noFill/>
+          <a:ln/>
+        </p:spPr>
+        <p:txBody>
+          <a:bodyPr wrap="square" lIns="0" tIns="0" rIns="0" bIns="0" rtlCol="0" anchor="ctr"/>
+          <a:lstStyle/>
+          <a:p>
+            <a:pPr algn="ctr" indent="0" marL="0">
+              <a:buNone/>
+            </a:pPr>
+            <a:r>
+              <a:rPr lang="en-US" sz="1200" b="1" dirty="0">
+                <a:solidFill>
+                  <a:srgbClr val="FFFFFF"/>
+                </a:solidFill>
+                <a:latin typeface="游ゴシック" pitchFamily="34" charset="0"/>
+                <a:ea typeface="游ゴシック" pitchFamily="34" charset="-122"/>
+                <a:cs typeface="游ゴシック" pitchFamily="34" charset="-120"/>
+              </a:rPr>
+              <a:t>3</a:t>
+            </a:r>
+            <a:endParaRPr lang="en-US" sz="1200" dirty="0"/>
+          </a:p>
+        </p:txBody>
+      </p:sp>
+      <p:sp>
+        <p:nvSpPr>
+          <p:cNvPr id="15" name="Text 13"/>
+          <p:cNvSpPr txBox="1"/>
+          <p:nvPr/>
+        </p:nvSpPr>
+        <p:spPr>
+          <a:xfrm>
+            <a:off x="4800600" y="3474720"/>
+            <a:ext cx="2240280" cy="457200"/>
+          </a:xfrm>
+          <a:prstGeom prst="rect">
+            <a:avLst/>
+          </a:prstGeom>
+          <a:noFill/>
+          <a:ln/>
+        </p:spPr>
+        <p:txBody>
+          <a:bodyPr wrap="square" lIns="0" tIns="0" rIns="0" bIns="0" rtlCol="0" anchor="ctr"/>
+          <a:lstStyle/>
+          <a:p>
+            <a:pPr algn="ctr" indent="0" marL="0">
+              <a:buNone/>
+            </a:pPr>
+            <a:r>
+              <a:rPr lang="en-US" sz="1350" b="1" dirty="0">
+                <a:solidFill>
+                  <a:srgbClr val="1E3A5F"/>
+                </a:solidFill>
+                <a:latin typeface="游ゴシック" pitchFamily="34" charset="0"/>
+                <a:ea typeface="游ゴシック" pitchFamily="34" charset="-122"/>
+                <a:cs typeface="游ゴシック" pitchFamily="34" charset="-120"/>
+              </a:rPr>
+              <a:t>FC展開</a:t>
+            </a:r>
+            <a:endParaRPr lang="en-US" sz="1350" dirty="0"/>
+          </a:p>
+        </p:txBody>
+      </p:sp>
+      <p:sp>
+        <p:nvSpPr>
+          <p:cNvPr id="16" name="Text 14"/>
+          <p:cNvSpPr txBox="1"/>
+          <p:nvPr/>
+        </p:nvSpPr>
+        <p:spPr>
+          <a:xfrm>
+            <a:off x="4800600" y="3931920"/>
+            <a:ext cx="2240280" cy="822960"/>
+          </a:xfrm>
+          <a:prstGeom prst="rect">
+            <a:avLst/>
+          </a:prstGeom>
+          <a:noFill/>
+          <a:ln/>
+        </p:spPr>
+        <p:txBody>
+          <a:bodyPr wrap="square" lIns="0" tIns="0" rIns="0" bIns="0" rtlCol="0" anchor="t"/>
+          <a:lstStyle/>
+          <a:p>
+            <a:pPr algn="ctr" indent="0" marL="0">
+              <a:buNone/>
+            </a:pPr>
+            <a:r>
+              <a:rPr lang="en-US" sz="1050" dirty="0">
+                <a:solidFill>
+                  <a:srgbClr val="6B6B6B"/>
+                </a:solidFill>
+                <a:latin typeface="游ゴシック" pitchFamily="34" charset="0"/>
+                <a:ea typeface="游ゴシック" pitchFamily="34" charset="-122"/>
+                <a:cs typeface="游ゴシック" pitchFamily="34" charset="-120"/>
+              </a:rPr>
+              <a:t>繋ぐ相続サロン®</a:t>
+            </a:r>
+            <a:endParaRPr lang="en-US" sz="1050" dirty="0"/>
+          </a:p>
+        </p:txBody>
+      </p:sp>
+      <p:sp>
+        <p:nvSpPr>
+          <p:cNvPr id="17" name="Shape 15"/>
+          <p:cNvSpPr/>
+          <p:nvPr/>
+        </p:nvSpPr>
+        <p:spPr>
+          <a:xfrm>
+            <a:off x="7726680" y="2537460"/>
+            <a:ext cx="685800" cy="685800"/>
+          </a:xfrm>
+          <a:prstGeom prst="ellipse">
+            <a:avLst/>
+          </a:prstGeom>
+          <a:solidFill>
+            <a:srgbClr val="1E3A5F"/>
+          </a:solidFill>
+          <a:ln/>
+        </p:spPr>
+      </p:sp>
+      <p:sp>
+        <p:nvSpPr>
+          <p:cNvPr id="18" name="Text 16"/>
+          <p:cNvSpPr txBox="1"/>
+          <p:nvPr/>
+        </p:nvSpPr>
+        <p:spPr>
+          <a:xfrm>
+            <a:off x="7452360" y="2537460"/>
+            <a:ext cx="1234440" cy="685800"/>
+          </a:xfrm>
+          <a:prstGeom prst="rect">
+            <a:avLst/>
+          </a:prstGeom>
+          <a:noFill/>
+          <a:ln/>
+        </p:spPr>
+        <p:txBody>
+          <a:bodyPr wrap="square" lIns="0" tIns="0" rIns="0" bIns="0" rtlCol="0" anchor="ctr"/>
+          <a:lstStyle/>
+          <a:p>
+            <a:pPr algn="ctr" indent="0" marL="0">
+              <a:buNone/>
+            </a:pPr>
+            <a:r>
+              <a:rPr lang="en-US" sz="1200" b="1" dirty="0">
+                <a:solidFill>
+                  <a:srgbClr val="FFFFFF"/>
+                </a:solidFill>
+                <a:latin typeface="游ゴシック" pitchFamily="34" charset="0"/>
+                <a:ea typeface="游ゴシック" pitchFamily="34" charset="-122"/>
+                <a:cs typeface="游ゴシック" pitchFamily="34" charset="-120"/>
+              </a:rPr>
+              <a:t>4</a:t>
+            </a:r>
+            <a:endParaRPr lang="en-US" sz="1200" dirty="0"/>
+          </a:p>
+        </p:txBody>
+      </p:sp>
+      <p:sp>
+        <p:nvSpPr>
+          <p:cNvPr id="19" name="Text 17"/>
+          <p:cNvSpPr txBox="1"/>
+          <p:nvPr/>
+        </p:nvSpPr>
+        <p:spPr>
+          <a:xfrm>
+            <a:off x="6949440" y="3474720"/>
+            <a:ext cx="2240280" cy="457200"/>
+          </a:xfrm>
+          <a:prstGeom prst="rect">
+            <a:avLst/>
+          </a:prstGeom>
+          <a:noFill/>
+          <a:ln/>
+        </p:spPr>
+        <p:txBody>
+          <a:bodyPr wrap="square" lIns="0" tIns="0" rIns="0" bIns="0" rtlCol="0" anchor="ctr"/>
+          <a:lstStyle/>
+          <a:p>
+            <a:pPr algn="ctr" indent="0" marL="0">
+              <a:buNone/>
+            </a:pPr>
+            <a:r>
+              <a:rPr lang="en-US" sz="1350" b="1" dirty="0">
+                <a:solidFill>
+                  <a:srgbClr val="1E3A5F"/>
+                </a:solidFill>
+                <a:latin typeface="游ゴシック" pitchFamily="34" charset="0"/>
+                <a:ea typeface="游ゴシック" pitchFamily="34" charset="-122"/>
+                <a:cs typeface="游ゴシック" pitchFamily="34" charset="-120"/>
+              </a:rPr>
+              <a:t>一般社団法人設立</a:t>
+            </a:r>
+            <a:endParaRPr lang="en-US" sz="1350" dirty="0"/>
+          </a:p>
+        </p:txBody>
+      </p:sp>
+      <p:sp>
+        <p:nvSpPr>
+          <p:cNvPr id="20" name="Text 18"/>
+          <p:cNvSpPr txBox="1"/>
+          <p:nvPr/>
+        </p:nvSpPr>
+        <p:spPr>
+          <a:xfrm>
+            <a:off x="6949440" y="3931920"/>
+            <a:ext cx="2240280" cy="822960"/>
+          </a:xfrm>
+          <a:prstGeom prst="rect">
+            <a:avLst/>
+          </a:prstGeom>
+          <a:noFill/>
+          <a:ln/>
+        </p:spPr>
+        <p:txBody>
+          <a:bodyPr wrap="square" lIns="0" tIns="0" rIns="0" bIns="0" rtlCol="0" anchor="t"/>
+          <a:lstStyle/>
+          <a:p>
+            <a:pPr algn="ctr" indent="0" marL="0">
+              <a:buNone/>
+            </a:pPr>
+            <a:r>
+              <a:rPr lang="en-US" sz="1050" dirty="0">
+                <a:solidFill>
+                  <a:srgbClr val="6B6B6B"/>
+                </a:solidFill>
+                <a:latin typeface="游ゴシック" pitchFamily="34" charset="0"/>
+                <a:ea typeface="游ゴシック" pitchFamily="34" charset="-122"/>
+                <a:cs typeface="游ゴシック" pitchFamily="34" charset="-120"/>
+              </a:rPr>
+              <a:t>繋ぐライク</a:t>
+            </a:r>
+            <a:endParaRPr lang="en-US" sz="1050" dirty="0"/>
+          </a:p>
+          <a:p>
+            <a:pPr algn="ctr" indent="0" marL="0">
+              <a:buNone/>
+            </a:pPr>
+            <a:r>
+              <a:rPr lang="en-US" sz="1050" dirty="0">
+                <a:solidFill>
+                  <a:srgbClr val="6B6B6B"/>
+                </a:solidFill>
+                <a:latin typeface="游ゴシック" pitchFamily="34" charset="0"/>
+                <a:ea typeface="游ゴシック" pitchFamily="34" charset="-122"/>
+                <a:cs typeface="游ゴシック" pitchFamily="34" charset="-120"/>
+              </a:rPr>
+              <a:t>ファミリーサポート</a:t>
+            </a:r>
+            <a:endParaRPr lang="en-US" sz="1050" dirty="0"/>
+          </a:p>
+        </p:txBody>
+      </p:sp>
+      <p:sp>
+        <p:nvSpPr>
+          <p:cNvPr id="21" name="Shape 19"/>
+          <p:cNvSpPr/>
+          <p:nvPr/>
+        </p:nvSpPr>
+        <p:spPr>
+          <a:xfrm>
+            <a:off x="9875520" y="2537460"/>
+            <a:ext cx="685800" cy="685800"/>
+          </a:xfrm>
+          <a:prstGeom prst="ellipse">
+            <a:avLst/>
+          </a:prstGeom>
+          <a:solidFill>
+            <a:srgbClr val="C9603F"/>
+          </a:solidFill>
+          <a:ln/>
+        </p:spPr>
+      </p:sp>
+      <p:sp>
+        <p:nvSpPr>
+          <p:cNvPr id="22" name="Text 20"/>
+          <p:cNvSpPr txBox="1"/>
+          <p:nvPr/>
+        </p:nvSpPr>
+        <p:spPr>
+          <a:xfrm>
+            <a:off x="9601200" y="2537460"/>
+            <a:ext cx="1234440" cy="685800"/>
+          </a:xfrm>
+          <a:prstGeom prst="rect">
+            <a:avLst/>
+          </a:prstGeom>
+          <a:noFill/>
+          <a:ln/>
+        </p:spPr>
+        <p:txBody>
+          <a:bodyPr wrap="square" lIns="0" tIns="0" rIns="0" bIns="0" rtlCol="0" anchor="ctr"/>
+          <a:lstStyle/>
+          <a:p>
+            <a:pPr algn="ctr" indent="0" marL="0">
+              <a:buNone/>
+            </a:pPr>
+            <a:r>
+              <a:rPr lang="en-US" sz="1200" b="1" dirty="0">
+                <a:solidFill>
+                  <a:srgbClr val="FFFFFF"/>
+                </a:solidFill>
+                <a:latin typeface="游ゴシック" pitchFamily="34" charset="0"/>
+                <a:ea typeface="游ゴシック" pitchFamily="34" charset="-122"/>
+                <a:cs typeface="游ゴシック" pitchFamily="34" charset="-120"/>
+              </a:rPr>
+              <a:t>5</a:t>
+            </a:r>
+            <a:endParaRPr lang="en-US" sz="1200" dirty="0"/>
+          </a:p>
+        </p:txBody>
+      </p:sp>
+      <p:sp>
+        <p:nvSpPr>
+          <p:cNvPr id="23" name="Text 21"/>
+          <p:cNvSpPr txBox="1"/>
+          <p:nvPr/>
+        </p:nvSpPr>
+        <p:spPr>
+          <a:xfrm>
+            <a:off x="9098280" y="3474720"/>
+            <a:ext cx="2240280" cy="457200"/>
+          </a:xfrm>
+          <a:prstGeom prst="rect">
+            <a:avLst/>
+          </a:prstGeom>
+          <a:noFill/>
+          <a:ln/>
+        </p:spPr>
+        <p:txBody>
+          <a:bodyPr wrap="square" lIns="0" tIns="0" rIns="0" bIns="0" rtlCol="0" anchor="ctr"/>
+          <a:lstStyle/>
+          <a:p>
+            <a:pPr algn="ctr" indent="0" marL="0">
+              <a:buNone/>
+            </a:pPr>
+            <a:r>
+              <a:rPr lang="en-US" sz="1350" b="1" dirty="0">
+                <a:solidFill>
+                  <a:srgbClr val="1E3A5F"/>
+                </a:solidFill>
+                <a:latin typeface="游ゴシック" pitchFamily="34" charset="0"/>
+                <a:ea typeface="游ゴシック" pitchFamily="34" charset="-122"/>
+                <a:cs typeface="游ゴシック" pitchFamily="34" charset="-120"/>
+              </a:rPr>
+              <a:t>企業タイアップ</a:t>
+            </a:r>
+            <a:endParaRPr lang="en-US" sz="1350" dirty="0"/>
+          </a:p>
+        </p:txBody>
+      </p:sp>
+      <p:sp>
+        <p:nvSpPr>
+          <p:cNvPr id="24" name="Text 22"/>
+          <p:cNvSpPr txBox="1"/>
+          <p:nvPr/>
+        </p:nvSpPr>
+        <p:spPr>
+          <a:xfrm>
+            <a:off x="9098280" y="3931920"/>
+            <a:ext cx="2240280" cy="822960"/>
+          </a:xfrm>
+          <a:prstGeom prst="rect">
+            <a:avLst/>
+          </a:prstGeom>
+          <a:noFill/>
+          <a:ln/>
+        </p:spPr>
+        <p:txBody>
+          <a:bodyPr wrap="square" lIns="0" tIns="0" rIns="0" bIns="0" rtlCol="0" anchor="t"/>
+          <a:lstStyle/>
+          <a:p>
+            <a:pPr algn="ctr" indent="0" marL="0">
+              <a:buNone/>
+            </a:pPr>
+            <a:r>
+              <a:rPr lang="en-US" sz="1050" dirty="0">
+                <a:solidFill>
+                  <a:srgbClr val="6B6B6B"/>
+                </a:solidFill>
+                <a:latin typeface="游ゴシック" pitchFamily="34" charset="0"/>
+                <a:ea typeface="游ゴシック" pitchFamily="34" charset="-122"/>
+                <a:cs typeface="游ゴシック" pitchFamily="34" charset="-120"/>
+              </a:rPr>
+              <a:t>異業種との連携</a:t>
+            </a:r>
+            <a:endParaRPr lang="en-US" sz="1050" dirty="0"/>
+          </a:p>
+        </p:txBody>
+      </p:sp>
+      <p:sp>
+        <p:nvSpPr>
+          <p:cNvPr id="25" name="Shape 23"/>
+          <p:cNvSpPr/>
+          <p:nvPr/>
+        </p:nvSpPr>
+        <p:spPr>
+          <a:xfrm>
+            <a:off x="2651760" y="4892040"/>
+            <a:ext cx="6858000" cy="1371600"/>
           </a:xfrm>
           <a:prstGeom prst="roundRect">
             <a:avLst>
-              <a:gd name="adj" fmla="val 4545"/>
+              <a:gd name="adj" fmla="val 6667"/>
             </a:avLst>
           </a:prstGeom>
           <a:solidFill>
-            <a:srgbClr val="F6F1EA"/>
+            <a:srgbClr val="1E3A5F"/>
           </a:solidFill>
           <a:ln/>
           <a:effectLst>
@@ -9465,14 +10428,14 @@
       </p:sp>
       <p:sp>
         <p:nvSpPr>
-          <p:cNvPr id="5" name="Text 3"/>
-          <p:cNvSpPr txBox="1"/>
-          <p:nvPr/>
-        </p:nvSpPr>
-        <p:spPr>
-          <a:xfrm>
-            <a:off x="777240" y="2267712"/>
-            <a:ext cx="1737360" cy="1307592"/>
+          <p:cNvPr id="26" name="Text 24"/>
+          <p:cNvSpPr txBox="1"/>
+          <p:nvPr/>
+        </p:nvSpPr>
+        <p:spPr>
+          <a:xfrm>
+            <a:off x="2926080" y="5029200"/>
+            <a:ext cx="6309360" cy="594360"/>
           </a:xfrm>
           <a:prstGeom prst="rect">
             <a:avLst/>
@@ -9488,614 +10451,62 @@
               <a:buNone/>
             </a:pPr>
             <a:r>
-              <a:rPr lang="en-US" sz="2400" b="1" dirty="0">
-                <a:solidFill>
-                  <a:srgbClr val="C9603F"/>
-                </a:solidFill>
-                <a:latin typeface="游ゴシック" pitchFamily="34" charset="0"/>
-                <a:ea typeface="游ゴシック" pitchFamily="34" charset="-122"/>
-                <a:cs typeface="游ゴシック" pitchFamily="34" charset="-120"/>
-              </a:rPr>
-              <a:t>延べ500名+</a:t>
-            </a:r>
-            <a:endParaRPr lang="en-US" sz="2400" dirty="0"/>
-          </a:p>
-        </p:txBody>
-      </p:sp>
-      <p:sp>
-        <p:nvSpPr>
-          <p:cNvPr id="6" name="Text 4"/>
-          <p:cNvSpPr txBox="1"/>
-          <p:nvPr/>
-        </p:nvSpPr>
-        <p:spPr>
-          <a:xfrm>
-            <a:off x="731520" y="3482035"/>
-            <a:ext cx="1828800" cy="903427"/>
-          </a:xfrm>
-          <a:prstGeom prst="rect">
-            <a:avLst/>
-          </a:prstGeom>
-          <a:noFill/>
-          <a:ln/>
-        </p:spPr>
-        <p:txBody>
-          <a:bodyPr wrap="square" lIns="0" tIns="0" rIns="0" bIns="0" rtlCol="0" anchor="t"/>
+              <a:rPr lang="en-US" sz="3000" b="1" dirty="0">
+                <a:solidFill>
+                  <a:srgbClr val="FFFFFF"/>
+                </a:solidFill>
+                <a:latin typeface="游ゴシック" pitchFamily="34" charset="0"/>
+                <a:ea typeface="游ゴシック" pitchFamily="34" charset="-122"/>
+                <a:cs typeface="游ゴシック" pitchFamily="34" charset="-120"/>
+              </a:rPr>
+              <a:t>全国50事業所</a:t>
+            </a:r>
+            <a:endParaRPr lang="en-US" sz="3000" dirty="0"/>
+          </a:p>
+        </p:txBody>
+      </p:sp>
+      <p:sp>
+        <p:nvSpPr>
+          <p:cNvPr id="27" name="Text 25"/>
+          <p:cNvSpPr txBox="1"/>
+          <p:nvPr/>
+        </p:nvSpPr>
+        <p:spPr>
+          <a:xfrm>
+            <a:off x="2926080" y="5623560"/>
+            <a:ext cx="6309360" cy="502920"/>
+          </a:xfrm>
+          <a:prstGeom prst="rect">
+            <a:avLst/>
+          </a:prstGeom>
+          <a:noFill/>
+          <a:ln/>
+        </p:spPr>
+        <p:txBody>
+          <a:bodyPr wrap="square" lIns="0" tIns="0" rIns="0" bIns="0" rtlCol="0" anchor="ctr"/>
           <a:lstStyle/>
           <a:p>
             <a:pPr algn="ctr" indent="0" marL="0">
               <a:buNone/>
             </a:pPr>
             <a:r>
-              <a:rPr lang="en-US" sz="1150" dirty="0">
-                <a:solidFill>
-                  <a:srgbClr val="1E3A5F"/>
-                </a:solidFill>
-                <a:latin typeface="游ゴシック" pitchFamily="34" charset="0"/>
-                <a:ea typeface="游ゴシック" pitchFamily="34" charset="-122"/>
-                <a:cs typeface="游ゴシック" pitchFamily="34" charset="-120"/>
-              </a:rPr>
-              <a:t>地域セミナー</a:t>
-            </a:r>
-            <a:endParaRPr lang="en-US" sz="1150" dirty="0"/>
-          </a:p>
-          <a:p>
-            <a:pPr algn="ctr" indent="0" marL="0">
-              <a:buNone/>
-            </a:pPr>
-            <a:r>
-              <a:rPr lang="en-US" sz="1150" dirty="0">
-                <a:solidFill>
-                  <a:srgbClr val="1E3A5F"/>
-                </a:solidFill>
-                <a:latin typeface="游ゴシック" pitchFamily="34" charset="0"/>
-                <a:ea typeface="游ゴシック" pitchFamily="34" charset="-122"/>
-                <a:cs typeface="游ゴシック" pitchFamily="34" charset="-120"/>
-              </a:rPr>
-              <a:t>（3年間）</a:t>
-            </a:r>
-            <a:endParaRPr lang="en-US" sz="1150" dirty="0"/>
-          </a:p>
-        </p:txBody>
-      </p:sp>
-      <p:sp>
-        <p:nvSpPr>
-          <p:cNvPr id="7" name="Shape 5"/>
-          <p:cNvSpPr/>
-          <p:nvPr/>
-        </p:nvSpPr>
-        <p:spPr>
-          <a:xfrm>
-            <a:off x="2880360" y="2103120"/>
-            <a:ext cx="2011680" cy="2377440"/>
-          </a:xfrm>
-          <a:prstGeom prst="roundRect">
-            <a:avLst>
-              <a:gd name="adj" fmla="val 4545"/>
-            </a:avLst>
-          </a:prstGeom>
-          <a:solidFill>
-            <a:srgbClr val="F6F1EA"/>
-          </a:solidFill>
-          <a:ln/>
-          <a:effectLst>
-            <a:outerShdw sx="100000" sy="100000" kx="0" ky="0" algn="bl" rotWithShape="0" blurRad="101600" dist="38100" dir="5400000">
-              <a:srgbClr val="10233A">
-                <a:alpha val="18000"/>
-              </a:srgbClr>
-            </a:outerShdw>
-          </a:effectLst>
-        </p:spPr>
-      </p:sp>
-      <p:sp>
-        <p:nvSpPr>
-          <p:cNvPr id="8" name="Text 6"/>
-          <p:cNvSpPr txBox="1"/>
-          <p:nvPr/>
-        </p:nvSpPr>
-        <p:spPr>
-          <a:xfrm>
-            <a:off x="3017520" y="2267712"/>
-            <a:ext cx="1737360" cy="1307592"/>
-          </a:xfrm>
-          <a:prstGeom prst="rect">
-            <a:avLst/>
-          </a:prstGeom>
-          <a:noFill/>
-          <a:ln/>
-        </p:spPr>
-        <p:txBody>
-          <a:bodyPr wrap="square" lIns="0" tIns="0" rIns="0" bIns="0" rtlCol="0" anchor="ctr"/>
-          <a:lstStyle/>
-          <a:p>
-            <a:pPr algn="ctr" indent="0" marL="0">
-              <a:buNone/>
-            </a:pPr>
-            <a:r>
-              <a:rPr lang="en-US" sz="2400" b="1" dirty="0">
-                <a:solidFill>
-                  <a:srgbClr val="C9603F"/>
-                </a:solidFill>
-                <a:latin typeface="游ゴシック" pitchFamily="34" charset="0"/>
-                <a:ea typeface="游ゴシック" pitchFamily="34" charset="-122"/>
-                <a:cs typeface="游ゴシック" pitchFamily="34" charset="-120"/>
-              </a:rPr>
-              <a:t>▲30%</a:t>
-            </a:r>
-            <a:endParaRPr lang="en-US" sz="2400" dirty="0"/>
-          </a:p>
-        </p:txBody>
-      </p:sp>
-      <p:sp>
-        <p:nvSpPr>
-          <p:cNvPr id="9" name="Text 7"/>
-          <p:cNvSpPr txBox="1"/>
-          <p:nvPr/>
-        </p:nvSpPr>
-        <p:spPr>
-          <a:xfrm>
-            <a:off x="2971800" y="3482035"/>
-            <a:ext cx="1828800" cy="903427"/>
-          </a:xfrm>
-          <a:prstGeom prst="rect">
-            <a:avLst/>
-          </a:prstGeom>
-          <a:noFill/>
-          <a:ln/>
-        </p:spPr>
-        <p:txBody>
-          <a:bodyPr wrap="square" lIns="0" tIns="0" rIns="0" bIns="0" rtlCol="0" anchor="t"/>
-          <a:lstStyle/>
-          <a:p>
-            <a:pPr algn="ctr" indent="0" marL="0">
-              <a:buNone/>
-            </a:pPr>
-            <a:r>
-              <a:rPr lang="en-US" sz="1150" dirty="0">
-                <a:solidFill>
-                  <a:srgbClr val="1E3A5F"/>
-                </a:solidFill>
-                <a:latin typeface="游ゴシック" pitchFamily="34" charset="0"/>
-                <a:ea typeface="游ゴシック" pitchFamily="34" charset="-122"/>
-                <a:cs typeface="游ゴシック" pitchFamily="34" charset="-120"/>
-              </a:rPr>
-              <a:t>企業導入で</a:t>
-            </a:r>
-            <a:endParaRPr lang="en-US" sz="1150" dirty="0"/>
-          </a:p>
-          <a:p>
-            <a:pPr algn="ctr" indent="0" marL="0">
-              <a:buNone/>
-            </a:pPr>
-            <a:r>
-              <a:rPr lang="en-US" sz="1150" dirty="0">
-                <a:solidFill>
-                  <a:srgbClr val="1E3A5F"/>
-                </a:solidFill>
-                <a:latin typeface="游ゴシック" pitchFamily="34" charset="0"/>
-                <a:ea typeface="游ゴシック" pitchFamily="34" charset="-122"/>
-                <a:cs typeface="游ゴシック" pitchFamily="34" charset="-120"/>
-              </a:rPr>
-              <a:t>介護離職が減少</a:t>
-            </a:r>
-            <a:endParaRPr lang="en-US" sz="1150" dirty="0"/>
-          </a:p>
-        </p:txBody>
-      </p:sp>
-      <p:sp>
-        <p:nvSpPr>
-          <p:cNvPr id="10" name="Shape 8"/>
-          <p:cNvSpPr/>
-          <p:nvPr/>
-        </p:nvSpPr>
-        <p:spPr>
-          <a:xfrm>
-            <a:off x="5120640" y="2103120"/>
-            <a:ext cx="2011680" cy="2377440"/>
-          </a:xfrm>
-          <a:prstGeom prst="roundRect">
-            <a:avLst>
-              <a:gd name="adj" fmla="val 4545"/>
-            </a:avLst>
-          </a:prstGeom>
-          <a:solidFill>
-            <a:srgbClr val="F6F1EA"/>
-          </a:solidFill>
-          <a:ln/>
-          <a:effectLst>
-            <a:outerShdw sx="100000" sy="100000" kx="0" ky="0" algn="bl" rotWithShape="0" blurRad="101600" dist="38100" dir="5400000">
-              <a:srgbClr val="10233A">
-                <a:alpha val="18000"/>
-              </a:srgbClr>
-            </a:outerShdw>
-          </a:effectLst>
-        </p:spPr>
-      </p:sp>
-      <p:sp>
-        <p:nvSpPr>
-          <p:cNvPr id="11" name="Text 9"/>
-          <p:cNvSpPr txBox="1"/>
-          <p:nvPr/>
-        </p:nvSpPr>
-        <p:spPr>
-          <a:xfrm>
-            <a:off x="5257800" y="2267712"/>
-            <a:ext cx="1737360" cy="1307592"/>
-          </a:xfrm>
-          <a:prstGeom prst="rect">
-            <a:avLst/>
-          </a:prstGeom>
-          <a:noFill/>
-          <a:ln/>
-        </p:spPr>
-        <p:txBody>
-          <a:bodyPr wrap="square" lIns="0" tIns="0" rIns="0" bIns="0" rtlCol="0" anchor="ctr"/>
-          <a:lstStyle/>
-          <a:p>
-            <a:pPr algn="ctr" indent="0" marL="0">
-              <a:buNone/>
-            </a:pPr>
-            <a:r>
-              <a:rPr lang="en-US" sz="2400" b="1" dirty="0">
-                <a:solidFill>
-                  <a:srgbClr val="C9603F"/>
-                </a:solidFill>
-                <a:latin typeface="游ゴシック" pitchFamily="34" charset="0"/>
-                <a:ea typeface="游ゴシック" pitchFamily="34" charset="-122"/>
-                <a:cs typeface="游ゴシック" pitchFamily="34" charset="-120"/>
-              </a:rPr>
-              <a:t>80%超</a:t>
-            </a:r>
-            <a:endParaRPr lang="en-US" sz="2400" dirty="0"/>
-          </a:p>
-        </p:txBody>
-      </p:sp>
-      <p:sp>
-        <p:nvSpPr>
-          <p:cNvPr id="12" name="Text 10"/>
-          <p:cNvSpPr txBox="1"/>
-          <p:nvPr/>
-        </p:nvSpPr>
-        <p:spPr>
-          <a:xfrm>
-            <a:off x="5212080" y="3482035"/>
-            <a:ext cx="1828800" cy="903427"/>
-          </a:xfrm>
-          <a:prstGeom prst="rect">
-            <a:avLst/>
-          </a:prstGeom>
-          <a:noFill/>
-          <a:ln/>
-        </p:spPr>
-        <p:txBody>
-          <a:bodyPr wrap="square" lIns="0" tIns="0" rIns="0" bIns="0" rtlCol="0" anchor="t"/>
-          <a:lstStyle/>
-          <a:p>
-            <a:pPr algn="ctr" indent="0" marL="0">
-              <a:buNone/>
-            </a:pPr>
-            <a:r>
-              <a:rPr lang="en-US" sz="1150" dirty="0">
-                <a:solidFill>
-                  <a:srgbClr val="1E3A5F"/>
-                </a:solidFill>
-                <a:latin typeface="游ゴシック" pitchFamily="34" charset="0"/>
-                <a:ea typeface="游ゴシック" pitchFamily="34" charset="-122"/>
-                <a:cs typeface="游ゴシック" pitchFamily="34" charset="-120"/>
-              </a:rPr>
-              <a:t>導入病院の</a:t>
-            </a:r>
-            <a:endParaRPr lang="en-US" sz="1150" dirty="0"/>
-          </a:p>
-          <a:p>
-            <a:pPr algn="ctr" indent="0" marL="0">
-              <a:buNone/>
-            </a:pPr>
-            <a:r>
-              <a:rPr lang="en-US" sz="1150" dirty="0">
-                <a:solidFill>
-                  <a:srgbClr val="1E3A5F"/>
-                </a:solidFill>
-                <a:latin typeface="游ゴシック" pitchFamily="34" charset="0"/>
-                <a:ea typeface="游ゴシック" pitchFamily="34" charset="-122"/>
-                <a:cs typeface="游ゴシック" pitchFamily="34" charset="-120"/>
-              </a:rPr>
-              <a:t>ACP実施率</a:t>
-            </a:r>
-            <a:endParaRPr lang="en-US" sz="1150" dirty="0"/>
-          </a:p>
-        </p:txBody>
-      </p:sp>
-      <p:sp>
-        <p:nvSpPr>
-          <p:cNvPr id="13" name="Shape 11"/>
-          <p:cNvSpPr/>
-          <p:nvPr/>
-        </p:nvSpPr>
-        <p:spPr>
-          <a:xfrm>
-            <a:off x="7360920" y="2103120"/>
-            <a:ext cx="2011680" cy="2377440"/>
-          </a:xfrm>
-          <a:prstGeom prst="roundRect">
-            <a:avLst>
-              <a:gd name="adj" fmla="val 4545"/>
-            </a:avLst>
-          </a:prstGeom>
-          <a:solidFill>
-            <a:srgbClr val="F6F1EA"/>
-          </a:solidFill>
-          <a:ln/>
-          <a:effectLst>
-            <a:outerShdw sx="100000" sy="100000" kx="0" ky="0" algn="bl" rotWithShape="0" blurRad="101600" dist="38100" dir="5400000">
-              <a:srgbClr val="10233A">
-                <a:alpha val="18000"/>
-              </a:srgbClr>
-            </a:outerShdw>
-          </a:effectLst>
-        </p:spPr>
-      </p:sp>
-      <p:sp>
-        <p:nvSpPr>
-          <p:cNvPr id="14" name="Text 12"/>
-          <p:cNvSpPr txBox="1"/>
-          <p:nvPr/>
-        </p:nvSpPr>
-        <p:spPr>
-          <a:xfrm>
-            <a:off x="7498080" y="2267712"/>
-            <a:ext cx="1737360" cy="1307592"/>
-          </a:xfrm>
-          <a:prstGeom prst="rect">
-            <a:avLst/>
-          </a:prstGeom>
-          <a:noFill/>
-          <a:ln/>
-        </p:spPr>
-        <p:txBody>
-          <a:bodyPr wrap="square" lIns="0" tIns="0" rIns="0" bIns="0" rtlCol="0" anchor="ctr"/>
-          <a:lstStyle/>
-          <a:p>
-            <a:pPr algn="ctr" indent="0" marL="0">
-              <a:buNone/>
-            </a:pPr>
-            <a:r>
-              <a:rPr lang="en-US" sz="2400" b="1" dirty="0">
-                <a:solidFill>
-                  <a:srgbClr val="C9603F"/>
-                </a:solidFill>
-                <a:latin typeface="游ゴシック" pitchFamily="34" charset="0"/>
-                <a:ea typeface="游ゴシック" pitchFamily="34" charset="-122"/>
-                <a:cs typeface="游ゴシック" pitchFamily="34" charset="-120"/>
-              </a:rPr>
-              <a:t>5,000部</a:t>
-            </a:r>
-            <a:endParaRPr lang="en-US" sz="2400" dirty="0"/>
-          </a:p>
-        </p:txBody>
-      </p:sp>
-      <p:sp>
-        <p:nvSpPr>
-          <p:cNvPr id="15" name="Text 13"/>
-          <p:cNvSpPr txBox="1"/>
-          <p:nvPr/>
-        </p:nvSpPr>
-        <p:spPr>
-          <a:xfrm>
-            <a:off x="7452360" y="3482035"/>
-            <a:ext cx="1828800" cy="903427"/>
-          </a:xfrm>
-          <a:prstGeom prst="rect">
-            <a:avLst/>
-          </a:prstGeom>
-          <a:noFill/>
-          <a:ln/>
-        </p:spPr>
-        <p:txBody>
-          <a:bodyPr wrap="square" lIns="0" tIns="0" rIns="0" bIns="0" rtlCol="0" anchor="t"/>
-          <a:lstStyle/>
-          <a:p>
-            <a:pPr algn="ctr" indent="0" marL="0">
-              <a:buNone/>
-            </a:pPr>
-            <a:r>
-              <a:rPr lang="en-US" sz="1150" dirty="0">
-                <a:solidFill>
-                  <a:srgbClr val="1E3A5F"/>
-                </a:solidFill>
-                <a:latin typeface="游ゴシック" pitchFamily="34" charset="0"/>
-                <a:ea typeface="游ゴシック" pitchFamily="34" charset="-122"/>
-                <a:cs typeface="游ゴシック" pitchFamily="34" charset="-120"/>
-              </a:rPr>
-              <a:t>「繋ぐノート」</a:t>
-            </a:r>
-            <a:endParaRPr lang="en-US" sz="1150" dirty="0"/>
-          </a:p>
-          <a:p>
-            <a:pPr algn="ctr" indent="0" marL="0">
-              <a:buNone/>
-            </a:pPr>
-            <a:r>
-              <a:rPr lang="en-US" sz="1150" dirty="0">
-                <a:solidFill>
-                  <a:srgbClr val="1E3A5F"/>
-                </a:solidFill>
-                <a:latin typeface="游ゴシック" pitchFamily="34" charset="0"/>
-                <a:ea typeface="游ゴシック" pitchFamily="34" charset="-122"/>
-                <a:cs typeface="游ゴシック" pitchFamily="34" charset="-120"/>
-              </a:rPr>
-              <a:t>普及実績</a:t>
-            </a:r>
-            <a:endParaRPr lang="en-US" sz="1150" dirty="0"/>
-          </a:p>
-        </p:txBody>
-      </p:sp>
-      <p:sp>
-        <p:nvSpPr>
-          <p:cNvPr id="16" name="Shape 14"/>
-          <p:cNvSpPr/>
-          <p:nvPr/>
-        </p:nvSpPr>
-        <p:spPr>
-          <a:xfrm>
-            <a:off x="9601200" y="2103120"/>
-            <a:ext cx="2011680" cy="2377440"/>
-          </a:xfrm>
-          <a:prstGeom prst="roundRect">
-            <a:avLst>
-              <a:gd name="adj" fmla="val 4545"/>
-            </a:avLst>
-          </a:prstGeom>
-          <a:solidFill>
-            <a:srgbClr val="F6F1EA"/>
-          </a:solidFill>
-          <a:ln/>
-          <a:effectLst>
-            <a:outerShdw sx="100000" sy="100000" kx="0" ky="0" algn="bl" rotWithShape="0" blurRad="101600" dist="38100" dir="5400000">
-              <a:srgbClr val="10233A">
-                <a:alpha val="18000"/>
-              </a:srgbClr>
-            </a:outerShdw>
-          </a:effectLst>
-        </p:spPr>
-      </p:sp>
-      <p:sp>
-        <p:nvSpPr>
-          <p:cNvPr id="17" name="Text 15"/>
-          <p:cNvSpPr txBox="1"/>
-          <p:nvPr/>
-        </p:nvSpPr>
-        <p:spPr>
-          <a:xfrm>
-            <a:off x="9738360" y="2267712"/>
-            <a:ext cx="1737360" cy="1307592"/>
-          </a:xfrm>
-          <a:prstGeom prst="rect">
-            <a:avLst/>
-          </a:prstGeom>
-          <a:noFill/>
-          <a:ln/>
-        </p:spPr>
-        <p:txBody>
-          <a:bodyPr wrap="square" lIns="0" tIns="0" rIns="0" bIns="0" rtlCol="0" anchor="ctr"/>
-          <a:lstStyle/>
-          <a:p>
-            <a:pPr algn="ctr" indent="0" marL="0">
-              <a:buNone/>
-            </a:pPr>
-            <a:r>
-              <a:rPr lang="en-US" sz="2400" b="1" dirty="0">
-                <a:solidFill>
-                  <a:srgbClr val="C9603F"/>
-                </a:solidFill>
-                <a:latin typeface="游ゴシック" pitchFamily="34" charset="0"/>
-                <a:ea typeface="游ゴシック" pitchFamily="34" charset="-122"/>
-                <a:cs typeface="游ゴシック" pitchFamily="34" charset="-120"/>
-              </a:rPr>
-              <a:t>50名</a:t>
-            </a:r>
-            <a:endParaRPr lang="en-US" sz="2400" dirty="0"/>
-          </a:p>
-        </p:txBody>
-      </p:sp>
-      <p:sp>
-        <p:nvSpPr>
-          <p:cNvPr id="18" name="Text 16"/>
-          <p:cNvSpPr txBox="1"/>
-          <p:nvPr/>
-        </p:nvSpPr>
-        <p:spPr>
-          <a:xfrm>
-            <a:off x="9692640" y="3482035"/>
-            <a:ext cx="1828800" cy="903427"/>
-          </a:xfrm>
-          <a:prstGeom prst="rect">
-            <a:avLst/>
-          </a:prstGeom>
-          <a:noFill/>
-          <a:ln/>
-        </p:spPr>
-        <p:txBody>
-          <a:bodyPr wrap="square" lIns="0" tIns="0" rIns="0" bIns="0" rtlCol="0" anchor="t"/>
-          <a:lstStyle/>
-          <a:p>
-            <a:pPr algn="ctr" indent="0" marL="0">
-              <a:buNone/>
-            </a:pPr>
-            <a:r>
-              <a:rPr lang="en-US" sz="1150" dirty="0">
-                <a:solidFill>
-                  <a:srgbClr val="1E3A5F"/>
-                </a:solidFill>
-                <a:latin typeface="游ゴシック" pitchFamily="34" charset="0"/>
-                <a:ea typeface="游ゴシック" pitchFamily="34" charset="-122"/>
-                <a:cs typeface="游ゴシック" pitchFamily="34" charset="-120"/>
-              </a:rPr>
-              <a:t>資格者数</a:t>
-            </a:r>
-            <a:endParaRPr lang="en-US" sz="1150" dirty="0"/>
-          </a:p>
-          <a:p>
-            <a:pPr algn="ctr" indent="0" marL="0">
-              <a:buNone/>
-            </a:pPr>
-            <a:r>
-              <a:rPr lang="en-US" sz="1150" dirty="0">
-                <a:solidFill>
-                  <a:srgbClr val="1E3A5F"/>
-                </a:solidFill>
-                <a:latin typeface="游ゴシック" pitchFamily="34" charset="0"/>
-                <a:ea typeface="游ゴシック" pitchFamily="34" charset="-122"/>
-                <a:cs typeface="游ゴシック" pitchFamily="34" charset="-120"/>
-              </a:rPr>
-              <a:t>（2年間）</a:t>
-            </a:r>
-            <a:endParaRPr lang="en-US" sz="1150" dirty="0"/>
-          </a:p>
-        </p:txBody>
-      </p:sp>
-      <p:sp>
-        <p:nvSpPr>
-          <p:cNvPr id="19" name="Text 17"/>
-          <p:cNvSpPr txBox="1"/>
-          <p:nvPr/>
-        </p:nvSpPr>
-        <p:spPr>
-          <a:xfrm>
-            <a:off x="640080" y="4846320"/>
-            <a:ext cx="10881360" cy="731520"/>
-          </a:xfrm>
-          <a:prstGeom prst="rect">
-            <a:avLst/>
-          </a:prstGeom>
-          <a:noFill/>
-          <a:ln/>
-        </p:spPr>
-        <p:txBody>
-          <a:bodyPr wrap="square" lIns="0" tIns="0" rIns="0" bIns="0" rtlCol="0" anchor="t"/>
-          <a:lstStyle/>
-          <a:p>
-            <a:pPr indent="0" marL="0">
-              <a:buNone/>
-            </a:pPr>
-            <a:r>
-              <a:rPr lang="en-US" sz="1350" i="1" dirty="0">
-                <a:solidFill>
-                  <a:srgbClr val="6B6B6B"/>
-                </a:solidFill>
-                <a:latin typeface="游ゴシック" pitchFamily="34" charset="0"/>
-                <a:ea typeface="游ゴシック" pitchFamily="34" charset="-122"/>
-                <a:cs typeface="游ゴシック" pitchFamily="34" charset="-120"/>
-              </a:rPr>
-              <a:t>数としてはこれから拡大するフェーズ。広告ではなく、医療・行政・企業・教育という現場での信頼関係を通じて積み上げてきました。</a:t>
-            </a:r>
-            <a:endParaRPr lang="en-US" sz="1350" dirty="0"/>
-          </a:p>
-        </p:txBody>
-      </p:sp>
-      <p:sp>
-        <p:nvSpPr>
-          <p:cNvPr id="20" name="Text 18"/>
+              <a:rPr lang="en-US" sz="1200" dirty="0">
+                <a:solidFill>
+                  <a:srgbClr val="F1DCCF"/>
+                </a:solidFill>
+                <a:latin typeface="游ゴシック" pitchFamily="34" charset="0"/>
+                <a:ea typeface="游ゴシック" pitchFamily="34" charset="-122"/>
+                <a:cs typeface="游ゴシック" pitchFamily="34" charset="-120"/>
+              </a:rPr>
+              <a:t>広告で一気に拡大したのではなく、一件一件の信頼で積み上げた8年間</a:t>
+            </a:r>
+            <a:endParaRPr lang="en-US" sz="1200" dirty="0"/>
+          </a:p>
+        </p:txBody>
+      </p:sp>
+      <p:sp>
+        <p:nvSpPr>
+          <p:cNvPr id="28" name="Text 26"/>
           <p:cNvSpPr txBox="1"/>
           <p:nvPr/>
         </p:nvSpPr>
@@ -10197,7 +10608,7 @@
                 <a:ea typeface="游ゴシック" pitchFamily="34" charset="-122"/>
                 <a:cs typeface="游ゴシック" pitchFamily="34" charset="-120"/>
               </a:rPr>
-              <a:t>BUSINESS SCALE</a:t>
+              <a:t>RESULTS</a:t>
             </a:r>
             <a:endParaRPr lang="en-US" sz="1300" dirty="0"/>
           </a:p>
@@ -10236,7 +10647,7 @@
                 <a:ea typeface="游ゴシック" pitchFamily="34" charset="-122"/>
                 <a:cs typeface="游ゴシック" pitchFamily="34" charset="-120"/>
               </a:rPr>
-              <a:t>売上規模 ― 本体が独占しない「分散型モデル」</a:t>
+              <a:t>実績・成果</a:t>
             </a:r>
             <a:endParaRPr lang="en-US" sz="2800" dirty="0"/>
           </a:p>
@@ -10250,16 +10661,16 @@
         </p:nvSpPr>
         <p:spPr>
           <a:xfrm>
-            <a:off x="914400" y="1920240"/>
-            <a:ext cx="3291840" cy="2194560"/>
+            <a:off x="640080" y="2103120"/>
+            <a:ext cx="2011680" cy="2377440"/>
           </a:xfrm>
           <a:prstGeom prst="roundRect">
             <a:avLst>
-              <a:gd name="adj" fmla="val 4167"/>
+              <a:gd name="adj" fmla="val 4545"/>
             </a:avLst>
           </a:prstGeom>
           <a:solidFill>
-            <a:srgbClr val="1E3A5F"/>
+            <a:srgbClr val="F6F1EA"/>
           </a:solidFill>
           <a:ln/>
           <a:effectLst>
@@ -10279,8 +10690,8 @@
         </p:nvSpPr>
         <p:spPr>
           <a:xfrm>
-            <a:off x="1097280" y="2240280"/>
-            <a:ext cx="2926080" cy="731520"/>
+            <a:off x="777240" y="2267712"/>
+            <a:ext cx="1737360" cy="1307592"/>
           </a:xfrm>
           <a:prstGeom prst="rect">
             <a:avLst/>
@@ -10296,17 +10707,17 @@
               <a:buNone/>
             </a:pPr>
             <a:r>
-              <a:rPr lang="en-US" sz="2800" b="1" dirty="0">
-                <a:solidFill>
-                  <a:srgbClr val="FFFFFF"/>
-                </a:solidFill>
-                <a:latin typeface="游ゴシック" pitchFamily="34" charset="0"/>
-                <a:ea typeface="游ゴシック" pitchFamily="34" charset="-122"/>
-                <a:cs typeface="游ゴシック" pitchFamily="34" charset="-120"/>
-              </a:rPr>
-              <a:t>5,000万円</a:t>
-            </a:r>
-            <a:endParaRPr lang="en-US" sz="2800" dirty="0"/>
+              <a:rPr lang="en-US" sz="2400" b="1" dirty="0">
+                <a:solidFill>
+                  <a:srgbClr val="C9603F"/>
+                </a:solidFill>
+                <a:latin typeface="游ゴシック" pitchFamily="34" charset="0"/>
+                <a:ea typeface="游ゴシック" pitchFamily="34" charset="-122"/>
+                <a:cs typeface="游ゴシック" pitchFamily="34" charset="-120"/>
+              </a:rPr>
+              <a:t>延べ500名+</a:t>
+            </a:r>
+            <a:endParaRPr lang="en-US" sz="2400" dirty="0"/>
           </a:p>
         </p:txBody>
       </p:sp>
@@ -10318,8 +10729,8 @@
         </p:nvSpPr>
         <p:spPr>
           <a:xfrm>
-            <a:off x="1097280" y="3108960"/>
-            <a:ext cx="2926080" cy="822960"/>
+            <a:off x="731520" y="3482035"/>
+            <a:ext cx="1828800" cy="903427"/>
           </a:xfrm>
           <a:prstGeom prst="rect">
             <a:avLst/>
@@ -10335,91 +10746,55 @@
               <a:buNone/>
             </a:pPr>
             <a:r>
-              <a:rPr lang="en-US" sz="1250" dirty="0">
-                <a:solidFill>
-                  <a:srgbClr val="E6EAF0"/>
-                </a:solidFill>
-                <a:latin typeface="游ゴシック" pitchFamily="34" charset="0"/>
-                <a:ea typeface="游ゴシック" pitchFamily="34" charset="-122"/>
-                <a:cs typeface="游ゴシック" pitchFamily="34" charset="-120"/>
-              </a:rPr>
-              <a:t>単体</a:t>
-            </a:r>
-            <a:endParaRPr lang="en-US" sz="1250" dirty="0"/>
+              <a:rPr lang="en-US" sz="1150" dirty="0">
+                <a:solidFill>
+                  <a:srgbClr val="1E3A5F"/>
+                </a:solidFill>
+                <a:latin typeface="游ゴシック" pitchFamily="34" charset="0"/>
+                <a:ea typeface="游ゴシック" pitchFamily="34" charset="-122"/>
+                <a:cs typeface="游ゴシック" pitchFamily="34" charset="-120"/>
+              </a:rPr>
+              <a:t>地域セミナー</a:t>
+            </a:r>
+            <a:endParaRPr lang="en-US" sz="1150" dirty="0"/>
           </a:p>
           <a:p>
             <a:pPr algn="ctr" indent="0" marL="0">
               <a:buNone/>
             </a:pPr>
             <a:r>
-              <a:rPr lang="en-US" sz="1250" dirty="0">
-                <a:solidFill>
-                  <a:srgbClr val="E6EAF0"/>
-                </a:solidFill>
-                <a:latin typeface="游ゴシック" pitchFamily="34" charset="0"/>
-                <a:ea typeface="游ゴシック" pitchFamily="34" charset="-122"/>
-                <a:cs typeface="游ゴシック" pitchFamily="34" charset="-120"/>
-              </a:rPr>
-              <a:t>（株式会社繋ぐコンサルタントオフィス）</a:t>
-            </a:r>
-            <a:endParaRPr lang="en-US" sz="1250" dirty="0"/>
-          </a:p>
-        </p:txBody>
-      </p:sp>
-      <p:sp>
-        <p:nvSpPr>
-          <p:cNvPr id="7" name="Text 5"/>
-          <p:cNvSpPr txBox="1"/>
-          <p:nvPr/>
-        </p:nvSpPr>
-        <p:spPr>
-          <a:xfrm>
-            <a:off x="4206240" y="2743200"/>
-            <a:ext cx="548640" cy="548640"/>
-          </a:xfrm>
-          <a:prstGeom prst="rect">
-            <a:avLst/>
-          </a:prstGeom>
-          <a:noFill/>
-          <a:ln/>
-        </p:spPr>
-        <p:txBody>
-          <a:bodyPr wrap="square" lIns="0" tIns="0" rIns="0" bIns="0" rtlCol="0" anchor="ctr"/>
-          <a:lstStyle/>
-          <a:p>
-            <a:pPr algn="ctr" indent="0" marL="0">
-              <a:buNone/>
-            </a:pPr>
-            <a:r>
-              <a:rPr lang="en-US" sz="2200" dirty="0">
+              <a:rPr lang="en-US" sz="1150" dirty="0">
                 <a:solidFill>
                   <a:srgbClr val="1E3A5F"/>
                 </a:solidFill>
-              </a:rPr>
-              <a:t>→</a:t>
-            </a:r>
-            <a:endParaRPr lang="en-US" sz="2200" dirty="0"/>
-          </a:p>
-        </p:txBody>
-      </p:sp>
-      <p:sp>
-        <p:nvSpPr>
-          <p:cNvPr id="8" name="Shape 6"/>
+                <a:latin typeface="游ゴシック" pitchFamily="34" charset="0"/>
+                <a:ea typeface="游ゴシック" pitchFamily="34" charset="-122"/>
+                <a:cs typeface="游ゴシック" pitchFamily="34" charset="-120"/>
+              </a:rPr>
+              <a:t>（3年間）</a:t>
+            </a:r>
+            <a:endParaRPr lang="en-US" sz="1150" dirty="0"/>
+          </a:p>
+        </p:txBody>
+      </p:sp>
+      <p:sp>
+        <p:nvSpPr>
+          <p:cNvPr id="7" name="Shape 5"/>
           <p:cNvSpPr/>
           <p:nvPr/>
         </p:nvSpPr>
         <p:spPr>
           <a:xfrm>
-            <a:off x="4754880" y="1920240"/>
-            <a:ext cx="3291840" cy="2194560"/>
+            <a:off x="2880360" y="2103120"/>
+            <a:ext cx="2011680" cy="2377440"/>
           </a:xfrm>
           <a:prstGeom prst="roundRect">
             <a:avLst>
-              <a:gd name="adj" fmla="val 4167"/>
+              <a:gd name="adj" fmla="val 4545"/>
             </a:avLst>
           </a:prstGeom>
           <a:solidFill>
-            <a:srgbClr val="C9603F"/>
+            <a:srgbClr val="F6F1EA"/>
           </a:solidFill>
           <a:ln/>
           <a:effectLst>
@@ -10433,153 +10808,117 @@
       </p:sp>
       <p:sp>
         <p:nvSpPr>
+          <p:cNvPr id="8" name="Text 6"/>
+          <p:cNvSpPr txBox="1"/>
+          <p:nvPr/>
+        </p:nvSpPr>
+        <p:spPr>
+          <a:xfrm>
+            <a:off x="3017520" y="2267712"/>
+            <a:ext cx="1737360" cy="1307592"/>
+          </a:xfrm>
+          <a:prstGeom prst="rect">
+            <a:avLst/>
+          </a:prstGeom>
+          <a:noFill/>
+          <a:ln/>
+        </p:spPr>
+        <p:txBody>
+          <a:bodyPr wrap="square" lIns="0" tIns="0" rIns="0" bIns="0" rtlCol="0" anchor="ctr"/>
+          <a:lstStyle/>
+          <a:p>
+            <a:pPr algn="ctr" indent="0" marL="0">
+              <a:buNone/>
+            </a:pPr>
+            <a:r>
+              <a:rPr lang="en-US" sz="2400" b="1" dirty="0">
+                <a:solidFill>
+                  <a:srgbClr val="C9603F"/>
+                </a:solidFill>
+                <a:latin typeface="游ゴシック" pitchFamily="34" charset="0"/>
+                <a:ea typeface="游ゴシック" pitchFamily="34" charset="-122"/>
+                <a:cs typeface="游ゴシック" pitchFamily="34" charset="-120"/>
+              </a:rPr>
+              <a:t>▲30%</a:t>
+            </a:r>
+            <a:endParaRPr lang="en-US" sz="2400" dirty="0"/>
+          </a:p>
+        </p:txBody>
+      </p:sp>
+      <p:sp>
+        <p:nvSpPr>
           <p:cNvPr id="9" name="Text 7"/>
           <p:cNvSpPr txBox="1"/>
           <p:nvPr/>
         </p:nvSpPr>
         <p:spPr>
           <a:xfrm>
-            <a:off x="4937760" y="2240280"/>
-            <a:ext cx="2926080" cy="731520"/>
-          </a:xfrm>
-          <a:prstGeom prst="rect">
-            <a:avLst/>
-          </a:prstGeom>
-          <a:noFill/>
-          <a:ln/>
-        </p:spPr>
-        <p:txBody>
-          <a:bodyPr wrap="square" lIns="0" tIns="0" rIns="0" bIns="0" rtlCol="0" anchor="ctr"/>
+            <a:off x="2971800" y="3482035"/>
+            <a:ext cx="1828800" cy="903427"/>
+          </a:xfrm>
+          <a:prstGeom prst="rect">
+            <a:avLst/>
+          </a:prstGeom>
+          <a:noFill/>
+          <a:ln/>
+        </p:spPr>
+        <p:txBody>
+          <a:bodyPr wrap="square" lIns="0" tIns="0" rIns="0" bIns="0" rtlCol="0" anchor="t"/>
           <a:lstStyle/>
           <a:p>
             <a:pPr algn="ctr" indent="0" marL="0">
               <a:buNone/>
             </a:pPr>
             <a:r>
-              <a:rPr lang="en-US" sz="2800" b="1" dirty="0">
-                <a:solidFill>
-                  <a:srgbClr val="FFFFFF"/>
-                </a:solidFill>
-                <a:latin typeface="游ゴシック" pitchFamily="34" charset="0"/>
-                <a:ea typeface="游ゴシック" pitchFamily="34" charset="-122"/>
-                <a:cs typeface="游ゴシック" pitchFamily="34" charset="-120"/>
-              </a:rPr>
-              <a:t>2億円規模</a:t>
-            </a:r>
-            <a:endParaRPr lang="en-US" sz="2800" dirty="0"/>
-          </a:p>
-        </p:txBody>
-      </p:sp>
-      <p:sp>
-        <p:nvSpPr>
-          <p:cNvPr id="10" name="Text 8"/>
-          <p:cNvSpPr txBox="1"/>
-          <p:nvPr/>
-        </p:nvSpPr>
-        <p:spPr>
-          <a:xfrm>
-            <a:off x="4937760" y="3108960"/>
-            <a:ext cx="2926080" cy="822960"/>
-          </a:xfrm>
-          <a:prstGeom prst="rect">
-            <a:avLst/>
-          </a:prstGeom>
-          <a:noFill/>
-          <a:ln/>
-        </p:spPr>
-        <p:txBody>
-          <a:bodyPr wrap="square" lIns="0" tIns="0" rIns="0" bIns="0" rtlCol="0" anchor="t"/>
-          <a:lstStyle/>
+              <a:rPr lang="en-US" sz="1150" dirty="0">
+                <a:solidFill>
+                  <a:srgbClr val="1E3A5F"/>
+                </a:solidFill>
+                <a:latin typeface="游ゴシック" pitchFamily="34" charset="0"/>
+                <a:ea typeface="游ゴシック" pitchFamily="34" charset="-122"/>
+                <a:cs typeface="游ゴシック" pitchFamily="34" charset="-120"/>
+              </a:rPr>
+              <a:t>企業導入で</a:t>
+            </a:r>
+            <a:endParaRPr lang="en-US" sz="1150" dirty="0"/>
+          </a:p>
           <a:p>
             <a:pPr algn="ctr" indent="0" marL="0">
               <a:buNone/>
             </a:pPr>
             <a:r>
-              <a:rPr lang="en-US" sz="1250" dirty="0">
-                <a:solidFill>
-                  <a:srgbClr val="E6EAF0"/>
-                </a:solidFill>
-                <a:latin typeface="游ゴシック" pitchFamily="34" charset="0"/>
-                <a:ea typeface="游ゴシック" pitchFamily="34" charset="-122"/>
-                <a:cs typeface="游ゴシック" pitchFamily="34" charset="-120"/>
-              </a:rPr>
-              <a:t>FC全体</a:t>
-            </a:r>
-            <a:endParaRPr lang="en-US" sz="1250" dirty="0"/>
-          </a:p>
-          <a:p>
-            <a:pPr algn="ctr" indent="0" marL="0">
-              <a:buNone/>
-            </a:pPr>
-            <a:r>
-              <a:rPr lang="en-US" sz="1250" dirty="0">
-                <a:solidFill>
-                  <a:srgbClr val="E6EAF0"/>
-                </a:solidFill>
-                <a:latin typeface="游ゴシック" pitchFamily="34" charset="0"/>
-                <a:ea typeface="游ゴシック" pitchFamily="34" charset="-122"/>
-                <a:cs typeface="游ゴシック" pitchFamily="34" charset="-120"/>
-              </a:rPr>
-              <a:t>（繋ぐ相続サロン® ネットワーク）</a:t>
-            </a:r>
-            <a:endParaRPr lang="en-US" sz="1250" dirty="0"/>
-          </a:p>
-        </p:txBody>
-      </p:sp>
-      <p:sp>
-        <p:nvSpPr>
-          <p:cNvPr id="11" name="Text 9"/>
-          <p:cNvSpPr txBox="1"/>
-          <p:nvPr/>
-        </p:nvSpPr>
-        <p:spPr>
-          <a:xfrm>
-            <a:off x="8046720" y="2743200"/>
-            <a:ext cx="548640" cy="548640"/>
-          </a:xfrm>
-          <a:prstGeom prst="rect">
-            <a:avLst/>
-          </a:prstGeom>
-          <a:noFill/>
-          <a:ln/>
-        </p:spPr>
-        <p:txBody>
-          <a:bodyPr wrap="square" lIns="0" tIns="0" rIns="0" bIns="0" rtlCol="0" anchor="ctr"/>
-          <a:lstStyle/>
-          <a:p>
-            <a:pPr algn="ctr" indent="0" marL="0">
-              <a:buNone/>
-            </a:pPr>
-            <a:r>
-              <a:rPr lang="en-US" sz="2200" dirty="0">
+              <a:rPr lang="en-US" sz="1150" dirty="0">
                 <a:solidFill>
                   <a:srgbClr val="1E3A5F"/>
                 </a:solidFill>
-              </a:rPr>
-              <a:t>→</a:t>
-            </a:r>
-            <a:endParaRPr lang="en-US" sz="2200" dirty="0"/>
-          </a:p>
-        </p:txBody>
-      </p:sp>
-      <p:sp>
-        <p:nvSpPr>
-          <p:cNvPr id="12" name="Shape 10"/>
+                <a:latin typeface="游ゴシック" pitchFamily="34" charset="0"/>
+                <a:ea typeface="游ゴシック" pitchFamily="34" charset="-122"/>
+                <a:cs typeface="游ゴシック" pitchFamily="34" charset="-120"/>
+              </a:rPr>
+              <a:t>介護離職が減少</a:t>
+            </a:r>
+            <a:endParaRPr lang="en-US" sz="1150" dirty="0"/>
+          </a:p>
+        </p:txBody>
+      </p:sp>
+      <p:sp>
+        <p:nvSpPr>
+          <p:cNvPr id="10" name="Shape 8"/>
           <p:cNvSpPr/>
           <p:nvPr/>
         </p:nvSpPr>
         <p:spPr>
           <a:xfrm>
-            <a:off x="8595360" y="1920240"/>
-            <a:ext cx="3291840" cy="2194560"/>
+            <a:off x="5120640" y="2103120"/>
+            <a:ext cx="2011680" cy="2377440"/>
           </a:xfrm>
           <a:prstGeom prst="roundRect">
             <a:avLst>
-              <a:gd name="adj" fmla="val 4167"/>
+              <a:gd name="adj" fmla="val 4545"/>
             </a:avLst>
           </a:prstGeom>
           <a:solidFill>
-            <a:srgbClr val="10233A"/>
+            <a:srgbClr val="F6F1EA"/>
           </a:solidFill>
           <a:ln/>
           <a:effectLst>
@@ -10593,14 +10932,14 @@
       </p:sp>
       <p:sp>
         <p:nvSpPr>
-          <p:cNvPr id="13" name="Text 11"/>
-          <p:cNvSpPr txBox="1"/>
-          <p:nvPr/>
-        </p:nvSpPr>
-        <p:spPr>
-          <a:xfrm>
-            <a:off x="8778240" y="2240280"/>
-            <a:ext cx="2926080" cy="731520"/>
+          <p:cNvPr id="11" name="Text 9"/>
+          <p:cNvSpPr txBox="1"/>
+          <p:nvPr/>
+        </p:nvSpPr>
+        <p:spPr>
+          <a:xfrm>
+            <a:off x="5257800" y="2267712"/>
+            <a:ext cx="1737360" cy="1307592"/>
           </a:xfrm>
           <a:prstGeom prst="rect">
             <a:avLst/>
@@ -10616,30 +10955,30 @@
               <a:buNone/>
             </a:pPr>
             <a:r>
-              <a:rPr lang="en-US" sz="2800" b="1" dirty="0">
-                <a:solidFill>
-                  <a:srgbClr val="FFFFFF"/>
-                </a:solidFill>
-                <a:latin typeface="游ゴシック" pitchFamily="34" charset="0"/>
-                <a:ea typeface="游ゴシック" pitchFamily="34" charset="-122"/>
-                <a:cs typeface="游ゴシック" pitchFamily="34" charset="-120"/>
-              </a:rPr>
-              <a:t>3億円規模</a:t>
-            </a:r>
-            <a:endParaRPr lang="en-US" sz="2800" dirty="0"/>
-          </a:p>
-        </p:txBody>
-      </p:sp>
-      <p:sp>
-        <p:nvSpPr>
-          <p:cNvPr id="14" name="Text 12"/>
-          <p:cNvSpPr txBox="1"/>
-          <p:nvPr/>
-        </p:nvSpPr>
-        <p:spPr>
-          <a:xfrm>
-            <a:off x="8778240" y="3108960"/>
-            <a:ext cx="2926080" cy="822960"/>
+              <a:rPr lang="en-US" sz="2400" b="1" dirty="0">
+                <a:solidFill>
+                  <a:srgbClr val="C9603F"/>
+                </a:solidFill>
+                <a:latin typeface="游ゴシック" pitchFamily="34" charset="0"/>
+                <a:ea typeface="游ゴシック" pitchFamily="34" charset="-122"/>
+                <a:cs typeface="游ゴシック" pitchFamily="34" charset="-120"/>
+              </a:rPr>
+              <a:t>80%超</a:t>
+            </a:r>
+            <a:endParaRPr lang="en-US" sz="2400" dirty="0"/>
+          </a:p>
+        </p:txBody>
+      </p:sp>
+      <p:sp>
+        <p:nvSpPr>
+          <p:cNvPr id="12" name="Text 10"/>
+          <p:cNvSpPr txBox="1"/>
+          <p:nvPr/>
+        </p:nvSpPr>
+        <p:spPr>
+          <a:xfrm>
+            <a:off x="5212080" y="3482035"/>
+            <a:ext cx="1828800" cy="903427"/>
           </a:xfrm>
           <a:prstGeom prst="rect">
             <a:avLst/>
@@ -10655,51 +10994,51 @@
               <a:buNone/>
             </a:pPr>
             <a:r>
-              <a:rPr lang="en-US" sz="1250" dirty="0">
-                <a:solidFill>
-                  <a:srgbClr val="E6EAF0"/>
-                </a:solidFill>
-                <a:latin typeface="游ゴシック" pitchFamily="34" charset="0"/>
-                <a:ea typeface="游ゴシック" pitchFamily="34" charset="-122"/>
-                <a:cs typeface="游ゴシック" pitchFamily="34" charset="-120"/>
-              </a:rPr>
-              <a:t>繋ぐグループ全体</a:t>
-            </a:r>
-            <a:endParaRPr lang="en-US" sz="1250" dirty="0"/>
+              <a:rPr lang="en-US" sz="1150" dirty="0">
+                <a:solidFill>
+                  <a:srgbClr val="1E3A5F"/>
+                </a:solidFill>
+                <a:latin typeface="游ゴシック" pitchFamily="34" charset="0"/>
+                <a:ea typeface="游ゴシック" pitchFamily="34" charset="-122"/>
+                <a:cs typeface="游ゴシック" pitchFamily="34" charset="-120"/>
+              </a:rPr>
+              <a:t>導入病院の</a:t>
+            </a:r>
+            <a:endParaRPr lang="en-US" sz="1150" dirty="0"/>
           </a:p>
           <a:p>
             <a:pPr algn="ctr" indent="0" marL="0">
               <a:buNone/>
             </a:pPr>
             <a:r>
-              <a:rPr lang="en-US" sz="1250" dirty="0">
-                <a:solidFill>
-                  <a:srgbClr val="E6EAF0"/>
-                </a:solidFill>
-                <a:latin typeface="游ゴシック" pitchFamily="34" charset="0"/>
-                <a:ea typeface="游ゴシック" pitchFamily="34" charset="-122"/>
-                <a:cs typeface="游ゴシック" pitchFamily="34" charset="-120"/>
-              </a:rPr>
-              <a:t>（繋ぐライクファミリーサポート等含む）</a:t>
-            </a:r>
-            <a:endParaRPr lang="en-US" sz="1250" dirty="0"/>
-          </a:p>
-        </p:txBody>
-      </p:sp>
-      <p:sp>
-        <p:nvSpPr>
-          <p:cNvPr id="15" name="Shape 13"/>
+              <a:rPr lang="en-US" sz="1150" dirty="0">
+                <a:solidFill>
+                  <a:srgbClr val="1E3A5F"/>
+                </a:solidFill>
+                <a:latin typeface="游ゴシック" pitchFamily="34" charset="0"/>
+                <a:ea typeface="游ゴシック" pitchFamily="34" charset="-122"/>
+                <a:cs typeface="游ゴシック" pitchFamily="34" charset="-120"/>
+              </a:rPr>
+              <a:t>ACP実施率</a:t>
+            </a:r>
+            <a:endParaRPr lang="en-US" sz="1150" dirty="0"/>
+          </a:p>
+        </p:txBody>
+      </p:sp>
+      <p:sp>
+        <p:nvSpPr>
+          <p:cNvPr id="13" name="Shape 11"/>
           <p:cNvSpPr/>
           <p:nvPr/>
         </p:nvSpPr>
         <p:spPr>
           <a:xfrm>
-            <a:off x="640080" y="4434840"/>
-            <a:ext cx="10881360" cy="1645920"/>
+            <a:off x="7360920" y="2103120"/>
+            <a:ext cx="2011680" cy="2377440"/>
           </a:xfrm>
           <a:prstGeom prst="roundRect">
             <a:avLst>
-              <a:gd name="adj" fmla="val 5556"/>
+              <a:gd name="adj" fmla="val 4545"/>
             </a:avLst>
           </a:prstGeom>
           <a:solidFill>
@@ -10717,88 +11056,265 @@
       </p:sp>
       <p:sp>
         <p:nvSpPr>
-          <p:cNvPr id="16" name="Text 14"/>
-          <p:cNvSpPr txBox="1"/>
-          <p:nvPr/>
-        </p:nvSpPr>
-        <p:spPr>
-          <a:xfrm>
-            <a:off x="1005840" y="4617720"/>
-            <a:ext cx="10149840" cy="365760"/>
-          </a:xfrm>
-          <a:prstGeom prst="rect">
-            <a:avLst/>
-          </a:prstGeom>
-          <a:noFill/>
-          <a:ln/>
-        </p:spPr>
-        <p:txBody>
-          <a:bodyPr wrap="square" lIns="0" tIns="0" rIns="0" bIns="0" rtlCol="0" anchor="ctr"/>
+          <p:cNvPr id="14" name="Text 12"/>
+          <p:cNvSpPr txBox="1"/>
+          <p:nvPr/>
+        </p:nvSpPr>
+        <p:spPr>
+          <a:xfrm>
+            <a:off x="7498080" y="2267712"/>
+            <a:ext cx="1737360" cy="1307592"/>
+          </a:xfrm>
+          <a:prstGeom prst="rect">
+            <a:avLst/>
+          </a:prstGeom>
+          <a:noFill/>
+          <a:ln/>
+        </p:spPr>
+        <p:txBody>
+          <a:bodyPr wrap="square" lIns="0" tIns="0" rIns="0" bIns="0" rtlCol="0" anchor="ctr"/>
+          <a:lstStyle/>
+          <a:p>
+            <a:pPr algn="ctr" indent="0" marL="0">
+              <a:buNone/>
+            </a:pPr>
+            <a:r>
+              <a:rPr lang="en-US" sz="2400" b="1" dirty="0">
+                <a:solidFill>
+                  <a:srgbClr val="C9603F"/>
+                </a:solidFill>
+                <a:latin typeface="游ゴシック" pitchFamily="34" charset="0"/>
+                <a:ea typeface="游ゴシック" pitchFamily="34" charset="-122"/>
+                <a:cs typeface="游ゴシック" pitchFamily="34" charset="-120"/>
+              </a:rPr>
+              <a:t>5,000部</a:t>
+            </a:r>
+            <a:endParaRPr lang="en-US" sz="2400" dirty="0"/>
+          </a:p>
+        </p:txBody>
+      </p:sp>
+      <p:sp>
+        <p:nvSpPr>
+          <p:cNvPr id="15" name="Text 13"/>
+          <p:cNvSpPr txBox="1"/>
+          <p:nvPr/>
+        </p:nvSpPr>
+        <p:spPr>
+          <a:xfrm>
+            <a:off x="7452360" y="3482035"/>
+            <a:ext cx="1828800" cy="903427"/>
+          </a:xfrm>
+          <a:prstGeom prst="rect">
+            <a:avLst/>
+          </a:prstGeom>
+          <a:noFill/>
+          <a:ln/>
+        </p:spPr>
+        <p:txBody>
+          <a:bodyPr wrap="square" lIns="0" tIns="0" rIns="0" bIns="0" rtlCol="0" anchor="t"/>
+          <a:lstStyle/>
+          <a:p>
+            <a:pPr algn="ctr" indent="0" marL="0">
+              <a:buNone/>
+            </a:pPr>
+            <a:r>
+              <a:rPr lang="en-US" sz="1150" dirty="0">
+                <a:solidFill>
+                  <a:srgbClr val="1E3A5F"/>
+                </a:solidFill>
+                <a:latin typeface="游ゴシック" pitchFamily="34" charset="0"/>
+                <a:ea typeface="游ゴシック" pitchFamily="34" charset="-122"/>
+                <a:cs typeface="游ゴシック" pitchFamily="34" charset="-120"/>
+              </a:rPr>
+              <a:t>「繋ぐノート」</a:t>
+            </a:r>
+            <a:endParaRPr lang="en-US" sz="1150" dirty="0"/>
+          </a:p>
+          <a:p>
+            <a:pPr algn="ctr" indent="0" marL="0">
+              <a:buNone/>
+            </a:pPr>
+            <a:r>
+              <a:rPr lang="en-US" sz="1150" dirty="0">
+                <a:solidFill>
+                  <a:srgbClr val="1E3A5F"/>
+                </a:solidFill>
+                <a:latin typeface="游ゴシック" pitchFamily="34" charset="0"/>
+                <a:ea typeface="游ゴシック" pitchFamily="34" charset="-122"/>
+                <a:cs typeface="游ゴシック" pitchFamily="34" charset="-120"/>
+              </a:rPr>
+              <a:t>普及実績</a:t>
+            </a:r>
+            <a:endParaRPr lang="en-US" sz="1150" dirty="0"/>
+          </a:p>
+        </p:txBody>
+      </p:sp>
+      <p:sp>
+        <p:nvSpPr>
+          <p:cNvPr id="16" name="Shape 14"/>
+          <p:cNvSpPr/>
+          <p:nvPr/>
+        </p:nvSpPr>
+        <p:spPr>
+          <a:xfrm>
+            <a:off x="9601200" y="2103120"/>
+            <a:ext cx="2011680" cy="2377440"/>
+          </a:xfrm>
+          <a:prstGeom prst="roundRect">
+            <a:avLst>
+              <a:gd name="adj" fmla="val 4545"/>
+            </a:avLst>
+          </a:prstGeom>
+          <a:solidFill>
+            <a:srgbClr val="F6F1EA"/>
+          </a:solidFill>
+          <a:ln/>
+          <a:effectLst>
+            <a:outerShdw sx="100000" sy="100000" kx="0" ky="0" algn="bl" rotWithShape="0" blurRad="101600" dist="38100" dir="5400000">
+              <a:srgbClr val="10233A">
+                <a:alpha val="18000"/>
+              </a:srgbClr>
+            </a:outerShdw>
+          </a:effectLst>
+        </p:spPr>
+      </p:sp>
+      <p:sp>
+        <p:nvSpPr>
+          <p:cNvPr id="17" name="Text 15"/>
+          <p:cNvSpPr txBox="1"/>
+          <p:nvPr/>
+        </p:nvSpPr>
+        <p:spPr>
+          <a:xfrm>
+            <a:off x="9738360" y="2267712"/>
+            <a:ext cx="1737360" cy="1307592"/>
+          </a:xfrm>
+          <a:prstGeom prst="rect">
+            <a:avLst/>
+          </a:prstGeom>
+          <a:noFill/>
+          <a:ln/>
+        </p:spPr>
+        <p:txBody>
+          <a:bodyPr wrap="square" lIns="0" tIns="0" rIns="0" bIns="0" rtlCol="0" anchor="ctr"/>
+          <a:lstStyle/>
+          <a:p>
+            <a:pPr algn="ctr" indent="0" marL="0">
+              <a:buNone/>
+            </a:pPr>
+            <a:r>
+              <a:rPr lang="en-US" sz="2400" b="1" dirty="0">
+                <a:solidFill>
+                  <a:srgbClr val="C9603F"/>
+                </a:solidFill>
+                <a:latin typeface="游ゴシック" pitchFamily="34" charset="0"/>
+                <a:ea typeface="游ゴシック" pitchFamily="34" charset="-122"/>
+                <a:cs typeface="游ゴシック" pitchFamily="34" charset="-120"/>
+              </a:rPr>
+              <a:t>50名</a:t>
+            </a:r>
+            <a:endParaRPr lang="en-US" sz="2400" dirty="0"/>
+          </a:p>
+        </p:txBody>
+      </p:sp>
+      <p:sp>
+        <p:nvSpPr>
+          <p:cNvPr id="18" name="Text 16"/>
+          <p:cNvSpPr txBox="1"/>
+          <p:nvPr/>
+        </p:nvSpPr>
+        <p:spPr>
+          <a:xfrm>
+            <a:off x="9692640" y="3482035"/>
+            <a:ext cx="1828800" cy="903427"/>
+          </a:xfrm>
+          <a:prstGeom prst="rect">
+            <a:avLst/>
+          </a:prstGeom>
+          <a:noFill/>
+          <a:ln/>
+        </p:spPr>
+        <p:txBody>
+          <a:bodyPr wrap="square" lIns="0" tIns="0" rIns="0" bIns="0" rtlCol="0" anchor="t"/>
+          <a:lstStyle/>
+          <a:p>
+            <a:pPr algn="ctr" indent="0" marL="0">
+              <a:buNone/>
+            </a:pPr>
+            <a:r>
+              <a:rPr lang="en-US" sz="1150" dirty="0">
+                <a:solidFill>
+                  <a:srgbClr val="1E3A5F"/>
+                </a:solidFill>
+                <a:latin typeface="游ゴシック" pitchFamily="34" charset="0"/>
+                <a:ea typeface="游ゴシック" pitchFamily="34" charset="-122"/>
+                <a:cs typeface="游ゴシック" pitchFamily="34" charset="-120"/>
+              </a:rPr>
+              <a:t>資格者数</a:t>
+            </a:r>
+            <a:endParaRPr lang="en-US" sz="1150" dirty="0"/>
+          </a:p>
+          <a:p>
+            <a:pPr algn="ctr" indent="0" marL="0">
+              <a:buNone/>
+            </a:pPr>
+            <a:r>
+              <a:rPr lang="en-US" sz="1150" dirty="0">
+                <a:solidFill>
+                  <a:srgbClr val="1E3A5F"/>
+                </a:solidFill>
+                <a:latin typeface="游ゴシック" pitchFamily="34" charset="0"/>
+                <a:ea typeface="游ゴシック" pitchFamily="34" charset="-122"/>
+                <a:cs typeface="游ゴシック" pitchFamily="34" charset="-120"/>
+              </a:rPr>
+              <a:t>（2年間）</a:t>
+            </a:r>
+            <a:endParaRPr lang="en-US" sz="1150" dirty="0"/>
+          </a:p>
+        </p:txBody>
+      </p:sp>
+      <p:sp>
+        <p:nvSpPr>
+          <p:cNvPr id="19" name="Text 17"/>
+          <p:cNvSpPr txBox="1"/>
+          <p:nvPr/>
+        </p:nvSpPr>
+        <p:spPr>
+          <a:xfrm>
+            <a:off x="640080" y="4846320"/>
+            <a:ext cx="10881360" cy="731520"/>
+          </a:xfrm>
+          <a:prstGeom prst="rect">
+            <a:avLst/>
+          </a:prstGeom>
+          <a:noFill/>
+          <a:ln/>
+        </p:spPr>
+        <p:txBody>
+          <a:bodyPr wrap="square" lIns="0" tIns="0" rIns="0" bIns="0" rtlCol="0" anchor="t"/>
           <a:lstStyle/>
           <a:p>
             <a:pPr indent="0" marL="0">
               <a:buNone/>
             </a:pPr>
             <a:r>
-              <a:rPr lang="en-US" sz="1500" b="1" dirty="0">
-                <a:solidFill>
-                  <a:srgbClr val="1E3A5F"/>
-                </a:solidFill>
-                <a:latin typeface="游ゴシック" pitchFamily="34" charset="0"/>
-                <a:ea typeface="游ゴシック" pitchFamily="34" charset="-122"/>
-                <a:cs typeface="游ゴシック" pitchFamily="34" charset="-120"/>
-              </a:rPr>
-              <a:t>なぜ本体の売上が大きくないのか？</a:t>
-            </a:r>
-            <a:endParaRPr lang="en-US" sz="1500" dirty="0"/>
-          </a:p>
-        </p:txBody>
-      </p:sp>
-      <p:sp>
-        <p:nvSpPr>
-          <p:cNvPr id="17" name="Text 15"/>
-          <p:cNvSpPr txBox="1"/>
-          <p:nvPr/>
-        </p:nvSpPr>
-        <p:spPr>
-          <a:xfrm>
-            <a:off x="1005840" y="4983480"/>
-            <a:ext cx="10149840" cy="1005840"/>
-          </a:xfrm>
-          <a:prstGeom prst="rect">
-            <a:avLst/>
-          </a:prstGeom>
-          <a:noFill/>
-          <a:ln/>
-        </p:spPr>
-        <p:txBody>
-          <a:bodyPr wrap="square" lIns="0" tIns="0" rIns="0" bIns="0" rtlCol="0" anchor="t"/>
-          <a:lstStyle/>
-          <a:p>
-            <a:pPr indent="0" marL="0">
-              <a:lnSpc>
-                <a:spcPct val="130000"/>
-              </a:lnSpc>
-              <a:buNone/>
-            </a:pPr>
-            <a:r>
-              <a:rPr lang="en-US" sz="1300" dirty="0">
-                <a:solidFill>
-                  <a:srgbClr val="3A3A3A"/>
-                </a:solidFill>
-                <a:latin typeface="游ゴシック" pitchFamily="34" charset="0"/>
-                <a:ea typeface="游ゴシック" pitchFamily="34" charset="-122"/>
-                <a:cs typeface="游ゴシック" pitchFamily="34" charset="-120"/>
-              </a:rPr>
-              <a:t>本体が売上を独占するのではなく、全国の加盟事業者が自律的に事業を営む分散型のネットワークだから。これは弱みではなく、「競争から共存へ」という経営思想と直結する強みです。</a:t>
-            </a:r>
-            <a:endParaRPr lang="en-US" sz="1300" dirty="0"/>
-          </a:p>
-        </p:txBody>
-      </p:sp>
-      <p:sp>
-        <p:nvSpPr>
-          <p:cNvPr id="18" name="Text 16"/>
+              <a:rPr lang="en-US" sz="1350" i="1" dirty="0">
+                <a:solidFill>
+                  <a:srgbClr val="6B6B6B"/>
+                </a:solidFill>
+                <a:latin typeface="游ゴシック" pitchFamily="34" charset="0"/>
+                <a:ea typeface="游ゴシック" pitchFamily="34" charset="-122"/>
+                <a:cs typeface="游ゴシック" pitchFamily="34" charset="-120"/>
+              </a:rPr>
+              <a:t>数としてはこれから拡大するフェーズ。広告ではなく、医療・行政・企業・教育という現場での信頼関係を通じて積み上げてきました。</a:t>
+            </a:r>
+            <a:endParaRPr lang="en-US" sz="1350" dirty="0"/>
+          </a:p>
+        </p:txBody>
+      </p:sp>
+      <p:sp>
+        <p:nvSpPr>
+          <p:cNvPr id="20" name="Text 18"/>
           <p:cNvSpPr txBox="1"/>
           <p:nvPr/>
         </p:nvSpPr>
